--- a/u06b_stacks/notes/13a.stacks.pptx
+++ b/u06b_stacks/notes/13a.stacks.pptx
@@ -5,10 +5,10 @@
     <p:sldMasterId id="2147483648" r:id="rId1"/>
   </p:sldMasterIdLst>
   <p:notesMasterIdLst>
-    <p:notesMasterId r:id="rId28"/>
+    <p:notesMasterId r:id="rId25"/>
   </p:notesMasterIdLst>
   <p:handoutMasterIdLst>
-    <p:handoutMasterId r:id="rId29"/>
+    <p:handoutMasterId r:id="rId26"/>
   </p:handoutMasterIdLst>
   <p:sldIdLst>
     <p:sldId id="364" r:id="rId2"/>
@@ -34,9 +34,6 @@
     <p:sldId id="410" r:id="rId22"/>
     <p:sldId id="412" r:id="rId23"/>
     <p:sldId id="411" r:id="rId24"/>
-    <p:sldId id="385" r:id="rId25"/>
-    <p:sldId id="386" r:id="rId26"/>
-    <p:sldId id="387" r:id="rId27"/>
   </p:sldIdLst>
   <p:sldSz cx="9144000" cy="6858000" type="screen4x3"/>
   <p:notesSz cx="6858000" cy="9144000"/>
@@ -11164,7 +11161,7 @@
               <a:buNone/>
             </a:pPr>
             <a:r>
-              <a:rPr lang="en-US" altLang="en-US" sz="2800">
+              <a:rPr lang="en-US" altLang="en-US" sz="2800" dirty="0">
                 <a:latin typeface="Tahoma" panose="020B0604030504040204" pitchFamily="34" charset="0"/>
               </a:rPr>
               <a:t>Stack&lt;Integer&gt; s;</a:t>
@@ -11179,7 +11176,7 @@
               <a:buNone/>
             </a:pPr>
             <a:r>
-              <a:rPr lang="en-US" altLang="en-US" sz="2800">
+              <a:rPr lang="en-US" altLang="en-US" sz="2800" dirty="0">
                 <a:latin typeface="Tahoma" panose="020B0604030504040204" pitchFamily="34" charset="0"/>
               </a:rPr>
               <a:t>s = new Stack&lt;Integer&gt;();</a:t>
@@ -11194,25 +11191,16 @@
               <a:buNone/>
             </a:pPr>
             <a:r>
-              <a:rPr lang="en-US" altLang="en-US" sz="2800">
+              <a:rPr lang="en-US" altLang="en-US" sz="2800" dirty="0" err="1">
                 <a:latin typeface="Tahoma" panose="020B0604030504040204" pitchFamily="34" charset="0"/>
               </a:rPr>
-              <a:t>s.push(88);</a:t>
-            </a:r>
-          </a:p>
-          <a:p>
-            <a:pPr>
-              <a:spcBef>
-                <a:spcPct val="0"/>
-              </a:spcBef>
-              <a:buFontTx/>
-              <a:buNone/>
-            </a:pPr>
-            <a:r>
-              <a:rPr lang="en-US" altLang="en-US" sz="2800">
+              <a:t>s.push</a:t>
+            </a:r>
+            <a:r>
+              <a:rPr lang="en-US" altLang="en-US" sz="2800" dirty="0">
                 <a:latin typeface="Tahoma" panose="020B0604030504040204" pitchFamily="34" charset="0"/>
               </a:rPr>
-              <a:t>s.push(23);</a:t>
+              <a:t>(88);</a:t>
             </a:r>
           </a:p>
           <a:p>
@@ -11224,25 +11212,16 @@
               <a:buNone/>
             </a:pPr>
             <a:r>
-              <a:rPr lang="en-US" altLang="en-US" sz="2800">
+              <a:rPr lang="en-US" altLang="en-US" sz="2800" dirty="0" err="1">
                 <a:latin typeface="Tahoma" panose="020B0604030504040204" pitchFamily="34" charset="0"/>
               </a:rPr>
-              <a:t>s.push(11);</a:t>
-            </a:r>
-          </a:p>
-          <a:p>
-            <a:pPr>
-              <a:spcBef>
-                <a:spcPct val="0"/>
-              </a:spcBef>
-              <a:buFontTx/>
-              <a:buNone/>
-            </a:pPr>
-            <a:r>
-              <a:rPr lang="en-US" altLang="en-US" sz="2800">
+              <a:t>s.push</a:t>
+            </a:r>
+            <a:r>
+              <a:rPr lang="en-US" altLang="en-US" sz="2800" dirty="0">
                 <a:latin typeface="Tahoma" panose="020B0604030504040204" pitchFamily="34" charset="0"/>
               </a:rPr>
-              <a:t>out.println(s.peek());</a:t>
+              <a:t>(23);</a:t>
             </a:r>
           </a:p>
           <a:p>
@@ -11254,10 +11233,16 @@
               <a:buNone/>
             </a:pPr>
             <a:r>
-              <a:rPr lang="en-US" altLang="en-US" sz="2800">
+              <a:rPr lang="en-US" altLang="en-US" sz="2800" dirty="0" err="1">
                 <a:latin typeface="Tahoma" panose="020B0604030504040204" pitchFamily="34" charset="0"/>
               </a:rPr>
-              <a:t>out.println(s);</a:t>
+              <a:t>s.push</a:t>
+            </a:r>
+            <a:r>
+              <a:rPr lang="en-US" altLang="en-US" sz="2800" dirty="0">
+                <a:latin typeface="Tahoma" panose="020B0604030504040204" pitchFamily="34" charset="0"/>
+              </a:rPr>
+              <a:t>(11);</a:t>
             </a:r>
           </a:p>
           <a:p>
@@ -11268,7 +11253,61 @@
               <a:buFontTx/>
               <a:buNone/>
             </a:pPr>
-            <a:endParaRPr lang="en-US" altLang="en-US" sz="2800">
+            <a:r>
+              <a:rPr lang="en-US" altLang="en-US" sz="2800" dirty="0" err="1">
+                <a:latin typeface="Tahoma" panose="020B0604030504040204" pitchFamily="34" charset="0"/>
+              </a:rPr>
+              <a:t>out.println</a:t>
+            </a:r>
+            <a:r>
+              <a:rPr lang="en-US" altLang="en-US" sz="2800" dirty="0">
+                <a:latin typeface="Tahoma" panose="020B0604030504040204" pitchFamily="34" charset="0"/>
+              </a:rPr>
+              <a:t>(</a:t>
+            </a:r>
+            <a:r>
+              <a:rPr lang="en-US" altLang="en-US" sz="2800" dirty="0" err="1">
+                <a:latin typeface="Tahoma" panose="020B0604030504040204" pitchFamily="34" charset="0"/>
+              </a:rPr>
+              <a:t>s.peek</a:t>
+            </a:r>
+            <a:r>
+              <a:rPr lang="en-US" altLang="en-US" sz="2800" dirty="0">
+                <a:latin typeface="Tahoma" panose="020B0604030504040204" pitchFamily="34" charset="0"/>
+              </a:rPr>
+              <a:t>());</a:t>
+            </a:r>
+          </a:p>
+          <a:p>
+            <a:pPr>
+              <a:spcBef>
+                <a:spcPct val="0"/>
+              </a:spcBef>
+              <a:buFontTx/>
+              <a:buNone/>
+            </a:pPr>
+            <a:r>
+              <a:rPr lang="en-US" altLang="en-US" sz="2800" dirty="0" err="1">
+                <a:latin typeface="Tahoma" panose="020B0604030504040204" pitchFamily="34" charset="0"/>
+              </a:rPr>
+              <a:t>out.println</a:t>
+            </a:r>
+            <a:r>
+              <a:rPr lang="en-US" altLang="en-US" sz="2800" dirty="0">
+                <a:latin typeface="Tahoma" panose="020B0604030504040204" pitchFamily="34" charset="0"/>
+              </a:rPr>
+              <a:t>(s);</a:t>
+            </a:r>
+          </a:p>
+          <a:p>
+            <a:pPr>
+              <a:spcBef>
+                <a:spcPct val="0"/>
+              </a:spcBef>
+              <a:buFontTx/>
+              <a:buNone/>
+            </a:pPr>
+            <a:endParaRPr lang="en-US" altLang="en-US" sz="2800" dirty="0">
               <a:latin typeface="Tahoma" panose="020B0604030504040204" pitchFamily="34" charset="0"/>
             </a:endParaRPr>
           </a:p>
@@ -11280,7 +11319,7 @@
               <a:buFontTx/>
               <a:buNone/>
             </a:pPr>
-            <a:endParaRPr lang="en-US" altLang="en-US" sz="2800">
+            <a:endParaRPr lang="en-US" altLang="en-US" sz="2800" dirty="0">
               <a:latin typeface="Tahoma" panose="020B0604030504040204" pitchFamily="34" charset="0"/>
             </a:endParaRPr>
           </a:p>
@@ -11556,7 +11595,7 @@
               <a:buNone/>
             </a:pPr>
             <a:r>
-              <a:rPr lang="en-US" altLang="en-US" u="sng">
+              <a:rPr lang="en-US" altLang="en-US" u="sng" dirty="0">
                 <a:solidFill>
                   <a:srgbClr val="FF0000"/>
                 </a:solidFill>
@@ -11574,18 +11613,18 @@
               <a:buNone/>
             </a:pPr>
             <a:r>
-              <a:rPr lang="en-US" altLang="en-US">
+              <a:rPr lang="en-US" altLang="en-US" dirty="0">
                 <a:latin typeface="Tahoma" panose="020B0604030504040204" pitchFamily="34" charset="0"/>
               </a:rPr>
               <a:t>11</a:t>
             </a:r>
             <a:br>
-              <a:rPr lang="en-US" altLang="en-US">
+              <a:rPr lang="en-US" altLang="en-US" dirty="0">
                 <a:latin typeface="Tahoma" panose="020B0604030504040204" pitchFamily="34" charset="0"/>
               </a:rPr>
             </a:br>
             <a:r>
-              <a:rPr lang="en-US" altLang="en-US">
+              <a:rPr lang="en-US" altLang="en-US" dirty="0">
                 <a:latin typeface="Tahoma" panose="020B0604030504040204" pitchFamily="34" charset="0"/>
               </a:rPr>
               <a:t>[88, 23, 11]</a:t>
@@ -12135,8 +12174,8 @@
         </p:nvSpPr>
         <p:spPr bwMode="auto">
           <a:xfrm>
-            <a:off x="685800" y="2133600"/>
-            <a:ext cx="6477000" cy="3935413"/>
+            <a:off x="685800" y="1704647"/>
+            <a:ext cx="6477000" cy="4832092"/>
           </a:xfrm>
           <a:prstGeom prst="rect">
             <a:avLst/>
@@ -12310,7 +12349,7 @@
               <a:buNone/>
             </a:pPr>
             <a:r>
-              <a:rPr lang="en-US" altLang="en-US" sz="2800">
+              <a:rPr lang="en-US" altLang="en-US" sz="2800" dirty="0">
                 <a:latin typeface="Tahoma" panose="020B0604030504040204" pitchFamily="34" charset="0"/>
               </a:rPr>
               <a:t>Stack&lt;Integer&gt; s;</a:t>
@@ -12325,7 +12364,7 @@
               <a:buNone/>
             </a:pPr>
             <a:r>
-              <a:rPr lang="en-US" altLang="en-US" sz="2800">
+              <a:rPr lang="en-US" altLang="en-US" sz="2800" dirty="0">
                 <a:latin typeface="Tahoma" panose="020B0604030504040204" pitchFamily="34" charset="0"/>
               </a:rPr>
               <a:t>s = new Stack&lt;Integer&gt;();</a:t>
@@ -12340,25 +12379,16 @@
               <a:buNone/>
             </a:pPr>
             <a:r>
-              <a:rPr lang="en-US" altLang="en-US" sz="2800">
+              <a:rPr lang="en-US" altLang="en-US" sz="2800" dirty="0" err="1">
                 <a:latin typeface="Tahoma" panose="020B0604030504040204" pitchFamily="34" charset="0"/>
               </a:rPr>
-              <a:t>s.push(88);</a:t>
-            </a:r>
-          </a:p>
-          <a:p>
-            <a:pPr>
-              <a:spcBef>
-                <a:spcPct val="0"/>
-              </a:spcBef>
-              <a:buFontTx/>
-              <a:buNone/>
-            </a:pPr>
-            <a:r>
-              <a:rPr lang="en-US" altLang="en-US" sz="2800">
+              <a:t>s.push</a:t>
+            </a:r>
+            <a:r>
+              <a:rPr lang="en-US" altLang="en-US" sz="2800" dirty="0">
                 <a:latin typeface="Tahoma" panose="020B0604030504040204" pitchFamily="34" charset="0"/>
               </a:rPr>
-              <a:t>s.push(23);</a:t>
+              <a:t>(88);</a:t>
             </a:r>
           </a:p>
           <a:p>
@@ -12370,25 +12400,16 @@
               <a:buNone/>
             </a:pPr>
             <a:r>
-              <a:rPr lang="en-US" altLang="en-US" sz="2800">
+              <a:rPr lang="en-US" altLang="en-US" sz="2800" dirty="0" err="1">
                 <a:latin typeface="Tahoma" panose="020B0604030504040204" pitchFamily="34" charset="0"/>
               </a:rPr>
-              <a:t>s.push(11);</a:t>
-            </a:r>
-          </a:p>
-          <a:p>
-            <a:pPr>
-              <a:spcBef>
-                <a:spcPct val="0"/>
-              </a:spcBef>
-              <a:buFontTx/>
-              <a:buNone/>
-            </a:pPr>
-            <a:r>
-              <a:rPr lang="en-US" altLang="en-US" sz="2800">
+              <a:t>s.push</a:t>
+            </a:r>
+            <a:r>
+              <a:rPr lang="en-US" altLang="en-US" sz="2800" dirty="0">
                 <a:latin typeface="Tahoma" panose="020B0604030504040204" pitchFamily="34" charset="0"/>
               </a:rPr>
-              <a:t>while(!s.isEmpty())</a:t>
+              <a:t>(23);</a:t>
             </a:r>
           </a:p>
           <a:p>
@@ -12400,7 +12421,81 @@
               <a:buNone/>
             </a:pPr>
             <a:r>
-              <a:rPr lang="en-US" altLang="en-US" sz="2800">
+              <a:rPr lang="en-US" altLang="en-US" sz="2800" dirty="0" err="1">
+                <a:latin typeface="Tahoma" panose="020B0604030504040204" pitchFamily="34" charset="0"/>
+              </a:rPr>
+              <a:t>s.push</a:t>
+            </a:r>
+            <a:r>
+              <a:rPr lang="en-US" altLang="en-US" sz="2800" dirty="0">
+                <a:latin typeface="Tahoma" panose="020B0604030504040204" pitchFamily="34" charset="0"/>
+              </a:rPr>
+              <a:t>(11);</a:t>
+            </a:r>
+          </a:p>
+          <a:p>
+            <a:pPr>
+              <a:spcBef>
+                <a:spcPct val="0"/>
+              </a:spcBef>
+              <a:buNone/>
+            </a:pPr>
+            <a:r>
+              <a:rPr lang="en-US" altLang="en-US" sz="2800" dirty="0" err="1">
+                <a:solidFill>
+                  <a:srgbClr val="0066FF"/>
+                </a:solidFill>
+                <a:latin typeface="Tahoma" panose="020B0604030504040204" pitchFamily="34" charset="0"/>
+              </a:rPr>
+              <a:t>out.println</a:t>
+            </a:r>
+            <a:r>
+              <a:rPr lang="en-US" altLang="en-US" sz="2800" dirty="0">
+                <a:solidFill>
+                  <a:srgbClr val="0066FF"/>
+                </a:solidFill>
+                <a:latin typeface="Tahoma" panose="020B0604030504040204" pitchFamily="34" charset="0"/>
+              </a:rPr>
+              <a:t>(s);</a:t>
+            </a:r>
+          </a:p>
+          <a:p>
+            <a:pPr>
+              <a:spcBef>
+                <a:spcPct val="0"/>
+              </a:spcBef>
+              <a:buFontTx/>
+              <a:buNone/>
+            </a:pPr>
+            <a:r>
+              <a:rPr lang="en-US" altLang="en-US" sz="2800" dirty="0">
+                <a:latin typeface="Tahoma" panose="020B0604030504040204" pitchFamily="34" charset="0"/>
+              </a:rPr>
+              <a:t>while(!</a:t>
+            </a:r>
+            <a:r>
+              <a:rPr lang="en-US" altLang="en-US" sz="2800" dirty="0" err="1">
+                <a:latin typeface="Tahoma" panose="020B0604030504040204" pitchFamily="34" charset="0"/>
+              </a:rPr>
+              <a:t>s.isEmpty</a:t>
+            </a:r>
+            <a:r>
+              <a:rPr lang="en-US" altLang="en-US" sz="2800" dirty="0">
+                <a:latin typeface="Tahoma" panose="020B0604030504040204" pitchFamily="34" charset="0"/>
+              </a:rPr>
+              <a:t>())</a:t>
+            </a:r>
+          </a:p>
+          <a:p>
+            <a:pPr>
+              <a:spcBef>
+                <a:spcPct val="0"/>
+              </a:spcBef>
+              <a:buFontTx/>
+              <a:buNone/>
+            </a:pPr>
+            <a:r>
+              <a:rPr lang="en-US" altLang="en-US" sz="2800" dirty="0">
                 <a:latin typeface="Tahoma" panose="020B0604030504040204" pitchFamily="34" charset="0"/>
               </a:rPr>
               <a:t>{</a:t>
@@ -12415,10 +12510,34 @@
               <a:buNone/>
             </a:pPr>
             <a:r>
-              <a:rPr lang="en-US" altLang="en-US" sz="2800">
+              <a:rPr lang="en-US" altLang="en-US" sz="2800" dirty="0">
                 <a:latin typeface="Tahoma" panose="020B0604030504040204" pitchFamily="34" charset="0"/>
               </a:rPr>
-              <a:t>   out.println(s.pop());</a:t>
+              <a:t>   </a:t>
+            </a:r>
+            <a:r>
+              <a:rPr lang="en-US" altLang="en-US" sz="2800" dirty="0" err="1">
+                <a:latin typeface="Tahoma" panose="020B0604030504040204" pitchFamily="34" charset="0"/>
+              </a:rPr>
+              <a:t>out.println</a:t>
+            </a:r>
+            <a:r>
+              <a:rPr lang="en-US" altLang="en-US" sz="2800" dirty="0">
+                <a:latin typeface="Tahoma" panose="020B0604030504040204" pitchFamily="34" charset="0"/>
+              </a:rPr>
+              <a:t>(</a:t>
+            </a:r>
+            <a:r>
+              <a:rPr lang="en-US" altLang="en-US" sz="2800" dirty="0" err="1">
+                <a:latin typeface="Tahoma" panose="020B0604030504040204" pitchFamily="34" charset="0"/>
+              </a:rPr>
+              <a:t>s.pop</a:t>
+            </a:r>
+            <a:r>
+              <a:rPr lang="en-US" altLang="en-US" sz="2800" dirty="0">
+                <a:latin typeface="Tahoma" panose="020B0604030504040204" pitchFamily="34" charset="0"/>
+              </a:rPr>
+              <a:t>());</a:t>
             </a:r>
           </a:p>
           <a:p>
@@ -12430,10 +12549,36 @@
               <a:buNone/>
             </a:pPr>
             <a:r>
-              <a:rPr lang="en-US" altLang="en-US" sz="2800">
+              <a:rPr lang="en-US" altLang="en-US" sz="2800" dirty="0">
                 <a:latin typeface="Tahoma" panose="020B0604030504040204" pitchFamily="34" charset="0"/>
               </a:rPr>
               <a:t>}</a:t>
+            </a:r>
+          </a:p>
+          <a:p>
+            <a:pPr>
+              <a:spcBef>
+                <a:spcPct val="0"/>
+              </a:spcBef>
+              <a:buNone/>
+            </a:pPr>
+            <a:r>
+              <a:rPr lang="en-US" altLang="en-US" sz="2800" dirty="0" err="1">
+                <a:solidFill>
+                  <a:srgbClr val="0066FF"/>
+                </a:solidFill>
+                <a:latin typeface="Tahoma" panose="020B0604030504040204" pitchFamily="34" charset="0"/>
+              </a:rPr>
+              <a:t>out.println</a:t>
+            </a:r>
+            <a:r>
+              <a:rPr lang="en-US" altLang="en-US" sz="2800" dirty="0">
+                <a:solidFill>
+                  <a:srgbClr val="0066FF"/>
+                </a:solidFill>
+                <a:latin typeface="Tahoma" panose="020B0604030504040204" pitchFamily="34" charset="0"/>
+              </a:rPr>
+              <a:t>(s);</a:t>
             </a:r>
           </a:p>
         </p:txBody>
@@ -12538,8 +12683,8 @@
         </p:nvSpPr>
         <p:spPr bwMode="auto">
           <a:xfrm>
-            <a:off x="6477000" y="3048000"/>
-            <a:ext cx="1981200" cy="2298700"/>
+            <a:off x="6361475" y="2227867"/>
+            <a:ext cx="2615377" cy="3785652"/>
           </a:xfrm>
           <a:prstGeom prst="rect">
             <a:avLst/>
@@ -12574,7 +12719,7 @@
           </a:extLst>
         </p:spPr>
         <p:txBody>
-          <a:bodyPr>
+          <a:bodyPr wrap="square">
             <a:spAutoFit/>
           </a:bodyPr>
           <a:lstStyle>
@@ -12708,7 +12853,7 @@
               <a:buNone/>
             </a:pPr>
             <a:r>
-              <a:rPr lang="en-US" altLang="en-US" u="sng">
+              <a:rPr lang="en-US" altLang="en-US" u="sng" dirty="0">
                 <a:solidFill>
                   <a:srgbClr val="FF0000"/>
                 </a:solidFill>
@@ -12718,7 +12863,7 @@
             </a:r>
           </a:p>
           <a:p>
-            <a:pPr algn="ctr">
+            <a:pPr>
               <a:spcBef>
                 <a:spcPct val="50000"/>
               </a:spcBef>
@@ -12726,32 +12871,68 @@
               <a:buNone/>
             </a:pPr>
             <a:r>
-              <a:rPr lang="en-US" altLang="en-US">
+              <a:rPr lang="en-US" altLang="en-US" dirty="0">
+                <a:solidFill>
+                  <a:srgbClr val="0066FF"/>
+                </a:solidFill>
+                <a:latin typeface="Tahoma" panose="020B0604030504040204" pitchFamily="34" charset="0"/>
+              </a:rPr>
+              <a:t>[88, 23, 11] </a:t>
+            </a:r>
+          </a:p>
+          <a:p>
+            <a:pPr>
+              <a:spcBef>
+                <a:spcPct val="50000"/>
+              </a:spcBef>
+              <a:buFontTx/>
+              <a:buNone/>
+            </a:pPr>
+            <a:r>
+              <a:rPr lang="en-US" altLang="en-US" dirty="0">
                 <a:latin typeface="Tahoma" panose="020B0604030504040204" pitchFamily="34" charset="0"/>
               </a:rPr>
               <a:t>11</a:t>
             </a:r>
             <a:br>
-              <a:rPr lang="en-US" altLang="en-US">
+              <a:rPr lang="en-US" altLang="en-US" dirty="0">
                 <a:latin typeface="Tahoma" panose="020B0604030504040204" pitchFamily="34" charset="0"/>
               </a:rPr>
             </a:br>
             <a:r>
-              <a:rPr lang="en-US" altLang="en-US">
+              <a:rPr lang="en-US" altLang="en-US" dirty="0">
                 <a:latin typeface="Tahoma" panose="020B0604030504040204" pitchFamily="34" charset="0"/>
               </a:rPr>
               <a:t>23</a:t>
             </a:r>
             <a:br>
-              <a:rPr lang="en-US" altLang="en-US">
+              <a:rPr lang="en-US" altLang="en-US" dirty="0">
                 <a:latin typeface="Tahoma" panose="020B0604030504040204" pitchFamily="34" charset="0"/>
               </a:rPr>
             </a:br>
             <a:r>
-              <a:rPr lang="en-US" altLang="en-US">
+              <a:rPr lang="en-US" altLang="en-US" dirty="0">
                 <a:latin typeface="Tahoma" panose="020B0604030504040204" pitchFamily="34" charset="0"/>
               </a:rPr>
               <a:t>88</a:t>
+            </a:r>
+          </a:p>
+          <a:p>
+            <a:pPr>
+              <a:spcBef>
+                <a:spcPct val="50000"/>
+              </a:spcBef>
+              <a:buFontTx/>
+              <a:buNone/>
+            </a:pPr>
+            <a:r>
+              <a:rPr lang="en-US" altLang="en-US" dirty="0">
+                <a:solidFill>
+                  <a:srgbClr val="0066FF"/>
+                </a:solidFill>
+                <a:latin typeface="Tahoma" panose="020B0604030504040204" pitchFamily="34" charset="0"/>
+              </a:rPr>
+              <a:t>[]</a:t>
             </a:r>
           </a:p>
         </p:txBody>
@@ -14848,90 +15029,6 @@
       </p:sp>
       <p:sp>
         <p:nvSpPr>
-          <p:cNvPr id="16388" name="WordArt 3">
-            <a:extLst>
-              <a:ext uri="{FF2B5EF4-FFF2-40B4-BE49-F238E27FC236}">
-                <a16:creationId xmlns:a16="http://schemas.microsoft.com/office/drawing/2014/main" id="{C8C69C8A-E150-4C25-908F-C1C3BCF78EA8}"/>
-              </a:ext>
-            </a:extLst>
-          </p:cNvPr>
-          <p:cNvSpPr>
-            <a:spLocks noChangeArrowheads="1" noChangeShapeType="1" noTextEdit="1"/>
-          </p:cNvSpPr>
-          <p:nvPr/>
-        </p:nvSpPr>
-        <p:spPr bwMode="auto">
-          <a:xfrm>
-            <a:off x="1560444" y="457200"/>
-            <a:ext cx="6400800" cy="1028700"/>
-          </a:xfrm>
-          <a:prstGeom prst="rect">
-            <a:avLst/>
-          </a:prstGeom>
-        </p:spPr>
-        <p:txBody>
-          <a:bodyPr wrap="none" fromWordArt="1">
-            <a:prstTxWarp prst="textPlain">
-              <a:avLst>
-                <a:gd name="adj" fmla="val 50000"/>
-              </a:avLst>
-            </a:prstTxWarp>
-          </a:bodyPr>
-          <a:lstStyle/>
-          <a:p>
-            <a:pPr algn="ctr"/>
-            <a:r>
-              <a:rPr lang="en-US" sz="3600" kern="10" dirty="0">
-                <a:ln w="12700">
-                  <a:solidFill>
-                    <a:srgbClr val="EAEAEA"/>
-                  </a:solidFill>
-                  <a:round/>
-                  <a:headEnd/>
-                  <a:tailEnd/>
-                </a:ln>
-                <a:gradFill rotWithShape="1">
-                  <a:gsLst>
-                    <a:gs pos="0">
-                      <a:srgbClr val="A603AB"/>
-                    </a:gs>
-                    <a:gs pos="12000">
-                      <a:srgbClr val="E81766"/>
-                    </a:gs>
-                    <a:gs pos="27000">
-                      <a:srgbClr val="EE3F17"/>
-                    </a:gs>
-                    <a:gs pos="48000">
-                      <a:srgbClr val="FFFF00"/>
-                    </a:gs>
-                    <a:gs pos="64999">
-                      <a:srgbClr val="1A8D48"/>
-                    </a:gs>
-                    <a:gs pos="78999">
-                      <a:srgbClr val="0819FB"/>
-                    </a:gs>
-                    <a:gs pos="100000">
-                      <a:srgbClr val="A603AB"/>
-                    </a:gs>
-                  </a:gsLst>
-                  <a:lin ang="0" scaled="1"/>
-                </a:gradFill>
-                <a:effectLst>
-                  <a:outerShdw dist="35921" dir="2700000" sy="50000" kx="2115830" algn="bl" rotWithShape="0">
-                    <a:srgbClr val="C0C0C0">
-                      <a:alpha val="79999"/>
-                    </a:srgbClr>
-                  </a:outerShdw>
-                </a:effectLst>
-                <a:latin typeface="Arial Black" panose="020B0A04020102020204" pitchFamily="34" charset="0"/>
-              </a:rPr>
-              <a:t>A Stack class Stack again</a:t>
-            </a:r>
-          </a:p>
-        </p:txBody>
-      </p:sp>
-      <p:sp>
-        <p:nvSpPr>
           <p:cNvPr id="16389" name="Text Box 4">
             <a:extLst>
               <a:ext uri="{FF2B5EF4-FFF2-40B4-BE49-F238E27FC236}">
@@ -15169,6 +15266,81 @@
               </a:rPr>
               <a:t>[88, 23]</a:t>
             </a:r>
+          </a:p>
+        </p:txBody>
+      </p:sp>
+      <p:sp>
+        <p:nvSpPr>
+          <p:cNvPr id="2" name="Rectangle 1">
+            <a:extLst>
+              <a:ext uri="{FF2B5EF4-FFF2-40B4-BE49-F238E27FC236}">
+                <a16:creationId xmlns:a16="http://schemas.microsoft.com/office/drawing/2014/main" id="{079FD71F-A232-08FB-7CE9-A59F44C9C012}"/>
+              </a:ext>
+            </a:extLst>
+          </p:cNvPr>
+          <p:cNvSpPr/>
+          <p:nvPr/>
+        </p:nvSpPr>
+        <p:spPr>
+          <a:xfrm>
+            <a:off x="508027" y="450234"/>
+            <a:ext cx="8403262" cy="1107996"/>
+          </a:xfrm>
+          <a:prstGeom prst="rect">
+            <a:avLst/>
+          </a:prstGeom>
+          <a:noFill/>
+        </p:spPr>
+        <p:txBody>
+          <a:bodyPr wrap="none" lIns="91440" tIns="45720" rIns="91440" bIns="45720">
+            <a:spAutoFit/>
+          </a:bodyPr>
+          <a:lstStyle/>
+          <a:p>
+            <a:pPr algn="ctr"/>
+            <a:r>
+              <a:rPr lang="en-US" sz="6600" dirty="0">
+                <a:ln w="12700">
+                  <a:solidFill>
+                    <a:schemeClr val="accent1"/>
+                  </a:solidFill>
+                  <a:prstDash val="solid"/>
+                </a:ln>
+                <a:solidFill>
+                  <a:schemeClr val="accent6">
+                    <a:lumMod val="75000"/>
+                  </a:schemeClr>
+                </a:solidFill>
+                <a:effectLst>
+                  <a:outerShdw blurRad="50800" dist="38100" dir="2700000" algn="tl" rotWithShape="0">
+                    <a:prstClr val="black">
+                      <a:alpha val="40000"/>
+                    </a:prstClr>
+                  </a:outerShdw>
+                </a:effectLst>
+              </a:rPr>
+              <a:t>Array-based Stacks</a:t>
+            </a:r>
+            <a:endParaRPr lang="en-US" sz="6600" b="1" cap="none" spc="0" dirty="0">
+              <a:ln w="12700">
+                <a:solidFill>
+                  <a:schemeClr val="accent1"/>
+                </a:solidFill>
+                <a:prstDash val="solid"/>
+              </a:ln>
+              <a:solidFill>
+                <a:schemeClr val="accent6">
+                  <a:lumMod val="75000"/>
+                </a:schemeClr>
+              </a:solidFill>
+              <a:effectLst>
+                <a:outerShdw blurRad="50800" dist="38100" dir="2700000" algn="tl" rotWithShape="0">
+                  <a:prstClr val="black">
+                    <a:alpha val="40000"/>
+                  </a:prstClr>
+                </a:outerShdw>
+              </a:effectLst>
+            </a:endParaRPr>
           </a:p>
         </p:txBody>
       </p:sp>
@@ -15218,7 +15390,7 @@
         </p:nvSpPr>
         <p:spPr bwMode="auto">
           <a:xfrm>
-            <a:off x="685800" y="2133600"/>
+            <a:off x="685800" y="2359736"/>
             <a:ext cx="6477000" cy="3108543"/>
           </a:xfrm>
           <a:prstGeom prst="rect">
@@ -15574,90 +15746,6 @@
       </p:sp>
       <p:sp>
         <p:nvSpPr>
-          <p:cNvPr id="16388" name="WordArt 3">
-            <a:extLst>
-              <a:ext uri="{FF2B5EF4-FFF2-40B4-BE49-F238E27FC236}">
-                <a16:creationId xmlns:a16="http://schemas.microsoft.com/office/drawing/2014/main" id="{C8C69C8A-E150-4C25-908F-C1C3BCF78EA8}"/>
-              </a:ext>
-            </a:extLst>
-          </p:cNvPr>
-          <p:cNvSpPr>
-            <a:spLocks noChangeArrowheads="1" noChangeShapeType="1" noTextEdit="1"/>
-          </p:cNvSpPr>
-          <p:nvPr/>
-        </p:nvSpPr>
-        <p:spPr bwMode="auto">
-          <a:xfrm>
-            <a:off x="1143000" y="533400"/>
-            <a:ext cx="6400800" cy="1028700"/>
-          </a:xfrm>
-          <a:prstGeom prst="rect">
-            <a:avLst/>
-          </a:prstGeom>
-        </p:spPr>
-        <p:txBody>
-          <a:bodyPr wrap="none" fromWordArt="1">
-            <a:prstTxWarp prst="textPlain">
-              <a:avLst>
-                <a:gd name="adj" fmla="val 50000"/>
-              </a:avLst>
-            </a:prstTxWarp>
-          </a:bodyPr>
-          <a:lstStyle/>
-          <a:p>
-            <a:pPr algn="ctr"/>
-            <a:r>
-              <a:rPr lang="en-US" sz="3600" kern="10" dirty="0">
-                <a:ln w="12700">
-                  <a:solidFill>
-                    <a:srgbClr val="EAEAEA"/>
-                  </a:solidFill>
-                  <a:round/>
-                  <a:headEnd/>
-                  <a:tailEnd/>
-                </a:ln>
-                <a:gradFill rotWithShape="1">
-                  <a:gsLst>
-                    <a:gs pos="0">
-                      <a:srgbClr val="A603AB"/>
-                    </a:gs>
-                    <a:gs pos="12000">
-                      <a:srgbClr val="E81766"/>
-                    </a:gs>
-                    <a:gs pos="27000">
-                      <a:srgbClr val="EE3F17"/>
-                    </a:gs>
-                    <a:gs pos="48000">
-                      <a:srgbClr val="FFFF00"/>
-                    </a:gs>
-                    <a:gs pos="64999">
-                      <a:srgbClr val="1A8D48"/>
-                    </a:gs>
-                    <a:gs pos="78999">
-                      <a:srgbClr val="0819FB"/>
-                    </a:gs>
-                    <a:gs pos="100000">
-                      <a:srgbClr val="A603AB"/>
-                    </a:gs>
-                  </a:gsLst>
-                  <a:lin ang="0" scaled="1"/>
-                </a:gradFill>
-                <a:effectLst>
-                  <a:outerShdw dist="35921" dir="2700000" sy="50000" kx="2115830" algn="bl" rotWithShape="0">
-                    <a:srgbClr val="C0C0C0">
-                      <a:alpha val="79999"/>
-                    </a:srgbClr>
-                  </a:outerShdw>
-                </a:effectLst>
-                <a:latin typeface="Arial Black" panose="020B0A04020102020204" pitchFamily="34" charset="0"/>
-              </a:rPr>
-              <a:t>A LinkedList Stack</a:t>
-            </a:r>
-          </a:p>
-        </p:txBody>
-      </p:sp>
-      <p:sp>
-        <p:nvSpPr>
           <p:cNvPr id="16389" name="Text Box 4">
             <a:extLst>
               <a:ext uri="{FF2B5EF4-FFF2-40B4-BE49-F238E27FC236}">
@@ -15672,7 +15760,7 @@
         </p:nvSpPr>
         <p:spPr bwMode="auto">
           <a:xfrm>
-            <a:off x="5562600" y="3429000"/>
+            <a:off x="5562600" y="3655136"/>
             <a:ext cx="2667000" cy="2308324"/>
           </a:xfrm>
           <a:prstGeom prst="rect">
@@ -15913,1585 +16001,87 @@
           </a:p>
         </p:txBody>
       </p:sp>
+      <p:sp>
+        <p:nvSpPr>
+          <p:cNvPr id="2" name="Rectangle 1">
+            <a:extLst>
+              <a:ext uri="{FF2B5EF4-FFF2-40B4-BE49-F238E27FC236}">
+                <a16:creationId xmlns:a16="http://schemas.microsoft.com/office/drawing/2014/main" id="{923CC222-9644-1495-22EB-9FDE367D597E}"/>
+              </a:ext>
+            </a:extLst>
+          </p:cNvPr>
+          <p:cNvSpPr/>
+          <p:nvPr/>
+        </p:nvSpPr>
+        <p:spPr>
+          <a:xfrm>
+            <a:off x="144868" y="134236"/>
+            <a:ext cx="8576345" cy="1938992"/>
+          </a:xfrm>
+          <a:prstGeom prst="rect">
+            <a:avLst/>
+          </a:prstGeom>
+          <a:noFill/>
+        </p:spPr>
+        <p:txBody>
+          <a:bodyPr wrap="square" lIns="91440" tIns="45720" rIns="91440" bIns="45720">
+            <a:spAutoFit/>
+          </a:bodyPr>
+          <a:lstStyle/>
+          <a:p>
+            <a:pPr algn="ctr"/>
+            <a:r>
+              <a:rPr lang="en-US" sz="6000" dirty="0">
+                <a:ln w="12700">
+                  <a:solidFill>
+                    <a:schemeClr val="accent1"/>
+                  </a:solidFill>
+                  <a:prstDash val="solid"/>
+                </a:ln>
+                <a:solidFill>
+                  <a:schemeClr val="accent6">
+                    <a:lumMod val="75000"/>
+                  </a:schemeClr>
+                </a:solidFill>
+                <a:effectLst>
+                  <a:outerShdw blurRad="50800" dist="38100" dir="2700000" algn="tl" rotWithShape="0">
+                    <a:prstClr val="black">
+                      <a:alpha val="40000"/>
+                    </a:prstClr>
+                  </a:outerShdw>
+                </a:effectLst>
+              </a:rPr>
+              <a:t>LinkedList-based Stacks</a:t>
+            </a:r>
+            <a:endParaRPr lang="en-US" sz="6000" b="1" cap="none" spc="0" dirty="0">
+              <a:ln w="12700">
+                <a:solidFill>
+                  <a:schemeClr val="accent1"/>
+                </a:solidFill>
+                <a:prstDash val="solid"/>
+              </a:ln>
+              <a:solidFill>
+                <a:schemeClr val="accent6">
+                  <a:lumMod val="75000"/>
+                </a:schemeClr>
+              </a:solidFill>
+              <a:effectLst>
+                <a:outerShdw blurRad="50800" dist="38100" dir="2700000" algn="tl" rotWithShape="0">
+                  <a:prstClr val="black">
+                    <a:alpha val="40000"/>
+                  </a:prstClr>
+                </a:outerShdw>
+              </a:effectLst>
+            </a:endParaRPr>
+          </a:p>
+        </p:txBody>
+      </p:sp>
     </p:spTree>
     <p:extLst>
       <p:ext uri="{BB962C8B-B14F-4D97-AF65-F5344CB8AC3E}">
         <p14:creationId xmlns:p14="http://schemas.microsoft.com/office/powerpoint/2010/main" val="494396268"/>
       </p:ext>
     </p:extLst>
-  </p:cSld>
-  <p:clrMapOvr>
-    <a:masterClrMapping/>
-  </p:clrMapOvr>
-</p:sld>
-</file>
-
-<file path=ppt/slides/slide24.xml><?xml version="1.0" encoding="utf-8"?>
-<p:sld xmlns:a="http://schemas.openxmlformats.org/drawingml/2006/main" xmlns:r="http://schemas.openxmlformats.org/officeDocument/2006/relationships" xmlns:p="http://schemas.openxmlformats.org/presentationml/2006/main">
-  <p:cSld>
-    <p:spTree>
-      <p:nvGrpSpPr>
-        <p:cNvPr id="1" name=""/>
-        <p:cNvGrpSpPr/>
-        <p:nvPr/>
-      </p:nvGrpSpPr>
-      <p:grpSpPr>
-        <a:xfrm>
-          <a:off x="0" y="0"/>
-          <a:ext cx="0" cy="0"/>
-          <a:chOff x="0" y="0"/>
-          <a:chExt cx="0" cy="0"/>
-        </a:xfrm>
-      </p:grpSpPr>
-      <p:sp>
-        <p:nvSpPr>
-          <p:cNvPr id="4098" name="Footer Placeholder 3">
-            <a:extLst>
-              <a:ext uri="{FF2B5EF4-FFF2-40B4-BE49-F238E27FC236}">
-                <a16:creationId xmlns:a16="http://schemas.microsoft.com/office/drawing/2014/main" id="{AFBD0E33-C581-45AF-9086-3C8C97A13DDB}"/>
-              </a:ext>
-            </a:extLst>
-          </p:cNvPr>
-          <p:cNvSpPr>
-            <a:spLocks noGrp="1"/>
-          </p:cNvSpPr>
-          <p:nvPr>
-            <p:ph type="ftr" sz="quarter" idx="12"/>
-          </p:nvPr>
-        </p:nvSpPr>
-        <p:spPr>
-          <a:noFill/>
-        </p:spPr>
-        <p:txBody>
-          <a:bodyPr/>
-          <a:lstStyle>
-            <a:lvl1pPr>
-              <a:spcBef>
-                <a:spcPct val="20000"/>
-              </a:spcBef>
-              <a:buChar char="•"/>
-              <a:defRPr sz="3200">
-                <a:solidFill>
-                  <a:schemeClr val="tx1"/>
-                </a:solidFill>
-                <a:latin typeface="Times New Roman" panose="02020603050405020304" pitchFamily="18" charset="0"/>
-              </a:defRPr>
-            </a:lvl1pPr>
-            <a:lvl2pPr marL="742950" indent="-285750">
-              <a:spcBef>
-                <a:spcPct val="20000"/>
-              </a:spcBef>
-              <a:buChar char="–"/>
-              <a:defRPr sz="2800">
-                <a:solidFill>
-                  <a:schemeClr val="tx1"/>
-                </a:solidFill>
-                <a:latin typeface="Times New Roman" panose="02020603050405020304" pitchFamily="18" charset="0"/>
-              </a:defRPr>
-            </a:lvl2pPr>
-            <a:lvl3pPr marL="1143000" indent="-228600">
-              <a:spcBef>
-                <a:spcPct val="20000"/>
-              </a:spcBef>
-              <a:buChar char="•"/>
-              <a:defRPr sz="2400">
-                <a:solidFill>
-                  <a:schemeClr val="tx1"/>
-                </a:solidFill>
-                <a:latin typeface="Times New Roman" panose="02020603050405020304" pitchFamily="18" charset="0"/>
-              </a:defRPr>
-            </a:lvl3pPr>
-            <a:lvl4pPr marL="1600200" indent="-228600">
-              <a:spcBef>
-                <a:spcPct val="20000"/>
-              </a:spcBef>
-              <a:buChar char="–"/>
-              <a:defRPr sz="2000">
-                <a:solidFill>
-                  <a:schemeClr val="tx1"/>
-                </a:solidFill>
-                <a:latin typeface="Times New Roman" panose="02020603050405020304" pitchFamily="18" charset="0"/>
-              </a:defRPr>
-            </a:lvl4pPr>
-            <a:lvl5pPr marL="2057400" indent="-228600">
-              <a:spcBef>
-                <a:spcPct val="20000"/>
-              </a:spcBef>
-              <a:buChar char="»"/>
-              <a:defRPr sz="2000">
-                <a:solidFill>
-                  <a:schemeClr val="tx1"/>
-                </a:solidFill>
-                <a:latin typeface="Times New Roman" panose="02020603050405020304" pitchFamily="18" charset="0"/>
-              </a:defRPr>
-            </a:lvl5pPr>
-            <a:lvl6pPr marL="2514600" indent="-228600" eaLnBrk="0" fontAlgn="base" hangingPunct="0">
-              <a:spcBef>
-                <a:spcPct val="20000"/>
-              </a:spcBef>
-              <a:spcAft>
-                <a:spcPct val="0"/>
-              </a:spcAft>
-              <a:buChar char="»"/>
-              <a:defRPr sz="2000">
-                <a:solidFill>
-                  <a:schemeClr val="tx1"/>
-                </a:solidFill>
-                <a:latin typeface="Times New Roman" panose="02020603050405020304" pitchFamily="18" charset="0"/>
-              </a:defRPr>
-            </a:lvl6pPr>
-            <a:lvl7pPr marL="2971800" indent="-228600" eaLnBrk="0" fontAlgn="base" hangingPunct="0">
-              <a:spcBef>
-                <a:spcPct val="20000"/>
-              </a:spcBef>
-              <a:spcAft>
-                <a:spcPct val="0"/>
-              </a:spcAft>
-              <a:buChar char="»"/>
-              <a:defRPr sz="2000">
-                <a:solidFill>
-                  <a:schemeClr val="tx1"/>
-                </a:solidFill>
-                <a:latin typeface="Times New Roman" panose="02020603050405020304" pitchFamily="18" charset="0"/>
-              </a:defRPr>
-            </a:lvl7pPr>
-            <a:lvl8pPr marL="3429000" indent="-228600" eaLnBrk="0" fontAlgn="base" hangingPunct="0">
-              <a:spcBef>
-                <a:spcPct val="20000"/>
-              </a:spcBef>
-              <a:spcAft>
-                <a:spcPct val="0"/>
-              </a:spcAft>
-              <a:buChar char="»"/>
-              <a:defRPr sz="2000">
-                <a:solidFill>
-                  <a:schemeClr val="tx1"/>
-                </a:solidFill>
-                <a:latin typeface="Times New Roman" panose="02020603050405020304" pitchFamily="18" charset="0"/>
-              </a:defRPr>
-            </a:lvl8pPr>
-            <a:lvl9pPr marL="3886200" indent="-228600" eaLnBrk="0" fontAlgn="base" hangingPunct="0">
-              <a:spcBef>
-                <a:spcPct val="20000"/>
-              </a:spcBef>
-              <a:spcAft>
-                <a:spcPct val="0"/>
-              </a:spcAft>
-              <a:buChar char="»"/>
-              <a:defRPr sz="2000">
-                <a:solidFill>
-                  <a:schemeClr val="tx1"/>
-                </a:solidFill>
-                <a:latin typeface="Times New Roman" panose="02020603050405020304" pitchFamily="18" charset="0"/>
-              </a:defRPr>
-            </a:lvl9pPr>
-          </a:lstStyle>
-          <a:p>
-            <a:pPr>
-              <a:spcBef>
-                <a:spcPct val="0"/>
-              </a:spcBef>
-              <a:buFontTx/>
-              <a:buNone/>
-            </a:pPr>
-            <a:endParaRPr lang="en-US" altLang="en-US" sz="800"/>
-          </a:p>
-          <a:p>
-            <a:pPr>
-              <a:spcBef>
-                <a:spcPct val="0"/>
-              </a:spcBef>
-              <a:buFontTx/>
-              <a:buNone/>
-            </a:pPr>
-            <a:endParaRPr lang="en-US" altLang="en-US" sz="800" b="0">
-              <a:latin typeface="Tahoma" panose="020B0604030504040204" pitchFamily="34" charset="0"/>
-            </a:endParaRPr>
-          </a:p>
-          <a:p>
-            <a:pPr>
-              <a:spcBef>
-                <a:spcPct val="0"/>
-              </a:spcBef>
-              <a:buFontTx/>
-              <a:buNone/>
-            </a:pPr>
-            <a:endParaRPr lang="en-US" altLang="en-US" sz="800">
-              <a:latin typeface="Tahoma" panose="020B0604030504040204" pitchFamily="34" charset="0"/>
-            </a:endParaRPr>
-          </a:p>
-          <a:p>
-            <a:pPr>
-              <a:spcBef>
-                <a:spcPct val="0"/>
-              </a:spcBef>
-              <a:buFontTx/>
-              <a:buNone/>
-            </a:pPr>
-            <a:r>
-              <a:rPr lang="en-US" altLang="en-US" sz="800">
-                <a:latin typeface="Tahoma" panose="020B0604030504040204" pitchFamily="34" charset="0"/>
-              </a:rPr>
-              <a:t>© A+ Computer Science  -  www.apluscompsci.com</a:t>
-            </a:r>
-          </a:p>
-        </p:txBody>
-      </p:sp>
-      <p:sp>
-        <p:nvSpPr>
-          <p:cNvPr id="4099" name="WordArt 2">
-            <a:extLst>
-              <a:ext uri="{FF2B5EF4-FFF2-40B4-BE49-F238E27FC236}">
-                <a16:creationId xmlns:a16="http://schemas.microsoft.com/office/drawing/2014/main" id="{2B79640A-4FE7-489A-AA6D-626F8ECF289D}"/>
-              </a:ext>
-            </a:extLst>
-          </p:cNvPr>
-          <p:cNvSpPr>
-            <a:spLocks noChangeArrowheads="1" noChangeShapeType="1" noTextEdit="1"/>
-          </p:cNvSpPr>
-          <p:nvPr/>
-        </p:nvSpPr>
-        <p:spPr bwMode="auto">
-          <a:xfrm>
-            <a:off x="838200" y="1600200"/>
-            <a:ext cx="7239000" cy="3200400"/>
-          </a:xfrm>
-          <a:prstGeom prst="rect">
-            <a:avLst/>
-          </a:prstGeom>
-        </p:spPr>
-        <p:txBody>
-          <a:bodyPr wrap="none" fromWordArt="1">
-            <a:prstTxWarp prst="textPlain">
-              <a:avLst>
-                <a:gd name="adj" fmla="val 50000"/>
-              </a:avLst>
-            </a:prstTxWarp>
-          </a:bodyPr>
-          <a:lstStyle/>
-          <a:p>
-            <a:pPr algn="ctr"/>
-            <a:r>
-              <a:rPr lang="en-US" sz="3600" kern="10">
-                <a:ln w="12700">
-                  <a:solidFill>
-                    <a:srgbClr val="EAEAEA"/>
-                  </a:solidFill>
-                  <a:round/>
-                  <a:headEnd/>
-                  <a:tailEnd/>
-                </a:ln>
-                <a:gradFill rotWithShape="1">
-                  <a:gsLst>
-                    <a:gs pos="0">
-                      <a:srgbClr val="A603AB"/>
-                    </a:gs>
-                    <a:gs pos="12000">
-                      <a:srgbClr val="E81766"/>
-                    </a:gs>
-                    <a:gs pos="27000">
-                      <a:srgbClr val="EE3F17"/>
-                    </a:gs>
-                    <a:gs pos="48000">
-                      <a:srgbClr val="FFFF00"/>
-                    </a:gs>
-                    <a:gs pos="64999">
-                      <a:srgbClr val="1A8D48"/>
-                    </a:gs>
-                    <a:gs pos="78999">
-                      <a:srgbClr val="0819FB"/>
-                    </a:gs>
-                    <a:gs pos="100000">
-                      <a:srgbClr val="A603AB"/>
-                    </a:gs>
-                  </a:gsLst>
-                  <a:lin ang="0" scaled="1"/>
-                </a:gradFill>
-                <a:effectLst>
-                  <a:outerShdw dist="35921" dir="2700000" sy="50000" kx="2115830" algn="bl" rotWithShape="0">
-                    <a:srgbClr val="C0C0C0"/>
-                  </a:outerShdw>
-                </a:effectLst>
-                <a:latin typeface="Arial Black" panose="020B0A04020102020204" pitchFamily="34" charset="0"/>
-              </a:rPr>
-              <a:t>Testing Expressions</a:t>
-            </a:r>
-          </a:p>
-          <a:p>
-            <a:pPr algn="ctr"/>
-            <a:r>
-              <a:rPr lang="en-US" sz="3600" kern="10">
-                <a:ln w="12700">
-                  <a:solidFill>
-                    <a:srgbClr val="EAEAEA"/>
-                  </a:solidFill>
-                  <a:round/>
-                  <a:headEnd/>
-                  <a:tailEnd/>
-                </a:ln>
-                <a:gradFill rotWithShape="1">
-                  <a:gsLst>
-                    <a:gs pos="0">
-                      <a:srgbClr val="A603AB"/>
-                    </a:gs>
-                    <a:gs pos="12000">
-                      <a:srgbClr val="E81766"/>
-                    </a:gs>
-                    <a:gs pos="27000">
-                      <a:srgbClr val="EE3F17"/>
-                    </a:gs>
-                    <a:gs pos="48000">
-                      <a:srgbClr val="FFFF00"/>
-                    </a:gs>
-                    <a:gs pos="64999">
-                      <a:srgbClr val="1A8D48"/>
-                    </a:gs>
-                    <a:gs pos="78999">
-                      <a:srgbClr val="0819FB"/>
-                    </a:gs>
-                    <a:gs pos="100000">
-                      <a:srgbClr val="A603AB"/>
-                    </a:gs>
-                  </a:gsLst>
-                  <a:lin ang="0" scaled="1"/>
-                </a:gradFill>
-                <a:effectLst>
-                  <a:outerShdw dist="35921" dir="2700000" sy="50000" kx="2115830" algn="bl" rotWithShape="0">
-                    <a:srgbClr val="C0C0C0"/>
-                  </a:outerShdw>
-                </a:effectLst>
-                <a:latin typeface="Arial Black" panose="020B0A04020102020204" pitchFamily="34" charset="0"/>
-              </a:rPr>
-              <a:t>With a Stack</a:t>
-            </a:r>
-          </a:p>
-        </p:txBody>
-      </p:sp>
-    </p:spTree>
-  </p:cSld>
-  <p:clrMapOvr>
-    <a:masterClrMapping/>
-  </p:clrMapOvr>
-</p:sld>
-</file>
-
-<file path=ppt/slides/slide25.xml><?xml version="1.0" encoding="utf-8"?>
-<p:sld xmlns:a="http://schemas.openxmlformats.org/drawingml/2006/main" xmlns:r="http://schemas.openxmlformats.org/officeDocument/2006/relationships" xmlns:p="http://schemas.openxmlformats.org/presentationml/2006/main">
-  <p:cSld>
-    <p:spTree>
-      <p:nvGrpSpPr>
-        <p:cNvPr id="1" name=""/>
-        <p:cNvGrpSpPr/>
-        <p:nvPr/>
-      </p:nvGrpSpPr>
-      <p:grpSpPr>
-        <a:xfrm>
-          <a:off x="0" y="0"/>
-          <a:ext cx="0" cy="0"/>
-          <a:chOff x="0" y="0"/>
-          <a:chExt cx="0" cy="0"/>
-        </a:xfrm>
-      </p:grpSpPr>
-      <p:sp>
-        <p:nvSpPr>
-          <p:cNvPr id="5122" name="Footer Placeholder 3">
-            <a:extLst>
-              <a:ext uri="{FF2B5EF4-FFF2-40B4-BE49-F238E27FC236}">
-                <a16:creationId xmlns:a16="http://schemas.microsoft.com/office/drawing/2014/main" id="{951D7F2C-190A-4A98-AA51-2922698D19E1}"/>
-              </a:ext>
-            </a:extLst>
-          </p:cNvPr>
-          <p:cNvSpPr>
-            <a:spLocks noGrp="1"/>
-          </p:cNvSpPr>
-          <p:nvPr>
-            <p:ph type="ftr" sz="quarter" idx="12"/>
-          </p:nvPr>
-        </p:nvSpPr>
-        <p:spPr>
-          <a:noFill/>
-        </p:spPr>
-        <p:txBody>
-          <a:bodyPr/>
-          <a:lstStyle>
-            <a:lvl1pPr>
-              <a:spcBef>
-                <a:spcPct val="20000"/>
-              </a:spcBef>
-              <a:buChar char="•"/>
-              <a:defRPr sz="3200">
-                <a:solidFill>
-                  <a:schemeClr val="tx1"/>
-                </a:solidFill>
-                <a:latin typeface="Times New Roman" panose="02020603050405020304" pitchFamily="18" charset="0"/>
-              </a:defRPr>
-            </a:lvl1pPr>
-            <a:lvl2pPr marL="742950" indent="-285750">
-              <a:spcBef>
-                <a:spcPct val="20000"/>
-              </a:spcBef>
-              <a:buChar char="–"/>
-              <a:defRPr sz="2800">
-                <a:solidFill>
-                  <a:schemeClr val="tx1"/>
-                </a:solidFill>
-                <a:latin typeface="Times New Roman" panose="02020603050405020304" pitchFamily="18" charset="0"/>
-              </a:defRPr>
-            </a:lvl2pPr>
-            <a:lvl3pPr marL="1143000" indent="-228600">
-              <a:spcBef>
-                <a:spcPct val="20000"/>
-              </a:spcBef>
-              <a:buChar char="•"/>
-              <a:defRPr sz="2400">
-                <a:solidFill>
-                  <a:schemeClr val="tx1"/>
-                </a:solidFill>
-                <a:latin typeface="Times New Roman" panose="02020603050405020304" pitchFamily="18" charset="0"/>
-              </a:defRPr>
-            </a:lvl3pPr>
-            <a:lvl4pPr marL="1600200" indent="-228600">
-              <a:spcBef>
-                <a:spcPct val="20000"/>
-              </a:spcBef>
-              <a:buChar char="–"/>
-              <a:defRPr sz="2000">
-                <a:solidFill>
-                  <a:schemeClr val="tx1"/>
-                </a:solidFill>
-                <a:latin typeface="Times New Roman" panose="02020603050405020304" pitchFamily="18" charset="0"/>
-              </a:defRPr>
-            </a:lvl4pPr>
-            <a:lvl5pPr marL="2057400" indent="-228600">
-              <a:spcBef>
-                <a:spcPct val="20000"/>
-              </a:spcBef>
-              <a:buChar char="»"/>
-              <a:defRPr sz="2000">
-                <a:solidFill>
-                  <a:schemeClr val="tx1"/>
-                </a:solidFill>
-                <a:latin typeface="Times New Roman" panose="02020603050405020304" pitchFamily="18" charset="0"/>
-              </a:defRPr>
-            </a:lvl5pPr>
-            <a:lvl6pPr marL="2514600" indent="-228600" eaLnBrk="0" fontAlgn="base" hangingPunct="0">
-              <a:spcBef>
-                <a:spcPct val="20000"/>
-              </a:spcBef>
-              <a:spcAft>
-                <a:spcPct val="0"/>
-              </a:spcAft>
-              <a:buChar char="»"/>
-              <a:defRPr sz="2000">
-                <a:solidFill>
-                  <a:schemeClr val="tx1"/>
-                </a:solidFill>
-                <a:latin typeface="Times New Roman" panose="02020603050405020304" pitchFamily="18" charset="0"/>
-              </a:defRPr>
-            </a:lvl6pPr>
-            <a:lvl7pPr marL="2971800" indent="-228600" eaLnBrk="0" fontAlgn="base" hangingPunct="0">
-              <a:spcBef>
-                <a:spcPct val="20000"/>
-              </a:spcBef>
-              <a:spcAft>
-                <a:spcPct val="0"/>
-              </a:spcAft>
-              <a:buChar char="»"/>
-              <a:defRPr sz="2000">
-                <a:solidFill>
-                  <a:schemeClr val="tx1"/>
-                </a:solidFill>
-                <a:latin typeface="Times New Roman" panose="02020603050405020304" pitchFamily="18" charset="0"/>
-              </a:defRPr>
-            </a:lvl7pPr>
-            <a:lvl8pPr marL="3429000" indent="-228600" eaLnBrk="0" fontAlgn="base" hangingPunct="0">
-              <a:spcBef>
-                <a:spcPct val="20000"/>
-              </a:spcBef>
-              <a:spcAft>
-                <a:spcPct val="0"/>
-              </a:spcAft>
-              <a:buChar char="»"/>
-              <a:defRPr sz="2000">
-                <a:solidFill>
-                  <a:schemeClr val="tx1"/>
-                </a:solidFill>
-                <a:latin typeface="Times New Roman" panose="02020603050405020304" pitchFamily="18" charset="0"/>
-              </a:defRPr>
-            </a:lvl8pPr>
-            <a:lvl9pPr marL="3886200" indent="-228600" eaLnBrk="0" fontAlgn="base" hangingPunct="0">
-              <a:spcBef>
-                <a:spcPct val="20000"/>
-              </a:spcBef>
-              <a:spcAft>
-                <a:spcPct val="0"/>
-              </a:spcAft>
-              <a:buChar char="»"/>
-              <a:defRPr sz="2000">
-                <a:solidFill>
-                  <a:schemeClr val="tx1"/>
-                </a:solidFill>
-                <a:latin typeface="Times New Roman" panose="02020603050405020304" pitchFamily="18" charset="0"/>
-              </a:defRPr>
-            </a:lvl9pPr>
-          </a:lstStyle>
-          <a:p>
-            <a:pPr>
-              <a:spcBef>
-                <a:spcPct val="0"/>
-              </a:spcBef>
-              <a:buFontTx/>
-              <a:buNone/>
-            </a:pPr>
-            <a:endParaRPr lang="en-US" altLang="en-US" sz="800"/>
-          </a:p>
-          <a:p>
-            <a:pPr>
-              <a:spcBef>
-                <a:spcPct val="0"/>
-              </a:spcBef>
-              <a:buFontTx/>
-              <a:buNone/>
-            </a:pPr>
-            <a:endParaRPr lang="en-US" altLang="en-US" sz="800" b="0">
-              <a:latin typeface="Tahoma" panose="020B0604030504040204" pitchFamily="34" charset="0"/>
-            </a:endParaRPr>
-          </a:p>
-          <a:p>
-            <a:pPr>
-              <a:spcBef>
-                <a:spcPct val="0"/>
-              </a:spcBef>
-              <a:buFontTx/>
-              <a:buNone/>
-            </a:pPr>
-            <a:endParaRPr lang="en-US" altLang="en-US" sz="800">
-              <a:latin typeface="Tahoma" panose="020B0604030504040204" pitchFamily="34" charset="0"/>
-            </a:endParaRPr>
-          </a:p>
-          <a:p>
-            <a:pPr>
-              <a:spcBef>
-                <a:spcPct val="0"/>
-              </a:spcBef>
-              <a:buFontTx/>
-              <a:buNone/>
-            </a:pPr>
-            <a:r>
-              <a:rPr lang="en-US" altLang="en-US" sz="800">
-                <a:latin typeface="Tahoma" panose="020B0604030504040204" pitchFamily="34" charset="0"/>
-              </a:rPr>
-              <a:t>© A+ Computer Science  -  www.apluscompsci.com</a:t>
-            </a:r>
-          </a:p>
-        </p:txBody>
-      </p:sp>
-      <p:sp>
-        <p:nvSpPr>
-          <p:cNvPr id="5123" name="Text Box 2">
-            <a:extLst>
-              <a:ext uri="{FF2B5EF4-FFF2-40B4-BE49-F238E27FC236}">
-                <a16:creationId xmlns:a16="http://schemas.microsoft.com/office/drawing/2014/main" id="{E284C3B2-E03B-411E-B485-482C388C7338}"/>
-              </a:ext>
-            </a:extLst>
-          </p:cNvPr>
-          <p:cNvSpPr txBox="1">
-            <a:spLocks noChangeArrowheads="1"/>
-          </p:cNvSpPr>
-          <p:nvPr/>
-        </p:nvSpPr>
-        <p:spPr bwMode="auto">
-          <a:xfrm>
-            <a:off x="1295400" y="1524000"/>
-            <a:ext cx="6351588" cy="4910138"/>
-          </a:xfrm>
-          <a:prstGeom prst="rect">
-            <a:avLst/>
-          </a:prstGeom>
-          <a:noFill/>
-          <a:ln>
-            <a:noFill/>
-          </a:ln>
-          <a:effectLst/>
-          <a:extLst>
-            <a:ext uri="{909E8E84-426E-40DD-AFC4-6F175D3DCCD1}">
-              <a14:hiddenFill xmlns:a14="http://schemas.microsoft.com/office/drawing/2010/main">
-                <a:solidFill>
-                  <a:schemeClr val="accent1"/>
-                </a:solidFill>
-              </a14:hiddenFill>
-            </a:ext>
-            <a:ext uri="{91240B29-F687-4F45-9708-019B960494DF}">
-              <a14:hiddenLine xmlns:a14="http://schemas.microsoft.com/office/drawing/2010/main" w="9525">
-                <a:solidFill>
-                  <a:schemeClr val="tx1"/>
-                </a:solidFill>
-                <a:miter lim="800000"/>
-                <a:headEnd/>
-                <a:tailEnd/>
-              </a14:hiddenLine>
-            </a:ext>
-            <a:ext uri="{AF507438-7753-43E0-B8FC-AC1667EBCBE1}">
-              <a14:hiddenEffects xmlns:a14="http://schemas.microsoft.com/office/drawing/2010/main">
-                <a:effectLst>
-                  <a:outerShdw dist="35921" dir="2700000" algn="ctr" rotWithShape="0">
-                    <a:schemeClr val="bg2"/>
-                  </a:outerShdw>
-                </a:effectLst>
-              </a14:hiddenEffects>
-            </a:ext>
-          </a:extLst>
-        </p:spPr>
-        <p:txBody>
-          <a:bodyPr wrap="none">
-            <a:spAutoFit/>
-          </a:bodyPr>
-          <a:lstStyle>
-            <a:lvl1pPr>
-              <a:spcBef>
-                <a:spcPct val="20000"/>
-              </a:spcBef>
-              <a:buChar char="•"/>
-              <a:defRPr sz="3200">
-                <a:solidFill>
-                  <a:schemeClr val="tx1"/>
-                </a:solidFill>
-                <a:latin typeface="Times New Roman" panose="02020603050405020304" pitchFamily="18" charset="0"/>
-              </a:defRPr>
-            </a:lvl1pPr>
-            <a:lvl2pPr marL="742950" indent="-285750">
-              <a:spcBef>
-                <a:spcPct val="20000"/>
-              </a:spcBef>
-              <a:buChar char="–"/>
-              <a:defRPr sz="2800">
-                <a:solidFill>
-                  <a:schemeClr val="tx1"/>
-                </a:solidFill>
-                <a:latin typeface="Times New Roman" panose="02020603050405020304" pitchFamily="18" charset="0"/>
-              </a:defRPr>
-            </a:lvl2pPr>
-            <a:lvl3pPr marL="1143000" indent="-228600">
-              <a:spcBef>
-                <a:spcPct val="20000"/>
-              </a:spcBef>
-              <a:buChar char="•"/>
-              <a:defRPr sz="2400">
-                <a:solidFill>
-                  <a:schemeClr val="tx1"/>
-                </a:solidFill>
-                <a:latin typeface="Times New Roman" panose="02020603050405020304" pitchFamily="18" charset="0"/>
-              </a:defRPr>
-            </a:lvl3pPr>
-            <a:lvl4pPr marL="1600200" indent="-228600">
-              <a:spcBef>
-                <a:spcPct val="20000"/>
-              </a:spcBef>
-              <a:buChar char="–"/>
-              <a:defRPr sz="2000">
-                <a:solidFill>
-                  <a:schemeClr val="tx1"/>
-                </a:solidFill>
-                <a:latin typeface="Times New Roman" panose="02020603050405020304" pitchFamily="18" charset="0"/>
-              </a:defRPr>
-            </a:lvl4pPr>
-            <a:lvl5pPr marL="2057400" indent="-228600">
-              <a:spcBef>
-                <a:spcPct val="20000"/>
-              </a:spcBef>
-              <a:buChar char="»"/>
-              <a:defRPr sz="2000">
-                <a:solidFill>
-                  <a:schemeClr val="tx1"/>
-                </a:solidFill>
-                <a:latin typeface="Times New Roman" panose="02020603050405020304" pitchFamily="18" charset="0"/>
-              </a:defRPr>
-            </a:lvl5pPr>
-            <a:lvl6pPr marL="2514600" indent="-228600" eaLnBrk="0" fontAlgn="base" hangingPunct="0">
-              <a:spcBef>
-                <a:spcPct val="20000"/>
-              </a:spcBef>
-              <a:spcAft>
-                <a:spcPct val="0"/>
-              </a:spcAft>
-              <a:buChar char="»"/>
-              <a:defRPr sz="2000">
-                <a:solidFill>
-                  <a:schemeClr val="tx1"/>
-                </a:solidFill>
-                <a:latin typeface="Times New Roman" panose="02020603050405020304" pitchFamily="18" charset="0"/>
-              </a:defRPr>
-            </a:lvl6pPr>
-            <a:lvl7pPr marL="2971800" indent="-228600" eaLnBrk="0" fontAlgn="base" hangingPunct="0">
-              <a:spcBef>
-                <a:spcPct val="20000"/>
-              </a:spcBef>
-              <a:spcAft>
-                <a:spcPct val="0"/>
-              </a:spcAft>
-              <a:buChar char="»"/>
-              <a:defRPr sz="2000">
-                <a:solidFill>
-                  <a:schemeClr val="tx1"/>
-                </a:solidFill>
-                <a:latin typeface="Times New Roman" panose="02020603050405020304" pitchFamily="18" charset="0"/>
-              </a:defRPr>
-            </a:lvl7pPr>
-            <a:lvl8pPr marL="3429000" indent="-228600" eaLnBrk="0" fontAlgn="base" hangingPunct="0">
-              <a:spcBef>
-                <a:spcPct val="20000"/>
-              </a:spcBef>
-              <a:spcAft>
-                <a:spcPct val="0"/>
-              </a:spcAft>
-              <a:buChar char="»"/>
-              <a:defRPr sz="2000">
-                <a:solidFill>
-                  <a:schemeClr val="tx1"/>
-                </a:solidFill>
-                <a:latin typeface="Times New Roman" panose="02020603050405020304" pitchFamily="18" charset="0"/>
-              </a:defRPr>
-            </a:lvl8pPr>
-            <a:lvl9pPr marL="3886200" indent="-228600" eaLnBrk="0" fontAlgn="base" hangingPunct="0">
-              <a:spcBef>
-                <a:spcPct val="20000"/>
-              </a:spcBef>
-              <a:spcAft>
-                <a:spcPct val="0"/>
-              </a:spcAft>
-              <a:buChar char="»"/>
-              <a:defRPr sz="2000">
-                <a:solidFill>
-                  <a:schemeClr val="tx1"/>
-                </a:solidFill>
-                <a:latin typeface="Times New Roman" panose="02020603050405020304" pitchFamily="18" charset="0"/>
-              </a:defRPr>
-            </a:lvl9pPr>
-          </a:lstStyle>
-          <a:p>
-            <a:pPr>
-              <a:spcBef>
-                <a:spcPct val="0"/>
-              </a:spcBef>
-              <a:buFontTx/>
-              <a:buNone/>
-            </a:pPr>
-            <a:r>
-              <a:rPr lang="en-US" altLang="en-US" sz="2800">
-                <a:latin typeface="Tahoma" panose="020B0604030504040204" pitchFamily="34" charset="0"/>
-              </a:rPr>
-              <a:t>Expressions are made up of values</a:t>
-            </a:r>
-          </a:p>
-          <a:p>
-            <a:pPr>
-              <a:spcBef>
-                <a:spcPct val="0"/>
-              </a:spcBef>
-              <a:buFontTx/>
-              <a:buNone/>
-            </a:pPr>
-            <a:r>
-              <a:rPr lang="en-US" altLang="en-US" sz="2800">
-                <a:latin typeface="Tahoma" panose="020B0604030504040204" pitchFamily="34" charset="0"/>
-              </a:rPr>
-              <a:t>and symbols.  Many symbols come</a:t>
-            </a:r>
-          </a:p>
-          <a:p>
-            <a:pPr>
-              <a:spcBef>
-                <a:spcPct val="0"/>
-              </a:spcBef>
-              <a:buFontTx/>
-              <a:buNone/>
-            </a:pPr>
-            <a:r>
-              <a:rPr lang="en-US" altLang="en-US" sz="2800">
-                <a:latin typeface="Tahoma" panose="020B0604030504040204" pitchFamily="34" charset="0"/>
-              </a:rPr>
-              <a:t>in pairs.</a:t>
-            </a:r>
-          </a:p>
-          <a:p>
-            <a:pPr>
-              <a:spcBef>
-                <a:spcPct val="0"/>
-              </a:spcBef>
-              <a:buFontTx/>
-              <a:buNone/>
-            </a:pPr>
-            <a:endParaRPr lang="en-US" altLang="en-US" sz="2800">
-              <a:latin typeface="Tahoma" panose="020B0604030504040204" pitchFamily="34" charset="0"/>
-            </a:endParaRPr>
-          </a:p>
-          <a:p>
-            <a:pPr>
-              <a:spcBef>
-                <a:spcPct val="0"/>
-              </a:spcBef>
-              <a:buFontTx/>
-              <a:buNone/>
-            </a:pPr>
-            <a:r>
-              <a:rPr lang="en-US" altLang="en-US" sz="4000">
-                <a:solidFill>
-                  <a:schemeClr val="accent2"/>
-                </a:solidFill>
-                <a:latin typeface="Tahoma" panose="020B0604030504040204" pitchFamily="34" charset="0"/>
-              </a:rPr>
-              <a:t>( )</a:t>
-            </a:r>
-          </a:p>
-          <a:p>
-            <a:pPr>
-              <a:spcBef>
-                <a:spcPct val="0"/>
-              </a:spcBef>
-              <a:buFontTx/>
-              <a:buNone/>
-            </a:pPr>
-            <a:r>
-              <a:rPr lang="en-US" altLang="en-US" sz="4000">
-                <a:solidFill>
-                  <a:schemeClr val="accent2"/>
-                </a:solidFill>
-                <a:latin typeface="Tahoma" panose="020B0604030504040204" pitchFamily="34" charset="0"/>
-              </a:rPr>
-              <a:t>{ }</a:t>
-            </a:r>
-          </a:p>
-          <a:p>
-            <a:pPr>
-              <a:spcBef>
-                <a:spcPct val="0"/>
-              </a:spcBef>
-              <a:buFontTx/>
-              <a:buNone/>
-            </a:pPr>
-            <a:endParaRPr lang="en-US" altLang="en-US" sz="4000">
-              <a:solidFill>
-                <a:schemeClr val="accent2"/>
-              </a:solidFill>
-              <a:latin typeface="Tahoma" panose="020B0604030504040204" pitchFamily="34" charset="0"/>
-            </a:endParaRPr>
-          </a:p>
-          <a:p>
-            <a:pPr>
-              <a:spcBef>
-                <a:spcPct val="0"/>
-              </a:spcBef>
-              <a:buFontTx/>
-              <a:buNone/>
-            </a:pPr>
-            <a:r>
-              <a:rPr lang="en-US" altLang="en-US" sz="2800">
-                <a:latin typeface="Tahoma" panose="020B0604030504040204" pitchFamily="34" charset="0"/>
-              </a:rPr>
-              <a:t>A stack can be used to match up</a:t>
-            </a:r>
-          </a:p>
-          <a:p>
-            <a:pPr>
-              <a:spcBef>
-                <a:spcPct val="0"/>
-              </a:spcBef>
-              <a:buFontTx/>
-              <a:buNone/>
-            </a:pPr>
-            <a:r>
-              <a:rPr lang="en-US" altLang="en-US" sz="2800">
-                <a:latin typeface="Tahoma" panose="020B0604030504040204" pitchFamily="34" charset="0"/>
-              </a:rPr>
-              <a:t>opening and closing symbols.</a:t>
-            </a:r>
-          </a:p>
-          <a:p>
-            <a:pPr>
-              <a:spcBef>
-                <a:spcPct val="0"/>
-              </a:spcBef>
-              <a:buFontTx/>
-              <a:buNone/>
-            </a:pPr>
-            <a:endParaRPr lang="en-US" altLang="en-US" sz="2800">
-              <a:latin typeface="Tahoma" panose="020B0604030504040204" pitchFamily="34" charset="0"/>
-            </a:endParaRPr>
-          </a:p>
-        </p:txBody>
-      </p:sp>
-      <p:sp>
-        <p:nvSpPr>
-          <p:cNvPr id="5124" name="WordArt 3">
-            <a:extLst>
-              <a:ext uri="{FF2B5EF4-FFF2-40B4-BE49-F238E27FC236}">
-                <a16:creationId xmlns:a16="http://schemas.microsoft.com/office/drawing/2014/main" id="{7000B803-0C8E-40CF-BC0E-C6321F5CD604}"/>
-              </a:ext>
-            </a:extLst>
-          </p:cNvPr>
-          <p:cNvSpPr>
-            <a:spLocks noChangeArrowheads="1" noChangeShapeType="1" noTextEdit="1"/>
-          </p:cNvSpPr>
-          <p:nvPr/>
-        </p:nvSpPr>
-        <p:spPr bwMode="auto">
-          <a:xfrm>
-            <a:off x="1143000" y="457200"/>
-            <a:ext cx="6553200" cy="762000"/>
-          </a:xfrm>
-          <a:prstGeom prst="rect">
-            <a:avLst/>
-          </a:prstGeom>
-        </p:spPr>
-        <p:txBody>
-          <a:bodyPr wrap="none" fromWordArt="1">
-            <a:prstTxWarp prst="textPlain">
-              <a:avLst>
-                <a:gd name="adj" fmla="val 50000"/>
-              </a:avLst>
-            </a:prstTxWarp>
-          </a:bodyPr>
-          <a:lstStyle/>
-          <a:p>
-            <a:pPr algn="ctr"/>
-            <a:r>
-              <a:rPr lang="en-US" sz="3600" kern="10">
-                <a:ln w="9525">
-                  <a:solidFill>
-                    <a:srgbClr val="CCFFFF"/>
-                  </a:solidFill>
-                  <a:round/>
-                  <a:headEnd/>
-                  <a:tailEnd/>
-                </a:ln>
-                <a:solidFill>
-                  <a:srgbClr val="0000FF"/>
-                </a:solidFill>
-                <a:effectLst>
-                  <a:outerShdw dist="35921" dir="2700000" algn="ctr" rotWithShape="0">
-                    <a:srgbClr val="C0C0C0"/>
-                  </a:outerShdw>
-                </a:effectLst>
-                <a:latin typeface="Impact" panose="020B0806030902050204" pitchFamily="34" charset="0"/>
-              </a:rPr>
-              <a:t>Expression Tester</a:t>
-            </a:r>
-          </a:p>
-        </p:txBody>
-      </p:sp>
-    </p:spTree>
-  </p:cSld>
-  <p:clrMapOvr>
-    <a:masterClrMapping/>
-  </p:clrMapOvr>
-</p:sld>
-</file>
-
-<file path=ppt/slides/slide26.xml><?xml version="1.0" encoding="utf-8"?>
-<p:sld xmlns:a="http://schemas.openxmlformats.org/drawingml/2006/main" xmlns:r="http://schemas.openxmlformats.org/officeDocument/2006/relationships" xmlns:p="http://schemas.openxmlformats.org/presentationml/2006/main">
-  <p:cSld>
-    <p:spTree>
-      <p:nvGrpSpPr>
-        <p:cNvPr id="1" name=""/>
-        <p:cNvGrpSpPr/>
-        <p:nvPr/>
-      </p:nvGrpSpPr>
-      <p:grpSpPr>
-        <a:xfrm>
-          <a:off x="0" y="0"/>
-          <a:ext cx="0" cy="0"/>
-          <a:chOff x="0" y="0"/>
-          <a:chExt cx="0" cy="0"/>
-        </a:xfrm>
-      </p:grpSpPr>
-      <p:sp>
-        <p:nvSpPr>
-          <p:cNvPr id="6146" name="Footer Placeholder 3">
-            <a:extLst>
-              <a:ext uri="{FF2B5EF4-FFF2-40B4-BE49-F238E27FC236}">
-                <a16:creationId xmlns:a16="http://schemas.microsoft.com/office/drawing/2014/main" id="{B3AE48E7-E90B-4E59-8B41-2FFC94D3D0E0}"/>
-              </a:ext>
-            </a:extLst>
-          </p:cNvPr>
-          <p:cNvSpPr>
-            <a:spLocks noGrp="1"/>
-          </p:cNvSpPr>
-          <p:nvPr>
-            <p:ph type="ftr" sz="quarter" idx="12"/>
-          </p:nvPr>
-        </p:nvSpPr>
-        <p:spPr>
-          <a:noFill/>
-        </p:spPr>
-        <p:txBody>
-          <a:bodyPr/>
-          <a:lstStyle>
-            <a:lvl1pPr>
-              <a:spcBef>
-                <a:spcPct val="20000"/>
-              </a:spcBef>
-              <a:buChar char="•"/>
-              <a:defRPr sz="3200">
-                <a:solidFill>
-                  <a:schemeClr val="tx1"/>
-                </a:solidFill>
-                <a:latin typeface="Times New Roman" panose="02020603050405020304" pitchFamily="18" charset="0"/>
-              </a:defRPr>
-            </a:lvl1pPr>
-            <a:lvl2pPr marL="742950" indent="-285750">
-              <a:spcBef>
-                <a:spcPct val="20000"/>
-              </a:spcBef>
-              <a:buChar char="–"/>
-              <a:defRPr sz="2800">
-                <a:solidFill>
-                  <a:schemeClr val="tx1"/>
-                </a:solidFill>
-                <a:latin typeface="Times New Roman" panose="02020603050405020304" pitchFamily="18" charset="0"/>
-              </a:defRPr>
-            </a:lvl2pPr>
-            <a:lvl3pPr marL="1143000" indent="-228600">
-              <a:spcBef>
-                <a:spcPct val="20000"/>
-              </a:spcBef>
-              <a:buChar char="•"/>
-              <a:defRPr sz="2400">
-                <a:solidFill>
-                  <a:schemeClr val="tx1"/>
-                </a:solidFill>
-                <a:latin typeface="Times New Roman" panose="02020603050405020304" pitchFamily="18" charset="0"/>
-              </a:defRPr>
-            </a:lvl3pPr>
-            <a:lvl4pPr marL="1600200" indent="-228600">
-              <a:spcBef>
-                <a:spcPct val="20000"/>
-              </a:spcBef>
-              <a:buChar char="–"/>
-              <a:defRPr sz="2000">
-                <a:solidFill>
-                  <a:schemeClr val="tx1"/>
-                </a:solidFill>
-                <a:latin typeface="Times New Roman" panose="02020603050405020304" pitchFamily="18" charset="0"/>
-              </a:defRPr>
-            </a:lvl4pPr>
-            <a:lvl5pPr marL="2057400" indent="-228600">
-              <a:spcBef>
-                <a:spcPct val="20000"/>
-              </a:spcBef>
-              <a:buChar char="»"/>
-              <a:defRPr sz="2000">
-                <a:solidFill>
-                  <a:schemeClr val="tx1"/>
-                </a:solidFill>
-                <a:latin typeface="Times New Roman" panose="02020603050405020304" pitchFamily="18" charset="0"/>
-              </a:defRPr>
-            </a:lvl5pPr>
-            <a:lvl6pPr marL="2514600" indent="-228600" eaLnBrk="0" fontAlgn="base" hangingPunct="0">
-              <a:spcBef>
-                <a:spcPct val="20000"/>
-              </a:spcBef>
-              <a:spcAft>
-                <a:spcPct val="0"/>
-              </a:spcAft>
-              <a:buChar char="»"/>
-              <a:defRPr sz="2000">
-                <a:solidFill>
-                  <a:schemeClr val="tx1"/>
-                </a:solidFill>
-                <a:latin typeface="Times New Roman" panose="02020603050405020304" pitchFamily="18" charset="0"/>
-              </a:defRPr>
-            </a:lvl6pPr>
-            <a:lvl7pPr marL="2971800" indent="-228600" eaLnBrk="0" fontAlgn="base" hangingPunct="0">
-              <a:spcBef>
-                <a:spcPct val="20000"/>
-              </a:spcBef>
-              <a:spcAft>
-                <a:spcPct val="0"/>
-              </a:spcAft>
-              <a:buChar char="»"/>
-              <a:defRPr sz="2000">
-                <a:solidFill>
-                  <a:schemeClr val="tx1"/>
-                </a:solidFill>
-                <a:latin typeface="Times New Roman" panose="02020603050405020304" pitchFamily="18" charset="0"/>
-              </a:defRPr>
-            </a:lvl7pPr>
-            <a:lvl8pPr marL="3429000" indent="-228600" eaLnBrk="0" fontAlgn="base" hangingPunct="0">
-              <a:spcBef>
-                <a:spcPct val="20000"/>
-              </a:spcBef>
-              <a:spcAft>
-                <a:spcPct val="0"/>
-              </a:spcAft>
-              <a:buChar char="»"/>
-              <a:defRPr sz="2000">
-                <a:solidFill>
-                  <a:schemeClr val="tx1"/>
-                </a:solidFill>
-                <a:latin typeface="Times New Roman" panose="02020603050405020304" pitchFamily="18" charset="0"/>
-              </a:defRPr>
-            </a:lvl8pPr>
-            <a:lvl9pPr marL="3886200" indent="-228600" eaLnBrk="0" fontAlgn="base" hangingPunct="0">
-              <a:spcBef>
-                <a:spcPct val="20000"/>
-              </a:spcBef>
-              <a:spcAft>
-                <a:spcPct val="0"/>
-              </a:spcAft>
-              <a:buChar char="»"/>
-              <a:defRPr sz="2000">
-                <a:solidFill>
-                  <a:schemeClr val="tx1"/>
-                </a:solidFill>
-                <a:latin typeface="Times New Roman" panose="02020603050405020304" pitchFamily="18" charset="0"/>
-              </a:defRPr>
-            </a:lvl9pPr>
-          </a:lstStyle>
-          <a:p>
-            <a:pPr>
-              <a:spcBef>
-                <a:spcPct val="0"/>
-              </a:spcBef>
-              <a:buFontTx/>
-              <a:buNone/>
-            </a:pPr>
-            <a:endParaRPr lang="en-US" altLang="en-US" sz="800"/>
-          </a:p>
-          <a:p>
-            <a:pPr>
-              <a:spcBef>
-                <a:spcPct val="0"/>
-              </a:spcBef>
-              <a:buFontTx/>
-              <a:buNone/>
-            </a:pPr>
-            <a:endParaRPr lang="en-US" altLang="en-US" sz="800" b="0">
-              <a:latin typeface="Tahoma" panose="020B0604030504040204" pitchFamily="34" charset="0"/>
-            </a:endParaRPr>
-          </a:p>
-          <a:p>
-            <a:pPr>
-              <a:spcBef>
-                <a:spcPct val="0"/>
-              </a:spcBef>
-              <a:buFontTx/>
-              <a:buNone/>
-            </a:pPr>
-            <a:endParaRPr lang="en-US" altLang="en-US" sz="800">
-              <a:latin typeface="Tahoma" panose="020B0604030504040204" pitchFamily="34" charset="0"/>
-            </a:endParaRPr>
-          </a:p>
-          <a:p>
-            <a:pPr>
-              <a:spcBef>
-                <a:spcPct val="0"/>
-              </a:spcBef>
-              <a:buFontTx/>
-              <a:buNone/>
-            </a:pPr>
-            <a:r>
-              <a:rPr lang="en-US" altLang="en-US" sz="800">
-                <a:latin typeface="Tahoma" panose="020B0604030504040204" pitchFamily="34" charset="0"/>
-              </a:rPr>
-              <a:t>© A+ Computer Science  -  www.apluscompsci.com</a:t>
-            </a:r>
-          </a:p>
-        </p:txBody>
-      </p:sp>
-      <p:sp>
-        <p:nvSpPr>
-          <p:cNvPr id="6147" name="Text Box 2">
-            <a:extLst>
-              <a:ext uri="{FF2B5EF4-FFF2-40B4-BE49-F238E27FC236}">
-                <a16:creationId xmlns:a16="http://schemas.microsoft.com/office/drawing/2014/main" id="{9D560BE2-3E90-49B1-9650-3C6CEC65262C}"/>
-              </a:ext>
-            </a:extLst>
-          </p:cNvPr>
-          <p:cNvSpPr txBox="1">
-            <a:spLocks noChangeArrowheads="1"/>
-          </p:cNvSpPr>
-          <p:nvPr/>
-        </p:nvSpPr>
-        <p:spPr bwMode="auto">
-          <a:xfrm>
-            <a:off x="1295400" y="1676400"/>
-            <a:ext cx="6977063" cy="3970338"/>
-          </a:xfrm>
-          <a:prstGeom prst="rect">
-            <a:avLst/>
-          </a:prstGeom>
-          <a:noFill/>
-          <a:ln>
-            <a:noFill/>
-          </a:ln>
-          <a:effectLst/>
-          <a:extLst>
-            <a:ext uri="{909E8E84-426E-40DD-AFC4-6F175D3DCCD1}">
-              <a14:hiddenFill xmlns:a14="http://schemas.microsoft.com/office/drawing/2010/main">
-                <a:solidFill>
-                  <a:schemeClr val="accent1"/>
-                </a:solidFill>
-              </a14:hiddenFill>
-            </a:ext>
-            <a:ext uri="{91240B29-F687-4F45-9708-019B960494DF}">
-              <a14:hiddenLine xmlns:a14="http://schemas.microsoft.com/office/drawing/2010/main" w="9525">
-                <a:solidFill>
-                  <a:schemeClr val="tx1"/>
-                </a:solidFill>
-                <a:miter lim="800000"/>
-                <a:headEnd/>
-                <a:tailEnd/>
-              </a14:hiddenLine>
-            </a:ext>
-            <a:ext uri="{AF507438-7753-43E0-B8FC-AC1667EBCBE1}">
-              <a14:hiddenEffects xmlns:a14="http://schemas.microsoft.com/office/drawing/2010/main">
-                <a:effectLst>
-                  <a:outerShdw dist="35921" dir="2700000" algn="ctr" rotWithShape="0">
-                    <a:schemeClr val="bg2"/>
-                  </a:outerShdw>
-                </a:effectLst>
-              </a14:hiddenEffects>
-            </a:ext>
-          </a:extLst>
-        </p:spPr>
-        <p:txBody>
-          <a:bodyPr wrap="none">
-            <a:spAutoFit/>
-          </a:bodyPr>
-          <a:lstStyle>
-            <a:lvl1pPr>
-              <a:spcBef>
-                <a:spcPct val="20000"/>
-              </a:spcBef>
-              <a:buChar char="•"/>
-              <a:defRPr sz="3200">
-                <a:solidFill>
-                  <a:schemeClr val="tx1"/>
-                </a:solidFill>
-                <a:latin typeface="Times New Roman" panose="02020603050405020304" pitchFamily="18" charset="0"/>
-              </a:defRPr>
-            </a:lvl1pPr>
-            <a:lvl2pPr marL="742950" indent="-285750">
-              <a:spcBef>
-                <a:spcPct val="20000"/>
-              </a:spcBef>
-              <a:buChar char="–"/>
-              <a:defRPr sz="2800">
-                <a:solidFill>
-                  <a:schemeClr val="tx1"/>
-                </a:solidFill>
-                <a:latin typeface="Times New Roman" panose="02020603050405020304" pitchFamily="18" charset="0"/>
-              </a:defRPr>
-            </a:lvl2pPr>
-            <a:lvl3pPr marL="1143000" indent="-228600">
-              <a:spcBef>
-                <a:spcPct val="20000"/>
-              </a:spcBef>
-              <a:buChar char="•"/>
-              <a:defRPr sz="2400">
-                <a:solidFill>
-                  <a:schemeClr val="tx1"/>
-                </a:solidFill>
-                <a:latin typeface="Times New Roman" panose="02020603050405020304" pitchFamily="18" charset="0"/>
-              </a:defRPr>
-            </a:lvl3pPr>
-            <a:lvl4pPr marL="1600200" indent="-228600">
-              <a:spcBef>
-                <a:spcPct val="20000"/>
-              </a:spcBef>
-              <a:buChar char="–"/>
-              <a:defRPr sz="2000">
-                <a:solidFill>
-                  <a:schemeClr val="tx1"/>
-                </a:solidFill>
-                <a:latin typeface="Times New Roman" panose="02020603050405020304" pitchFamily="18" charset="0"/>
-              </a:defRPr>
-            </a:lvl4pPr>
-            <a:lvl5pPr marL="2057400" indent="-228600">
-              <a:spcBef>
-                <a:spcPct val="20000"/>
-              </a:spcBef>
-              <a:buChar char="»"/>
-              <a:defRPr sz="2000">
-                <a:solidFill>
-                  <a:schemeClr val="tx1"/>
-                </a:solidFill>
-                <a:latin typeface="Times New Roman" panose="02020603050405020304" pitchFamily="18" charset="0"/>
-              </a:defRPr>
-            </a:lvl5pPr>
-            <a:lvl6pPr marL="2514600" indent="-228600" eaLnBrk="0" fontAlgn="base" hangingPunct="0">
-              <a:spcBef>
-                <a:spcPct val="20000"/>
-              </a:spcBef>
-              <a:spcAft>
-                <a:spcPct val="0"/>
-              </a:spcAft>
-              <a:buChar char="»"/>
-              <a:defRPr sz="2000">
-                <a:solidFill>
-                  <a:schemeClr val="tx1"/>
-                </a:solidFill>
-                <a:latin typeface="Times New Roman" panose="02020603050405020304" pitchFamily="18" charset="0"/>
-              </a:defRPr>
-            </a:lvl6pPr>
-            <a:lvl7pPr marL="2971800" indent="-228600" eaLnBrk="0" fontAlgn="base" hangingPunct="0">
-              <a:spcBef>
-                <a:spcPct val="20000"/>
-              </a:spcBef>
-              <a:spcAft>
-                <a:spcPct val="0"/>
-              </a:spcAft>
-              <a:buChar char="»"/>
-              <a:defRPr sz="2000">
-                <a:solidFill>
-                  <a:schemeClr val="tx1"/>
-                </a:solidFill>
-                <a:latin typeface="Times New Roman" panose="02020603050405020304" pitchFamily="18" charset="0"/>
-              </a:defRPr>
-            </a:lvl7pPr>
-            <a:lvl8pPr marL="3429000" indent="-228600" eaLnBrk="0" fontAlgn="base" hangingPunct="0">
-              <a:spcBef>
-                <a:spcPct val="20000"/>
-              </a:spcBef>
-              <a:spcAft>
-                <a:spcPct val="0"/>
-              </a:spcAft>
-              <a:buChar char="»"/>
-              <a:defRPr sz="2000">
-                <a:solidFill>
-                  <a:schemeClr val="tx1"/>
-                </a:solidFill>
-                <a:latin typeface="Times New Roman" panose="02020603050405020304" pitchFamily="18" charset="0"/>
-              </a:defRPr>
-            </a:lvl8pPr>
-            <a:lvl9pPr marL="3886200" indent="-228600" eaLnBrk="0" fontAlgn="base" hangingPunct="0">
-              <a:spcBef>
-                <a:spcPct val="20000"/>
-              </a:spcBef>
-              <a:spcAft>
-                <a:spcPct val="0"/>
-              </a:spcAft>
-              <a:buChar char="»"/>
-              <a:defRPr sz="2000">
-                <a:solidFill>
-                  <a:schemeClr val="tx1"/>
-                </a:solidFill>
-                <a:latin typeface="Times New Roman" panose="02020603050405020304" pitchFamily="18" charset="0"/>
-              </a:defRPr>
-            </a:lvl9pPr>
-          </a:lstStyle>
-          <a:p>
-            <a:pPr>
-              <a:spcBef>
-                <a:spcPct val="0"/>
-              </a:spcBef>
-              <a:buFontTx/>
-              <a:buNone/>
-            </a:pPr>
-            <a:r>
-              <a:rPr lang="en-US" altLang="en-US" sz="2800">
-                <a:solidFill>
-                  <a:schemeClr val="accent2"/>
-                </a:solidFill>
-                <a:latin typeface="Tahoma" panose="020B0604030504040204" pitchFamily="34" charset="0"/>
-              </a:rPr>
-              <a:t>{ ( [ ] ) }</a:t>
-            </a:r>
-            <a:r>
-              <a:rPr lang="en-US" altLang="en-US" sz="2800">
-                <a:latin typeface="Tahoma" panose="020B0604030504040204" pitchFamily="34" charset="0"/>
-              </a:rPr>
-              <a:t>     is a valid expression</a:t>
-            </a:r>
-          </a:p>
-          <a:p>
-            <a:pPr>
-              <a:spcBef>
-                <a:spcPct val="0"/>
-              </a:spcBef>
-              <a:buFontTx/>
-              <a:buNone/>
-            </a:pPr>
-            <a:endParaRPr lang="en-US" altLang="en-US" sz="2800">
-              <a:latin typeface="Tahoma" panose="020B0604030504040204" pitchFamily="34" charset="0"/>
-            </a:endParaRPr>
-          </a:p>
-          <a:p>
-            <a:pPr>
-              <a:spcBef>
-                <a:spcPct val="0"/>
-              </a:spcBef>
-              <a:buFontTx/>
-              <a:buNone/>
-            </a:pPr>
-            <a:r>
-              <a:rPr lang="en-US" altLang="en-US" sz="2800">
-                <a:solidFill>
-                  <a:srgbClr val="CC0000"/>
-                </a:solidFill>
-                <a:latin typeface="Tahoma" panose="020B0604030504040204" pitchFamily="34" charset="0"/>
-              </a:rPr>
-              <a:t>{ ( } )</a:t>
-            </a:r>
-            <a:r>
-              <a:rPr lang="en-US" altLang="en-US" sz="2800">
-                <a:latin typeface="Tahoma" panose="020B0604030504040204" pitchFamily="34" charset="0"/>
-              </a:rPr>
-              <a:t>    is an invalid expression</a:t>
-            </a:r>
-          </a:p>
-          <a:p>
-            <a:pPr>
-              <a:spcBef>
-                <a:spcPct val="0"/>
-              </a:spcBef>
-              <a:buFontTx/>
-              <a:buNone/>
-            </a:pPr>
-            <a:endParaRPr lang="en-US" altLang="en-US" sz="2800">
-              <a:latin typeface="Tahoma" panose="020B0604030504040204" pitchFamily="34" charset="0"/>
-            </a:endParaRPr>
-          </a:p>
-          <a:p>
-            <a:pPr>
-              <a:spcBef>
-                <a:spcPct val="0"/>
-              </a:spcBef>
-              <a:buFontTx/>
-              <a:buNone/>
-            </a:pPr>
-            <a:r>
-              <a:rPr lang="en-US" altLang="en-US" sz="2800">
-                <a:solidFill>
-                  <a:srgbClr val="CC0000"/>
-                </a:solidFill>
-                <a:latin typeface="Tahoma" panose="020B0604030504040204" pitchFamily="34" charset="0"/>
-              </a:rPr>
-              <a:t>{ ( ] ) </a:t>
-            </a:r>
-            <a:r>
-              <a:rPr lang="en-US" altLang="en-US" sz="2800">
-                <a:latin typeface="Tahoma" panose="020B0604030504040204" pitchFamily="34" charset="0"/>
-              </a:rPr>
-              <a:t>    is an invalid expression</a:t>
-            </a:r>
-          </a:p>
-          <a:p>
-            <a:pPr>
-              <a:spcBef>
-                <a:spcPct val="0"/>
-              </a:spcBef>
-              <a:buFontTx/>
-              <a:buNone/>
-            </a:pPr>
-            <a:endParaRPr lang="en-US" altLang="en-US" sz="2800">
-              <a:latin typeface="Tahoma" panose="020B0604030504040204" pitchFamily="34" charset="0"/>
-            </a:endParaRPr>
-          </a:p>
-          <a:p>
-            <a:pPr>
-              <a:spcBef>
-                <a:spcPct val="0"/>
-              </a:spcBef>
-              <a:buFontTx/>
-              <a:buNone/>
-            </a:pPr>
-            <a:r>
-              <a:rPr lang="en-US" altLang="en-US" sz="2800">
-                <a:latin typeface="Tahoma" panose="020B0604030504040204" pitchFamily="34" charset="0"/>
-              </a:rPr>
-              <a:t>Open and closing symbol pairs</a:t>
-            </a:r>
-          </a:p>
-          <a:p>
-            <a:pPr>
-              <a:spcBef>
-                <a:spcPct val="0"/>
-              </a:spcBef>
-              <a:buFontTx/>
-              <a:buNone/>
-            </a:pPr>
-            <a:r>
-              <a:rPr lang="en-US" altLang="en-US" sz="2800">
-                <a:latin typeface="Tahoma" panose="020B0604030504040204" pitchFamily="34" charset="0"/>
-              </a:rPr>
-              <a:t>have to occur in the proper sequence.</a:t>
-            </a:r>
-          </a:p>
-          <a:p>
-            <a:pPr>
-              <a:spcBef>
-                <a:spcPct val="0"/>
-              </a:spcBef>
-              <a:buFontTx/>
-              <a:buNone/>
-            </a:pPr>
-            <a:endParaRPr lang="en-US" altLang="en-US" sz="2800">
-              <a:latin typeface="Tahoma" panose="020B0604030504040204" pitchFamily="34" charset="0"/>
-            </a:endParaRPr>
-          </a:p>
-        </p:txBody>
-      </p:sp>
-      <p:sp>
-        <p:nvSpPr>
-          <p:cNvPr id="6148" name="WordArt 3">
-            <a:extLst>
-              <a:ext uri="{FF2B5EF4-FFF2-40B4-BE49-F238E27FC236}">
-                <a16:creationId xmlns:a16="http://schemas.microsoft.com/office/drawing/2014/main" id="{67826DCD-3108-4F72-95EE-DB64F05D9D4F}"/>
-              </a:ext>
-            </a:extLst>
-          </p:cNvPr>
-          <p:cNvSpPr>
-            <a:spLocks noChangeArrowheads="1" noChangeShapeType="1" noTextEdit="1"/>
-          </p:cNvSpPr>
-          <p:nvPr/>
-        </p:nvSpPr>
-        <p:spPr bwMode="auto">
-          <a:xfrm>
-            <a:off x="1143000" y="457200"/>
-            <a:ext cx="6553200" cy="762000"/>
-          </a:xfrm>
-          <a:prstGeom prst="rect">
-            <a:avLst/>
-          </a:prstGeom>
-        </p:spPr>
-        <p:txBody>
-          <a:bodyPr wrap="none" fromWordArt="1">
-            <a:prstTxWarp prst="textPlain">
-              <a:avLst>
-                <a:gd name="adj" fmla="val 50000"/>
-              </a:avLst>
-            </a:prstTxWarp>
-          </a:bodyPr>
-          <a:lstStyle/>
-          <a:p>
-            <a:pPr algn="ctr"/>
-            <a:r>
-              <a:rPr lang="en-US" sz="3600" kern="10">
-                <a:ln w="9525">
-                  <a:solidFill>
-                    <a:srgbClr val="CCFFFF"/>
-                  </a:solidFill>
-                  <a:round/>
-                  <a:headEnd/>
-                  <a:tailEnd/>
-                </a:ln>
-                <a:solidFill>
-                  <a:srgbClr val="0000FF"/>
-                </a:solidFill>
-                <a:effectLst>
-                  <a:outerShdw dist="35921" dir="2700000" algn="ctr" rotWithShape="0">
-                    <a:srgbClr val="C0C0C0"/>
-                  </a:outerShdw>
-                </a:effectLst>
-                <a:latin typeface="Impact" panose="020B0806030902050204" pitchFamily="34" charset="0"/>
-              </a:rPr>
-              <a:t>Expression Tester</a:t>
-            </a:r>
-          </a:p>
-        </p:txBody>
-      </p:sp>
-    </p:spTree>
   </p:cSld>
   <p:clrMapOvr>
     <a:masterClrMapping/>

--- a/u06b_stacks/notes/13a.stacks.pptx
+++ b/u06b_stacks/notes/13a.stacks.pptx
@@ -7,10 +7,10 @@
     <p:sldMasterId id="2147483672" r:id="rId3"/>
   </p:sldMasterIdLst>
   <p:notesMasterIdLst>
-    <p:notesMasterId r:id="rId29"/>
+    <p:notesMasterId r:id="rId31"/>
   </p:notesMasterIdLst>
   <p:handoutMasterIdLst>
-    <p:handoutMasterId r:id="rId30"/>
+    <p:handoutMasterId r:id="rId32"/>
   </p:handoutMasterIdLst>
   <p:sldIdLst>
     <p:sldId id="364" r:id="rId4"/>
@@ -24,7 +24,7 @@
     <p:sldId id="370" r:id="rId12"/>
     <p:sldId id="371" r:id="rId13"/>
     <p:sldId id="372" r:id="rId14"/>
-    <p:sldId id="415" r:id="rId15"/>
+    <p:sldId id="410" r:id="rId15"/>
     <p:sldId id="373" r:id="rId16"/>
     <p:sldId id="374" r:id="rId17"/>
     <p:sldId id="376" r:id="rId18"/>
@@ -33,11 +33,13 @@
     <p:sldId id="381" r:id="rId21"/>
     <p:sldId id="382" r:id="rId22"/>
     <p:sldId id="383" r:id="rId23"/>
-    <p:sldId id="281" r:id="rId24"/>
-    <p:sldId id="384" r:id="rId25"/>
-    <p:sldId id="410" r:id="rId26"/>
-    <p:sldId id="412" r:id="rId27"/>
-    <p:sldId id="411" r:id="rId28"/>
+    <p:sldId id="417" r:id="rId24"/>
+    <p:sldId id="416" r:id="rId25"/>
+    <p:sldId id="281" r:id="rId26"/>
+    <p:sldId id="384" r:id="rId27"/>
+    <p:sldId id="415" r:id="rId28"/>
+    <p:sldId id="412" r:id="rId29"/>
+    <p:sldId id="411" r:id="rId30"/>
   </p:sldIdLst>
   <p:sldSz cx="9144000" cy="6858000" type="screen4x3"/>
   <p:notesSz cx="6858000" cy="9144000"/>
@@ -1394,6 +1396,124 @@
 </p:notes>
 </file>
 
+<file path=ppt/notesSlides/notesSlide2.xml><?xml version="1.0" encoding="utf-8"?>
+<p:notes xmlns:a="http://schemas.openxmlformats.org/drawingml/2006/main" xmlns:r="http://schemas.openxmlformats.org/officeDocument/2006/relationships" xmlns:p="http://schemas.openxmlformats.org/presentationml/2006/main">
+  <p:cSld>
+    <p:spTree>
+      <p:nvGrpSpPr>
+        <p:cNvPr id="1" name=""/>
+        <p:cNvGrpSpPr/>
+        <p:nvPr/>
+      </p:nvGrpSpPr>
+      <p:grpSpPr>
+        <a:xfrm>
+          <a:off x="0" y="0"/>
+          <a:ext cx="0" cy="0"/>
+          <a:chOff x="0" y="0"/>
+          <a:chExt cx="0" cy="0"/>
+        </a:xfrm>
+      </p:grpSpPr>
+      <p:sp>
+        <p:nvSpPr>
+          <p:cNvPr id="2" name="Slide Image Placeholder 1"/>
+          <p:cNvSpPr>
+            <a:spLocks noGrp="1" noRot="1" noChangeAspect="1"/>
+          </p:cNvSpPr>
+          <p:nvPr>
+            <p:ph type="sldImg"/>
+          </p:nvPr>
+        </p:nvSpPr>
+        <p:spPr/>
+      </p:sp>
+      <p:sp>
+        <p:nvSpPr>
+          <p:cNvPr id="3" name="Notes Placeholder 2"/>
+          <p:cNvSpPr>
+            <a:spLocks noGrp="1"/>
+          </p:cNvSpPr>
+          <p:nvPr>
+            <p:ph type="body" idx="1"/>
+          </p:nvPr>
+        </p:nvSpPr>
+        <p:spPr/>
+        <p:txBody>
+          <a:bodyPr/>
+          <a:lstStyle/>
+          <a:p>
+            <a:pPr algn="l">
+              <a:spcAft>
+                <a:spcPts val="750"/>
+              </a:spcAft>
+              <a:buNone/>
+            </a:pPr>
+            <a:r>
+              <a:rPr lang="en-US" b="0" i="0" dirty="0">
+                <a:solidFill>
+                  <a:srgbClr val="0A0A0A"/>
+                </a:solidFill>
+                <a:effectLst/>
+                <a:latin typeface="Google Sans"/>
+              </a:rPr>
+              <a:t>First-In, First-Out (FIFO) means that the first item added to the queue is the first one to be processed or removed.</a:t>
+            </a:r>
+          </a:p>
+          <a:p>
+            <a:pPr>
+              <a:buNone/>
+            </a:pPr>
+            <a:br>
+              <a:rPr lang="en-US" b="0" i="0" dirty="0">
+                <a:solidFill>
+                  <a:srgbClr val="0A0A0A"/>
+                </a:solidFill>
+                <a:effectLst/>
+                <a:latin typeface="Google Sans"/>
+              </a:rPr>
+            </a:br>
+            <a:endParaRPr lang="en-US" dirty="0"/>
+          </a:p>
+          <a:p>
+            <a:endParaRPr lang="en-US" dirty="0"/>
+          </a:p>
+        </p:txBody>
+      </p:sp>
+      <p:sp>
+        <p:nvSpPr>
+          <p:cNvPr id="4" name="Slide Number Placeholder 3"/>
+          <p:cNvSpPr>
+            <a:spLocks noGrp="1"/>
+          </p:cNvSpPr>
+          <p:nvPr>
+            <p:ph type="sldNum" sz="quarter" idx="5"/>
+          </p:nvPr>
+        </p:nvSpPr>
+        <p:spPr/>
+        <p:txBody>
+          <a:bodyPr/>
+          <a:lstStyle/>
+          <a:p>
+            <a:fld id="{F5888543-F783-4CDD-8E9B-E513FF49708B}" type="slidenum">
+              <a:rPr lang="en-US" altLang="en-US" smtClean="0"/>
+              <a:pPr/>
+              <a:t>21</a:t>
+            </a:fld>
+            <a:endParaRPr lang="en-US" altLang="en-US"/>
+          </a:p>
+        </p:txBody>
+      </p:sp>
+    </p:spTree>
+    <p:extLst>
+      <p:ext uri="{BB962C8B-B14F-4D97-AF65-F5344CB8AC3E}">
+        <p14:creationId xmlns:p14="http://schemas.microsoft.com/office/powerpoint/2010/main" val="3807634034"/>
+      </p:ext>
+    </p:extLst>
+  </p:cSld>
+  <p:clrMapOvr>
+    <a:masterClrMapping/>
+  </p:clrMapOvr>
+</p:notes>
+</file>
+
 <file path=ppt/slideLayouts/slideLayout1.xml><?xml version="1.0" encoding="utf-8"?>
 <p:sldLayout xmlns:a="http://schemas.openxmlformats.org/drawingml/2006/main" xmlns:r="http://schemas.openxmlformats.org/officeDocument/2006/relationships" xmlns:p="http://schemas.openxmlformats.org/presentationml/2006/main" type="title" preserve="1">
   <p:cSld name="Title Slide">
@@ -2482,7 +2602,7 @@
             <a:fld id="{225BB752-5555-4AC8-BA7D-9ABEF2F1A86D}" type="datetime1">
               <a:rPr lang="en-US" altLang="en-US"/>
               <a:pPr/>
-              <a:t>12/3/2024</a:t>
+              <a:t>11/14/2025</a:t>
             </a:fld>
             <a:endParaRPr lang="en-US" altLang="en-US"/>
           </a:p>
@@ -2700,7 +2820,7 @@
             <a:fld id="{E4C22075-2258-4585-98EC-37BA22CBDB83}" type="datetime1">
               <a:rPr lang="en-US" altLang="en-US"/>
               <a:pPr/>
-              <a:t>12/3/2024</a:t>
+              <a:t>11/14/2025</a:t>
             </a:fld>
             <a:endParaRPr lang="en-US" altLang="en-US"/>
           </a:p>
@@ -3062,7 +3182,7 @@
             <a:fld id="{A6C78630-5898-462C-9F38-9943EA89C0F4}" type="datetime1">
               <a:rPr lang="en-US" altLang="en-US"/>
               <a:pPr/>
-              <a:t>12/3/2024</a:t>
+              <a:t>11/14/2025</a:t>
             </a:fld>
             <a:endParaRPr lang="en-US" altLang="en-US"/>
           </a:p>
@@ -3341,7 +3461,7 @@
             <a:fld id="{548B10E0-20E2-4A73-AD26-43D19F632903}" type="datetime1">
               <a:rPr lang="en-US" altLang="en-US"/>
               <a:pPr/>
-              <a:t>12/3/2024</a:t>
+              <a:t>11/14/2025</a:t>
             </a:fld>
             <a:endParaRPr lang="en-US" altLang="en-US"/>
           </a:p>
@@ -3730,7 +3850,7 @@
             <a:fld id="{E0348925-512E-4F86-99F8-4C8D2038E18A}" type="datetime1">
               <a:rPr lang="en-US" altLang="en-US"/>
               <a:pPr/>
-              <a:t>12/3/2024</a:t>
+              <a:t>11/14/2025</a:t>
             </a:fld>
             <a:endParaRPr lang="en-US" altLang="en-US"/>
           </a:p>
@@ -3945,7 +4065,7 @@
             <a:fld id="{25A9A943-7773-40E8-A1E6-ED78BE098ED0}" type="datetime1">
               <a:rPr lang="en-US" altLang="en-US"/>
               <a:pPr/>
-              <a:t>12/3/2024</a:t>
+              <a:t>11/14/2025</a:t>
             </a:fld>
             <a:endParaRPr lang="en-US" altLang="en-US"/>
           </a:p>
@@ -4182,7 +4302,7 @@
             <a:fld id="{1DD5B239-EE7A-4CD8-ABC8-32776AFF009C}" type="datetime1">
               <a:rPr lang="en-US" altLang="en-US"/>
               <a:pPr/>
-              <a:t>12/3/2024</a:t>
+              <a:t>11/14/2025</a:t>
             </a:fld>
             <a:endParaRPr lang="en-US" altLang="en-US"/>
           </a:p>
@@ -4624,7 +4744,7 @@
             <a:fld id="{5B1E4A41-1FBE-40CB-85A4-BA19BC8FE08F}" type="datetime1">
               <a:rPr lang="en-US" altLang="en-US"/>
               <a:pPr/>
-              <a:t>12/3/2024</a:t>
+              <a:t>11/14/2025</a:t>
             </a:fld>
             <a:endParaRPr lang="en-US" altLang="en-US"/>
           </a:p>
@@ -5290,7 +5410,7 @@
             <a:fld id="{9EE02DED-B932-4856-9769-596211D30DF0}" type="datetime1">
               <a:rPr lang="en-US" altLang="en-US"/>
               <a:pPr/>
-              <a:t>12/3/2024</a:t>
+              <a:t>11/14/2025</a:t>
             </a:fld>
             <a:endParaRPr lang="en-US" altLang="en-US"/>
           </a:p>
@@ -5493,7 +5613,7 @@
             <a:fld id="{2A32BF1C-0FE7-4422-9E48-F96339057159}" type="datetime1">
               <a:rPr lang="en-US" altLang="en-US"/>
               <a:pPr/>
-              <a:t>12/3/2024</a:t>
+              <a:t>11/14/2025</a:t>
             </a:fld>
             <a:endParaRPr lang="en-US" altLang="en-US"/>
           </a:p>
@@ -5862,7 +5982,7 @@
             <a:fld id="{78456794-3851-46AA-823E-9C214C3546C7}" type="datetime1">
               <a:rPr lang="en-US" altLang="en-US"/>
               <a:pPr/>
-              <a:t>12/3/2024</a:t>
+              <a:t>11/14/2025</a:t>
             </a:fld>
             <a:endParaRPr lang="en-US" altLang="en-US"/>
           </a:p>
@@ -6311,7 +6431,7 @@
             <a:fld id="{3FCB5B12-A290-40A6-8ACE-0E4117A284D2}" type="datetime1">
               <a:rPr lang="en-US" altLang="en-US"/>
               <a:pPr/>
-              <a:t>12/3/2024</a:t>
+              <a:t>11/14/2025</a:t>
             </a:fld>
             <a:endParaRPr lang="en-US" altLang="en-US"/>
           </a:p>
@@ -6529,7 +6649,7 @@
             <a:fld id="{CD1C30FB-A307-4C9B-81A1-AE7358D96550}" type="datetime1">
               <a:rPr lang="en-US" altLang="en-US"/>
               <a:pPr/>
-              <a:t>12/3/2024</a:t>
+              <a:t>11/14/2025</a:t>
             </a:fld>
             <a:endParaRPr lang="en-US" altLang="en-US"/>
           </a:p>
@@ -6891,7 +7011,7 @@
             <a:fld id="{0E963D90-3888-40A3-826E-D7E9A6DB150F}" type="datetime1">
               <a:rPr lang="en-US" altLang="en-US"/>
               <a:pPr/>
-              <a:t>12/3/2024</a:t>
+              <a:t>11/14/2025</a:t>
             </a:fld>
             <a:endParaRPr lang="en-US" altLang="en-US"/>
           </a:p>
@@ -7170,7 +7290,7 @@
             <a:fld id="{DB683801-14FA-4781-B9E6-DC002CBF9FDE}" type="datetime1">
               <a:rPr lang="en-US" altLang="en-US"/>
               <a:pPr/>
-              <a:t>12/3/2024</a:t>
+              <a:t>11/14/2025</a:t>
             </a:fld>
             <a:endParaRPr lang="en-US" altLang="en-US"/>
           </a:p>
@@ -7559,7 +7679,7 @@
             <a:fld id="{63EBA726-AD99-490C-B6FA-0784DC830068}" type="datetime1">
               <a:rPr lang="en-US" altLang="en-US"/>
               <a:pPr/>
-              <a:t>12/3/2024</a:t>
+              <a:t>11/14/2025</a:t>
             </a:fld>
             <a:endParaRPr lang="en-US" altLang="en-US"/>
           </a:p>
@@ -7774,7 +7894,7 @@
             <a:fld id="{8FA937ED-B143-4E69-8ECF-67B95BDFD094}" type="datetime1">
               <a:rPr lang="en-US" altLang="en-US"/>
               <a:pPr/>
-              <a:t>12/3/2024</a:t>
+              <a:t>11/14/2025</a:t>
             </a:fld>
             <a:endParaRPr lang="en-US" altLang="en-US"/>
           </a:p>
@@ -8011,7 +8131,7 @@
             <a:fld id="{61A83335-62F1-4DA7-BD65-974C2D46797F}" type="datetime1">
               <a:rPr lang="en-US" altLang="en-US"/>
               <a:pPr/>
-              <a:t>12/3/2024</a:t>
+              <a:t>11/14/2025</a:t>
             </a:fld>
             <a:endParaRPr lang="en-US" altLang="en-US"/>
           </a:p>
@@ -8708,7 +8828,7 @@
             <a:fld id="{BBE22620-5986-42B9-AD18-3101735E763A}" type="datetime1">
               <a:rPr lang="en-US" altLang="en-US"/>
               <a:pPr/>
-              <a:t>12/3/2024</a:t>
+              <a:t>11/14/2025</a:t>
             </a:fld>
             <a:endParaRPr lang="en-US" altLang="en-US"/>
           </a:p>
@@ -9142,7 +9262,7 @@
             <a:fld id="{604ACA17-E9A8-4A71-B388-1AA6FF20C7DF}" type="datetime1">
               <a:rPr lang="en-US" altLang="en-US"/>
               <a:pPr/>
-              <a:t>12/3/2024</a:t>
+              <a:t>11/14/2025</a:t>
             </a:fld>
             <a:endParaRPr lang="en-US" altLang="en-US"/>
           </a:p>
@@ -9345,7 +9465,7 @@
             <a:fld id="{FC9C1F0F-2EFB-4411-B2B7-ADDCCA4D12BB}" type="datetime1">
               <a:rPr lang="en-US" altLang="en-US"/>
               <a:pPr/>
-              <a:t>12/3/2024</a:t>
+              <a:t>11/14/2025</a:t>
             </a:fld>
             <a:endParaRPr lang="en-US" altLang="en-US"/>
           </a:p>
@@ -9714,7 +9834,7 @@
             <a:fld id="{1C6CA457-D711-4BA7-BBEC-5C9F2F21C631}" type="datetime1">
               <a:rPr lang="en-US" altLang="en-US"/>
               <a:pPr/>
-              <a:t>12/3/2024</a:t>
+              <a:t>11/14/2025</a:t>
             </a:fld>
             <a:endParaRPr lang="en-US" altLang="en-US"/>
           </a:p>
@@ -12710,7 +12830,7 @@
             <a:fld id="{F127FCB8-9F60-4B67-A623-90F2131FC5AC}" type="datetime1">
               <a:rPr lang="en-US" altLang="en-US"/>
               <a:pPr/>
-              <a:t>12/3/2024</a:t>
+              <a:t>11/14/2025</a:t>
             </a:fld>
             <a:endParaRPr lang="en-US" altLang="en-US"/>
           </a:p>
@@ -13653,7 +13773,7 @@
             <a:fld id="{674B90B2-BBF1-4057-AA9D-DE265354F4DF}" type="datetime1">
               <a:rPr lang="en-US" altLang="en-US"/>
               <a:pPr/>
-              <a:t>12/3/2024</a:t>
+              <a:t>11/14/2025</a:t>
             </a:fld>
             <a:endParaRPr lang="en-US" altLang="en-US"/>
           </a:p>
@@ -16447,7 +16567,7 @@
     </p:spTree>
     <p:extLst>
       <p:ext uri="{BB962C8B-B14F-4D97-AF65-F5344CB8AC3E}">
-        <p14:creationId xmlns:p14="http://schemas.microsoft.com/office/powerpoint/2010/main" val="1316991132"/>
+        <p14:creationId xmlns:p14="http://schemas.microsoft.com/office/powerpoint/2010/main" val="2170331600"/>
       </p:ext>
     </p:extLst>
   </p:cSld>
@@ -19901,24 +20021,36 @@
             </a:pPr>
             <a:r>
               <a:rPr lang="en-US" altLang="en-US" sz="2800" dirty="0" err="1">
+                <a:solidFill>
+                  <a:srgbClr val="0066FF"/>
+                </a:solidFill>
                 <a:latin typeface="Tahoma" panose="020B0604030504040204" pitchFamily="34" charset="0"/>
               </a:rPr>
               <a:t>out.println</a:t>
             </a:r>
             <a:r>
               <a:rPr lang="en-US" altLang="en-US" sz="2800" dirty="0">
+                <a:solidFill>
+                  <a:srgbClr val="0066FF"/>
+                </a:solidFill>
                 <a:latin typeface="Tahoma" panose="020B0604030504040204" pitchFamily="34" charset="0"/>
               </a:rPr>
               <a:t>(</a:t>
             </a:r>
             <a:r>
               <a:rPr lang="en-US" altLang="en-US" sz="2800" dirty="0" err="1">
+                <a:solidFill>
+                  <a:srgbClr val="0066FF"/>
+                </a:solidFill>
                 <a:latin typeface="Tahoma" panose="020B0604030504040204" pitchFamily="34" charset="0"/>
               </a:rPr>
               <a:t>s.pop</a:t>
             </a:r>
             <a:r>
               <a:rPr lang="en-US" altLang="en-US" sz="2800" dirty="0">
+                <a:solidFill>
+                  <a:srgbClr val="0066FF"/>
+                </a:solidFill>
                 <a:latin typeface="Tahoma" panose="020B0604030504040204" pitchFamily="34" charset="0"/>
               </a:rPr>
               <a:t>());</a:t>
@@ -19955,24 +20087,36 @@
             </a:pPr>
             <a:r>
               <a:rPr lang="en-US" altLang="en-US" sz="2800" dirty="0" err="1">
+                <a:solidFill>
+                  <a:srgbClr val="0066FF"/>
+                </a:solidFill>
                 <a:latin typeface="Tahoma" panose="020B0604030504040204" pitchFamily="34" charset="0"/>
               </a:rPr>
               <a:t>out.println</a:t>
             </a:r>
             <a:r>
               <a:rPr lang="en-US" altLang="en-US" sz="2800" dirty="0">
+                <a:solidFill>
+                  <a:srgbClr val="0066FF"/>
+                </a:solidFill>
                 <a:latin typeface="Tahoma" panose="020B0604030504040204" pitchFamily="34" charset="0"/>
               </a:rPr>
               <a:t>(</a:t>
             </a:r>
             <a:r>
               <a:rPr lang="en-US" altLang="en-US" sz="2800" dirty="0" err="1">
+                <a:solidFill>
+                  <a:srgbClr val="0066FF"/>
+                </a:solidFill>
                 <a:latin typeface="Tahoma" panose="020B0604030504040204" pitchFamily="34" charset="0"/>
               </a:rPr>
               <a:t>s.pop</a:t>
             </a:r>
             <a:r>
               <a:rPr lang="en-US" altLang="en-US" sz="2800" dirty="0">
+                <a:solidFill>
+                  <a:srgbClr val="0066FF"/>
+                </a:solidFill>
                 <a:latin typeface="Tahoma" panose="020B0604030504040204" pitchFamily="34" charset="0"/>
               </a:rPr>
               <a:t>());</a:t>
@@ -20290,6 +20434,9 @@
             </a:pPr>
             <a:r>
               <a:rPr lang="en-US" altLang="en-US" dirty="0">
+                <a:solidFill>
+                  <a:srgbClr val="0066FF"/>
+                </a:solidFill>
                 <a:latin typeface="Tahoma" panose="020B0604030504040204" pitchFamily="34" charset="0"/>
               </a:rPr>
               <a:t>11</a:t>
@@ -20320,6 +20467,9 @@
             </a:pPr>
             <a:r>
               <a:rPr lang="en-US" altLang="en-US" dirty="0">
+                <a:solidFill>
+                  <a:srgbClr val="0066FF"/>
+                </a:solidFill>
                 <a:latin typeface="Tahoma" panose="020B0604030504040204" pitchFamily="34" charset="0"/>
               </a:rPr>
               <a:t>23</a:t>
@@ -21153,24 +21303,36 @@
             </a:pPr>
             <a:r>
               <a:rPr lang="en-US" altLang="en-US" sz="2800" dirty="0" err="1">
+                <a:solidFill>
+                  <a:srgbClr val="0066FF"/>
+                </a:solidFill>
                 <a:latin typeface="Tahoma" panose="020B0604030504040204" pitchFamily="34" charset="0"/>
               </a:rPr>
               <a:t>out.println</a:t>
             </a:r>
             <a:r>
               <a:rPr lang="en-US" altLang="en-US" sz="2800" dirty="0">
+                <a:solidFill>
+                  <a:srgbClr val="0066FF"/>
+                </a:solidFill>
                 <a:latin typeface="Tahoma" panose="020B0604030504040204" pitchFamily="34" charset="0"/>
               </a:rPr>
               <a:t>(</a:t>
             </a:r>
             <a:r>
               <a:rPr lang="en-US" altLang="en-US" sz="2800" dirty="0" err="1">
+                <a:solidFill>
+                  <a:srgbClr val="0066FF"/>
+                </a:solidFill>
                 <a:latin typeface="Tahoma" panose="020B0604030504040204" pitchFamily="34" charset="0"/>
               </a:rPr>
               <a:t>s.peek</a:t>
             </a:r>
             <a:r>
               <a:rPr lang="en-US" altLang="en-US" sz="2800" dirty="0">
+                <a:solidFill>
+                  <a:srgbClr val="0066FF"/>
+                </a:solidFill>
                 <a:latin typeface="Tahoma" panose="020B0604030504040204" pitchFamily="34" charset="0"/>
               </a:rPr>
               <a:t>());</a:t>
@@ -21512,6 +21674,9 @@
             </a:pPr>
             <a:r>
               <a:rPr lang="en-US" altLang="en-US" dirty="0">
+                <a:solidFill>
+                  <a:srgbClr val="0066FF"/>
+                </a:solidFill>
                 <a:latin typeface="Tahoma" panose="020B0604030504040204" pitchFamily="34" charset="0"/>
               </a:rPr>
               <a:t>11</a:t>
@@ -22550,10 +22715,681 @@
       </p:sp>
       <p:sp>
         <p:nvSpPr>
+          <p:cNvPr id="2" name="Rectangle 1">
+            <a:extLst>
+              <a:ext uri="{FF2B5EF4-FFF2-40B4-BE49-F238E27FC236}">
+                <a16:creationId xmlns:a16="http://schemas.microsoft.com/office/drawing/2014/main" id="{5F9A5E7C-14B0-25A2-7073-DEE0295313FE}"/>
+              </a:ext>
+            </a:extLst>
+          </p:cNvPr>
+          <p:cNvSpPr/>
+          <p:nvPr/>
+        </p:nvSpPr>
+        <p:spPr>
+          <a:xfrm>
+            <a:off x="505822" y="1266141"/>
+            <a:ext cx="8132355" cy="2932213"/>
+          </a:xfrm>
+          <a:prstGeom prst="rect">
+            <a:avLst/>
+          </a:prstGeom>
+          <a:noFill/>
+        </p:spPr>
+        <p:txBody>
+          <a:bodyPr wrap="none" lIns="91440" tIns="45720" rIns="91440" bIns="45720">
+            <a:spAutoFit/>
+          </a:bodyPr>
+          <a:lstStyle/>
+          <a:p>
+            <a:pPr algn="ctr">
+              <a:lnSpc>
+                <a:spcPct val="150000"/>
+              </a:lnSpc>
+            </a:pPr>
+            <a:r>
+              <a:rPr lang="en-US" sz="6600" b="1" strike="sngStrike" cap="none" spc="0" dirty="0">
+                <a:ln w="9525">
+                  <a:solidFill>
+                    <a:schemeClr val="bg1"/>
+                  </a:solidFill>
+                  <a:prstDash val="solid"/>
+                </a:ln>
+                <a:solidFill>
+                  <a:schemeClr val="tx1"/>
+                </a:solidFill>
+                <a:effectLst>
+                  <a:outerShdw blurRad="12700" dist="38100" dir="2700000" algn="tl" rotWithShape="0">
+                    <a:schemeClr val="bg1">
+                      <a:lumMod val="50000"/>
+                    </a:schemeClr>
+                  </a:outerShdw>
+                </a:effectLst>
+              </a:rPr>
+              <a:t>Looping thru a</a:t>
+            </a:r>
+          </a:p>
+          <a:p>
+            <a:pPr algn="ctr">
+              <a:lnSpc>
+                <a:spcPct val="150000"/>
+              </a:lnSpc>
+            </a:pPr>
+            <a:r>
+              <a:rPr lang="en-US" sz="6600" b="1" cap="none" spc="0" dirty="0">
+                <a:ln w="9525">
+                  <a:solidFill>
+                    <a:schemeClr val="bg1"/>
+                  </a:solidFill>
+                  <a:prstDash val="solid"/>
+                </a:ln>
+                <a:solidFill>
+                  <a:schemeClr val="tx1"/>
+                </a:solidFill>
+                <a:effectLst>
+                  <a:outerShdw blurRad="12700" dist="38100" dir="2700000" algn="tl" rotWithShape="0">
+                    <a:schemeClr val="bg1">
+                      <a:lumMod val="50000"/>
+                    </a:schemeClr>
+                  </a:outerShdw>
+                </a:effectLst>
+              </a:rPr>
+              <a:t>Processing a Stack</a:t>
+            </a:r>
+          </a:p>
+        </p:txBody>
+      </p:sp>
+    </p:spTree>
+  </p:cSld>
+  <p:clrMapOvr>
+    <a:masterClrMapping/>
+  </p:clrMapOvr>
+</p:sld>
+</file>
+
+<file path=ppt/slides/slide21.xml><?xml version="1.0" encoding="utf-8"?>
+<p:sld xmlns:a="http://schemas.openxmlformats.org/drawingml/2006/main" xmlns:r="http://schemas.openxmlformats.org/officeDocument/2006/relationships" xmlns:p="http://schemas.openxmlformats.org/presentationml/2006/main">
+  <p:cSld>
+    <p:spTree>
+      <p:nvGrpSpPr>
+        <p:cNvPr id="1" name="">
+          <a:extLst>
+            <a:ext uri="{FF2B5EF4-FFF2-40B4-BE49-F238E27FC236}">
+              <a16:creationId xmlns:a16="http://schemas.microsoft.com/office/drawing/2014/main" id="{B51C60E1-FD80-4F46-DDF1-2AC1C28F6CC1}"/>
+            </a:ext>
+          </a:extLst>
+        </p:cNvPr>
+        <p:cNvGrpSpPr/>
+        <p:nvPr/>
+      </p:nvGrpSpPr>
+      <p:grpSpPr>
+        <a:xfrm>
+          <a:off x="0" y="0"/>
+          <a:ext cx="0" cy="0"/>
+          <a:chOff x="0" y="0"/>
+          <a:chExt cx="0" cy="0"/>
+        </a:xfrm>
+      </p:grpSpPr>
+      <p:sp>
+        <p:nvSpPr>
+          <p:cNvPr id="24578" name="Footer Placeholder 3">
+            <a:extLst>
+              <a:ext uri="{FF2B5EF4-FFF2-40B4-BE49-F238E27FC236}">
+                <a16:creationId xmlns:a16="http://schemas.microsoft.com/office/drawing/2014/main" id="{1B40368C-580F-E814-3AAA-240211F9C66F}"/>
+              </a:ext>
+            </a:extLst>
+          </p:cNvPr>
+          <p:cNvSpPr>
+            <a:spLocks noGrp="1"/>
+          </p:cNvSpPr>
+          <p:nvPr>
+            <p:ph type="ftr" sz="quarter" idx="12"/>
+          </p:nvPr>
+        </p:nvSpPr>
+        <p:spPr>
+          <a:noFill/>
+        </p:spPr>
+        <p:txBody>
+          <a:bodyPr/>
+          <a:lstStyle>
+            <a:lvl1pPr>
+              <a:spcBef>
+                <a:spcPct val="20000"/>
+              </a:spcBef>
+              <a:buChar char="•"/>
+              <a:defRPr sz="3200">
+                <a:solidFill>
+                  <a:schemeClr val="tx1"/>
+                </a:solidFill>
+                <a:latin typeface="Times New Roman" panose="02020603050405020304" pitchFamily="18" charset="0"/>
+              </a:defRPr>
+            </a:lvl1pPr>
+            <a:lvl2pPr marL="742950" indent="-285750">
+              <a:spcBef>
+                <a:spcPct val="20000"/>
+              </a:spcBef>
+              <a:buChar char="–"/>
+              <a:defRPr sz="2800">
+                <a:solidFill>
+                  <a:schemeClr val="tx1"/>
+                </a:solidFill>
+                <a:latin typeface="Times New Roman" panose="02020603050405020304" pitchFamily="18" charset="0"/>
+              </a:defRPr>
+            </a:lvl2pPr>
+            <a:lvl3pPr marL="1143000" indent="-228600">
+              <a:spcBef>
+                <a:spcPct val="20000"/>
+              </a:spcBef>
+              <a:buChar char="•"/>
+              <a:defRPr sz="2400">
+                <a:solidFill>
+                  <a:schemeClr val="tx1"/>
+                </a:solidFill>
+                <a:latin typeface="Times New Roman" panose="02020603050405020304" pitchFamily="18" charset="0"/>
+              </a:defRPr>
+            </a:lvl3pPr>
+            <a:lvl4pPr marL="1600200" indent="-228600">
+              <a:spcBef>
+                <a:spcPct val="20000"/>
+              </a:spcBef>
+              <a:buChar char="–"/>
+              <a:defRPr sz="2000">
+                <a:solidFill>
+                  <a:schemeClr val="tx1"/>
+                </a:solidFill>
+                <a:latin typeface="Times New Roman" panose="02020603050405020304" pitchFamily="18" charset="0"/>
+              </a:defRPr>
+            </a:lvl4pPr>
+            <a:lvl5pPr marL="2057400" indent="-228600">
+              <a:spcBef>
+                <a:spcPct val="20000"/>
+              </a:spcBef>
+              <a:buChar char="»"/>
+              <a:defRPr sz="2000">
+                <a:solidFill>
+                  <a:schemeClr val="tx1"/>
+                </a:solidFill>
+                <a:latin typeface="Times New Roman" panose="02020603050405020304" pitchFamily="18" charset="0"/>
+              </a:defRPr>
+            </a:lvl5pPr>
+            <a:lvl6pPr marL="2514600" indent="-228600" eaLnBrk="0" fontAlgn="base" hangingPunct="0">
+              <a:spcBef>
+                <a:spcPct val="20000"/>
+              </a:spcBef>
+              <a:spcAft>
+                <a:spcPct val="0"/>
+              </a:spcAft>
+              <a:buChar char="»"/>
+              <a:defRPr sz="2000">
+                <a:solidFill>
+                  <a:schemeClr val="tx1"/>
+                </a:solidFill>
+                <a:latin typeface="Times New Roman" panose="02020603050405020304" pitchFamily="18" charset="0"/>
+              </a:defRPr>
+            </a:lvl6pPr>
+            <a:lvl7pPr marL="2971800" indent="-228600" eaLnBrk="0" fontAlgn="base" hangingPunct="0">
+              <a:spcBef>
+                <a:spcPct val="20000"/>
+              </a:spcBef>
+              <a:spcAft>
+                <a:spcPct val="0"/>
+              </a:spcAft>
+              <a:buChar char="»"/>
+              <a:defRPr sz="2000">
+                <a:solidFill>
+                  <a:schemeClr val="tx1"/>
+                </a:solidFill>
+                <a:latin typeface="Times New Roman" panose="02020603050405020304" pitchFamily="18" charset="0"/>
+              </a:defRPr>
+            </a:lvl7pPr>
+            <a:lvl8pPr marL="3429000" indent="-228600" eaLnBrk="0" fontAlgn="base" hangingPunct="0">
+              <a:spcBef>
+                <a:spcPct val="20000"/>
+              </a:spcBef>
+              <a:spcAft>
+                <a:spcPct val="0"/>
+              </a:spcAft>
+              <a:buChar char="»"/>
+              <a:defRPr sz="2000">
+                <a:solidFill>
+                  <a:schemeClr val="tx1"/>
+                </a:solidFill>
+                <a:latin typeface="Times New Roman" panose="02020603050405020304" pitchFamily="18" charset="0"/>
+              </a:defRPr>
+            </a:lvl8pPr>
+            <a:lvl9pPr marL="3886200" indent="-228600" eaLnBrk="0" fontAlgn="base" hangingPunct="0">
+              <a:spcBef>
+                <a:spcPct val="20000"/>
+              </a:spcBef>
+              <a:spcAft>
+                <a:spcPct val="0"/>
+              </a:spcAft>
+              <a:buChar char="»"/>
+              <a:defRPr sz="2000">
+                <a:solidFill>
+                  <a:schemeClr val="tx1"/>
+                </a:solidFill>
+                <a:latin typeface="Times New Roman" panose="02020603050405020304" pitchFamily="18" charset="0"/>
+              </a:defRPr>
+            </a:lvl9pPr>
+          </a:lstStyle>
+          <a:p>
+            <a:pPr>
+              <a:spcBef>
+                <a:spcPct val="0"/>
+              </a:spcBef>
+              <a:buFontTx/>
+              <a:buNone/>
+            </a:pPr>
+            <a:endParaRPr lang="en-US" altLang="en-US" sz="800"/>
+          </a:p>
+          <a:p>
+            <a:pPr>
+              <a:spcBef>
+                <a:spcPct val="0"/>
+              </a:spcBef>
+              <a:buFontTx/>
+              <a:buNone/>
+            </a:pPr>
+            <a:endParaRPr lang="en-US" altLang="en-US" sz="800" b="0">
+              <a:latin typeface="Tahoma" panose="020B0604030504040204" pitchFamily="34" charset="0"/>
+            </a:endParaRPr>
+          </a:p>
+          <a:p>
+            <a:pPr>
+              <a:spcBef>
+                <a:spcPct val="0"/>
+              </a:spcBef>
+              <a:buFontTx/>
+              <a:buNone/>
+            </a:pPr>
+            <a:endParaRPr lang="en-US" altLang="en-US" sz="800">
+              <a:latin typeface="Tahoma" panose="020B0604030504040204" pitchFamily="34" charset="0"/>
+            </a:endParaRPr>
+          </a:p>
+          <a:p>
+            <a:pPr>
+              <a:spcBef>
+                <a:spcPct val="0"/>
+              </a:spcBef>
+              <a:buFontTx/>
+              <a:buNone/>
+            </a:pPr>
+            <a:r>
+              <a:rPr lang="en-US" altLang="en-US" sz="800">
+                <a:latin typeface="Tahoma" panose="020B0604030504040204" pitchFamily="34" charset="0"/>
+              </a:rPr>
+              <a:t>© A+ Computer Science  -  www.apluscompsci.com</a:t>
+            </a:r>
+          </a:p>
+        </p:txBody>
+      </p:sp>
+      <p:sp>
+        <p:nvSpPr>
+          <p:cNvPr id="2" name="Rectangle 1">
+            <a:extLst>
+              <a:ext uri="{FF2B5EF4-FFF2-40B4-BE49-F238E27FC236}">
+                <a16:creationId xmlns:a16="http://schemas.microsoft.com/office/drawing/2014/main" id="{0CB992CA-9CBA-DE39-B069-024ACF56F401}"/>
+              </a:ext>
+            </a:extLst>
+          </p:cNvPr>
+          <p:cNvSpPr/>
+          <p:nvPr/>
+        </p:nvSpPr>
+        <p:spPr>
+          <a:xfrm>
+            <a:off x="868101" y="0"/>
+            <a:ext cx="7407797" cy="1289071"/>
+          </a:xfrm>
+          <a:prstGeom prst="rect">
+            <a:avLst/>
+          </a:prstGeom>
+          <a:noFill/>
+        </p:spPr>
+        <p:txBody>
+          <a:bodyPr wrap="none" lIns="91440" tIns="45720" rIns="91440" bIns="45720">
+            <a:spAutoFit/>
+          </a:bodyPr>
+          <a:lstStyle/>
+          <a:p>
+            <a:pPr algn="ctr">
+              <a:lnSpc>
+                <a:spcPct val="150000"/>
+              </a:lnSpc>
+            </a:pPr>
+            <a:r>
+              <a:rPr lang="en-US" sz="6000" b="1" cap="none" spc="0" dirty="0">
+                <a:ln w="9525">
+                  <a:solidFill>
+                    <a:schemeClr val="bg1"/>
+                  </a:solidFill>
+                  <a:prstDash val="solid"/>
+                </a:ln>
+                <a:solidFill>
+                  <a:schemeClr val="tx1"/>
+                </a:solidFill>
+                <a:effectLst>
+                  <a:outerShdw blurRad="12700" dist="38100" dir="2700000" algn="tl" rotWithShape="0">
+                    <a:schemeClr val="bg1">
+                      <a:lumMod val="50000"/>
+                    </a:schemeClr>
+                  </a:outerShdw>
+                </a:effectLst>
+              </a:rPr>
+              <a:t>Processing a Stack</a:t>
+            </a:r>
+          </a:p>
+        </p:txBody>
+      </p:sp>
+      <p:sp>
+        <p:nvSpPr>
+          <p:cNvPr id="4" name="TextBox 3">
+            <a:extLst>
+              <a:ext uri="{FF2B5EF4-FFF2-40B4-BE49-F238E27FC236}">
+                <a16:creationId xmlns:a16="http://schemas.microsoft.com/office/drawing/2014/main" id="{1EA2FFDB-F5AD-1D8D-3312-324188E81ADB}"/>
+              </a:ext>
+            </a:extLst>
+          </p:cNvPr>
+          <p:cNvSpPr txBox="1"/>
+          <p:nvPr/>
+        </p:nvSpPr>
+        <p:spPr>
+          <a:xfrm>
+            <a:off x="842191" y="2069103"/>
+            <a:ext cx="7459617" cy="2964914"/>
+          </a:xfrm>
+          <a:prstGeom prst="rect">
+            <a:avLst/>
+          </a:prstGeom>
+          <a:noFill/>
+        </p:spPr>
+        <p:txBody>
+          <a:bodyPr wrap="square">
+            <a:spAutoFit/>
+          </a:bodyPr>
+          <a:lstStyle/>
+          <a:p>
+            <a:pPr algn="l">
+              <a:spcAft>
+                <a:spcPts val="750"/>
+              </a:spcAft>
+              <a:buNone/>
+            </a:pPr>
+            <a:r>
+              <a:rPr lang="en-US" sz="3600" b="0" i="0" dirty="0">
+                <a:solidFill>
+                  <a:srgbClr val="0A0A0A"/>
+                </a:solidFill>
+                <a:effectLst/>
+                <a:latin typeface="Google Sans"/>
+              </a:rPr>
+              <a:t>A stack is a type of queue. </a:t>
+            </a:r>
+          </a:p>
+          <a:p>
+            <a:pPr>
+              <a:spcAft>
+                <a:spcPts val="750"/>
+              </a:spcAft>
+            </a:pPr>
+            <a:r>
+              <a:rPr lang="en-US" sz="3600" b="0" i="0" dirty="0">
+                <a:solidFill>
+                  <a:srgbClr val="0A0A0A"/>
+                </a:solidFill>
+                <a:effectLst/>
+                <a:latin typeface="Google Sans"/>
+              </a:rPr>
+              <a:t>The primary purpose of a queue in is to process data or tasks in a specific, ordered sequence, typically following the</a:t>
+            </a:r>
+            <a:r>
+              <a:rPr lang="en-US" sz="3600" b="0" dirty="0">
+                <a:solidFill>
+                  <a:srgbClr val="0A0A0A"/>
+                </a:solidFill>
+                <a:latin typeface="Google Sans"/>
+              </a:rPr>
+              <a:t> First-In, First-Out (FIFO) principle. </a:t>
+            </a:r>
+            <a:endParaRPr lang="en-US" sz="3600" dirty="0"/>
+          </a:p>
+        </p:txBody>
+      </p:sp>
+    </p:spTree>
+    <p:extLst>
+      <p:ext uri="{BB962C8B-B14F-4D97-AF65-F5344CB8AC3E}">
+        <p14:creationId xmlns:p14="http://schemas.microsoft.com/office/powerpoint/2010/main" val="733261420"/>
+      </p:ext>
+    </p:extLst>
+  </p:cSld>
+  <p:clrMapOvr>
+    <a:masterClrMapping/>
+  </p:clrMapOvr>
+</p:sld>
+</file>
+
+<file path=ppt/slides/slide22.xml><?xml version="1.0" encoding="utf-8"?>
+<p:sld xmlns:a="http://schemas.openxmlformats.org/drawingml/2006/main" xmlns:r="http://schemas.openxmlformats.org/officeDocument/2006/relationships" xmlns:p="http://schemas.openxmlformats.org/presentationml/2006/main">
+  <p:cSld>
+    <p:spTree>
+      <p:nvGrpSpPr>
+        <p:cNvPr id="1" name="">
+          <a:extLst>
+            <a:ext uri="{FF2B5EF4-FFF2-40B4-BE49-F238E27FC236}">
+              <a16:creationId xmlns:a16="http://schemas.microsoft.com/office/drawing/2014/main" id="{BE5C9A9F-F111-DB6A-AD28-36F6DC94927A}"/>
+            </a:ext>
+          </a:extLst>
+        </p:cNvPr>
+        <p:cNvGrpSpPr/>
+        <p:nvPr/>
+      </p:nvGrpSpPr>
+      <p:grpSpPr>
+        <a:xfrm>
+          <a:off x="0" y="0"/>
+          <a:ext cx="0" cy="0"/>
+          <a:chOff x="0" y="0"/>
+          <a:chExt cx="0" cy="0"/>
+        </a:xfrm>
+      </p:grpSpPr>
+      <p:sp>
+        <p:nvSpPr>
+          <p:cNvPr id="24578" name="Footer Placeholder 3">
+            <a:extLst>
+              <a:ext uri="{FF2B5EF4-FFF2-40B4-BE49-F238E27FC236}">
+                <a16:creationId xmlns:a16="http://schemas.microsoft.com/office/drawing/2014/main" id="{2BD3DB83-5524-2993-6D28-0B5E1E320318}"/>
+              </a:ext>
+            </a:extLst>
+          </p:cNvPr>
+          <p:cNvSpPr>
+            <a:spLocks noGrp="1"/>
+          </p:cNvSpPr>
+          <p:nvPr>
+            <p:ph type="ftr" sz="quarter" idx="12"/>
+          </p:nvPr>
+        </p:nvSpPr>
+        <p:spPr>
+          <a:noFill/>
+        </p:spPr>
+        <p:txBody>
+          <a:bodyPr/>
+          <a:lstStyle>
+            <a:lvl1pPr>
+              <a:spcBef>
+                <a:spcPct val="20000"/>
+              </a:spcBef>
+              <a:buChar char="•"/>
+              <a:defRPr sz="3200">
+                <a:solidFill>
+                  <a:schemeClr val="tx1"/>
+                </a:solidFill>
+                <a:latin typeface="Times New Roman" panose="02020603050405020304" pitchFamily="18" charset="0"/>
+              </a:defRPr>
+            </a:lvl1pPr>
+            <a:lvl2pPr marL="742950" indent="-285750">
+              <a:spcBef>
+                <a:spcPct val="20000"/>
+              </a:spcBef>
+              <a:buChar char="–"/>
+              <a:defRPr sz="2800">
+                <a:solidFill>
+                  <a:schemeClr val="tx1"/>
+                </a:solidFill>
+                <a:latin typeface="Times New Roman" panose="02020603050405020304" pitchFamily="18" charset="0"/>
+              </a:defRPr>
+            </a:lvl2pPr>
+            <a:lvl3pPr marL="1143000" indent="-228600">
+              <a:spcBef>
+                <a:spcPct val="20000"/>
+              </a:spcBef>
+              <a:buChar char="•"/>
+              <a:defRPr sz="2400">
+                <a:solidFill>
+                  <a:schemeClr val="tx1"/>
+                </a:solidFill>
+                <a:latin typeface="Times New Roman" panose="02020603050405020304" pitchFamily="18" charset="0"/>
+              </a:defRPr>
+            </a:lvl3pPr>
+            <a:lvl4pPr marL="1600200" indent="-228600">
+              <a:spcBef>
+                <a:spcPct val="20000"/>
+              </a:spcBef>
+              <a:buChar char="–"/>
+              <a:defRPr sz="2000">
+                <a:solidFill>
+                  <a:schemeClr val="tx1"/>
+                </a:solidFill>
+                <a:latin typeface="Times New Roman" panose="02020603050405020304" pitchFamily="18" charset="0"/>
+              </a:defRPr>
+            </a:lvl4pPr>
+            <a:lvl5pPr marL="2057400" indent="-228600">
+              <a:spcBef>
+                <a:spcPct val="20000"/>
+              </a:spcBef>
+              <a:buChar char="»"/>
+              <a:defRPr sz="2000">
+                <a:solidFill>
+                  <a:schemeClr val="tx1"/>
+                </a:solidFill>
+                <a:latin typeface="Times New Roman" panose="02020603050405020304" pitchFamily="18" charset="0"/>
+              </a:defRPr>
+            </a:lvl5pPr>
+            <a:lvl6pPr marL="2514600" indent="-228600" eaLnBrk="0" fontAlgn="base" hangingPunct="0">
+              <a:spcBef>
+                <a:spcPct val="20000"/>
+              </a:spcBef>
+              <a:spcAft>
+                <a:spcPct val="0"/>
+              </a:spcAft>
+              <a:buChar char="»"/>
+              <a:defRPr sz="2000">
+                <a:solidFill>
+                  <a:schemeClr val="tx1"/>
+                </a:solidFill>
+                <a:latin typeface="Times New Roman" panose="02020603050405020304" pitchFamily="18" charset="0"/>
+              </a:defRPr>
+            </a:lvl6pPr>
+            <a:lvl7pPr marL="2971800" indent="-228600" eaLnBrk="0" fontAlgn="base" hangingPunct="0">
+              <a:spcBef>
+                <a:spcPct val="20000"/>
+              </a:spcBef>
+              <a:spcAft>
+                <a:spcPct val="0"/>
+              </a:spcAft>
+              <a:buChar char="»"/>
+              <a:defRPr sz="2000">
+                <a:solidFill>
+                  <a:schemeClr val="tx1"/>
+                </a:solidFill>
+                <a:latin typeface="Times New Roman" panose="02020603050405020304" pitchFamily="18" charset="0"/>
+              </a:defRPr>
+            </a:lvl7pPr>
+            <a:lvl8pPr marL="3429000" indent="-228600" eaLnBrk="0" fontAlgn="base" hangingPunct="0">
+              <a:spcBef>
+                <a:spcPct val="20000"/>
+              </a:spcBef>
+              <a:spcAft>
+                <a:spcPct val="0"/>
+              </a:spcAft>
+              <a:buChar char="»"/>
+              <a:defRPr sz="2000">
+                <a:solidFill>
+                  <a:schemeClr val="tx1"/>
+                </a:solidFill>
+                <a:latin typeface="Times New Roman" panose="02020603050405020304" pitchFamily="18" charset="0"/>
+              </a:defRPr>
+            </a:lvl8pPr>
+            <a:lvl9pPr marL="3886200" indent="-228600" eaLnBrk="0" fontAlgn="base" hangingPunct="0">
+              <a:spcBef>
+                <a:spcPct val="20000"/>
+              </a:spcBef>
+              <a:spcAft>
+                <a:spcPct val="0"/>
+              </a:spcAft>
+              <a:buChar char="»"/>
+              <a:defRPr sz="2000">
+                <a:solidFill>
+                  <a:schemeClr val="tx1"/>
+                </a:solidFill>
+                <a:latin typeface="Times New Roman" panose="02020603050405020304" pitchFamily="18" charset="0"/>
+              </a:defRPr>
+            </a:lvl9pPr>
+          </a:lstStyle>
+          <a:p>
+            <a:pPr>
+              <a:spcBef>
+                <a:spcPct val="0"/>
+              </a:spcBef>
+              <a:buFontTx/>
+              <a:buNone/>
+            </a:pPr>
+            <a:endParaRPr lang="en-US" altLang="en-US" sz="800"/>
+          </a:p>
+          <a:p>
+            <a:pPr>
+              <a:spcBef>
+                <a:spcPct val="0"/>
+              </a:spcBef>
+              <a:buFontTx/>
+              <a:buNone/>
+            </a:pPr>
+            <a:endParaRPr lang="en-US" altLang="en-US" sz="800" b="0">
+              <a:latin typeface="Tahoma" panose="020B0604030504040204" pitchFamily="34" charset="0"/>
+            </a:endParaRPr>
+          </a:p>
+          <a:p>
+            <a:pPr>
+              <a:spcBef>
+                <a:spcPct val="0"/>
+              </a:spcBef>
+              <a:buFontTx/>
+              <a:buNone/>
+            </a:pPr>
+            <a:endParaRPr lang="en-US" altLang="en-US" sz="800">
+              <a:latin typeface="Tahoma" panose="020B0604030504040204" pitchFamily="34" charset="0"/>
+            </a:endParaRPr>
+          </a:p>
+          <a:p>
+            <a:pPr>
+              <a:spcBef>
+                <a:spcPct val="0"/>
+              </a:spcBef>
+              <a:buFontTx/>
+              <a:buNone/>
+            </a:pPr>
+            <a:r>
+              <a:rPr lang="en-US" altLang="en-US" sz="800">
+                <a:latin typeface="Tahoma" panose="020B0604030504040204" pitchFamily="34" charset="0"/>
+              </a:rPr>
+              <a:t>© A+ Computer Science  -  www.apluscompsci.com</a:t>
+            </a:r>
+          </a:p>
+        </p:txBody>
+      </p:sp>
+      <p:sp>
+        <p:nvSpPr>
           <p:cNvPr id="24579" name="Text Box 2">
             <a:extLst>
               <a:ext uri="{FF2B5EF4-FFF2-40B4-BE49-F238E27FC236}">
-                <a16:creationId xmlns:a16="http://schemas.microsoft.com/office/drawing/2014/main" id="{B7DA6ECB-1CE2-4557-B4AC-D645B8B3E567}"/>
+                <a16:creationId xmlns:a16="http://schemas.microsoft.com/office/drawing/2014/main" id="{EEF81B5E-714B-27C3-EE34-314EB801F38C}"/>
               </a:ext>
             </a:extLst>
           </p:cNvPr>
@@ -22564,8 +23400,8 @@
         </p:nvSpPr>
         <p:spPr bwMode="auto">
           <a:xfrm>
-            <a:off x="685800" y="1704647"/>
-            <a:ext cx="6477000" cy="4832092"/>
+            <a:off x="685800" y="1369367"/>
+            <a:ext cx="6477000" cy="4401205"/>
           </a:xfrm>
           <a:prstGeom prst="rect">
             <a:avLst/>
@@ -22832,18 +23668,12 @@
             </a:pPr>
             <a:r>
               <a:rPr lang="en-US" altLang="en-US" sz="2800" dirty="0" err="1">
-                <a:solidFill>
-                  <a:srgbClr val="0066FF"/>
-                </a:solidFill>
                 <a:latin typeface="Tahoma" panose="020B0604030504040204" pitchFamily="34" charset="0"/>
               </a:rPr>
               <a:t>out.println</a:t>
             </a:r>
             <a:r>
               <a:rPr lang="en-US" altLang="en-US" sz="2800" dirty="0">
-                <a:solidFill>
-                  <a:srgbClr val="0066FF"/>
-                </a:solidFill>
                 <a:latin typeface="Tahoma" panose="020B0604030504040204" pitchFamily="34" charset="0"/>
               </a:rPr>
               <a:t>(s);</a:t>
@@ -22859,21 +23689,30 @@
             </a:pPr>
             <a:r>
               <a:rPr lang="en-US" altLang="en-US" sz="2800" dirty="0">
+                <a:solidFill>
+                  <a:srgbClr val="0066FF"/>
+                </a:solidFill>
                 <a:latin typeface="Tahoma" panose="020B0604030504040204" pitchFamily="34" charset="0"/>
               </a:rPr>
               <a:t>while(!</a:t>
             </a:r>
             <a:r>
               <a:rPr lang="en-US" altLang="en-US" sz="2800" dirty="0" err="1">
+                <a:solidFill>
+                  <a:srgbClr val="0066FF"/>
+                </a:solidFill>
                 <a:latin typeface="Tahoma" panose="020B0604030504040204" pitchFamily="34" charset="0"/>
               </a:rPr>
               <a:t>s.isEmpty</a:t>
             </a:r>
             <a:r>
               <a:rPr lang="en-US" altLang="en-US" sz="2800" dirty="0">
+                <a:solidFill>
+                  <a:srgbClr val="0066FF"/>
+                </a:solidFill>
                 <a:latin typeface="Tahoma" panose="020B0604030504040204" pitchFamily="34" charset="0"/>
               </a:rPr>
-              <a:t>())</a:t>
+              <a:t>()) {</a:t>
             </a:r>
           </a:p>
           <a:p>
@@ -22886,9 +23725,48 @@
             </a:pPr>
             <a:r>
               <a:rPr lang="en-US" altLang="en-US" sz="2800" dirty="0">
+                <a:solidFill>
+                  <a:srgbClr val="0066FF"/>
+                </a:solidFill>
                 <a:latin typeface="Tahoma" panose="020B0604030504040204" pitchFamily="34" charset="0"/>
               </a:rPr>
-              <a:t>{</a:t>
+              <a:t>   </a:t>
+            </a:r>
+            <a:r>
+              <a:rPr lang="en-US" altLang="en-US" sz="2800" dirty="0" err="1">
+                <a:solidFill>
+                  <a:srgbClr val="0066FF"/>
+                </a:solidFill>
+                <a:latin typeface="Tahoma" panose="020B0604030504040204" pitchFamily="34" charset="0"/>
+              </a:rPr>
+              <a:t>out.println</a:t>
+            </a:r>
+            <a:r>
+              <a:rPr lang="en-US" altLang="en-US" sz="2800" dirty="0">
+                <a:solidFill>
+                  <a:srgbClr val="0066FF"/>
+                </a:solidFill>
+                <a:latin typeface="Tahoma" panose="020B0604030504040204" pitchFamily="34" charset="0"/>
+              </a:rPr>
+              <a:t>(</a:t>
+            </a:r>
+            <a:r>
+              <a:rPr lang="en-US" altLang="en-US" sz="2800" dirty="0" err="1">
+                <a:solidFill>
+                  <a:srgbClr val="0066FF"/>
+                </a:solidFill>
+                <a:latin typeface="Tahoma" panose="020B0604030504040204" pitchFamily="34" charset="0"/>
+              </a:rPr>
+              <a:t>s.pop</a:t>
+            </a:r>
+            <a:r>
+              <a:rPr lang="en-US" altLang="en-US" sz="2800" dirty="0">
+                <a:solidFill>
+                  <a:srgbClr val="0066FF"/>
+                </a:solidFill>
+                <a:latin typeface="Tahoma" panose="020B0604030504040204" pitchFamily="34" charset="0"/>
+              </a:rPr>
+              <a:t>());</a:t>
             </a:r>
           </a:p>
           <a:p>
@@ -22901,158 +23779,38 @@
             </a:pPr>
             <a:r>
               <a:rPr lang="en-US" altLang="en-US" sz="2800" dirty="0">
+                <a:solidFill>
+                  <a:srgbClr val="0066FF"/>
+                </a:solidFill>
                 <a:latin typeface="Tahoma" panose="020B0604030504040204" pitchFamily="34" charset="0"/>
               </a:rPr>
-              <a:t>   </a:t>
-            </a:r>
+              <a:t>}</a:t>
+            </a:r>
+          </a:p>
+          <a:p>
+            <a:pPr>
+              <a:spcBef>
+                <a:spcPct val="0"/>
+              </a:spcBef>
+              <a:buNone/>
+            </a:pPr>
             <a:r>
               <a:rPr lang="en-US" altLang="en-US" sz="2800" dirty="0" err="1">
+                <a:solidFill>
+                  <a:srgbClr val="7030A0"/>
+                </a:solidFill>
                 <a:latin typeface="Tahoma" panose="020B0604030504040204" pitchFamily="34" charset="0"/>
               </a:rPr>
               <a:t>out.println</a:t>
             </a:r>
             <a:r>
               <a:rPr lang="en-US" altLang="en-US" sz="2800" dirty="0">
-                <a:latin typeface="Tahoma" panose="020B0604030504040204" pitchFamily="34" charset="0"/>
-              </a:rPr>
-              <a:t>(</a:t>
-            </a:r>
-            <a:r>
-              <a:rPr lang="en-US" altLang="en-US" sz="2800" dirty="0" err="1">
-                <a:latin typeface="Tahoma" panose="020B0604030504040204" pitchFamily="34" charset="0"/>
-              </a:rPr>
-              <a:t>s.pop</a:t>
-            </a:r>
-            <a:r>
-              <a:rPr lang="en-US" altLang="en-US" sz="2800" dirty="0">
-                <a:latin typeface="Tahoma" panose="020B0604030504040204" pitchFamily="34" charset="0"/>
-              </a:rPr>
-              <a:t>());</a:t>
-            </a:r>
-          </a:p>
-          <a:p>
-            <a:pPr>
-              <a:spcBef>
-                <a:spcPct val="0"/>
-              </a:spcBef>
-              <a:buFontTx/>
-              <a:buNone/>
-            </a:pPr>
-            <a:r>
-              <a:rPr lang="en-US" altLang="en-US" sz="2800" dirty="0">
-                <a:latin typeface="Tahoma" panose="020B0604030504040204" pitchFamily="34" charset="0"/>
-              </a:rPr>
-              <a:t>}</a:t>
-            </a:r>
-          </a:p>
-          <a:p>
-            <a:pPr>
-              <a:spcBef>
-                <a:spcPct val="0"/>
-              </a:spcBef>
-              <a:buNone/>
-            </a:pPr>
-            <a:r>
-              <a:rPr lang="en-US" altLang="en-US" sz="2800" dirty="0" err="1">
-                <a:solidFill>
-                  <a:srgbClr val="0066FF"/>
-                </a:solidFill>
-                <a:latin typeface="Tahoma" panose="020B0604030504040204" pitchFamily="34" charset="0"/>
-              </a:rPr>
-              <a:t>out.println</a:t>
-            </a:r>
-            <a:r>
-              <a:rPr lang="en-US" altLang="en-US" sz="2800" dirty="0">
-                <a:solidFill>
-                  <a:srgbClr val="0066FF"/>
+                <a:solidFill>
+                  <a:srgbClr val="7030A0"/>
                 </a:solidFill>
                 <a:latin typeface="Tahoma" panose="020B0604030504040204" pitchFamily="34" charset="0"/>
               </a:rPr>
               <a:t>(s);</a:t>
-            </a:r>
-          </a:p>
-        </p:txBody>
-      </p:sp>
-      <p:sp>
-        <p:nvSpPr>
-          <p:cNvPr id="24580" name="WordArt 3">
-            <a:extLst>
-              <a:ext uri="{FF2B5EF4-FFF2-40B4-BE49-F238E27FC236}">
-                <a16:creationId xmlns:a16="http://schemas.microsoft.com/office/drawing/2014/main" id="{BC5A2D5A-5923-4BBA-8C4D-34424391AB0B}"/>
-              </a:ext>
-            </a:extLst>
-          </p:cNvPr>
-          <p:cNvSpPr>
-            <a:spLocks noChangeArrowheads="1" noChangeShapeType="1" noTextEdit="1"/>
-          </p:cNvSpPr>
-          <p:nvPr/>
-        </p:nvSpPr>
-        <p:spPr bwMode="auto">
-          <a:xfrm>
-            <a:off x="1143000" y="609600"/>
-            <a:ext cx="6400800" cy="952500"/>
-          </a:xfrm>
-          <a:prstGeom prst="rect">
-            <a:avLst/>
-          </a:prstGeom>
-        </p:spPr>
-        <p:txBody>
-          <a:bodyPr wrap="none" fromWordArt="1">
-            <a:prstTxWarp prst="textPlain">
-              <a:avLst>
-                <a:gd name="adj" fmla="val 50000"/>
-              </a:avLst>
-            </a:prstTxWarp>
-          </a:bodyPr>
-          <a:lstStyle/>
-          <a:p>
-            <a:pPr algn="ctr"/>
-            <a:r>
-              <a:rPr lang="en-US" sz="3600" kern="10">
-                <a:ln w="12700">
-                  <a:solidFill>
-                    <a:srgbClr val="EAEAEA"/>
-                  </a:solidFill>
-                  <a:round/>
-                  <a:headEnd/>
-                  <a:tailEnd/>
-                </a:ln>
-                <a:gradFill rotWithShape="1">
-                  <a:gsLst>
-                    <a:gs pos="0">
-                      <a:srgbClr val="A603AB"/>
-                    </a:gs>
-                    <a:gs pos="12000">
-                      <a:srgbClr val="E81766"/>
-                    </a:gs>
-                    <a:gs pos="27000">
-                      <a:srgbClr val="EE3F17"/>
-                    </a:gs>
-                    <a:gs pos="48000">
-                      <a:srgbClr val="FFFF00"/>
-                    </a:gs>
-                    <a:gs pos="64999">
-                      <a:srgbClr val="1A8D48"/>
-                    </a:gs>
-                    <a:gs pos="78999">
-                      <a:srgbClr val="0819FB"/>
-                    </a:gs>
-                    <a:gs pos="100000">
-                      <a:srgbClr val="A603AB"/>
-                    </a:gs>
-                  </a:gsLst>
-                  <a:lin ang="0" scaled="1"/>
-                </a:gradFill>
-                <a:effectLst>
-                  <a:outerShdw dist="35921" dir="2700000" sy="50000" kx="2115830" algn="bl" rotWithShape="0">
-                    <a:srgbClr val="C0C0C0">
-                      <a:alpha val="79999"/>
-                    </a:srgbClr>
-                  </a:outerShdw>
-                </a:effectLst>
-                <a:latin typeface="Arial Black" panose="020B0A04020102020204" pitchFamily="34" charset="0"/>
-              </a:rPr>
-              <a:t>isEmpty</a:t>
             </a:r>
           </a:p>
         </p:txBody>
@@ -23062,7 +23820,7 @@
           <p:cNvPr id="24581" name="Text Box 4">
             <a:extLst>
               <a:ext uri="{FF2B5EF4-FFF2-40B4-BE49-F238E27FC236}">
-                <a16:creationId xmlns:a16="http://schemas.microsoft.com/office/drawing/2014/main" id="{FCADF05D-749E-436C-B406-E02014164D56}"/>
+                <a16:creationId xmlns:a16="http://schemas.microsoft.com/office/drawing/2014/main" id="{F4F68DB6-8BCE-35E4-5D16-1C672CAB9C12}"/>
               </a:ext>
             </a:extLst>
           </p:cNvPr>
@@ -23262,9 +24020,6 @@
             </a:pPr>
             <a:r>
               <a:rPr lang="en-US" altLang="en-US" dirty="0">
-                <a:solidFill>
-                  <a:srgbClr val="0066FF"/>
-                </a:solidFill>
                 <a:latin typeface="Tahoma" panose="020B0604030504040204" pitchFamily="34" charset="0"/>
               </a:rPr>
               <a:t>[88, 23, 11] </a:t>
@@ -23280,28 +24035,43 @@
             </a:pPr>
             <a:r>
               <a:rPr lang="en-US" altLang="en-US" dirty="0">
+                <a:solidFill>
+                  <a:srgbClr val="0066FF"/>
+                </a:solidFill>
                 <a:latin typeface="Tahoma" panose="020B0604030504040204" pitchFamily="34" charset="0"/>
               </a:rPr>
               <a:t>11</a:t>
             </a:r>
             <a:br>
               <a:rPr lang="en-US" altLang="en-US" dirty="0">
+                <a:solidFill>
+                  <a:srgbClr val="0066FF"/>
+                </a:solidFill>
                 <a:latin typeface="Tahoma" panose="020B0604030504040204" pitchFamily="34" charset="0"/>
               </a:rPr>
             </a:br>
             <a:r>
               <a:rPr lang="en-US" altLang="en-US" dirty="0">
+                <a:solidFill>
+                  <a:srgbClr val="0066FF"/>
+                </a:solidFill>
                 <a:latin typeface="Tahoma" panose="020B0604030504040204" pitchFamily="34" charset="0"/>
               </a:rPr>
               <a:t>23</a:t>
             </a:r>
             <a:br>
               <a:rPr lang="en-US" altLang="en-US" dirty="0">
+                <a:solidFill>
+                  <a:srgbClr val="0066FF"/>
+                </a:solidFill>
                 <a:latin typeface="Tahoma" panose="020B0604030504040204" pitchFamily="34" charset="0"/>
               </a:rPr>
             </a:br>
             <a:r>
               <a:rPr lang="en-US" altLang="en-US" dirty="0">
+                <a:solidFill>
+                  <a:srgbClr val="0066FF"/>
+                </a:solidFill>
                 <a:latin typeface="Tahoma" panose="020B0604030504040204" pitchFamily="34" charset="0"/>
               </a:rPr>
               <a:t>88</a:t>
@@ -23318,7 +24088,7 @@
             <a:r>
               <a:rPr lang="en-US" altLang="en-US" dirty="0">
                 <a:solidFill>
-                  <a:srgbClr val="0066FF"/>
+                  <a:srgbClr val="7030A0"/>
                 </a:solidFill>
                 <a:latin typeface="Tahoma" panose="020B0604030504040204" pitchFamily="34" charset="0"/>
               </a:rPr>
@@ -23327,7 +24097,65 @@
           </a:p>
         </p:txBody>
       </p:sp>
+      <p:sp>
+        <p:nvSpPr>
+          <p:cNvPr id="2" name="Rectangle 1">
+            <a:extLst>
+              <a:ext uri="{FF2B5EF4-FFF2-40B4-BE49-F238E27FC236}">
+                <a16:creationId xmlns:a16="http://schemas.microsoft.com/office/drawing/2014/main" id="{2C8D73B1-04A2-294C-7E2D-FADA63868902}"/>
+              </a:ext>
+            </a:extLst>
+          </p:cNvPr>
+          <p:cNvSpPr/>
+          <p:nvPr/>
+        </p:nvSpPr>
+        <p:spPr>
+          <a:xfrm>
+            <a:off x="1225571" y="321261"/>
+            <a:ext cx="6692858" cy="923330"/>
+          </a:xfrm>
+          <a:prstGeom prst="rect">
+            <a:avLst/>
+          </a:prstGeom>
+          <a:noFill/>
+        </p:spPr>
+        <p:txBody>
+          <a:bodyPr wrap="none" lIns="91440" tIns="45720" rIns="91440" bIns="45720">
+            <a:spAutoFit/>
+          </a:bodyPr>
+          <a:lstStyle/>
+          <a:p>
+            <a:pPr algn="ctr"/>
+            <a:r>
+              <a:rPr lang="en-US" sz="5400" b="1" cap="none" spc="0" dirty="0">
+                <a:ln w="9525">
+                  <a:solidFill>
+                    <a:schemeClr val="bg1"/>
+                  </a:solidFill>
+                  <a:prstDash val="solid"/>
+                </a:ln>
+                <a:solidFill>
+                  <a:schemeClr val="tx1"/>
+                </a:solidFill>
+                <a:effectLst>
+                  <a:outerShdw blurRad="12700" dist="38100" dir="2700000" algn="tl" rotWithShape="0">
+                    <a:schemeClr val="bg1">
+                      <a:lumMod val="50000"/>
+                    </a:schemeClr>
+                  </a:outerShdw>
+                </a:effectLst>
+              </a:rPr>
+              <a:t>Processing a Stack</a:t>
+            </a:r>
+          </a:p>
+        </p:txBody>
+      </p:sp>
     </p:spTree>
+    <p:extLst>
+      <p:ext uri="{BB962C8B-B14F-4D97-AF65-F5344CB8AC3E}">
+        <p14:creationId xmlns:p14="http://schemas.microsoft.com/office/powerpoint/2010/main" val="3329232806"/>
+      </p:ext>
+    </p:extLst>
   </p:cSld>
   <p:clrMapOvr>
     <a:masterClrMapping/>
@@ -23335,7 +24163,7 @@
 </p:sld>
 </file>
 
-<file path=ppt/slides/slide21.xml><?xml version="1.0" encoding="utf-8"?>
+<file path=ppt/slides/slide23.xml><?xml version="1.0" encoding="utf-8"?>
 <p:sld xmlns:a="http://schemas.openxmlformats.org/drawingml/2006/main" xmlns:r="http://schemas.openxmlformats.org/officeDocument/2006/relationships" xmlns:p="http://schemas.openxmlformats.org/presentationml/2006/main">
   <p:cSld>
     <p:spTree>
@@ -24158,7 +24986,7 @@
 </p:sld>
 </file>
 
-<file path=ppt/slides/slide22.xml><?xml version="1.0" encoding="utf-8"?>
+<file path=ppt/slides/slide24.xml><?xml version="1.0" encoding="utf-8"?>
 <p:sld xmlns:a="http://schemas.openxmlformats.org/drawingml/2006/main" xmlns:r="http://schemas.openxmlformats.org/officeDocument/2006/relationships" xmlns:p="http://schemas.openxmlformats.org/presentationml/2006/main">
   <p:cSld>
     <p:spTree>
@@ -24465,7 +25293,7 @@
 </p:sld>
 </file>
 
-<file path=ppt/slides/slide23.xml><?xml version="1.0" encoding="utf-8"?>
+<file path=ppt/slides/slide25.xml><?xml version="1.0" encoding="utf-8"?>
 <p:sld xmlns:a="http://schemas.openxmlformats.org/drawingml/2006/main" xmlns:r="http://schemas.openxmlformats.org/officeDocument/2006/relationships" xmlns:p="http://schemas.openxmlformats.org/presentationml/2006/main">
   <p:cSld>
     <p:spTree>
@@ -24484,10 +25312,10 @@
       </p:grpSpPr>
       <p:grpSp>
         <p:nvGrpSpPr>
-          <p:cNvPr id="2" name="Group 1" descr="The Vector class extends AbstractList and implements the RandomAccess interface just like ArrayList does. &#10;The Stack class extends the Vector class.">
+          <p:cNvPr id="39" name="Group 38">
             <a:extLst>
               <a:ext uri="{FF2B5EF4-FFF2-40B4-BE49-F238E27FC236}">
-                <a16:creationId xmlns:a16="http://schemas.microsoft.com/office/drawing/2014/main" id="{118B60EC-9170-493B-A82C-DA3E296E2D6A}"/>
+                <a16:creationId xmlns:a16="http://schemas.microsoft.com/office/drawing/2014/main" id="{3E054F22-EC08-1097-7BC3-E41910FE3A6A}"/>
               </a:ext>
             </a:extLst>
           </p:cNvPr>
@@ -24496,10 +25324,10 @@
         </p:nvGrpSpPr>
         <p:grpSpPr>
           <a:xfrm>
-            <a:off x="76200" y="304800"/>
-            <a:ext cx="8979294" cy="6400800"/>
-            <a:chOff x="76200" y="304800"/>
-            <a:chExt cx="8979294" cy="6400800"/>
+            <a:off x="89212" y="82399"/>
+            <a:ext cx="9054788" cy="6413246"/>
+            <a:chOff x="89212" y="82399"/>
+            <a:chExt cx="9054788" cy="6413246"/>
           </a:xfrm>
         </p:grpSpPr>
         <p:pic>
@@ -24524,14 +25352,15 @@
                 </a:ext>
               </a:extLst>
             </a:blip>
+            <a:srcRect t="15272" r="28207" b="5715"/>
             <a:stretch>
               <a:fillRect/>
             </a:stretch>
           </p:blipFill>
           <p:spPr>
             <a:xfrm>
-              <a:off x="76200" y="304800"/>
-              <a:ext cx="8979294" cy="6400800"/>
+              <a:off x="2392680" y="1241695"/>
+              <a:ext cx="6446520" cy="5057506"/>
             </a:xfrm>
             <a:prstGeom prst="rect">
               <a:avLst/>
@@ -24552,7 +25381,7 @@
           </p:nvSpPr>
           <p:spPr>
             <a:xfrm>
-              <a:off x="1828800" y="838200"/>
+              <a:off x="4145280" y="797560"/>
               <a:ext cx="990600" cy="276999"/>
             </a:xfrm>
             <a:prstGeom prst="rect">
@@ -24598,7 +25427,7 @@
           </p:nvCxnSpPr>
           <p:spPr bwMode="auto">
             <a:xfrm flipV="1">
-              <a:off x="2362200" y="1115199"/>
+              <a:off x="4678680" y="1074559"/>
               <a:ext cx="0" cy="408801"/>
             </a:xfrm>
             <a:prstGeom prst="straightConnector1">
@@ -24644,7 +25473,7 @@
           </p:nvSpPr>
           <p:spPr>
             <a:xfrm>
-              <a:off x="990600" y="5562600"/>
+              <a:off x="3307080" y="5521960"/>
               <a:ext cx="990600" cy="276999"/>
             </a:xfrm>
             <a:prstGeom prst="rect">
@@ -24653,7 +25482,7 @@
             <a:noFill/>
             <a:ln w="19050">
               <a:solidFill>
-                <a:srgbClr val="7030A0"/>
+                <a:schemeClr val="tx1"/>
               </a:solidFill>
             </a:ln>
           </p:spPr>
@@ -24666,17 +25495,11 @@
               <a:pPr algn="ctr"/>
               <a:r>
                 <a:rPr lang="en-US" sz="1200" b="0" dirty="0">
-                  <a:solidFill>
-                    <a:srgbClr val="7030A0"/>
-                  </a:solidFill>
                   <a:latin typeface="Trebuchet MS" panose="020B0603020202020204" pitchFamily="34" charset="0"/>
                 </a:rPr>
                 <a:t>Vector</a:t>
               </a:r>
               <a:endParaRPr lang="en-US" sz="1800" b="0" dirty="0">
-                <a:solidFill>
-                  <a:srgbClr val="7030A0"/>
-                </a:solidFill>
                 <a:latin typeface="Trebuchet MS" panose="020B0603020202020204" pitchFamily="34" charset="0"/>
               </a:endParaRPr>
             </a:p>
@@ -24696,7 +25519,7 @@
           </p:nvCxnSpPr>
           <p:spPr bwMode="auto">
             <a:xfrm flipV="1">
-              <a:off x="1514797" y="5137219"/>
+              <a:off x="3831277" y="5096579"/>
               <a:ext cx="588323" cy="438446"/>
             </a:xfrm>
             <a:prstGeom prst="straightConnector1">
@@ -24707,7 +25530,7 @@
             </a:solidFill>
             <a:ln w="25400" cap="flat" cmpd="sng" algn="ctr">
               <a:solidFill>
-                <a:srgbClr val="7030A0"/>
+                <a:schemeClr val="tx1"/>
               </a:solidFill>
               <a:prstDash val="solid"/>
               <a:round/>
@@ -24742,7 +25565,7 @@
           </p:nvSpPr>
           <p:spPr>
             <a:xfrm>
-              <a:off x="990600" y="6259286"/>
+              <a:off x="3307080" y="6218646"/>
               <a:ext cx="990600" cy="276999"/>
             </a:xfrm>
             <a:prstGeom prst="rect">
@@ -24794,7 +25617,7 @@
           </p:nvCxnSpPr>
           <p:spPr bwMode="auto">
             <a:xfrm flipH="1">
-              <a:off x="336550" y="5701100"/>
+              <a:off x="2653030" y="5660460"/>
               <a:ext cx="654050" cy="0"/>
             </a:xfrm>
             <a:prstGeom prst="line">
@@ -24805,7 +25628,7 @@
             </a:solidFill>
             <a:ln w="28575" cap="flat" cmpd="sng" algn="ctr">
               <a:solidFill>
-                <a:srgbClr val="7030A0"/>
+                <a:schemeClr val="tx1"/>
               </a:solidFill>
               <a:prstDash val="solid"/>
               <a:round/>
@@ -24840,7 +25663,7 @@
           </p:nvSpPr>
           <p:spPr bwMode="auto">
             <a:xfrm>
-              <a:off x="1460665" y="5854535"/>
+              <a:off x="3777145" y="5813895"/>
               <a:ext cx="88425" cy="391886"/>
             </a:xfrm>
             <a:custGeom>
@@ -24968,7 +25791,7 @@
           </p:nvSpPr>
           <p:spPr bwMode="auto">
             <a:xfrm>
-              <a:off x="1514065" y="3213463"/>
+              <a:off x="3830545" y="3172823"/>
               <a:ext cx="1473075" cy="2351314"/>
             </a:xfrm>
             <a:custGeom>
@@ -25085,7 +25908,7 @@
             <a:noFill/>
             <a:ln w="25400" cap="flat" cmpd="sng" algn="ctr">
               <a:solidFill>
-                <a:srgbClr val="7030A0"/>
+                <a:schemeClr val="tx1"/>
               </a:solidFill>
               <a:prstDash val="solid"/>
               <a:round/>
@@ -25142,11 +25965,531 @@
             </a:p>
           </p:txBody>
         </p:sp>
+        <p:sp>
+          <p:nvSpPr>
+            <p:cNvPr id="3" name="Rectangle 2">
+              <a:extLst>
+                <a:ext uri="{FF2B5EF4-FFF2-40B4-BE49-F238E27FC236}">
+                  <a16:creationId xmlns:a16="http://schemas.microsoft.com/office/drawing/2014/main" id="{6C50F5E6-EAAA-C4E6-486A-010BF615568B}"/>
+                </a:ext>
+              </a:extLst>
+            </p:cNvPr>
+            <p:cNvSpPr/>
+            <p:nvPr/>
+          </p:nvSpPr>
+          <p:spPr bwMode="auto">
+            <a:xfrm>
+              <a:off x="6766560" y="5974080"/>
+              <a:ext cx="2377440" cy="521565"/>
+            </a:xfrm>
+            <a:prstGeom prst="rect">
+              <a:avLst/>
+            </a:prstGeom>
+            <a:solidFill>
+              <a:schemeClr val="bg1"/>
+            </a:solidFill>
+            <a:ln w="12700" cap="flat" cmpd="sng" algn="ctr">
+              <a:solidFill>
+                <a:schemeClr val="bg1"/>
+              </a:solidFill>
+              <a:prstDash val="solid"/>
+              <a:round/>
+              <a:headEnd type="none" w="sm" len="sm"/>
+              <a:tailEnd type="none" w="sm" len="sm"/>
+            </a:ln>
+            <a:effectLst/>
+          </p:spPr>
+          <p:txBody>
+            <a:bodyPr vert="horz" wrap="square" lIns="91440" tIns="45720" rIns="91440" bIns="45720" numCol="1" rtlCol="0" anchor="t" anchorCtr="0" compatLnSpc="1">
+              <a:prstTxWarp prst="textNoShape">
+                <a:avLst/>
+              </a:prstTxWarp>
+            </a:bodyPr>
+            <a:lstStyle/>
+            <a:p>
+              <a:pPr marL="0" marR="0" indent="0" algn="l" defTabSz="914400" rtl="0" eaLnBrk="1" fontAlgn="base" latinLnBrk="0" hangingPunct="1">
+                <a:lnSpc>
+                  <a:spcPct val="100000"/>
+                </a:lnSpc>
+                <a:spcBef>
+                  <a:spcPct val="0"/>
+                </a:spcBef>
+                <a:spcAft>
+                  <a:spcPct val="0"/>
+                </a:spcAft>
+                <a:buClrTx/>
+                <a:buSzTx/>
+                <a:buFontTx/>
+                <a:buNone/>
+                <a:tabLst/>
+              </a:pPr>
+              <a:endParaRPr kumimoji="0" lang="en-US" sz="2800" b="1" i="0" u="none" strike="noStrike" cap="none" normalizeH="0" baseline="0">
+                <a:ln>
+                  <a:noFill/>
+                </a:ln>
+                <a:solidFill>
+                  <a:schemeClr val="tx1"/>
+                </a:solidFill>
+                <a:effectLst/>
+                <a:latin typeface="Tahoma" pitchFamily="34" charset="0"/>
+              </a:endParaRPr>
+            </a:p>
+          </p:txBody>
+        </p:sp>
+        <p:sp>
+          <p:nvSpPr>
+            <p:cNvPr id="11" name="TextBox 10">
+              <a:extLst>
+                <a:ext uri="{FF2B5EF4-FFF2-40B4-BE49-F238E27FC236}">
+                  <a16:creationId xmlns:a16="http://schemas.microsoft.com/office/drawing/2014/main" id="{F9C6B8E5-9C83-F456-26A9-FEAB696B8F94}"/>
+                </a:ext>
+              </a:extLst>
+            </p:cNvPr>
+            <p:cNvSpPr txBox="1"/>
+            <p:nvPr/>
+          </p:nvSpPr>
+          <p:spPr>
+            <a:xfrm>
+              <a:off x="772160" y="1351280"/>
+              <a:ext cx="883896" cy="492443"/>
+            </a:xfrm>
+            <a:prstGeom prst="rect">
+              <a:avLst/>
+            </a:prstGeom>
+            <a:noFill/>
+            <a:ln>
+              <a:solidFill>
+                <a:schemeClr val="tx1"/>
+              </a:solidFill>
+            </a:ln>
+          </p:spPr>
+          <p:txBody>
+            <a:bodyPr wrap="none" lIns="182880" tIns="137160" rIns="182880" bIns="137160" rtlCol="0">
+              <a:spAutoFit/>
+            </a:bodyPr>
+            <a:lstStyle/>
+            <a:p>
+              <a:r>
+                <a:rPr lang="en-US" sz="1400" b="0" dirty="0">
+                  <a:ea typeface="Tahoma" panose="020B0604030504040204" pitchFamily="34" charset="0"/>
+                  <a:cs typeface="Tahoma" panose="020B0604030504040204" pitchFamily="34" charset="0"/>
+                </a:rPr>
+                <a:t>Queue</a:t>
+              </a:r>
+            </a:p>
+          </p:txBody>
+        </p:sp>
+        <p:cxnSp>
+          <p:nvCxnSpPr>
+            <p:cNvPr id="14" name="Straight Arrow Connector 13">
+              <a:extLst>
+                <a:ext uri="{FF2B5EF4-FFF2-40B4-BE49-F238E27FC236}">
+                  <a16:creationId xmlns:a16="http://schemas.microsoft.com/office/drawing/2014/main" id="{AED2C27E-E26D-636F-86BE-3C5FD7F41E14}"/>
+                </a:ext>
+              </a:extLst>
+            </p:cNvPr>
+            <p:cNvCxnSpPr>
+              <a:stCxn id="11" idx="3"/>
+            </p:cNvCxnSpPr>
+            <p:nvPr/>
+          </p:nvCxnSpPr>
+          <p:spPr bwMode="auto">
+            <a:xfrm flipV="1">
+              <a:off x="1656056" y="1597501"/>
+              <a:ext cx="2459222" cy="1"/>
+            </a:xfrm>
+            <a:prstGeom prst="straightConnector1">
+              <a:avLst/>
+            </a:prstGeom>
+            <a:solidFill>
+              <a:schemeClr val="accent1"/>
+            </a:solidFill>
+            <a:ln w="28575" cap="flat" cmpd="sng" algn="ctr">
+              <a:solidFill>
+                <a:schemeClr val="tx1"/>
+              </a:solidFill>
+              <a:prstDash val="solid"/>
+              <a:round/>
+              <a:headEnd type="none" w="med" len="med"/>
+              <a:tailEnd type="triangle" w="lg" len="med"/>
+            </a:ln>
+            <a:effectLst/>
+            <a:extLst>
+              <a:ext uri="{AF507438-7753-43E0-B8FC-AC1667EBCBE1}">
+                <a14:hiddenEffects xmlns:a14="http://schemas.microsoft.com/office/drawing/2010/main">
+                  <a:effectLst>
+                    <a:outerShdw dist="35921" dir="2700000" algn="ctr" rotWithShape="0">
+                      <a:schemeClr val="bg2"/>
+                    </a:outerShdw>
+                  </a:effectLst>
+                </a14:hiddenEffects>
+              </a:ext>
+            </a:extLst>
+          </p:spPr>
+        </p:cxnSp>
+        <p:sp>
+          <p:nvSpPr>
+            <p:cNvPr id="15" name="TextBox 14">
+              <a:extLst>
+                <a:ext uri="{FF2B5EF4-FFF2-40B4-BE49-F238E27FC236}">
+                  <a16:creationId xmlns:a16="http://schemas.microsoft.com/office/drawing/2014/main" id="{C78B30C9-B6C4-B8D9-D542-922D5EEA4B01}"/>
+                </a:ext>
+              </a:extLst>
+            </p:cNvPr>
+            <p:cNvSpPr txBox="1"/>
+            <p:nvPr/>
+          </p:nvSpPr>
+          <p:spPr>
+            <a:xfrm>
+              <a:off x="1208793" y="2283562"/>
+              <a:ext cx="879087" cy="492443"/>
+            </a:xfrm>
+            <a:prstGeom prst="rect">
+              <a:avLst/>
+            </a:prstGeom>
+            <a:noFill/>
+            <a:ln>
+              <a:solidFill>
+                <a:schemeClr val="tx1"/>
+              </a:solidFill>
+            </a:ln>
+          </p:spPr>
+          <p:txBody>
+            <a:bodyPr wrap="none" lIns="182880" tIns="137160" rIns="182880" bIns="137160" rtlCol="0">
+              <a:spAutoFit/>
+            </a:bodyPr>
+            <a:lstStyle/>
+            <a:p>
+              <a:r>
+                <a:rPr lang="en-US" sz="1400" b="0" dirty="0">
+                  <a:ea typeface="Tahoma" panose="020B0604030504040204" pitchFamily="34" charset="0"/>
+                  <a:cs typeface="Tahoma" panose="020B0604030504040204" pitchFamily="34" charset="0"/>
+                </a:rPr>
+                <a:t>Deque</a:t>
+              </a:r>
+            </a:p>
+          </p:txBody>
+        </p:sp>
+        <p:sp>
+          <p:nvSpPr>
+            <p:cNvPr id="16" name="TextBox 15">
+              <a:extLst>
+                <a:ext uri="{FF2B5EF4-FFF2-40B4-BE49-F238E27FC236}">
+                  <a16:creationId xmlns:a16="http://schemas.microsoft.com/office/drawing/2014/main" id="{9E821786-0D4D-9D38-D823-FD74AD9EB2A5}"/>
+                </a:ext>
+              </a:extLst>
+            </p:cNvPr>
+            <p:cNvSpPr txBox="1"/>
+            <p:nvPr/>
+          </p:nvSpPr>
+          <p:spPr>
+            <a:xfrm>
+              <a:off x="89212" y="3027997"/>
+              <a:ext cx="1584536" cy="492443"/>
+            </a:xfrm>
+            <a:prstGeom prst="rect">
+              <a:avLst/>
+            </a:prstGeom>
+            <a:solidFill>
+              <a:srgbClr val="CAC9CE"/>
+            </a:solidFill>
+            <a:ln>
+              <a:solidFill>
+                <a:schemeClr val="tx1"/>
+              </a:solidFill>
+            </a:ln>
+          </p:spPr>
+          <p:txBody>
+            <a:bodyPr wrap="none" lIns="182880" tIns="137160" rIns="182880" bIns="137160" rtlCol="0">
+              <a:spAutoFit/>
+            </a:bodyPr>
+            <a:lstStyle/>
+            <a:p>
+              <a:r>
+                <a:rPr lang="en-US" sz="1400" b="0" dirty="0">
+                  <a:ea typeface="Tahoma" panose="020B0604030504040204" pitchFamily="34" charset="0"/>
+                  <a:cs typeface="Tahoma" panose="020B0604030504040204" pitchFamily="34" charset="0"/>
+                </a:rPr>
+                <a:t>Abstract Queue</a:t>
+              </a:r>
+            </a:p>
+          </p:txBody>
+        </p:sp>
+        <p:cxnSp>
+          <p:nvCxnSpPr>
+            <p:cNvPr id="17" name="Straight Arrow Connector 16">
+              <a:extLst>
+                <a:ext uri="{FF2B5EF4-FFF2-40B4-BE49-F238E27FC236}">
+                  <a16:creationId xmlns:a16="http://schemas.microsoft.com/office/drawing/2014/main" id="{E2578E66-3A83-E43E-9F6D-0BF467E2117A}"/>
+                </a:ext>
+              </a:extLst>
+            </p:cNvPr>
+            <p:cNvCxnSpPr>
+              <a:stCxn id="15" idx="0"/>
+              <a:endCxn id="11" idx="2"/>
+            </p:cNvCxnSpPr>
+            <p:nvPr/>
+          </p:nvCxnSpPr>
+          <p:spPr bwMode="auto">
+            <a:xfrm flipH="1" flipV="1">
+              <a:off x="1214108" y="1843723"/>
+              <a:ext cx="434229" cy="439839"/>
+            </a:xfrm>
+            <a:prstGeom prst="straightConnector1">
+              <a:avLst/>
+            </a:prstGeom>
+            <a:solidFill>
+              <a:schemeClr val="accent1"/>
+            </a:solidFill>
+            <a:ln w="28575" cap="flat" cmpd="sng" algn="ctr">
+              <a:solidFill>
+                <a:schemeClr val="tx1"/>
+              </a:solidFill>
+              <a:prstDash val="solid"/>
+              <a:round/>
+              <a:headEnd type="none" w="med" len="med"/>
+              <a:tailEnd type="triangle" w="lg" len="med"/>
+            </a:ln>
+            <a:effectLst/>
+            <a:extLst>
+              <a:ext uri="{AF507438-7753-43E0-B8FC-AC1667EBCBE1}">
+                <a14:hiddenEffects xmlns:a14="http://schemas.microsoft.com/office/drawing/2010/main">
+                  <a:effectLst>
+                    <a:outerShdw dist="35921" dir="2700000" algn="ctr" rotWithShape="0">
+                      <a:schemeClr val="bg2"/>
+                    </a:outerShdw>
+                  </a:effectLst>
+                </a14:hiddenEffects>
+              </a:ext>
+            </a:extLst>
+          </p:spPr>
+        </p:cxnSp>
+        <p:cxnSp>
+          <p:nvCxnSpPr>
+            <p:cNvPr id="20" name="Straight Arrow Connector 19">
+              <a:extLst>
+                <a:ext uri="{FF2B5EF4-FFF2-40B4-BE49-F238E27FC236}">
+                  <a16:creationId xmlns:a16="http://schemas.microsoft.com/office/drawing/2014/main" id="{ED780EB9-B7E5-6DBF-4CF0-1A415145C980}"/>
+                </a:ext>
+              </a:extLst>
+            </p:cNvPr>
+            <p:cNvCxnSpPr>
+              <a:stCxn id="16" idx="0"/>
+            </p:cNvCxnSpPr>
+            <p:nvPr/>
+          </p:nvCxnSpPr>
+          <p:spPr bwMode="auto">
+            <a:xfrm flipV="1">
+              <a:off x="881480" y="1843723"/>
+              <a:ext cx="269996" cy="1184274"/>
+            </a:xfrm>
+            <a:prstGeom prst="straightConnector1">
+              <a:avLst/>
+            </a:prstGeom>
+            <a:solidFill>
+              <a:schemeClr val="accent1"/>
+            </a:solidFill>
+            <a:ln w="28575" cap="flat" cmpd="sng" algn="ctr">
+              <a:solidFill>
+                <a:schemeClr val="tx1"/>
+              </a:solidFill>
+              <a:prstDash val="solid"/>
+              <a:round/>
+              <a:headEnd type="none" w="med" len="med"/>
+              <a:tailEnd type="triangle" w="lg" len="med"/>
+            </a:ln>
+            <a:effectLst/>
+            <a:extLst>
+              <a:ext uri="{AF507438-7753-43E0-B8FC-AC1667EBCBE1}">
+                <a14:hiddenEffects xmlns:a14="http://schemas.microsoft.com/office/drawing/2010/main">
+                  <a:effectLst>
+                    <a:outerShdw dist="35921" dir="2700000" algn="ctr" rotWithShape="0">
+                      <a:schemeClr val="bg2"/>
+                    </a:outerShdw>
+                  </a:effectLst>
+                </a14:hiddenEffects>
+              </a:ext>
+            </a:extLst>
+          </p:spPr>
+        </p:cxnSp>
+        <p:sp>
+          <p:nvSpPr>
+            <p:cNvPr id="25" name="TextBox 24">
+              <a:extLst>
+                <a:ext uri="{FF2B5EF4-FFF2-40B4-BE49-F238E27FC236}">
+                  <a16:creationId xmlns:a16="http://schemas.microsoft.com/office/drawing/2014/main" id="{F2E5D698-30F2-034E-D828-B8B2CCE3FCD8}"/>
+                </a:ext>
+              </a:extLst>
+            </p:cNvPr>
+            <p:cNvSpPr txBox="1"/>
+            <p:nvPr/>
+          </p:nvSpPr>
+          <p:spPr>
+            <a:xfrm>
+              <a:off x="133262" y="4264875"/>
+              <a:ext cx="1496435" cy="492443"/>
+            </a:xfrm>
+            <a:prstGeom prst="rect">
+              <a:avLst/>
+            </a:prstGeom>
+            <a:noFill/>
+            <a:ln>
+              <a:solidFill>
+                <a:schemeClr val="tx1"/>
+              </a:solidFill>
+            </a:ln>
+          </p:spPr>
+          <p:txBody>
+            <a:bodyPr wrap="none" lIns="182880" tIns="137160" rIns="182880" bIns="137160" rtlCol="0">
+              <a:spAutoFit/>
+            </a:bodyPr>
+            <a:lstStyle/>
+            <a:p>
+              <a:r>
+                <a:rPr lang="en-US" sz="1400" b="0" dirty="0">
+                  <a:ea typeface="Tahoma" panose="020B0604030504040204" pitchFamily="34" charset="0"/>
+                  <a:cs typeface="Tahoma" panose="020B0604030504040204" pitchFamily="34" charset="0"/>
+                </a:rPr>
+                <a:t>Priority Queue</a:t>
+              </a:r>
+            </a:p>
+          </p:txBody>
+        </p:sp>
+        <p:cxnSp>
+          <p:nvCxnSpPr>
+            <p:cNvPr id="26" name="Straight Arrow Connector 25">
+              <a:extLst>
+                <a:ext uri="{FF2B5EF4-FFF2-40B4-BE49-F238E27FC236}">
+                  <a16:creationId xmlns:a16="http://schemas.microsoft.com/office/drawing/2014/main" id="{DB25EB27-1738-7382-A918-67720E3E9F1A}"/>
+                </a:ext>
+              </a:extLst>
+            </p:cNvPr>
+            <p:cNvCxnSpPr>
+              <a:stCxn id="25" idx="0"/>
+              <a:endCxn id="16" idx="2"/>
+            </p:cNvCxnSpPr>
+            <p:nvPr/>
+          </p:nvCxnSpPr>
+          <p:spPr bwMode="auto">
+            <a:xfrm flipV="1">
+              <a:off x="881480" y="3520440"/>
+              <a:ext cx="0" cy="744435"/>
+            </a:xfrm>
+            <a:prstGeom prst="straightConnector1">
+              <a:avLst/>
+            </a:prstGeom>
+            <a:solidFill>
+              <a:schemeClr val="accent1"/>
+            </a:solidFill>
+            <a:ln w="28575" cap="flat" cmpd="sng" algn="ctr">
+              <a:solidFill>
+                <a:schemeClr val="tx1"/>
+              </a:solidFill>
+              <a:prstDash val="solid"/>
+              <a:round/>
+              <a:headEnd type="none" w="med" len="med"/>
+              <a:tailEnd type="triangle" w="lg" len="med"/>
+            </a:ln>
+            <a:effectLst/>
+            <a:extLst>
+              <a:ext uri="{AF507438-7753-43E0-B8FC-AC1667EBCBE1}">
+                <a14:hiddenEffects xmlns:a14="http://schemas.microsoft.com/office/drawing/2010/main">
+                  <a:effectLst>
+                    <a:outerShdw dist="35921" dir="2700000" algn="ctr" rotWithShape="0">
+                      <a:schemeClr val="bg2"/>
+                    </a:outerShdw>
+                  </a:effectLst>
+                </a14:hiddenEffects>
+              </a:ext>
+            </a:extLst>
+          </p:spPr>
+        </p:cxnSp>
+        <p:cxnSp>
+          <p:nvCxnSpPr>
+            <p:cNvPr id="29" name="Straight Arrow Connector 28">
+              <a:extLst>
+                <a:ext uri="{FF2B5EF4-FFF2-40B4-BE49-F238E27FC236}">
+                  <a16:creationId xmlns:a16="http://schemas.microsoft.com/office/drawing/2014/main" id="{1892A140-3251-07A1-D97F-50190CDFAAEE}"/>
+                </a:ext>
+              </a:extLst>
+            </p:cNvPr>
+            <p:cNvCxnSpPr/>
+            <p:nvPr/>
+          </p:nvCxnSpPr>
+          <p:spPr bwMode="auto">
+            <a:xfrm flipH="1" flipV="1">
+              <a:off x="2087880" y="2776005"/>
+              <a:ext cx="1346200" cy="994443"/>
+            </a:xfrm>
+            <a:prstGeom prst="straightConnector1">
+              <a:avLst/>
+            </a:prstGeom>
+            <a:solidFill>
+              <a:schemeClr val="accent1"/>
+            </a:solidFill>
+            <a:ln w="28575" cap="flat" cmpd="sng" algn="ctr">
+              <a:solidFill>
+                <a:schemeClr val="tx1"/>
+              </a:solidFill>
+              <a:prstDash val="solid"/>
+              <a:round/>
+              <a:headEnd type="none" w="med" len="med"/>
+              <a:tailEnd type="triangle" w="lg" len="med"/>
+            </a:ln>
+            <a:effectLst/>
+            <a:extLst>
+              <a:ext uri="{AF507438-7753-43E0-B8FC-AC1667EBCBE1}">
+                <a14:hiddenEffects xmlns:a14="http://schemas.microsoft.com/office/drawing/2010/main">
+                  <a:effectLst>
+                    <a:outerShdw dist="35921" dir="2700000" algn="ctr" rotWithShape="0">
+                      <a:schemeClr val="bg2"/>
+                    </a:outerShdw>
+                  </a:effectLst>
+                </a14:hiddenEffects>
+              </a:ext>
+            </a:extLst>
+          </p:spPr>
+        </p:cxnSp>
+        <p:sp>
+          <p:nvSpPr>
+            <p:cNvPr id="38" name="TextBox 37">
+              <a:extLst>
+                <a:ext uri="{FF2B5EF4-FFF2-40B4-BE49-F238E27FC236}">
+                  <a16:creationId xmlns:a16="http://schemas.microsoft.com/office/drawing/2014/main" id="{880FD6F5-68A0-FE2E-3B65-9B8C6669A53C}"/>
+                </a:ext>
+              </a:extLst>
+            </p:cNvPr>
+            <p:cNvSpPr txBox="1"/>
+            <p:nvPr/>
+          </p:nvSpPr>
+          <p:spPr>
+            <a:xfrm>
+              <a:off x="2108716" y="82399"/>
+              <a:ext cx="4916731" cy="461665"/>
+            </a:xfrm>
+            <a:prstGeom prst="rect">
+              <a:avLst/>
+            </a:prstGeom>
+            <a:noFill/>
+          </p:spPr>
+          <p:txBody>
+            <a:bodyPr wrap="none" rtlCol="0">
+              <a:spAutoFit/>
+            </a:bodyPr>
+            <a:lstStyle/>
+            <a:p>
+              <a:r>
+                <a:rPr lang="en-US" sz="2400" dirty="0"/>
+                <a:t>The Java Collections Hierarchy</a:t>
+              </a:r>
+            </a:p>
+          </p:txBody>
+        </p:sp>
       </p:grpSp>
     </p:spTree>
     <p:extLst>
       <p:ext uri="{BB962C8B-B14F-4D97-AF65-F5344CB8AC3E}">
-        <p14:creationId xmlns:p14="http://schemas.microsoft.com/office/powerpoint/2010/main" val="2170331600"/>
+        <p14:creationId xmlns:p14="http://schemas.microsoft.com/office/powerpoint/2010/main" val="1316991132"/>
       </p:ext>
     </p:extLst>
   </p:cSld>
@@ -25156,7 +26499,7 @@
 </p:sld>
 </file>
 
-<file path=ppt/slides/slide24.xml><?xml version="1.0" encoding="utf-8"?>
+<file path=ppt/slides/slide26.xml><?xml version="1.0" encoding="utf-8"?>
 <p:sld xmlns:a="http://schemas.openxmlformats.org/drawingml/2006/main" xmlns:r="http://schemas.openxmlformats.org/officeDocument/2006/relationships" xmlns:p="http://schemas.openxmlformats.org/presentationml/2006/main">
   <p:cSld>
     <p:spTree>
@@ -26078,7 +27421,7 @@
 </p:sld>
 </file>
 
-<file path=ppt/slides/slide25.xml><?xml version="1.0" encoding="utf-8"?>
+<file path=ppt/slides/slide27.xml><?xml version="1.0" encoding="utf-8"?>
 <p:sld xmlns:a="http://schemas.openxmlformats.org/drawingml/2006/main" xmlns:r="http://schemas.openxmlformats.org/officeDocument/2006/relationships" xmlns:p="http://schemas.openxmlformats.org/presentationml/2006/main">
   <p:cSld>
     <p:spTree>
@@ -29268,8 +30611,8 @@
         </p:nvSpPr>
         <p:spPr bwMode="auto">
           <a:xfrm>
-            <a:off x="762000" y="2057400"/>
-            <a:ext cx="6553200" cy="2227263"/>
+            <a:off x="726440" y="2206713"/>
+            <a:ext cx="7691120" cy="1815882"/>
           </a:xfrm>
           <a:prstGeom prst="rect">
             <a:avLst/>
@@ -29309,7 +30652,7 @@
           </a:extLst>
         </p:spPr>
         <p:txBody>
-          <a:bodyPr>
+          <a:bodyPr wrap="square">
             <a:spAutoFit/>
           </a:bodyPr>
           <a:lstStyle>
@@ -29442,7 +30785,7 @@
               <a:buFontTx/>
               <a:buNone/>
             </a:pPr>
-            <a:endParaRPr lang="en-US" altLang="en-US" sz="2800">
+            <a:endParaRPr lang="en-US" altLang="en-US" sz="2800" dirty="0">
               <a:latin typeface="Tahoma" panose="020B0604030504040204" pitchFamily="34" charset="0"/>
             </a:endParaRPr>
           </a:p>
@@ -29455,13 +30798,13 @@
               <a:buNone/>
             </a:pPr>
             <a:r>
-              <a:rPr lang="en-US" altLang="en-US" sz="2800">
+              <a:rPr lang="en-US" altLang="en-US" sz="2800" dirty="0">
                 <a:latin typeface="Tahoma" panose="020B0604030504040204" pitchFamily="34" charset="0"/>
               </a:rPr>
               <a:t>Stack&lt;</a:t>
             </a:r>
             <a:r>
-              <a:rPr lang="en-US" altLang="en-US" sz="2800">
+              <a:rPr lang="en-US" altLang="en-US" sz="2800" dirty="0">
                 <a:solidFill>
                   <a:srgbClr val="009900"/>
                 </a:solidFill>
@@ -29470,10 +30813,10 @@
               <a:t>Integer</a:t>
             </a:r>
             <a:r>
-              <a:rPr lang="en-US" altLang="en-US" sz="2800">
+              <a:rPr lang="en-US" altLang="en-US" sz="2800" dirty="0">
                 <a:latin typeface="Tahoma" panose="020B0604030504040204" pitchFamily="34" charset="0"/>
               </a:rPr>
-              <a:t>&gt; stack;</a:t>
+              <a:t>&gt; stack = new Stack&lt;&gt;();</a:t>
             </a:r>
           </a:p>
           <a:p>
@@ -29484,27 +30827,9 @@
               <a:buFontTx/>
               <a:buNone/>
             </a:pPr>
-            <a:r>
-              <a:rPr lang="en-US" altLang="en-US" sz="2800">
-                <a:latin typeface="Tahoma" panose="020B0604030504040204" pitchFamily="34" charset="0"/>
-              </a:rPr>
-              <a:t>stack = new Stack&lt;</a:t>
-            </a:r>
-            <a:r>
-              <a:rPr lang="en-US" altLang="en-US" sz="2800">
-                <a:solidFill>
-                  <a:srgbClr val="009900"/>
-                </a:solidFill>
-                <a:latin typeface="Tahoma" panose="020B0604030504040204" pitchFamily="34" charset="0"/>
-              </a:rPr>
-              <a:t>Integer</a:t>
-            </a:r>
-            <a:r>
-              <a:rPr lang="en-US" altLang="en-US" sz="2800">
-                <a:latin typeface="Tahoma" panose="020B0604030504040204" pitchFamily="34" charset="0"/>
-              </a:rPr>
-              <a:t>&gt;();</a:t>
-            </a:r>
+            <a:endParaRPr lang="en-US" altLang="en-US" sz="2800" dirty="0">
+              <a:latin typeface="Tahoma" panose="020B0604030504040204" pitchFamily="34" charset="0"/>
+            </a:endParaRPr>
           </a:p>
           <a:p>
             <a:pPr>
@@ -29514,19 +30839,7 @@
               <a:buFontTx/>
               <a:buNone/>
             </a:pPr>
-            <a:endParaRPr lang="en-US" altLang="en-US" sz="2800">
-              <a:latin typeface="Tahoma" panose="020B0604030504040204" pitchFamily="34" charset="0"/>
-            </a:endParaRPr>
-          </a:p>
-          <a:p>
-            <a:pPr>
-              <a:spcBef>
-                <a:spcPct val="0"/>
-              </a:spcBef>
-              <a:buFontTx/>
-              <a:buNone/>
-            </a:pPr>
-            <a:endParaRPr lang="en-US" altLang="en-US" sz="2800">
+            <a:endParaRPr lang="en-US" altLang="en-US" sz="2800" dirty="0">
               <a:latin typeface="Tahoma" panose="020B0604030504040204" pitchFamily="34" charset="0"/>
             </a:endParaRPr>
           </a:p>
@@ -29680,8 +30993,8 @@
         </p:nvSpPr>
         <p:spPr bwMode="auto">
           <a:xfrm>
-            <a:off x="1143000" y="4343400"/>
-            <a:ext cx="3429000" cy="831850"/>
+            <a:off x="1437640" y="4022595"/>
+            <a:ext cx="5877560" cy="461665"/>
           </a:xfrm>
           <a:prstGeom prst="rect">
             <a:avLst/>
@@ -29716,7 +31029,7 @@
           </a:extLst>
         </p:spPr>
         <p:txBody>
-          <a:bodyPr>
+          <a:bodyPr wrap="square">
             <a:spAutoFit/>
           </a:bodyPr>
           <a:lstStyle>
@@ -29850,30 +31163,13 @@
               <a:buNone/>
             </a:pPr>
             <a:r>
-              <a:rPr lang="en-US" altLang="en-US" sz="2400">
+              <a:rPr lang="en-US" altLang="en-US" sz="2400" dirty="0">
                 <a:solidFill>
                   <a:schemeClr val="accent2"/>
                 </a:solidFill>
                 <a:latin typeface="Tahoma" panose="020B0604030504040204" pitchFamily="34" charset="0"/>
               </a:rPr>
-              <a:t>stack will only store</a:t>
-            </a:r>
-            <a:br>
-              <a:rPr lang="en-US" altLang="en-US" sz="2400">
-                <a:solidFill>
-                  <a:schemeClr val="accent2"/>
-                </a:solidFill>
-                <a:latin typeface="Tahoma" panose="020B0604030504040204" pitchFamily="34" charset="0"/>
-              </a:rPr>
-            </a:br>
-            <a:r>
-              <a:rPr lang="en-US" altLang="en-US" sz="2400">
-                <a:solidFill>
-                  <a:schemeClr val="accent2"/>
-                </a:solidFill>
-                <a:latin typeface="Tahoma" panose="020B0604030504040204" pitchFamily="34" charset="0"/>
-              </a:rPr>
-              <a:t>Integer values.</a:t>
+              <a:t>stack will only store Integer values.</a:t>
             </a:r>
           </a:p>
         </p:txBody>

--- a/u06b_stacks/notes/13a.stacks.pptx
+++ b/u06b_stacks/notes/13a.stacks.pptx
@@ -7,39 +7,41 @@
     <p:sldMasterId id="2147483672" r:id="rId3"/>
   </p:sldMasterIdLst>
   <p:notesMasterIdLst>
-    <p:notesMasterId r:id="rId31"/>
+    <p:notesMasterId r:id="rId33"/>
   </p:notesMasterIdLst>
   <p:handoutMasterIdLst>
-    <p:handoutMasterId r:id="rId32"/>
+    <p:handoutMasterId r:id="rId34"/>
   </p:handoutMasterIdLst>
   <p:sldIdLst>
     <p:sldId id="364" r:id="rId4"/>
-    <p:sldId id="365" r:id="rId5"/>
+    <p:sldId id="419" r:id="rId5"/>
     <p:sldId id="405" r:id="rId6"/>
-    <p:sldId id="280" r:id="rId7"/>
-    <p:sldId id="366" r:id="rId8"/>
-    <p:sldId id="367" r:id="rId9"/>
-    <p:sldId id="368" r:id="rId10"/>
-    <p:sldId id="369" r:id="rId11"/>
-    <p:sldId id="370" r:id="rId12"/>
-    <p:sldId id="371" r:id="rId13"/>
-    <p:sldId id="372" r:id="rId14"/>
-    <p:sldId id="410" r:id="rId15"/>
-    <p:sldId id="373" r:id="rId16"/>
-    <p:sldId id="374" r:id="rId17"/>
-    <p:sldId id="376" r:id="rId18"/>
-    <p:sldId id="377" r:id="rId19"/>
-    <p:sldId id="378" r:id="rId20"/>
-    <p:sldId id="381" r:id="rId21"/>
-    <p:sldId id="382" r:id="rId22"/>
-    <p:sldId id="383" r:id="rId23"/>
-    <p:sldId id="417" r:id="rId24"/>
-    <p:sldId id="416" r:id="rId25"/>
-    <p:sldId id="281" r:id="rId26"/>
-    <p:sldId id="384" r:id="rId27"/>
-    <p:sldId id="415" r:id="rId28"/>
-    <p:sldId id="412" r:id="rId29"/>
-    <p:sldId id="411" r:id="rId30"/>
+    <p:sldId id="366" r:id="rId7"/>
+    <p:sldId id="367" r:id="rId8"/>
+    <p:sldId id="368" r:id="rId9"/>
+    <p:sldId id="369" r:id="rId10"/>
+    <p:sldId id="370" r:id="rId11"/>
+    <p:sldId id="371" r:id="rId12"/>
+    <p:sldId id="420" r:id="rId13"/>
+    <p:sldId id="280" r:id="rId14"/>
+    <p:sldId id="372" r:id="rId15"/>
+    <p:sldId id="410" r:id="rId16"/>
+    <p:sldId id="373" r:id="rId17"/>
+    <p:sldId id="374" r:id="rId18"/>
+    <p:sldId id="376" r:id="rId19"/>
+    <p:sldId id="377" r:id="rId20"/>
+    <p:sldId id="418" r:id="rId21"/>
+    <p:sldId id="378" r:id="rId22"/>
+    <p:sldId id="381" r:id="rId23"/>
+    <p:sldId id="382" r:id="rId24"/>
+    <p:sldId id="383" r:id="rId25"/>
+    <p:sldId id="417" r:id="rId26"/>
+    <p:sldId id="416" r:id="rId27"/>
+    <p:sldId id="281" r:id="rId28"/>
+    <p:sldId id="384" r:id="rId29"/>
+    <p:sldId id="415" r:id="rId30"/>
+    <p:sldId id="412" r:id="rId31"/>
+    <p:sldId id="411" r:id="rId32"/>
   </p:sldIdLst>
   <p:sldSz cx="9144000" cy="6858000" type="screen4x3"/>
   <p:notesSz cx="6858000" cy="9144000"/>
@@ -1190,60 +1192,41 @@
       </p:grpSpPr>
       <p:sp>
         <p:nvSpPr>
-          <p:cNvPr id="15362" name="Slide Image Placeholder 1">
-            <a:extLst>
-              <a:ext uri="{FF2B5EF4-FFF2-40B4-BE49-F238E27FC236}">
-                <a16:creationId xmlns:a16="http://schemas.microsoft.com/office/drawing/2014/main" id="{1A350529-E36F-4889-B163-18B3FE6D938E}"/>
-              </a:ext>
-            </a:extLst>
-          </p:cNvPr>
+          <p:cNvPr id="2" name="Slide Image Placeholder 1"/>
           <p:cNvSpPr>
-            <a:spLocks noGrp="1" noRot="1" noChangeAspect="1" noChangeArrowheads="1" noTextEdit="1"/>
+            <a:spLocks noGrp="1" noRot="1" noChangeAspect="1"/>
           </p:cNvSpPr>
           <p:nvPr>
             <p:ph type="sldImg"/>
           </p:nvPr>
         </p:nvSpPr>
-        <p:spPr>
-          <a:ln/>
-        </p:spPr>
+        <p:spPr/>
       </p:sp>
       <p:sp>
         <p:nvSpPr>
-          <p:cNvPr id="15363" name="Notes Placeholder 2">
-            <a:extLst>
-              <a:ext uri="{FF2B5EF4-FFF2-40B4-BE49-F238E27FC236}">
-                <a16:creationId xmlns:a16="http://schemas.microsoft.com/office/drawing/2014/main" id="{B068287B-7129-4C36-ADCF-96C1F7C09799}"/>
-              </a:ext>
-            </a:extLst>
-          </p:cNvPr>
+          <p:cNvPr id="3" name="Notes Placeholder 2"/>
           <p:cNvSpPr>
-            <a:spLocks noGrp="1" noChangeArrowheads="1"/>
+            <a:spLocks noGrp="1"/>
           </p:cNvSpPr>
           <p:nvPr>
             <p:ph type="body" idx="1"/>
           </p:nvPr>
         </p:nvSpPr>
-        <p:spPr>
-          <a:noFill/>
-        </p:spPr>
+        <p:spPr/>
         <p:txBody>
           <a:bodyPr/>
           <a:lstStyle/>
           <a:p>
-            <a:endParaRPr lang="en-US" altLang="en-US"/>
+            <a:r>
+              <a:rPr lang="en-US" dirty="0"/>
+              <a:t>There are also double-ended queues.</a:t>
+            </a:r>
           </a:p>
         </p:txBody>
       </p:sp>
       <p:sp>
         <p:nvSpPr>
-          <p:cNvPr id="15364" name="Slide Number Placeholder 3">
-            <a:extLst>
-              <a:ext uri="{FF2B5EF4-FFF2-40B4-BE49-F238E27FC236}">
-                <a16:creationId xmlns:a16="http://schemas.microsoft.com/office/drawing/2014/main" id="{DEC3EE18-88C6-433D-BB6D-188C19768E76}"/>
-              </a:ext>
-            </a:extLst>
-          </p:cNvPr>
+          <p:cNvPr id="4" name="Slide Number Placeholder 3"/>
           <p:cNvSpPr>
             <a:spLocks noGrp="1"/>
           </p:cNvSpPr>
@@ -1251,144 +1234,26 @@
             <p:ph type="sldNum" sz="quarter" idx="5"/>
           </p:nvPr>
         </p:nvSpPr>
-        <p:spPr>
-          <a:noFill/>
-        </p:spPr>
+        <p:spPr/>
         <p:txBody>
           <a:bodyPr/>
-          <a:lstStyle>
-            <a:lvl1pPr>
-              <a:spcBef>
-                <a:spcPct val="30000"/>
-              </a:spcBef>
-              <a:defRPr sz="1200">
-                <a:solidFill>
-                  <a:schemeClr val="tx1"/>
-                </a:solidFill>
-                <a:latin typeface="Times New Roman" panose="02020603050405020304" pitchFamily="18" charset="0"/>
-              </a:defRPr>
-            </a:lvl1pPr>
-            <a:lvl2pPr marL="742950" indent="-285750">
-              <a:spcBef>
-                <a:spcPct val="30000"/>
-              </a:spcBef>
-              <a:defRPr sz="1200">
-                <a:solidFill>
-                  <a:schemeClr val="tx1"/>
-                </a:solidFill>
-                <a:latin typeface="Times New Roman" panose="02020603050405020304" pitchFamily="18" charset="0"/>
-              </a:defRPr>
-            </a:lvl2pPr>
-            <a:lvl3pPr marL="1143000" indent="-228600">
-              <a:spcBef>
-                <a:spcPct val="30000"/>
-              </a:spcBef>
-              <a:defRPr sz="1200">
-                <a:solidFill>
-                  <a:schemeClr val="tx1"/>
-                </a:solidFill>
-                <a:latin typeface="Times New Roman" panose="02020603050405020304" pitchFamily="18" charset="0"/>
-              </a:defRPr>
-            </a:lvl3pPr>
-            <a:lvl4pPr marL="1600200" indent="-228600">
-              <a:spcBef>
-                <a:spcPct val="30000"/>
-              </a:spcBef>
-              <a:defRPr sz="1200">
-                <a:solidFill>
-                  <a:schemeClr val="tx1"/>
-                </a:solidFill>
-                <a:latin typeface="Times New Roman" panose="02020603050405020304" pitchFamily="18" charset="0"/>
-              </a:defRPr>
-            </a:lvl4pPr>
-            <a:lvl5pPr marL="2057400" indent="-228600">
-              <a:spcBef>
-                <a:spcPct val="30000"/>
-              </a:spcBef>
-              <a:defRPr sz="1200">
-                <a:solidFill>
-                  <a:schemeClr val="tx1"/>
-                </a:solidFill>
-                <a:latin typeface="Times New Roman" panose="02020603050405020304" pitchFamily="18" charset="0"/>
-              </a:defRPr>
-            </a:lvl5pPr>
-            <a:lvl6pPr marL="2514600" indent="-228600" eaLnBrk="0" fontAlgn="base" hangingPunct="0">
-              <a:spcBef>
-                <a:spcPct val="30000"/>
-              </a:spcBef>
-              <a:spcAft>
-                <a:spcPct val="0"/>
-              </a:spcAft>
-              <a:defRPr sz="1200">
-                <a:solidFill>
-                  <a:schemeClr val="tx1"/>
-                </a:solidFill>
-                <a:latin typeface="Times New Roman" panose="02020603050405020304" pitchFamily="18" charset="0"/>
-              </a:defRPr>
-            </a:lvl6pPr>
-            <a:lvl7pPr marL="2971800" indent="-228600" eaLnBrk="0" fontAlgn="base" hangingPunct="0">
-              <a:spcBef>
-                <a:spcPct val="30000"/>
-              </a:spcBef>
-              <a:spcAft>
-                <a:spcPct val="0"/>
-              </a:spcAft>
-              <a:defRPr sz="1200">
-                <a:solidFill>
-                  <a:schemeClr val="tx1"/>
-                </a:solidFill>
-                <a:latin typeface="Times New Roman" panose="02020603050405020304" pitchFamily="18" charset="0"/>
-              </a:defRPr>
-            </a:lvl7pPr>
-            <a:lvl8pPr marL="3429000" indent="-228600" eaLnBrk="0" fontAlgn="base" hangingPunct="0">
-              <a:spcBef>
-                <a:spcPct val="30000"/>
-              </a:spcBef>
-              <a:spcAft>
-                <a:spcPct val="0"/>
-              </a:spcAft>
-              <a:defRPr sz="1200">
-                <a:solidFill>
-                  <a:schemeClr val="tx1"/>
-                </a:solidFill>
-                <a:latin typeface="Times New Roman" panose="02020603050405020304" pitchFamily="18" charset="0"/>
-              </a:defRPr>
-            </a:lvl8pPr>
-            <a:lvl9pPr marL="3886200" indent="-228600" eaLnBrk="0" fontAlgn="base" hangingPunct="0">
-              <a:spcBef>
-                <a:spcPct val="30000"/>
-              </a:spcBef>
-              <a:spcAft>
-                <a:spcPct val="0"/>
-              </a:spcAft>
-              <a:defRPr sz="1200">
-                <a:solidFill>
-                  <a:schemeClr val="tx1"/>
-                </a:solidFill>
-                <a:latin typeface="Times New Roman" panose="02020603050405020304" pitchFamily="18" charset="0"/>
-              </a:defRPr>
-            </a:lvl9pPr>
-          </a:lstStyle>
-          <a:p>
-            <a:pPr>
-              <a:spcBef>
-                <a:spcPct val="0"/>
-              </a:spcBef>
-            </a:pPr>
-            <a:fld id="{B5814832-7AD3-4C5E-ABEB-536F3923124F}" type="slidenum">
-              <a:rPr lang="en-US" altLang="en-US"/>
-              <a:pPr>
-                <a:spcBef>
-                  <a:spcPct val="0"/>
-                </a:spcBef>
-              </a:pPr>
-              <a:t>13</a:t>
+          <a:lstStyle/>
+          <a:p>
+            <a:fld id="{F5888543-F783-4CDD-8E9B-E513FF49708B}" type="slidenum">
+              <a:rPr lang="en-US" altLang="en-US" smtClean="0"/>
+              <a:pPr/>
+              <a:t>10</a:t>
             </a:fld>
             <a:endParaRPr lang="en-US" altLang="en-US"/>
           </a:p>
         </p:txBody>
       </p:sp>
     </p:spTree>
+    <p:extLst>
+      <p:ext uri="{BB962C8B-B14F-4D97-AF65-F5344CB8AC3E}">
+        <p14:creationId xmlns:p14="http://schemas.microsoft.com/office/powerpoint/2010/main" val="1312019279"/>
+      </p:ext>
+    </p:extLst>
   </p:cSld>
   <p:clrMapOvr>
     <a:masterClrMapping/>
@@ -1440,39 +1305,6 @@
           <a:bodyPr/>
           <a:lstStyle/>
           <a:p>
-            <a:pPr algn="l">
-              <a:spcAft>
-                <a:spcPts val="750"/>
-              </a:spcAft>
-              <a:buNone/>
-            </a:pPr>
-            <a:r>
-              <a:rPr lang="en-US" b="0" i="0" dirty="0">
-                <a:solidFill>
-                  <a:srgbClr val="0A0A0A"/>
-                </a:solidFill>
-                <a:effectLst/>
-                <a:latin typeface="Google Sans"/>
-              </a:rPr>
-              <a:t>First-In, First-Out (FIFO) means that the first item added to the queue is the first one to be processed or removed.</a:t>
-            </a:r>
-          </a:p>
-          <a:p>
-            <a:pPr>
-              <a:buNone/>
-            </a:pPr>
-            <a:br>
-              <a:rPr lang="en-US" b="0" i="0" dirty="0">
-                <a:solidFill>
-                  <a:srgbClr val="0A0A0A"/>
-                </a:solidFill>
-                <a:effectLst/>
-                <a:latin typeface="Google Sans"/>
-              </a:rPr>
-            </a:br>
-            <a:endParaRPr lang="en-US" dirty="0"/>
-          </a:p>
-          <a:p>
             <a:endParaRPr lang="en-US" dirty="0"/>
           </a:p>
         </p:txBody>
@@ -1495,7 +1327,350 @@
             <a:fld id="{F5888543-F783-4CDD-8E9B-E513FF49708B}" type="slidenum">
               <a:rPr lang="en-US" altLang="en-US" smtClean="0"/>
               <a:pPr/>
-              <a:t>21</a:t>
+              <a:t>11</a:t>
+            </a:fld>
+            <a:endParaRPr lang="en-US" altLang="en-US"/>
+          </a:p>
+        </p:txBody>
+      </p:sp>
+    </p:spTree>
+    <p:extLst>
+      <p:ext uri="{BB962C8B-B14F-4D97-AF65-F5344CB8AC3E}">
+        <p14:creationId xmlns:p14="http://schemas.microsoft.com/office/powerpoint/2010/main" val="2718450282"/>
+      </p:ext>
+    </p:extLst>
+  </p:cSld>
+  <p:clrMapOvr>
+    <a:masterClrMapping/>
+  </p:clrMapOvr>
+</p:notes>
+</file>
+
+<file path=ppt/notesSlides/notesSlide3.xml><?xml version="1.0" encoding="utf-8"?>
+<p:notes xmlns:a="http://schemas.openxmlformats.org/drawingml/2006/main" xmlns:r="http://schemas.openxmlformats.org/officeDocument/2006/relationships" xmlns:p="http://schemas.openxmlformats.org/presentationml/2006/main">
+  <p:cSld>
+    <p:spTree>
+      <p:nvGrpSpPr>
+        <p:cNvPr id="1" name=""/>
+        <p:cNvGrpSpPr/>
+        <p:nvPr/>
+      </p:nvGrpSpPr>
+      <p:grpSpPr>
+        <a:xfrm>
+          <a:off x="0" y="0"/>
+          <a:ext cx="0" cy="0"/>
+          <a:chOff x="0" y="0"/>
+          <a:chExt cx="0" cy="0"/>
+        </a:xfrm>
+      </p:grpSpPr>
+      <p:sp>
+        <p:nvSpPr>
+          <p:cNvPr id="15362" name="Slide Image Placeholder 1">
+            <a:extLst>
+              <a:ext uri="{FF2B5EF4-FFF2-40B4-BE49-F238E27FC236}">
+                <a16:creationId xmlns:a16="http://schemas.microsoft.com/office/drawing/2014/main" id="{1A350529-E36F-4889-B163-18B3FE6D938E}"/>
+              </a:ext>
+            </a:extLst>
+          </p:cNvPr>
+          <p:cNvSpPr>
+            <a:spLocks noGrp="1" noRot="1" noChangeAspect="1" noChangeArrowheads="1" noTextEdit="1"/>
+          </p:cNvSpPr>
+          <p:nvPr>
+            <p:ph type="sldImg"/>
+          </p:nvPr>
+        </p:nvSpPr>
+        <p:spPr>
+          <a:ln/>
+        </p:spPr>
+      </p:sp>
+      <p:sp>
+        <p:nvSpPr>
+          <p:cNvPr id="15363" name="Notes Placeholder 2">
+            <a:extLst>
+              <a:ext uri="{FF2B5EF4-FFF2-40B4-BE49-F238E27FC236}">
+                <a16:creationId xmlns:a16="http://schemas.microsoft.com/office/drawing/2014/main" id="{B068287B-7129-4C36-ADCF-96C1F7C09799}"/>
+              </a:ext>
+            </a:extLst>
+          </p:cNvPr>
+          <p:cNvSpPr>
+            <a:spLocks noGrp="1" noChangeArrowheads="1"/>
+          </p:cNvSpPr>
+          <p:nvPr>
+            <p:ph type="body" idx="1"/>
+          </p:nvPr>
+        </p:nvSpPr>
+        <p:spPr>
+          <a:noFill/>
+        </p:spPr>
+        <p:txBody>
+          <a:bodyPr/>
+          <a:lstStyle/>
+          <a:p>
+            <a:endParaRPr lang="en-US" altLang="en-US"/>
+          </a:p>
+        </p:txBody>
+      </p:sp>
+      <p:sp>
+        <p:nvSpPr>
+          <p:cNvPr id="15364" name="Slide Number Placeholder 3">
+            <a:extLst>
+              <a:ext uri="{FF2B5EF4-FFF2-40B4-BE49-F238E27FC236}">
+                <a16:creationId xmlns:a16="http://schemas.microsoft.com/office/drawing/2014/main" id="{DEC3EE18-88C6-433D-BB6D-188C19768E76}"/>
+              </a:ext>
+            </a:extLst>
+          </p:cNvPr>
+          <p:cNvSpPr>
+            <a:spLocks noGrp="1"/>
+          </p:cNvSpPr>
+          <p:nvPr>
+            <p:ph type="sldNum" sz="quarter" idx="5"/>
+          </p:nvPr>
+        </p:nvSpPr>
+        <p:spPr>
+          <a:noFill/>
+        </p:spPr>
+        <p:txBody>
+          <a:bodyPr/>
+          <a:lstStyle>
+            <a:lvl1pPr>
+              <a:spcBef>
+                <a:spcPct val="30000"/>
+              </a:spcBef>
+              <a:defRPr sz="1200">
+                <a:solidFill>
+                  <a:schemeClr val="tx1"/>
+                </a:solidFill>
+                <a:latin typeface="Times New Roman" panose="02020603050405020304" pitchFamily="18" charset="0"/>
+              </a:defRPr>
+            </a:lvl1pPr>
+            <a:lvl2pPr marL="742950" indent="-285750">
+              <a:spcBef>
+                <a:spcPct val="30000"/>
+              </a:spcBef>
+              <a:defRPr sz="1200">
+                <a:solidFill>
+                  <a:schemeClr val="tx1"/>
+                </a:solidFill>
+                <a:latin typeface="Times New Roman" panose="02020603050405020304" pitchFamily="18" charset="0"/>
+              </a:defRPr>
+            </a:lvl2pPr>
+            <a:lvl3pPr marL="1143000" indent="-228600">
+              <a:spcBef>
+                <a:spcPct val="30000"/>
+              </a:spcBef>
+              <a:defRPr sz="1200">
+                <a:solidFill>
+                  <a:schemeClr val="tx1"/>
+                </a:solidFill>
+                <a:latin typeface="Times New Roman" panose="02020603050405020304" pitchFamily="18" charset="0"/>
+              </a:defRPr>
+            </a:lvl3pPr>
+            <a:lvl4pPr marL="1600200" indent="-228600">
+              <a:spcBef>
+                <a:spcPct val="30000"/>
+              </a:spcBef>
+              <a:defRPr sz="1200">
+                <a:solidFill>
+                  <a:schemeClr val="tx1"/>
+                </a:solidFill>
+                <a:latin typeface="Times New Roman" panose="02020603050405020304" pitchFamily="18" charset="0"/>
+              </a:defRPr>
+            </a:lvl4pPr>
+            <a:lvl5pPr marL="2057400" indent="-228600">
+              <a:spcBef>
+                <a:spcPct val="30000"/>
+              </a:spcBef>
+              <a:defRPr sz="1200">
+                <a:solidFill>
+                  <a:schemeClr val="tx1"/>
+                </a:solidFill>
+                <a:latin typeface="Times New Roman" panose="02020603050405020304" pitchFamily="18" charset="0"/>
+              </a:defRPr>
+            </a:lvl5pPr>
+            <a:lvl6pPr marL="2514600" indent="-228600" eaLnBrk="0" fontAlgn="base" hangingPunct="0">
+              <a:spcBef>
+                <a:spcPct val="30000"/>
+              </a:spcBef>
+              <a:spcAft>
+                <a:spcPct val="0"/>
+              </a:spcAft>
+              <a:defRPr sz="1200">
+                <a:solidFill>
+                  <a:schemeClr val="tx1"/>
+                </a:solidFill>
+                <a:latin typeface="Times New Roman" panose="02020603050405020304" pitchFamily="18" charset="0"/>
+              </a:defRPr>
+            </a:lvl6pPr>
+            <a:lvl7pPr marL="2971800" indent="-228600" eaLnBrk="0" fontAlgn="base" hangingPunct="0">
+              <a:spcBef>
+                <a:spcPct val="30000"/>
+              </a:spcBef>
+              <a:spcAft>
+                <a:spcPct val="0"/>
+              </a:spcAft>
+              <a:defRPr sz="1200">
+                <a:solidFill>
+                  <a:schemeClr val="tx1"/>
+                </a:solidFill>
+                <a:latin typeface="Times New Roman" panose="02020603050405020304" pitchFamily="18" charset="0"/>
+              </a:defRPr>
+            </a:lvl7pPr>
+            <a:lvl8pPr marL="3429000" indent="-228600" eaLnBrk="0" fontAlgn="base" hangingPunct="0">
+              <a:spcBef>
+                <a:spcPct val="30000"/>
+              </a:spcBef>
+              <a:spcAft>
+                <a:spcPct val="0"/>
+              </a:spcAft>
+              <a:defRPr sz="1200">
+                <a:solidFill>
+                  <a:schemeClr val="tx1"/>
+                </a:solidFill>
+                <a:latin typeface="Times New Roman" panose="02020603050405020304" pitchFamily="18" charset="0"/>
+              </a:defRPr>
+            </a:lvl8pPr>
+            <a:lvl9pPr marL="3886200" indent="-228600" eaLnBrk="0" fontAlgn="base" hangingPunct="0">
+              <a:spcBef>
+                <a:spcPct val="30000"/>
+              </a:spcBef>
+              <a:spcAft>
+                <a:spcPct val="0"/>
+              </a:spcAft>
+              <a:defRPr sz="1200">
+                <a:solidFill>
+                  <a:schemeClr val="tx1"/>
+                </a:solidFill>
+                <a:latin typeface="Times New Roman" panose="02020603050405020304" pitchFamily="18" charset="0"/>
+              </a:defRPr>
+            </a:lvl9pPr>
+          </a:lstStyle>
+          <a:p>
+            <a:pPr>
+              <a:spcBef>
+                <a:spcPct val="0"/>
+              </a:spcBef>
+            </a:pPr>
+            <a:fld id="{B5814832-7AD3-4C5E-ABEB-536F3923124F}" type="slidenum">
+              <a:rPr lang="en-US" altLang="en-US"/>
+              <a:pPr>
+                <a:spcBef>
+                  <a:spcPct val="0"/>
+                </a:spcBef>
+              </a:pPr>
+              <a:t>14</a:t>
+            </a:fld>
+            <a:endParaRPr lang="en-US" altLang="en-US"/>
+          </a:p>
+        </p:txBody>
+      </p:sp>
+    </p:spTree>
+  </p:cSld>
+  <p:clrMapOvr>
+    <a:masterClrMapping/>
+  </p:clrMapOvr>
+</p:notes>
+</file>
+
+<file path=ppt/notesSlides/notesSlide4.xml><?xml version="1.0" encoding="utf-8"?>
+<p:notes xmlns:a="http://schemas.openxmlformats.org/drawingml/2006/main" xmlns:r="http://schemas.openxmlformats.org/officeDocument/2006/relationships" xmlns:p="http://schemas.openxmlformats.org/presentationml/2006/main">
+  <p:cSld>
+    <p:spTree>
+      <p:nvGrpSpPr>
+        <p:cNvPr id="1" name=""/>
+        <p:cNvGrpSpPr/>
+        <p:nvPr/>
+      </p:nvGrpSpPr>
+      <p:grpSpPr>
+        <a:xfrm>
+          <a:off x="0" y="0"/>
+          <a:ext cx="0" cy="0"/>
+          <a:chOff x="0" y="0"/>
+          <a:chExt cx="0" cy="0"/>
+        </a:xfrm>
+      </p:grpSpPr>
+      <p:sp>
+        <p:nvSpPr>
+          <p:cNvPr id="2" name="Slide Image Placeholder 1"/>
+          <p:cNvSpPr>
+            <a:spLocks noGrp="1" noRot="1" noChangeAspect="1"/>
+          </p:cNvSpPr>
+          <p:nvPr>
+            <p:ph type="sldImg"/>
+          </p:nvPr>
+        </p:nvSpPr>
+        <p:spPr/>
+      </p:sp>
+      <p:sp>
+        <p:nvSpPr>
+          <p:cNvPr id="3" name="Notes Placeholder 2"/>
+          <p:cNvSpPr>
+            <a:spLocks noGrp="1"/>
+          </p:cNvSpPr>
+          <p:nvPr>
+            <p:ph type="body" idx="1"/>
+          </p:nvPr>
+        </p:nvSpPr>
+        <p:spPr/>
+        <p:txBody>
+          <a:bodyPr/>
+          <a:lstStyle/>
+          <a:p>
+            <a:pPr algn="l">
+              <a:spcAft>
+                <a:spcPts val="750"/>
+              </a:spcAft>
+              <a:buNone/>
+            </a:pPr>
+            <a:r>
+              <a:rPr lang="en-US" b="0" i="0" dirty="0">
+                <a:solidFill>
+                  <a:srgbClr val="0A0A0A"/>
+                </a:solidFill>
+                <a:effectLst/>
+                <a:latin typeface="Google Sans"/>
+              </a:rPr>
+              <a:t>First-In, First-Out (FIFO) means that the first item added to the queue is the first one to be processed or removed.</a:t>
+            </a:r>
+          </a:p>
+          <a:p>
+            <a:pPr>
+              <a:buNone/>
+            </a:pPr>
+            <a:br>
+              <a:rPr lang="en-US" b="0" i="0" dirty="0">
+                <a:solidFill>
+                  <a:srgbClr val="0A0A0A"/>
+                </a:solidFill>
+                <a:effectLst/>
+                <a:latin typeface="Google Sans"/>
+              </a:rPr>
+            </a:br>
+            <a:endParaRPr lang="en-US" dirty="0"/>
+          </a:p>
+          <a:p>
+            <a:endParaRPr lang="en-US" dirty="0"/>
+          </a:p>
+        </p:txBody>
+      </p:sp>
+      <p:sp>
+        <p:nvSpPr>
+          <p:cNvPr id="4" name="Slide Number Placeholder 3"/>
+          <p:cNvSpPr>
+            <a:spLocks noGrp="1"/>
+          </p:cNvSpPr>
+          <p:nvPr>
+            <p:ph type="sldNum" sz="quarter" idx="5"/>
+          </p:nvPr>
+        </p:nvSpPr>
+        <p:spPr/>
+        <p:txBody>
+          <a:bodyPr/>
+          <a:lstStyle/>
+          <a:p>
+            <a:fld id="{F5888543-F783-4CDD-8E9B-E513FF49708B}" type="slidenum">
+              <a:rPr lang="en-US" altLang="en-US" smtClean="0"/>
+              <a:pPr/>
+              <a:t>23</a:t>
             </a:fld>
             <a:endParaRPr lang="en-US" altLang="en-US"/>
           </a:p>
@@ -14774,7 +14949,13 @@
   <p:cSld>
     <p:spTree>
       <p:nvGrpSpPr>
-        <p:cNvPr id="1" name=""/>
+        <p:cNvPr id="1" name="">
+          <a:extLst>
+            <a:ext uri="{FF2B5EF4-FFF2-40B4-BE49-F238E27FC236}">
+              <a16:creationId xmlns:a16="http://schemas.microsoft.com/office/drawing/2014/main" id="{AED68F06-B7D7-C385-8D4B-33756370E96B}"/>
+            </a:ext>
+          </a:extLst>
+        </p:cNvPr>
         <p:cNvGrpSpPr/>
         <p:nvPr/>
       </p:nvGrpSpPr>
@@ -14788,204 +14969,10 @@
       </p:grpSpPr>
       <p:sp>
         <p:nvSpPr>
-          <p:cNvPr id="12290" name="Footer Placeholder 3">
+          <p:cNvPr id="5123" name="Text Box 2">
             <a:extLst>
               <a:ext uri="{FF2B5EF4-FFF2-40B4-BE49-F238E27FC236}">
-                <a16:creationId xmlns:a16="http://schemas.microsoft.com/office/drawing/2014/main" id="{136C3C54-91F7-4335-A21C-71C13068E663}"/>
-              </a:ext>
-            </a:extLst>
-          </p:cNvPr>
-          <p:cNvSpPr>
-            <a:spLocks noGrp="1"/>
-          </p:cNvSpPr>
-          <p:nvPr>
-            <p:ph type="ftr" sz="quarter" idx="12"/>
-          </p:nvPr>
-        </p:nvSpPr>
-        <p:spPr>
-          <a:noFill/>
-        </p:spPr>
-        <p:txBody>
-          <a:bodyPr/>
-          <a:lstStyle>
-            <a:lvl1pPr>
-              <a:spcBef>
-                <a:spcPct val="20000"/>
-              </a:spcBef>
-              <a:buChar char="•"/>
-              <a:defRPr sz="3200">
-                <a:solidFill>
-                  <a:schemeClr val="tx1"/>
-                </a:solidFill>
-                <a:latin typeface="Times New Roman" panose="02020603050405020304" pitchFamily="18" charset="0"/>
-              </a:defRPr>
-            </a:lvl1pPr>
-            <a:lvl2pPr marL="742950" indent="-285750">
-              <a:spcBef>
-                <a:spcPct val="20000"/>
-              </a:spcBef>
-              <a:buChar char="–"/>
-              <a:defRPr sz="2800">
-                <a:solidFill>
-                  <a:schemeClr val="tx1"/>
-                </a:solidFill>
-                <a:latin typeface="Times New Roman" panose="02020603050405020304" pitchFamily="18" charset="0"/>
-              </a:defRPr>
-            </a:lvl2pPr>
-            <a:lvl3pPr marL="1143000" indent="-228600">
-              <a:spcBef>
-                <a:spcPct val="20000"/>
-              </a:spcBef>
-              <a:buChar char="•"/>
-              <a:defRPr sz="2400">
-                <a:solidFill>
-                  <a:schemeClr val="tx1"/>
-                </a:solidFill>
-                <a:latin typeface="Times New Roman" panose="02020603050405020304" pitchFamily="18" charset="0"/>
-              </a:defRPr>
-            </a:lvl3pPr>
-            <a:lvl4pPr marL="1600200" indent="-228600">
-              <a:spcBef>
-                <a:spcPct val="20000"/>
-              </a:spcBef>
-              <a:buChar char="–"/>
-              <a:defRPr sz="2000">
-                <a:solidFill>
-                  <a:schemeClr val="tx1"/>
-                </a:solidFill>
-                <a:latin typeface="Times New Roman" panose="02020603050405020304" pitchFamily="18" charset="0"/>
-              </a:defRPr>
-            </a:lvl4pPr>
-            <a:lvl5pPr marL="2057400" indent="-228600">
-              <a:spcBef>
-                <a:spcPct val="20000"/>
-              </a:spcBef>
-              <a:buChar char="»"/>
-              <a:defRPr sz="2000">
-                <a:solidFill>
-                  <a:schemeClr val="tx1"/>
-                </a:solidFill>
-                <a:latin typeface="Times New Roman" panose="02020603050405020304" pitchFamily="18" charset="0"/>
-              </a:defRPr>
-            </a:lvl5pPr>
-            <a:lvl6pPr marL="2514600" indent="-228600" eaLnBrk="0" fontAlgn="base" hangingPunct="0">
-              <a:spcBef>
-                <a:spcPct val="20000"/>
-              </a:spcBef>
-              <a:spcAft>
-                <a:spcPct val="0"/>
-              </a:spcAft>
-              <a:buChar char="»"/>
-              <a:defRPr sz="2000">
-                <a:solidFill>
-                  <a:schemeClr val="tx1"/>
-                </a:solidFill>
-                <a:latin typeface="Times New Roman" panose="02020603050405020304" pitchFamily="18" charset="0"/>
-              </a:defRPr>
-            </a:lvl6pPr>
-            <a:lvl7pPr marL="2971800" indent="-228600" eaLnBrk="0" fontAlgn="base" hangingPunct="0">
-              <a:spcBef>
-                <a:spcPct val="20000"/>
-              </a:spcBef>
-              <a:spcAft>
-                <a:spcPct val="0"/>
-              </a:spcAft>
-              <a:buChar char="»"/>
-              <a:defRPr sz="2000">
-                <a:solidFill>
-                  <a:schemeClr val="tx1"/>
-                </a:solidFill>
-                <a:latin typeface="Times New Roman" panose="02020603050405020304" pitchFamily="18" charset="0"/>
-              </a:defRPr>
-            </a:lvl7pPr>
-            <a:lvl8pPr marL="3429000" indent="-228600" eaLnBrk="0" fontAlgn="base" hangingPunct="0">
-              <a:spcBef>
-                <a:spcPct val="20000"/>
-              </a:spcBef>
-              <a:spcAft>
-                <a:spcPct val="0"/>
-              </a:spcAft>
-              <a:buChar char="»"/>
-              <a:defRPr sz="2000">
-                <a:solidFill>
-                  <a:schemeClr val="tx1"/>
-                </a:solidFill>
-                <a:latin typeface="Times New Roman" panose="02020603050405020304" pitchFamily="18" charset="0"/>
-              </a:defRPr>
-            </a:lvl8pPr>
-            <a:lvl9pPr marL="3886200" indent="-228600" eaLnBrk="0" fontAlgn="base" hangingPunct="0">
-              <a:spcBef>
-                <a:spcPct val="20000"/>
-              </a:spcBef>
-              <a:spcAft>
-                <a:spcPct val="0"/>
-              </a:spcAft>
-              <a:buChar char="»"/>
-              <a:defRPr sz="2000">
-                <a:solidFill>
-                  <a:schemeClr val="tx1"/>
-                </a:solidFill>
-                <a:latin typeface="Times New Roman" panose="02020603050405020304" pitchFamily="18" charset="0"/>
-              </a:defRPr>
-            </a:lvl9pPr>
-          </a:lstStyle>
-          <a:p>
-            <a:pPr>
-              <a:spcBef>
-                <a:spcPct val="0"/>
-              </a:spcBef>
-              <a:buFontTx/>
-              <a:buNone/>
-            </a:pPr>
-            <a:endParaRPr lang="en-US" altLang="en-US" sz="800"/>
-          </a:p>
-          <a:p>
-            <a:pPr>
-              <a:spcBef>
-                <a:spcPct val="0"/>
-              </a:spcBef>
-              <a:buFontTx/>
-              <a:buNone/>
-            </a:pPr>
-            <a:endParaRPr lang="en-US" altLang="en-US" sz="800" b="0">
-              <a:latin typeface="Tahoma" panose="020B0604030504040204" pitchFamily="34" charset="0"/>
-            </a:endParaRPr>
-          </a:p>
-          <a:p>
-            <a:pPr>
-              <a:spcBef>
-                <a:spcPct val="0"/>
-              </a:spcBef>
-              <a:buFontTx/>
-              <a:buNone/>
-            </a:pPr>
-            <a:endParaRPr lang="en-US" altLang="en-US" sz="800">
-              <a:latin typeface="Tahoma" panose="020B0604030504040204" pitchFamily="34" charset="0"/>
-            </a:endParaRPr>
-          </a:p>
-          <a:p>
-            <a:pPr>
-              <a:spcBef>
-                <a:spcPct val="0"/>
-              </a:spcBef>
-              <a:buFontTx/>
-              <a:buNone/>
-            </a:pPr>
-            <a:r>
-              <a:rPr lang="en-US" altLang="en-US" sz="800">
-                <a:latin typeface="Tahoma" panose="020B0604030504040204" pitchFamily="34" charset="0"/>
-              </a:rPr>
-              <a:t>© A+ Computer Science  -  www.apluscompsci.com</a:t>
-            </a:r>
-          </a:p>
-        </p:txBody>
-      </p:sp>
-      <p:sp>
-        <p:nvSpPr>
-          <p:cNvPr id="12291" name="Text Box 2">
-            <a:extLst>
-              <a:ext uri="{FF2B5EF4-FFF2-40B4-BE49-F238E27FC236}">
-                <a16:creationId xmlns:a16="http://schemas.microsoft.com/office/drawing/2014/main" id="{DB477874-A6DB-4826-8A10-55A80C7443C6}"/>
+                <a16:creationId xmlns:a16="http://schemas.microsoft.com/office/drawing/2014/main" id="{00D4AEE4-9555-6401-68DD-7D23FB5493F4}"/>
               </a:ext>
             </a:extLst>
           </p:cNvPr>
@@ -14996,8 +14983,8 @@
         </p:nvSpPr>
         <p:spPr bwMode="auto">
           <a:xfrm>
-            <a:off x="1066800" y="2667000"/>
-            <a:ext cx="2359025" cy="946150"/>
+            <a:off x="315635" y="238438"/>
+            <a:ext cx="8828364" cy="890115"/>
           </a:xfrm>
           <a:prstGeom prst="rect">
             <a:avLst/>
@@ -15037,7 +15024,7 @@
           </a:extLst>
         </p:spPr>
         <p:txBody>
-          <a:bodyPr wrap="none">
+          <a:bodyPr wrap="square">
             <a:spAutoFit/>
           </a:bodyPr>
           <a:lstStyle>
@@ -15164,236 +15151,352 @@
           </a:lstStyle>
           <a:p>
             <a:pPr>
+              <a:lnSpc>
+                <a:spcPct val="150000"/>
+              </a:lnSpc>
               <a:spcBef>
                 <a:spcPct val="0"/>
               </a:spcBef>
               <a:buFontTx/>
               <a:buNone/>
             </a:pPr>
-            <a:endParaRPr lang="en-US" altLang="en-US" sz="2800">
-              <a:latin typeface="Tahoma" panose="020B0604030504040204" pitchFamily="34" charset="0"/>
-            </a:endParaRPr>
-          </a:p>
-          <a:p>
-            <a:pPr>
-              <a:spcBef>
-                <a:spcPct val="0"/>
-              </a:spcBef>
-              <a:buFontTx/>
-              <a:buNone/>
-            </a:pPr>
-            <a:r>
-              <a:rPr lang="en-US" altLang="en-US" sz="2800">
+            <a:r>
+              <a:rPr lang="en-US" altLang="en-US" sz="4000" dirty="0">
+                <a:solidFill>
+                  <a:srgbClr val="009900"/>
+                </a:solidFill>
                 <a:latin typeface="Tahoma" panose="020B0604030504040204" pitchFamily="34" charset="0"/>
               </a:rPr>
-              <a:t>stack.pop();</a:t>
+              <a:t>Stack (LIFO)          Queue (FIFO)</a:t>
             </a:r>
           </a:p>
         </p:txBody>
       </p:sp>
-      <p:sp>
-        <p:nvSpPr>
-          <p:cNvPr id="12292" name="Text Box 3">
+      <p:pic>
+        <p:nvPicPr>
+          <p:cNvPr id="1026" name="Picture 2">
             <a:extLst>
               <a:ext uri="{FF2B5EF4-FFF2-40B4-BE49-F238E27FC236}">
-                <a16:creationId xmlns:a16="http://schemas.microsoft.com/office/drawing/2014/main" id="{4F2E58D4-6A68-4584-8205-097A5F221026}"/>
+                <a16:creationId xmlns:a16="http://schemas.microsoft.com/office/drawing/2014/main" id="{3D86002A-6BF7-DCCE-9B66-7D7B8DEB7657}"/>
               </a:ext>
             </a:extLst>
           </p:cNvPr>
-          <p:cNvSpPr txBox="1">
-            <a:spLocks noChangeArrowheads="1"/>
-          </p:cNvSpPr>
+          <p:cNvPicPr>
+            <a:picLocks noChangeAspect="1" noChangeArrowheads="1"/>
+          </p:cNvPicPr>
           <p:nvPr/>
-        </p:nvSpPr>
+        </p:nvPicPr>
+        <p:blipFill rotWithShape="1">
+          <a:blip r:embed="rId3">
+            <a:extLst>
+              <a:ext uri="{28A0092B-C50C-407E-A947-70E740481C1C}">
+                <a14:useLocalDpi xmlns:a14="http://schemas.microsoft.com/office/drawing/2010/main" val="0"/>
+              </a:ext>
+            </a:extLst>
+          </a:blip>
+          <a:srcRect l="5605" t="10617" r="58715"/>
+          <a:stretch>
+            <a:fillRect/>
+          </a:stretch>
+        </p:blipFill>
         <p:spPr bwMode="auto">
           <a:xfrm>
-            <a:off x="1143000" y="4343400"/>
-            <a:ext cx="3048000" cy="1196975"/>
+            <a:off x="157819" y="1640734"/>
+            <a:ext cx="3750671" cy="4096187"/>
           </a:xfrm>
           <a:prstGeom prst="rect">
             <a:avLst/>
           </a:prstGeom>
           <a:noFill/>
-          <a:ln w="9525">
-            <a:solidFill>
-              <a:schemeClr val="accent2"/>
-            </a:solidFill>
-            <a:miter lim="800000"/>
-            <a:headEnd/>
-            <a:tailEnd/>
-          </a:ln>
-          <a:effectLst/>
           <a:extLst>
             <a:ext uri="{909E8E84-426E-40DD-AFC4-6F175D3DCCD1}">
               <a14:hiddenFill xmlns:a14="http://schemas.microsoft.com/office/drawing/2010/main">
                 <a:solidFill>
-                  <a:schemeClr val="accent1"/>
+                  <a:srgbClr val="FFFFFF"/>
                 </a:solidFill>
               </a14:hiddenFill>
-            </a:ext>
-            <a:ext uri="{AF507438-7753-43E0-B8FC-AC1667EBCBE1}">
-              <a14:hiddenEffects xmlns:a14="http://schemas.microsoft.com/office/drawing/2010/main">
-                <a:effectLst>
-                  <a:outerShdw dist="35921" dir="2700000" algn="ctr" rotWithShape="0">
-                    <a:schemeClr val="bg2"/>
-                  </a:outerShdw>
-                </a:effectLst>
-              </a14:hiddenEffects>
             </a:ext>
           </a:extLst>
         </p:spPr>
+      </p:pic>
+      <p:pic>
+        <p:nvPicPr>
+          <p:cNvPr id="2" name="Picture 2">
+            <a:extLst>
+              <a:ext uri="{FF2B5EF4-FFF2-40B4-BE49-F238E27FC236}">
+                <a16:creationId xmlns:a16="http://schemas.microsoft.com/office/drawing/2014/main" id="{F8E4D6DF-817F-CE60-E13D-BDEF601AFF3B}"/>
+              </a:ext>
+            </a:extLst>
+          </p:cNvPr>
+          <p:cNvPicPr>
+            <a:picLocks noChangeAspect="1" noChangeArrowheads="1"/>
+          </p:cNvPicPr>
+          <p:nvPr/>
+        </p:nvPicPr>
+        <p:blipFill rotWithShape="1">
+          <a:blip r:embed="rId3">
+            <a:extLst>
+              <a:ext uri="{28A0092B-C50C-407E-A947-70E740481C1C}">
+                <a14:useLocalDpi xmlns:a14="http://schemas.microsoft.com/office/drawing/2010/main" val="0"/>
+              </a:ext>
+            </a:extLst>
+          </a:blip>
+          <a:srcRect l="61486" t="10617"/>
+          <a:stretch>
+            <a:fillRect/>
+          </a:stretch>
+        </p:blipFill>
+        <p:spPr bwMode="auto">
+          <a:xfrm>
+            <a:off x="4807791" y="1333341"/>
+            <a:ext cx="4048678" cy="4096187"/>
+          </a:xfrm>
+          <a:prstGeom prst="rect">
+            <a:avLst/>
+          </a:prstGeom>
+          <a:noFill/>
+          <a:extLst>
+            <a:ext uri="{909E8E84-426E-40DD-AFC4-6F175D3DCCD1}">
+              <a14:hiddenFill xmlns:a14="http://schemas.microsoft.com/office/drawing/2010/main">
+                <a:solidFill>
+                  <a:srgbClr val="FFFFFF"/>
+                </a:solidFill>
+              </a14:hiddenFill>
+            </a:ext>
+          </a:extLst>
+        </p:spPr>
+      </p:pic>
+    </p:spTree>
+    <p:extLst>
+      <p:ext uri="{BB962C8B-B14F-4D97-AF65-F5344CB8AC3E}">
+        <p14:creationId xmlns:p14="http://schemas.microsoft.com/office/powerpoint/2010/main" val="3995238935"/>
+      </p:ext>
+    </p:extLst>
+  </p:cSld>
+  <p:clrMapOvr>
+    <a:masterClrMapping/>
+  </p:clrMapOvr>
+</p:sld>
+</file>
+
+<file path=ppt/slides/slide11.xml><?xml version="1.0" encoding="utf-8"?>
+<p:sld xmlns:a="http://schemas.openxmlformats.org/drawingml/2006/main" xmlns:r="http://schemas.openxmlformats.org/officeDocument/2006/relationships" xmlns:p="http://schemas.openxmlformats.org/presentationml/2006/main">
+  <p:cSld>
+    <p:spTree>
+      <p:nvGrpSpPr>
+        <p:cNvPr id="1" name=""/>
+        <p:cNvGrpSpPr/>
+        <p:nvPr/>
+      </p:nvGrpSpPr>
+      <p:grpSpPr>
+        <a:xfrm>
+          <a:off x="0" y="0"/>
+          <a:ext cx="0" cy="0"/>
+          <a:chOff x="0" y="0"/>
+          <a:chExt cx="0" cy="0"/>
+        </a:xfrm>
+      </p:grpSpPr>
+      <p:sp>
+        <p:nvSpPr>
+          <p:cNvPr id="21506" name="Title 1">
+            <a:extLst>
+              <a:ext uri="{FF2B5EF4-FFF2-40B4-BE49-F238E27FC236}">
+                <a16:creationId xmlns:a16="http://schemas.microsoft.com/office/drawing/2014/main" id="{8429338B-85E3-ED7C-A47A-7AAA634448C2}"/>
+              </a:ext>
+            </a:extLst>
+          </p:cNvPr>
+          <p:cNvSpPr>
+            <a:spLocks noGrp="1"/>
+          </p:cNvSpPr>
+          <p:nvPr>
+            <p:ph type="title"/>
+          </p:nvPr>
+        </p:nvSpPr>
+        <p:spPr/>
+        <p:txBody>
+          <a:bodyPr/>
+          <a:lstStyle/>
+          <a:p>
+            <a:pPr eaLnBrk="1" hangingPunct="1"/>
+            <a:r>
+              <a:rPr lang="en-US" altLang="en-US"/>
+              <a:t>Applications of Stacks</a:t>
+            </a:r>
+          </a:p>
+        </p:txBody>
+      </p:sp>
+      <p:sp>
+        <p:nvSpPr>
+          <p:cNvPr id="3" name="Content Placeholder 2">
+            <a:extLst>
+              <a:ext uri="{FF2B5EF4-FFF2-40B4-BE49-F238E27FC236}">
+                <a16:creationId xmlns:a16="http://schemas.microsoft.com/office/drawing/2014/main" id="{AEC31E50-F12F-7059-873F-46799A80E1A6}"/>
+              </a:ext>
+            </a:extLst>
+          </p:cNvPr>
+          <p:cNvSpPr>
+            <a:spLocks noGrp="1"/>
+          </p:cNvSpPr>
+          <p:nvPr>
+            <p:ph sz="quarter" idx="1"/>
+          </p:nvPr>
+        </p:nvSpPr>
+        <p:spPr>
+          <a:xfrm>
+            <a:off x="457200" y="1219200"/>
+            <a:ext cx="8229600" cy="4937125"/>
+          </a:xfrm>
+        </p:spPr>
         <p:txBody>
           <a:bodyPr>
-            <a:spAutoFit/>
+            <a:normAutofit/>
           </a:bodyPr>
-          <a:lstStyle>
-            <a:lvl1pPr>
-              <a:spcBef>
-                <a:spcPct val="20000"/>
-              </a:spcBef>
-              <a:buChar char="•"/>
-              <a:defRPr sz="3200">
-                <a:solidFill>
-                  <a:schemeClr val="tx1"/>
-                </a:solidFill>
-                <a:latin typeface="Times New Roman" panose="02020603050405020304" pitchFamily="18" charset="0"/>
-              </a:defRPr>
-            </a:lvl1pPr>
-            <a:lvl2pPr marL="742950" indent="-285750">
-              <a:spcBef>
-                <a:spcPct val="20000"/>
-              </a:spcBef>
-              <a:buChar char="–"/>
-              <a:defRPr sz="2800">
-                <a:solidFill>
-                  <a:schemeClr val="tx1"/>
-                </a:solidFill>
-                <a:latin typeface="Times New Roman" panose="02020603050405020304" pitchFamily="18" charset="0"/>
-              </a:defRPr>
-            </a:lvl2pPr>
-            <a:lvl3pPr marL="1143000" indent="-228600">
-              <a:spcBef>
-                <a:spcPct val="20000"/>
-              </a:spcBef>
-              <a:buChar char="•"/>
-              <a:defRPr sz="2400">
-                <a:solidFill>
-                  <a:schemeClr val="tx1"/>
-                </a:solidFill>
-                <a:latin typeface="Times New Roman" panose="02020603050405020304" pitchFamily="18" charset="0"/>
-              </a:defRPr>
-            </a:lvl3pPr>
-            <a:lvl4pPr marL="1600200" indent="-228600">
-              <a:spcBef>
-                <a:spcPct val="20000"/>
-              </a:spcBef>
-              <a:buChar char="–"/>
-              <a:defRPr sz="2000">
-                <a:solidFill>
-                  <a:schemeClr val="tx1"/>
-                </a:solidFill>
-                <a:latin typeface="Times New Roman" panose="02020603050405020304" pitchFamily="18" charset="0"/>
-              </a:defRPr>
-            </a:lvl4pPr>
-            <a:lvl5pPr marL="2057400" indent="-228600">
-              <a:spcBef>
-                <a:spcPct val="20000"/>
-              </a:spcBef>
-              <a:buChar char="»"/>
-              <a:defRPr sz="2000">
-                <a:solidFill>
-                  <a:schemeClr val="tx1"/>
-                </a:solidFill>
-                <a:latin typeface="Times New Roman" panose="02020603050405020304" pitchFamily="18" charset="0"/>
-              </a:defRPr>
-            </a:lvl5pPr>
-            <a:lvl6pPr marL="2514600" indent="-228600" eaLnBrk="0" fontAlgn="base" hangingPunct="0">
-              <a:spcBef>
-                <a:spcPct val="20000"/>
-              </a:spcBef>
-              <a:spcAft>
-                <a:spcPct val="0"/>
-              </a:spcAft>
-              <a:buChar char="»"/>
-              <a:defRPr sz="2000">
-                <a:solidFill>
-                  <a:schemeClr val="tx1"/>
-                </a:solidFill>
-                <a:latin typeface="Times New Roman" panose="02020603050405020304" pitchFamily="18" charset="0"/>
-              </a:defRPr>
-            </a:lvl6pPr>
-            <a:lvl7pPr marL="2971800" indent="-228600" eaLnBrk="0" fontAlgn="base" hangingPunct="0">
-              <a:spcBef>
-                <a:spcPct val="20000"/>
-              </a:spcBef>
-              <a:spcAft>
-                <a:spcPct val="0"/>
-              </a:spcAft>
-              <a:buChar char="»"/>
-              <a:defRPr sz="2000">
-                <a:solidFill>
-                  <a:schemeClr val="tx1"/>
-                </a:solidFill>
-                <a:latin typeface="Times New Roman" panose="02020603050405020304" pitchFamily="18" charset="0"/>
-              </a:defRPr>
-            </a:lvl7pPr>
-            <a:lvl8pPr marL="3429000" indent="-228600" eaLnBrk="0" fontAlgn="base" hangingPunct="0">
-              <a:spcBef>
-                <a:spcPct val="20000"/>
-              </a:spcBef>
-              <a:spcAft>
-                <a:spcPct val="0"/>
-              </a:spcAft>
-              <a:buChar char="»"/>
-              <a:defRPr sz="2000">
-                <a:solidFill>
-                  <a:schemeClr val="tx1"/>
-                </a:solidFill>
-                <a:latin typeface="Times New Roman" panose="02020603050405020304" pitchFamily="18" charset="0"/>
-              </a:defRPr>
-            </a:lvl8pPr>
-            <a:lvl9pPr marL="3886200" indent="-228600" eaLnBrk="0" fontAlgn="base" hangingPunct="0">
-              <a:spcBef>
-                <a:spcPct val="20000"/>
-              </a:spcBef>
-              <a:spcAft>
-                <a:spcPct val="0"/>
-              </a:spcAft>
-              <a:buChar char="»"/>
-              <a:defRPr sz="2000">
-                <a:solidFill>
-                  <a:schemeClr val="tx1"/>
-                </a:solidFill>
-                <a:latin typeface="Times New Roman" panose="02020603050405020304" pitchFamily="18" charset="0"/>
-              </a:defRPr>
-            </a:lvl9pPr>
-          </a:lstStyle>
-          <a:p>
-            <a:pPr>
-              <a:spcBef>
-                <a:spcPct val="50000"/>
-              </a:spcBef>
-              <a:buFontTx/>
-              <a:buNone/>
+          <a:lstStyle/>
+          <a:p>
+            <a:pPr eaLnBrk="1" hangingPunct="1">
+              <a:lnSpc>
+                <a:spcPct val="90000"/>
+              </a:lnSpc>
             </a:pPr>
             <a:r>
-              <a:rPr lang="en-US" altLang="en-US" sz="2400">
-                <a:solidFill>
-                  <a:schemeClr val="accent2"/>
-                </a:solidFill>
-                <a:latin typeface="Tahoma" panose="020B0604030504040204" pitchFamily="34" charset="0"/>
+              <a:rPr lang="en-US" altLang="en-US"/>
+              <a:t>Programming languages:</a:t>
+            </a:r>
+          </a:p>
+          <a:p>
+            <a:pPr lvl="1" eaLnBrk="1" hangingPunct="1">
+              <a:lnSpc>
+                <a:spcPct val="90000"/>
+              </a:lnSpc>
+            </a:pPr>
+            <a:r>
+              <a:rPr lang="en-US" altLang="en-US"/>
+              <a:t>method calls are placed onto a stack </a:t>
+            </a:r>
+            <a:r>
+              <a:rPr lang="en-US" altLang="en-US" i="1"/>
+              <a:t>(call=push, return=pop)</a:t>
+            </a:r>
+            <a:endParaRPr lang="en-US" altLang="en-US"/>
+          </a:p>
+          <a:p>
+            <a:pPr eaLnBrk="1" hangingPunct="1">
+              <a:lnSpc>
+                <a:spcPct val="90000"/>
+              </a:lnSpc>
+            </a:pPr>
+            <a:endParaRPr lang="en-US" altLang="en-US"/>
+          </a:p>
+          <a:p>
+            <a:pPr eaLnBrk="1" hangingPunct="1">
+              <a:lnSpc>
+                <a:spcPct val="90000"/>
+              </a:lnSpc>
+            </a:pPr>
+            <a:endParaRPr lang="en-US" altLang="en-US"/>
+          </a:p>
+          <a:p>
+            <a:pPr eaLnBrk="1" hangingPunct="1">
+              <a:lnSpc>
+                <a:spcPct val="90000"/>
+              </a:lnSpc>
+            </a:pPr>
+            <a:r>
+              <a:rPr lang="en-US" altLang="en-US"/>
+              <a:t>Matching up related pairs of things:</a:t>
+            </a:r>
+          </a:p>
+          <a:p>
+            <a:pPr lvl="1" eaLnBrk="1" hangingPunct="1">
+              <a:lnSpc>
+                <a:spcPct val="90000"/>
+              </a:lnSpc>
+            </a:pPr>
+            <a:r>
+              <a:rPr lang="en-US" altLang="en-US"/>
+              <a:t>find out whether a string is a palindrome</a:t>
+            </a:r>
+          </a:p>
+          <a:p>
+            <a:pPr lvl="1" eaLnBrk="1" hangingPunct="1">
+              <a:lnSpc>
+                <a:spcPct val="90000"/>
+              </a:lnSpc>
+            </a:pPr>
+            <a:r>
+              <a:rPr lang="en-US" altLang="en-US"/>
+              <a:t>examine a file to see if its braces </a:t>
+            </a:r>
+            <a:r>
+              <a:rPr lang="en-US" altLang="en-US">
+                <a:latin typeface="Courier New" panose="02070309020205020404" pitchFamily="49" charset="0"/>
               </a:rPr>
-              <a:t>pop removes an item from the stack.</a:t>
+              <a:t>{</a:t>
+            </a:r>
+            <a:r>
+              <a:rPr lang="en-US" altLang="en-US"/>
+              <a:t> </a:t>
+            </a:r>
+            <a:r>
+              <a:rPr lang="en-US" altLang="en-US">
+                <a:latin typeface="Courier New" panose="02070309020205020404" pitchFamily="49" charset="0"/>
+              </a:rPr>
+              <a:t>}</a:t>
+            </a:r>
+            <a:r>
+              <a:rPr lang="en-US" altLang="en-US"/>
+              <a:t> and other operators match</a:t>
+            </a:r>
+          </a:p>
+          <a:p>
+            <a:pPr eaLnBrk="1" hangingPunct="1">
+              <a:lnSpc>
+                <a:spcPct val="90000"/>
+              </a:lnSpc>
+            </a:pPr>
+            <a:endParaRPr lang="en-US" altLang="en-US"/>
+          </a:p>
+          <a:p>
+            <a:pPr eaLnBrk="1" hangingPunct="1">
+              <a:lnSpc>
+                <a:spcPct val="90000"/>
+              </a:lnSpc>
+            </a:pPr>
+            <a:r>
+              <a:rPr lang="en-US" altLang="en-US"/>
+              <a:t>Sophisticated algorithms:</a:t>
+            </a:r>
+          </a:p>
+          <a:p>
+            <a:pPr lvl="1" eaLnBrk="1" hangingPunct="1">
+              <a:lnSpc>
+                <a:spcPct val="90000"/>
+              </a:lnSpc>
+            </a:pPr>
+            <a:r>
+              <a:rPr lang="en-US" altLang="en-US"/>
+              <a:t>searching through a maze with "backtracking"</a:t>
+            </a:r>
+          </a:p>
+          <a:p>
+            <a:pPr lvl="1" eaLnBrk="1" hangingPunct="1">
+              <a:lnSpc>
+                <a:spcPct val="90000"/>
+              </a:lnSpc>
+            </a:pPr>
+            <a:r>
+              <a:rPr lang="en-US" altLang="en-US"/>
+              <a:t>many programs use an "undo stack" of previous operations</a:t>
             </a:r>
           </a:p>
         </p:txBody>
       </p:sp>
       <p:graphicFrame>
         <p:nvGraphicFramePr>
-          <p:cNvPr id="143364" name="Group 4">
+          <p:cNvPr id="5" name="Group 33">
             <a:extLst>
               <a:ext uri="{FF2B5EF4-FFF2-40B4-BE49-F238E27FC236}">
-                <a16:creationId xmlns:a16="http://schemas.microsoft.com/office/drawing/2014/main" id="{B4FB6CAB-D4BD-4AC1-8AD2-ADB745CFF592}"/>
+                <a16:creationId xmlns:a16="http://schemas.microsoft.com/office/drawing/2014/main" id="{E53B8ADF-88DE-DA72-F266-22FF302C0888}"/>
               </a:ext>
             </a:extLst>
           </p:cNvPr>
@@ -15403,29 +15506,36 @@
           <p:nvPr/>
         </p:nvGraphicFramePr>
         <p:xfrm>
-          <a:off x="5943600" y="4343400"/>
-          <a:ext cx="1905000" cy="1130300"/>
+          <a:off x="6399213" y="2095500"/>
+          <a:ext cx="2092325" cy="1539876"/>
         </p:xfrm>
         <a:graphic>
           <a:graphicData uri="http://schemas.openxmlformats.org/drawingml/2006/table">
             <a:tbl>
               <a:tblPr/>
               <a:tblGrid>
-                <a:gridCol w="1905000">
+                <a:gridCol w="1076325">
                   <a:extLst>
                     <a:ext uri="{9D8B030D-6E8A-4147-A177-3AD203B41FA5}">
                       <a16:colId xmlns:a16="http://schemas.microsoft.com/office/drawing/2014/main" val="20000"/>
                     </a:ext>
                   </a:extLst>
                 </a:gridCol>
+                <a:gridCol w="1016000">
+                  <a:extLst>
+                    <a:ext uri="{9D8B030D-6E8A-4147-A177-3AD203B41FA5}">
+                      <a16:colId xmlns:a16="http://schemas.microsoft.com/office/drawing/2014/main" val="20001"/>
+                    </a:ext>
+                  </a:extLst>
+                </a:gridCol>
               </a:tblGrid>
-              <a:tr h="1130300">
+              <a:tr h="512763">
                 <a:tc>
                   <a:txBody>
                     <a:bodyPr/>
                     <a:lstStyle/>
                     <a:p>
-                      <a:pPr marL="0" marR="0" lvl="0" indent="0" algn="ctr" defTabSz="914400" rtl="0" eaLnBrk="1" fontAlgn="base" latinLnBrk="0" hangingPunct="1">
+                      <a:pPr marL="0" marR="0" lvl="0" indent="0" algn="l" defTabSz="914400" rtl="0" eaLnBrk="1" fontAlgn="base" latinLnBrk="0" hangingPunct="1">
                         <a:lnSpc>
                           <a:spcPct val="100000"/>
                         </a:lnSpc>
@@ -15442,7 +15552,71 @@
                         <a:tabLst/>
                       </a:pPr>
                       <a:r>
-                        <a:rPr kumimoji="0" lang="en-US" sz="4400" b="1" i="0" u="none" strike="noStrike" cap="none" normalizeH="0" baseline="0">
+                        <a:rPr kumimoji="0" lang="en-US" sz="1800" b="0" i="0" u="none" strike="noStrike" cap="none" normalizeH="0" baseline="0" dirty="0">
+                          <a:ln>
+                            <a:noFill/>
+                          </a:ln>
+                          <a:solidFill>
+                            <a:schemeClr val="bg2"/>
+                          </a:solidFill>
+                          <a:effectLst/>
+                          <a:latin typeface="Tahoma" charset="0"/>
+                        </a:rPr>
+                        <a:t>method3</a:t>
+                      </a:r>
+                    </a:p>
+                  </a:txBody>
+                  <a:tcPr anchor="ctr" anchorCtr="1" horzOverflow="overflow">
+                    <a:lnL cap="flat">
+                      <a:noFill/>
+                    </a:lnL>
+                    <a:lnR w="12700" cap="flat" cmpd="sng" algn="ctr">
+                      <a:solidFill>
+                        <a:schemeClr val="tx1"/>
+                      </a:solidFill>
+                      <a:prstDash val="solid"/>
+                      <a:round/>
+                      <a:headEnd type="none" w="med" len="med"/>
+                      <a:tailEnd type="none" w="med" len="med"/>
+                    </a:lnR>
+                    <a:lnT cap="flat">
+                      <a:noFill/>
+                    </a:lnT>
+                    <a:lnB>
+                      <a:noFill/>
+                    </a:lnB>
+                    <a:lnTlToBr>
+                      <a:noFill/>
+                    </a:lnTlToBr>
+                    <a:lnBlToTr>
+                      <a:noFill/>
+                    </a:lnBlToTr>
+                    <a:noFill/>
+                  </a:tcPr>
+                </a:tc>
+                <a:tc>
+                  <a:txBody>
+                    <a:bodyPr/>
+                    <a:lstStyle/>
+                    <a:p>
+                      <a:pPr marL="0" marR="0" lvl="0" indent="0" algn="l" defTabSz="914400" rtl="0" eaLnBrk="1" fontAlgn="base" latinLnBrk="0" hangingPunct="1">
+                        <a:lnSpc>
+                          <a:spcPct val="70000"/>
+                        </a:lnSpc>
+                        <a:spcBef>
+                          <a:spcPct val="20000"/>
+                        </a:spcBef>
+                        <a:spcAft>
+                          <a:spcPct val="0"/>
+                        </a:spcAft>
+                        <a:buClrTx/>
+                        <a:buSzTx/>
+                        <a:buFontTx/>
+                        <a:buNone/>
+                        <a:tabLst/>
+                      </a:pPr>
+                      <a:r>
+                        <a:rPr kumimoji="0" lang="en-US" sz="1000" b="0" i="0" u="none" strike="noStrike" cap="none" normalizeH="0" baseline="0" dirty="0">
                           <a:ln>
                             <a:noFill/>
                           </a:ln>
@@ -15450,14 +15624,122 @@
                             <a:schemeClr val="tx1"/>
                           </a:solidFill>
                           <a:effectLst/>
-                          <a:latin typeface="Tahoma" pitchFamily="34" charset="0"/>
+                          <a:latin typeface="Tahoma" charset="0"/>
                         </a:rPr>
-                        <a:t>15</a:t>
+                        <a:t>return </a:t>
+                      </a:r>
+                      <a:r>
+                        <a:rPr kumimoji="0" lang="en-US" sz="1000" b="0" i="0" u="none" strike="noStrike" cap="none" normalizeH="0" baseline="0" dirty="0" err="1">
+                          <a:ln>
+                            <a:noFill/>
+                          </a:ln>
+                          <a:solidFill>
+                            <a:schemeClr val="tx1"/>
+                          </a:solidFill>
+                          <a:effectLst/>
+                          <a:latin typeface="Tahoma" charset="0"/>
+                        </a:rPr>
+                        <a:t>var</a:t>
+                      </a:r>
+                      <a:endParaRPr kumimoji="0" lang="en-US" sz="1000" b="0" i="0" u="none" strike="noStrike" cap="none" normalizeH="0" baseline="0" dirty="0">
+                        <a:ln>
+                          <a:noFill/>
+                        </a:ln>
+                        <a:solidFill>
+                          <a:schemeClr val="tx1"/>
+                        </a:solidFill>
+                        <a:effectLst/>
+                        <a:latin typeface="Tahoma" charset="0"/>
+                      </a:endParaRPr>
+                    </a:p>
+                    <a:p>
+                      <a:pPr marL="0" marR="0" lvl="0" indent="0" algn="l" defTabSz="914400" rtl="0" eaLnBrk="1" fontAlgn="base" latinLnBrk="0" hangingPunct="1">
+                        <a:lnSpc>
+                          <a:spcPct val="70000"/>
+                        </a:lnSpc>
+                        <a:spcBef>
+                          <a:spcPct val="20000"/>
+                        </a:spcBef>
+                        <a:spcAft>
+                          <a:spcPct val="0"/>
+                        </a:spcAft>
+                        <a:buClrTx/>
+                        <a:buSzTx/>
+                        <a:buFontTx/>
+                        <a:buNone/>
+                        <a:tabLst/>
+                      </a:pPr>
+                      <a:r>
+                        <a:rPr kumimoji="0" lang="en-US" sz="1000" b="0" i="0" u="none" strike="noStrike" cap="none" normalizeH="0" baseline="0" dirty="0">
+                          <a:ln>
+                            <a:noFill/>
+                          </a:ln>
+                          <a:solidFill>
+                            <a:schemeClr val="tx1"/>
+                          </a:solidFill>
+                          <a:effectLst/>
+                          <a:latin typeface="Tahoma" charset="0"/>
+                        </a:rPr>
+                        <a:t>local </a:t>
+                      </a:r>
+                      <a:r>
+                        <a:rPr kumimoji="0" lang="en-US" sz="1000" b="0" i="0" u="none" strike="noStrike" cap="none" normalizeH="0" baseline="0" dirty="0" err="1">
+                          <a:ln>
+                            <a:noFill/>
+                          </a:ln>
+                          <a:solidFill>
+                            <a:schemeClr val="tx1"/>
+                          </a:solidFill>
+                          <a:effectLst/>
+                          <a:latin typeface="Tahoma" charset="0"/>
+                        </a:rPr>
+                        <a:t>vars</a:t>
+                      </a:r>
+                      <a:endParaRPr kumimoji="0" lang="en-US" sz="1000" b="0" i="0" u="none" strike="noStrike" cap="none" normalizeH="0" baseline="0" dirty="0">
+                        <a:ln>
+                          <a:noFill/>
+                        </a:ln>
+                        <a:solidFill>
+                          <a:schemeClr val="tx1"/>
+                        </a:solidFill>
+                        <a:effectLst/>
+                        <a:latin typeface="Tahoma" charset="0"/>
+                      </a:endParaRPr>
+                    </a:p>
+                    <a:p>
+                      <a:pPr marL="0" marR="0" lvl="0" indent="0" algn="l" defTabSz="914400" rtl="0" eaLnBrk="1" fontAlgn="base" latinLnBrk="0" hangingPunct="1">
+                        <a:lnSpc>
+                          <a:spcPct val="70000"/>
+                        </a:lnSpc>
+                        <a:spcBef>
+                          <a:spcPct val="20000"/>
+                        </a:spcBef>
+                        <a:spcAft>
+                          <a:spcPct val="0"/>
+                        </a:spcAft>
+                        <a:buClrTx/>
+                        <a:buSzTx/>
+                        <a:buFontTx/>
+                        <a:buNone/>
+                        <a:tabLst/>
+                      </a:pPr>
+                      <a:r>
+                        <a:rPr kumimoji="0" lang="en-US" sz="1000" b="0" i="0" u="none" strike="noStrike" cap="none" normalizeH="0" baseline="0" dirty="0">
+                          <a:ln>
+                            <a:noFill/>
+                          </a:ln>
+                          <a:solidFill>
+                            <a:schemeClr val="tx1"/>
+                          </a:solidFill>
+                          <a:effectLst/>
+                          <a:latin typeface="Tahoma" charset="0"/>
+                        </a:rPr>
+                        <a:t>parameters</a:t>
                       </a:r>
                     </a:p>
                   </a:txBody>
-                  <a:tcPr horzOverflow="overflow">
-                    <a:lnL w="28575" cap="flat" cmpd="sng" algn="ctr">
+                  <a:tcPr anchor="ctr" anchorCtr="1" horzOverflow="overflow">
+                    <a:lnL w="12700" cap="flat" cmpd="sng" algn="ctr">
                       <a:solidFill>
                         <a:schemeClr val="tx1"/>
                       </a:solidFill>
@@ -15475,7 +15757,523 @@
                       <a:headEnd type="none" w="med" len="med"/>
                       <a:tailEnd type="none" w="med" len="med"/>
                     </a:lnR>
-                    <a:lnT w="28575" cap="flat" cmpd="sng" algn="ctr">
+                    <a:lnT cap="flat">
+                      <a:noFill/>
+                    </a:lnT>
+                    <a:lnB w="12700" cap="flat" cmpd="sng" algn="ctr">
+                      <a:solidFill>
+                        <a:schemeClr val="tx1"/>
+                      </a:solidFill>
+                      <a:prstDash val="solid"/>
+                      <a:round/>
+                      <a:headEnd type="none" w="med" len="med"/>
+                      <a:tailEnd type="none" w="med" len="med"/>
+                    </a:lnB>
+                    <a:lnTlToBr>
+                      <a:noFill/>
+                    </a:lnTlToBr>
+                    <a:lnBlToTr>
+                      <a:noFill/>
+                    </a:lnBlToTr>
+                    <a:noFill/>
+                  </a:tcPr>
+                </a:tc>
+                <a:extLst>
+                  <a:ext uri="{0D108BD9-81ED-4DB2-BD59-A6C34878D82A}">
+                    <a16:rowId xmlns:a16="http://schemas.microsoft.com/office/drawing/2014/main" val="10000"/>
+                  </a:ext>
+                </a:extLst>
+              </a:tr>
+              <a:tr h="514350">
+                <a:tc>
+                  <a:txBody>
+                    <a:bodyPr/>
+                    <a:lstStyle/>
+                    <a:p>
+                      <a:pPr marL="0" marR="0" lvl="0" indent="0" algn="l" defTabSz="914400" rtl="0" eaLnBrk="1" fontAlgn="base" latinLnBrk="0" hangingPunct="1">
+                        <a:lnSpc>
+                          <a:spcPct val="100000"/>
+                        </a:lnSpc>
+                        <a:spcBef>
+                          <a:spcPct val="20000"/>
+                        </a:spcBef>
+                        <a:spcAft>
+                          <a:spcPct val="0"/>
+                        </a:spcAft>
+                        <a:buClrTx/>
+                        <a:buSzTx/>
+                        <a:buFontTx/>
+                        <a:buNone/>
+                        <a:tabLst/>
+                      </a:pPr>
+                      <a:r>
+                        <a:rPr kumimoji="0" lang="en-US" sz="1800" b="0" i="0" u="none" strike="noStrike" cap="none" normalizeH="0" baseline="0">
+                          <a:ln>
+                            <a:noFill/>
+                          </a:ln>
+                          <a:solidFill>
+                            <a:schemeClr val="bg2"/>
+                          </a:solidFill>
+                          <a:effectLst/>
+                          <a:latin typeface="Tahoma" charset="0"/>
+                        </a:rPr>
+                        <a:t>method2</a:t>
+                      </a:r>
+                    </a:p>
+                  </a:txBody>
+                  <a:tcPr anchor="ctr" anchorCtr="1" horzOverflow="overflow">
+                    <a:lnL cap="flat">
+                      <a:noFill/>
+                    </a:lnL>
+                    <a:lnR w="12700" cap="flat" cmpd="sng" algn="ctr">
+                      <a:solidFill>
+                        <a:schemeClr val="tx1"/>
+                      </a:solidFill>
+                      <a:prstDash val="solid"/>
+                      <a:round/>
+                      <a:headEnd type="none" w="med" len="med"/>
+                      <a:tailEnd type="none" w="med" len="med"/>
+                    </a:lnR>
+                    <a:lnT>
+                      <a:noFill/>
+                    </a:lnT>
+                    <a:lnB>
+                      <a:noFill/>
+                    </a:lnB>
+                    <a:lnTlToBr>
+                      <a:noFill/>
+                    </a:lnTlToBr>
+                    <a:lnBlToTr>
+                      <a:noFill/>
+                    </a:lnBlToTr>
+                    <a:noFill/>
+                  </a:tcPr>
+                </a:tc>
+                <a:tc>
+                  <a:txBody>
+                    <a:bodyPr/>
+                    <a:lstStyle/>
+                    <a:p>
+                      <a:pPr marL="0" marR="0" lvl="0" indent="0" algn="l" defTabSz="914400" rtl="0" eaLnBrk="1" fontAlgn="base" latinLnBrk="0" hangingPunct="1">
+                        <a:lnSpc>
+                          <a:spcPct val="70000"/>
+                        </a:lnSpc>
+                        <a:spcBef>
+                          <a:spcPct val="20000"/>
+                        </a:spcBef>
+                        <a:spcAft>
+                          <a:spcPct val="0"/>
+                        </a:spcAft>
+                        <a:buClrTx/>
+                        <a:buSzTx/>
+                        <a:buFontTx/>
+                        <a:buNone/>
+                        <a:tabLst/>
+                      </a:pPr>
+                      <a:r>
+                        <a:rPr kumimoji="0" lang="en-US" sz="1000" b="0" i="0" u="none" strike="noStrike" cap="none" normalizeH="0" baseline="0" dirty="0">
+                          <a:ln>
+                            <a:noFill/>
+                          </a:ln>
+                          <a:solidFill>
+                            <a:schemeClr val="tx1"/>
+                          </a:solidFill>
+                          <a:effectLst/>
+                          <a:latin typeface="Tahoma" charset="0"/>
+                        </a:rPr>
+                        <a:t>return </a:t>
+                      </a:r>
+                      <a:r>
+                        <a:rPr kumimoji="0" lang="en-US" sz="1000" b="0" i="0" u="none" strike="noStrike" cap="none" normalizeH="0" baseline="0" dirty="0" err="1">
+                          <a:ln>
+                            <a:noFill/>
+                          </a:ln>
+                          <a:solidFill>
+                            <a:schemeClr val="tx1"/>
+                          </a:solidFill>
+                          <a:effectLst/>
+                          <a:latin typeface="Tahoma" charset="0"/>
+                        </a:rPr>
+                        <a:t>var</a:t>
+                      </a:r>
+                      <a:endParaRPr kumimoji="0" lang="en-US" sz="1000" b="0" i="0" u="none" strike="noStrike" cap="none" normalizeH="0" baseline="0" dirty="0">
+                        <a:ln>
+                          <a:noFill/>
+                        </a:ln>
+                        <a:solidFill>
+                          <a:schemeClr val="tx1"/>
+                        </a:solidFill>
+                        <a:effectLst/>
+                        <a:latin typeface="Tahoma" charset="0"/>
+                      </a:endParaRPr>
+                    </a:p>
+                    <a:p>
+                      <a:pPr marL="0" marR="0" lvl="0" indent="0" algn="l" defTabSz="914400" rtl="0" eaLnBrk="1" fontAlgn="base" latinLnBrk="0" hangingPunct="1">
+                        <a:lnSpc>
+                          <a:spcPct val="70000"/>
+                        </a:lnSpc>
+                        <a:spcBef>
+                          <a:spcPct val="20000"/>
+                        </a:spcBef>
+                        <a:spcAft>
+                          <a:spcPct val="0"/>
+                        </a:spcAft>
+                        <a:buClrTx/>
+                        <a:buSzTx/>
+                        <a:buFontTx/>
+                        <a:buNone/>
+                        <a:tabLst/>
+                      </a:pPr>
+                      <a:r>
+                        <a:rPr kumimoji="0" lang="en-US" sz="1000" b="0" i="0" u="none" strike="noStrike" cap="none" normalizeH="0" baseline="0" dirty="0">
+                          <a:ln>
+                            <a:noFill/>
+                          </a:ln>
+                          <a:solidFill>
+                            <a:schemeClr val="tx1"/>
+                          </a:solidFill>
+                          <a:effectLst/>
+                          <a:latin typeface="Tahoma" charset="0"/>
+                        </a:rPr>
+                        <a:t>local </a:t>
+                      </a:r>
+                      <a:r>
+                        <a:rPr kumimoji="0" lang="en-US" sz="1000" b="0" i="0" u="none" strike="noStrike" cap="none" normalizeH="0" baseline="0" dirty="0" err="1">
+                          <a:ln>
+                            <a:noFill/>
+                          </a:ln>
+                          <a:solidFill>
+                            <a:schemeClr val="tx1"/>
+                          </a:solidFill>
+                          <a:effectLst/>
+                          <a:latin typeface="Tahoma" charset="0"/>
+                        </a:rPr>
+                        <a:t>vars</a:t>
+                      </a:r>
+                      <a:endParaRPr kumimoji="0" lang="en-US" sz="1000" b="0" i="0" u="none" strike="noStrike" cap="none" normalizeH="0" baseline="0" dirty="0">
+                        <a:ln>
+                          <a:noFill/>
+                        </a:ln>
+                        <a:solidFill>
+                          <a:schemeClr val="tx1"/>
+                        </a:solidFill>
+                        <a:effectLst/>
+                        <a:latin typeface="Tahoma" charset="0"/>
+                      </a:endParaRPr>
+                    </a:p>
+                    <a:p>
+                      <a:pPr marL="0" marR="0" lvl="0" indent="0" algn="l" defTabSz="914400" rtl="0" eaLnBrk="1" fontAlgn="base" latinLnBrk="0" hangingPunct="1">
+                        <a:lnSpc>
+                          <a:spcPct val="70000"/>
+                        </a:lnSpc>
+                        <a:spcBef>
+                          <a:spcPct val="20000"/>
+                        </a:spcBef>
+                        <a:spcAft>
+                          <a:spcPct val="0"/>
+                        </a:spcAft>
+                        <a:buClrTx/>
+                        <a:buSzTx/>
+                        <a:buFontTx/>
+                        <a:buNone/>
+                        <a:tabLst/>
+                      </a:pPr>
+                      <a:r>
+                        <a:rPr kumimoji="0" lang="en-US" sz="1000" b="0" i="0" u="none" strike="noStrike" cap="none" normalizeH="0" baseline="0" dirty="0">
+                          <a:ln>
+                            <a:noFill/>
+                          </a:ln>
+                          <a:solidFill>
+                            <a:schemeClr val="tx1"/>
+                          </a:solidFill>
+                          <a:effectLst/>
+                          <a:latin typeface="Tahoma" charset="0"/>
+                        </a:rPr>
+                        <a:t>parameters</a:t>
+                      </a:r>
+                    </a:p>
+                  </a:txBody>
+                  <a:tcPr anchor="ctr" anchorCtr="1" horzOverflow="overflow">
+                    <a:lnL w="12700" cap="flat" cmpd="sng" algn="ctr">
+                      <a:solidFill>
+                        <a:schemeClr val="tx1"/>
+                      </a:solidFill>
+                      <a:prstDash val="solid"/>
+                      <a:round/>
+                      <a:headEnd type="none" w="med" len="med"/>
+                      <a:tailEnd type="none" w="med" len="med"/>
+                    </a:lnL>
+                    <a:lnR w="28575" cap="flat" cmpd="sng" algn="ctr">
+                      <a:solidFill>
+                        <a:schemeClr val="tx1"/>
+                      </a:solidFill>
+                      <a:prstDash val="solid"/>
+                      <a:round/>
+                      <a:headEnd type="none" w="med" len="med"/>
+                      <a:tailEnd type="none" w="med" len="med"/>
+                    </a:lnR>
+                    <a:lnT w="12700" cap="flat" cmpd="sng" algn="ctr">
+                      <a:solidFill>
+                        <a:schemeClr val="tx1"/>
+                      </a:solidFill>
+                      <a:prstDash val="solid"/>
+                      <a:round/>
+                      <a:headEnd type="none" w="med" len="med"/>
+                      <a:tailEnd type="none" w="med" len="med"/>
+                    </a:lnT>
+                    <a:lnB w="12700" cap="flat" cmpd="sng" algn="ctr">
+                      <a:solidFill>
+                        <a:schemeClr val="tx1"/>
+                      </a:solidFill>
+                      <a:prstDash val="solid"/>
+                      <a:round/>
+                      <a:headEnd type="none" w="med" len="med"/>
+                      <a:tailEnd type="none" w="med" len="med"/>
+                    </a:lnB>
+                    <a:lnTlToBr>
+                      <a:noFill/>
+                    </a:lnTlToBr>
+                    <a:lnBlToTr>
+                      <a:noFill/>
+                    </a:lnBlToTr>
+                    <a:noFill/>
+                  </a:tcPr>
+                </a:tc>
+                <a:extLst>
+                  <a:ext uri="{0D108BD9-81ED-4DB2-BD59-A6C34878D82A}">
+                    <a16:rowId xmlns:a16="http://schemas.microsoft.com/office/drawing/2014/main" val="10001"/>
+                  </a:ext>
+                </a:extLst>
+              </a:tr>
+              <a:tr h="512763">
+                <a:tc>
+                  <a:txBody>
+                    <a:bodyPr/>
+                    <a:lstStyle/>
+                    <a:p>
+                      <a:pPr marL="0" marR="0" lvl="0" indent="0" algn="l" defTabSz="914400" rtl="0" eaLnBrk="1" fontAlgn="base" latinLnBrk="0" hangingPunct="1">
+                        <a:lnSpc>
+                          <a:spcPct val="100000"/>
+                        </a:lnSpc>
+                        <a:spcBef>
+                          <a:spcPct val="20000"/>
+                        </a:spcBef>
+                        <a:spcAft>
+                          <a:spcPct val="0"/>
+                        </a:spcAft>
+                        <a:buClrTx/>
+                        <a:buSzTx/>
+                        <a:buFontTx/>
+                        <a:buNone/>
+                        <a:tabLst/>
+                      </a:pPr>
+                      <a:r>
+                        <a:rPr kumimoji="0" lang="en-US" sz="1800" b="0" i="0" u="none" strike="noStrike" cap="none" normalizeH="0" baseline="0">
+                          <a:ln>
+                            <a:noFill/>
+                          </a:ln>
+                          <a:solidFill>
+                            <a:schemeClr val="bg2"/>
+                          </a:solidFill>
+                          <a:effectLst/>
+                          <a:latin typeface="Tahoma" charset="0"/>
+                        </a:rPr>
+                        <a:t>method1</a:t>
+                      </a:r>
+                    </a:p>
+                  </a:txBody>
+                  <a:tcPr anchor="ctr" anchorCtr="1" horzOverflow="overflow">
+                    <a:lnL cap="flat">
+                      <a:noFill/>
+                    </a:lnL>
+                    <a:lnR w="12700" cap="flat" cmpd="sng" algn="ctr">
+                      <a:solidFill>
+                        <a:schemeClr val="tx1"/>
+                      </a:solidFill>
+                      <a:prstDash val="solid"/>
+                      <a:round/>
+                      <a:headEnd type="none" w="med" len="med"/>
+                      <a:tailEnd type="none" w="med" len="med"/>
+                    </a:lnR>
+                    <a:lnT>
+                      <a:noFill/>
+                    </a:lnT>
+                    <a:lnB cap="flat">
+                      <a:noFill/>
+                    </a:lnB>
+                    <a:lnTlToBr>
+                      <a:noFill/>
+                    </a:lnTlToBr>
+                    <a:lnBlToTr>
+                      <a:noFill/>
+                    </a:lnBlToTr>
+                    <a:noFill/>
+                  </a:tcPr>
+                </a:tc>
+                <a:tc>
+                  <a:txBody>
+                    <a:bodyPr/>
+                    <a:lstStyle/>
+                    <a:p>
+                      <a:pPr marL="0" marR="0" lvl="0" indent="0" algn="l" defTabSz="914400" rtl="0" eaLnBrk="1" fontAlgn="base" latinLnBrk="0" hangingPunct="1">
+                        <a:lnSpc>
+                          <a:spcPct val="70000"/>
+                        </a:lnSpc>
+                        <a:spcBef>
+                          <a:spcPct val="20000"/>
+                        </a:spcBef>
+                        <a:spcAft>
+                          <a:spcPct val="0"/>
+                        </a:spcAft>
+                        <a:buClrTx/>
+                        <a:buSzTx/>
+                        <a:buFontTx/>
+                        <a:buNone/>
+                        <a:tabLst/>
+                      </a:pPr>
+                      <a:r>
+                        <a:rPr kumimoji="0" lang="en-US" sz="1000" b="0" i="0" u="none" strike="noStrike" cap="none" normalizeH="0" baseline="0" dirty="0">
+                          <a:ln>
+                            <a:noFill/>
+                          </a:ln>
+                          <a:solidFill>
+                            <a:schemeClr val="tx1"/>
+                          </a:solidFill>
+                          <a:effectLst/>
+                          <a:latin typeface="Tahoma" charset="0"/>
+                        </a:rPr>
+                        <a:t>return </a:t>
+                      </a:r>
+                      <a:r>
+                        <a:rPr kumimoji="0" lang="en-US" sz="1000" b="0" i="0" u="none" strike="noStrike" cap="none" normalizeH="0" baseline="0" dirty="0" err="1">
+                          <a:ln>
+                            <a:noFill/>
+                          </a:ln>
+                          <a:solidFill>
+                            <a:schemeClr val="tx1"/>
+                          </a:solidFill>
+                          <a:effectLst/>
+                          <a:latin typeface="Tahoma" charset="0"/>
+                        </a:rPr>
+                        <a:t>var</a:t>
+                      </a:r>
+                      <a:endParaRPr kumimoji="0" lang="en-US" sz="1000" b="0" i="0" u="none" strike="noStrike" cap="none" normalizeH="0" baseline="0" dirty="0">
+                        <a:ln>
+                          <a:noFill/>
+                        </a:ln>
+                        <a:solidFill>
+                          <a:schemeClr val="tx1"/>
+                        </a:solidFill>
+                        <a:effectLst/>
+                        <a:latin typeface="Tahoma" charset="0"/>
+                      </a:endParaRPr>
+                    </a:p>
+                    <a:p>
+                      <a:pPr marL="0" marR="0" lvl="0" indent="0" algn="l" defTabSz="914400" rtl="0" eaLnBrk="1" fontAlgn="base" latinLnBrk="0" hangingPunct="1">
+                        <a:lnSpc>
+                          <a:spcPct val="70000"/>
+                        </a:lnSpc>
+                        <a:spcBef>
+                          <a:spcPct val="20000"/>
+                        </a:spcBef>
+                        <a:spcAft>
+                          <a:spcPct val="0"/>
+                        </a:spcAft>
+                        <a:buClrTx/>
+                        <a:buSzTx/>
+                        <a:buFontTx/>
+                        <a:buNone/>
+                        <a:tabLst/>
+                      </a:pPr>
+                      <a:r>
+                        <a:rPr kumimoji="0" lang="en-US" sz="1000" b="0" i="0" u="none" strike="noStrike" cap="none" normalizeH="0" baseline="0" dirty="0">
+                          <a:ln>
+                            <a:noFill/>
+                          </a:ln>
+                          <a:solidFill>
+                            <a:schemeClr val="tx1"/>
+                          </a:solidFill>
+                          <a:effectLst/>
+                          <a:latin typeface="Tahoma" charset="0"/>
+                        </a:rPr>
+                        <a:t>local </a:t>
+                      </a:r>
+                      <a:r>
+                        <a:rPr kumimoji="0" lang="en-US" sz="1000" b="0" i="0" u="none" strike="noStrike" cap="none" normalizeH="0" baseline="0" dirty="0" err="1">
+                          <a:ln>
+                            <a:noFill/>
+                          </a:ln>
+                          <a:solidFill>
+                            <a:schemeClr val="tx1"/>
+                          </a:solidFill>
+                          <a:effectLst/>
+                          <a:latin typeface="Tahoma" charset="0"/>
+                        </a:rPr>
+                        <a:t>vars</a:t>
+                      </a:r>
+                      <a:endParaRPr kumimoji="0" lang="en-US" sz="1000" b="0" i="0" u="none" strike="noStrike" cap="none" normalizeH="0" baseline="0" dirty="0">
+                        <a:ln>
+                          <a:noFill/>
+                        </a:ln>
+                        <a:solidFill>
+                          <a:schemeClr val="tx1"/>
+                        </a:solidFill>
+                        <a:effectLst/>
+                        <a:latin typeface="Tahoma" charset="0"/>
+                      </a:endParaRPr>
+                    </a:p>
+                    <a:p>
+                      <a:pPr marL="0" marR="0" lvl="0" indent="0" algn="l" defTabSz="914400" rtl="0" eaLnBrk="1" fontAlgn="base" latinLnBrk="0" hangingPunct="1">
+                        <a:lnSpc>
+                          <a:spcPct val="70000"/>
+                        </a:lnSpc>
+                        <a:spcBef>
+                          <a:spcPct val="20000"/>
+                        </a:spcBef>
+                        <a:spcAft>
+                          <a:spcPct val="0"/>
+                        </a:spcAft>
+                        <a:buClrTx/>
+                        <a:buSzTx/>
+                        <a:buFontTx/>
+                        <a:buNone/>
+                        <a:tabLst/>
+                      </a:pPr>
+                      <a:r>
+                        <a:rPr kumimoji="0" lang="en-US" sz="1000" b="0" i="0" u="none" strike="noStrike" cap="none" normalizeH="0" baseline="0" dirty="0">
+                          <a:ln>
+                            <a:noFill/>
+                          </a:ln>
+                          <a:solidFill>
+                            <a:schemeClr val="tx1"/>
+                          </a:solidFill>
+                          <a:effectLst/>
+                          <a:latin typeface="Tahoma" charset="0"/>
+                        </a:rPr>
+                        <a:t>parameters</a:t>
+                      </a:r>
+                    </a:p>
+                  </a:txBody>
+                  <a:tcPr anchor="ctr" anchorCtr="1" horzOverflow="overflow">
+                    <a:lnL w="12700" cap="flat" cmpd="sng" algn="ctr">
+                      <a:solidFill>
+                        <a:schemeClr val="tx1"/>
+                      </a:solidFill>
+                      <a:prstDash val="solid"/>
+                      <a:round/>
+                      <a:headEnd type="none" w="med" len="med"/>
+                      <a:tailEnd type="none" w="med" len="med"/>
+                    </a:lnL>
+                    <a:lnR w="28575" cap="flat" cmpd="sng" algn="ctr">
+                      <a:solidFill>
+                        <a:schemeClr val="tx1"/>
+                      </a:solidFill>
+                      <a:prstDash val="solid"/>
+                      <a:round/>
+                      <a:headEnd type="none" w="med" len="med"/>
+                      <a:tailEnd type="none" w="med" len="med"/>
+                    </a:lnR>
+                    <a:lnT w="12700" cap="flat" cmpd="sng" algn="ctr">
                       <a:solidFill>
                         <a:schemeClr val="tx1"/>
                       </a:solidFill>
@@ -15499,16 +16297,12 @@
                     <a:lnBlToTr>
                       <a:noFill/>
                     </a:lnBlToTr>
-                    <a:solidFill>
-                      <a:srgbClr val="66FFFF">
-                        <a:alpha val="50000"/>
-                      </a:srgbClr>
-                    </a:solidFill>
+                    <a:noFill/>
                   </a:tcPr>
                 </a:tc>
                 <a:extLst>
                   <a:ext uri="{0D108BD9-81ED-4DB2-BD59-A6C34878D82A}">
-                    <a16:rowId xmlns:a16="http://schemas.microsoft.com/office/drawing/2014/main" val="10000"/>
+                    <a16:rowId xmlns:a16="http://schemas.microsoft.com/office/drawing/2014/main" val="10002"/>
                   </a:ext>
                 </a:extLst>
               </a:tr>
@@ -15516,74 +16310,377 @@
           </a:graphicData>
         </a:graphic>
       </p:graphicFrame>
-      <p:sp>
-        <p:nvSpPr>
-          <p:cNvPr id="12299" name="WordArt 10">
-            <a:extLst>
-              <a:ext uri="{FF2B5EF4-FFF2-40B4-BE49-F238E27FC236}">
-                <a16:creationId xmlns:a16="http://schemas.microsoft.com/office/drawing/2014/main" id="{3CAF414C-E041-476A-90A7-24657F1DA8B7}"/>
-              </a:ext>
-            </a:extLst>
-          </p:cNvPr>
-          <p:cNvSpPr>
-            <a:spLocks noChangeArrowheads="1" noChangeShapeType="1" noTextEdit="1"/>
-          </p:cNvSpPr>
-          <p:nvPr/>
-        </p:nvSpPr>
-        <p:spPr bwMode="auto">
-          <a:xfrm>
-            <a:off x="1143000" y="609600"/>
-            <a:ext cx="6553200" cy="990600"/>
-          </a:xfrm>
-          <a:prstGeom prst="rect">
-            <a:avLst/>
-          </a:prstGeom>
-        </p:spPr>
-        <p:txBody>
-          <a:bodyPr wrap="none" fromWordArt="1">
-            <a:prstTxWarp prst="textPlain">
-              <a:avLst>
-                <a:gd name="adj" fmla="val 50000"/>
-              </a:avLst>
-            </a:prstTxWarp>
-          </a:bodyPr>
-          <a:lstStyle/>
-          <a:p>
-            <a:pPr algn="ctr"/>
-            <a:r>
-              <a:rPr lang="en-US" sz="3600" kern="10">
-                <a:ln w="9525">
-                  <a:solidFill>
-                    <a:srgbClr val="CCFFFF"/>
-                  </a:solidFill>
-                  <a:round/>
-                  <a:headEnd/>
-                  <a:tailEnd/>
-                </a:ln>
-                <a:solidFill>
-                  <a:srgbClr val="0000FF"/>
-                </a:solidFill>
-                <a:effectLst>
-                  <a:outerShdw dist="35921" dir="2700000" algn="ctr" rotWithShape="0">
-                    <a:srgbClr val="C0C0C0"/>
-                  </a:outerShdw>
-                </a:effectLst>
-                <a:latin typeface="Impact" panose="020B0806030902050204" pitchFamily="34" charset="0"/>
-              </a:rPr>
-              <a:t>What is a Stack?</a:t>
-            </a:r>
-          </a:p>
-        </p:txBody>
-      </p:sp>
     </p:spTree>
   </p:cSld>
   <p:clrMapOvr>
     <a:masterClrMapping/>
   </p:clrMapOvr>
+  <p:timing>
+    <p:tnLst>
+      <p:par>
+        <p:cTn id="1" dur="indefinite" restart="never" nodeType="tmRoot">
+          <p:childTnLst>
+            <p:seq concurrent="1" nextAc="seek">
+              <p:cTn id="2" dur="indefinite" nodeType="mainSeq">
+                <p:childTnLst>
+                  <p:par>
+                    <p:cTn id="3" fill="hold" nodeType="clickPar">
+                      <p:stCondLst>
+                        <p:cond delay="indefinite"/>
+                      </p:stCondLst>
+                      <p:childTnLst>
+                        <p:par>
+                          <p:cTn id="4" fill="hold" nodeType="withGroup">
+                            <p:stCondLst>
+                              <p:cond delay="0"/>
+                            </p:stCondLst>
+                            <p:childTnLst>
+                              <p:par>
+                                <p:cTn id="5" presetID="1" presetClass="entr" presetSubtype="0" fill="hold" nodeType="clickEffect">
+                                  <p:stCondLst>
+                                    <p:cond delay="0"/>
+                                  </p:stCondLst>
+                                  <p:childTnLst>
+                                    <p:set>
+                                      <p:cBhvr>
+                                        <p:cTn id="6" dur="1" fill="hold">
+                                          <p:stCondLst>
+                                            <p:cond delay="0"/>
+                                          </p:stCondLst>
+                                        </p:cTn>
+                                        <p:tgtEl>
+                                          <p:spTgt spid="3">
+                                            <p:txEl>
+                                              <p:pRg st="0" end="0"/>
+                                            </p:txEl>
+                                          </p:spTgt>
+                                        </p:tgtEl>
+                                        <p:attrNameLst>
+                                          <p:attrName>style.visibility</p:attrName>
+                                        </p:attrNameLst>
+                                      </p:cBhvr>
+                                      <p:to>
+                                        <p:strVal val="visible"/>
+                                      </p:to>
+                                    </p:set>
+                                  </p:childTnLst>
+                                </p:cTn>
+                              </p:par>
+                              <p:par>
+                                <p:cTn id="7" presetID="1" presetClass="entr" presetSubtype="0" fill="hold" nodeType="withEffect">
+                                  <p:stCondLst>
+                                    <p:cond delay="0"/>
+                                  </p:stCondLst>
+                                  <p:childTnLst>
+                                    <p:set>
+                                      <p:cBhvr>
+                                        <p:cTn id="8" dur="1" fill="hold">
+                                          <p:stCondLst>
+                                            <p:cond delay="0"/>
+                                          </p:stCondLst>
+                                        </p:cTn>
+                                        <p:tgtEl>
+                                          <p:spTgt spid="5"/>
+                                        </p:tgtEl>
+                                        <p:attrNameLst>
+                                          <p:attrName>style.visibility</p:attrName>
+                                        </p:attrNameLst>
+                                      </p:cBhvr>
+                                      <p:to>
+                                        <p:strVal val="visible"/>
+                                      </p:to>
+                                    </p:set>
+                                  </p:childTnLst>
+                                </p:cTn>
+                              </p:par>
+                              <p:par>
+                                <p:cTn id="9" presetID="1" presetClass="entr" presetSubtype="0" fill="hold" nodeType="withEffect">
+                                  <p:stCondLst>
+                                    <p:cond delay="0"/>
+                                  </p:stCondLst>
+                                  <p:childTnLst>
+                                    <p:set>
+                                      <p:cBhvr>
+                                        <p:cTn id="10" dur="1" fill="hold">
+                                          <p:stCondLst>
+                                            <p:cond delay="0"/>
+                                          </p:stCondLst>
+                                        </p:cTn>
+                                        <p:tgtEl>
+                                          <p:spTgt spid="3">
+                                            <p:txEl>
+                                              <p:pRg st="1" end="1"/>
+                                            </p:txEl>
+                                          </p:spTgt>
+                                        </p:tgtEl>
+                                        <p:attrNameLst>
+                                          <p:attrName>style.visibility</p:attrName>
+                                        </p:attrNameLst>
+                                      </p:cBhvr>
+                                      <p:to>
+                                        <p:strVal val="visible"/>
+                                      </p:to>
+                                    </p:set>
+                                  </p:childTnLst>
+                                </p:cTn>
+                              </p:par>
+                            </p:childTnLst>
+                          </p:cTn>
+                        </p:par>
+                      </p:childTnLst>
+                    </p:cTn>
+                  </p:par>
+                  <p:par>
+                    <p:cTn id="11" fill="hold" nodeType="clickPar">
+                      <p:stCondLst>
+                        <p:cond delay="indefinite"/>
+                      </p:stCondLst>
+                      <p:childTnLst>
+                        <p:par>
+                          <p:cTn id="12" fill="hold" nodeType="withGroup">
+                            <p:stCondLst>
+                              <p:cond delay="0"/>
+                            </p:stCondLst>
+                            <p:childTnLst>
+                              <p:par>
+                                <p:cTn id="13" presetID="1" presetClass="entr" presetSubtype="0" fill="hold" nodeType="clickEffect">
+                                  <p:stCondLst>
+                                    <p:cond delay="0"/>
+                                  </p:stCondLst>
+                                  <p:childTnLst>
+                                    <p:set>
+                                      <p:cBhvr>
+                                        <p:cTn id="14" dur="1" fill="hold">
+                                          <p:stCondLst>
+                                            <p:cond delay="0"/>
+                                          </p:stCondLst>
+                                        </p:cTn>
+                                        <p:tgtEl>
+                                          <p:spTgt spid="3">
+                                            <p:txEl>
+                                              <p:pRg st="4" end="4"/>
+                                            </p:txEl>
+                                          </p:spTgt>
+                                        </p:tgtEl>
+                                        <p:attrNameLst>
+                                          <p:attrName>style.visibility</p:attrName>
+                                        </p:attrNameLst>
+                                      </p:cBhvr>
+                                      <p:to>
+                                        <p:strVal val="visible"/>
+                                      </p:to>
+                                    </p:set>
+                                  </p:childTnLst>
+                                </p:cTn>
+                              </p:par>
+                              <p:par>
+                                <p:cTn id="15" presetID="1" presetClass="entr" presetSubtype="0" fill="hold" nodeType="withEffect">
+                                  <p:stCondLst>
+                                    <p:cond delay="0"/>
+                                  </p:stCondLst>
+                                  <p:childTnLst>
+                                    <p:set>
+                                      <p:cBhvr>
+                                        <p:cTn id="16" dur="1" fill="hold">
+                                          <p:stCondLst>
+                                            <p:cond delay="0"/>
+                                          </p:stCondLst>
+                                        </p:cTn>
+                                        <p:tgtEl>
+                                          <p:spTgt spid="3">
+                                            <p:txEl>
+                                              <p:pRg st="5" end="5"/>
+                                            </p:txEl>
+                                          </p:spTgt>
+                                        </p:tgtEl>
+                                        <p:attrNameLst>
+                                          <p:attrName>style.visibility</p:attrName>
+                                        </p:attrNameLst>
+                                      </p:cBhvr>
+                                      <p:to>
+                                        <p:strVal val="visible"/>
+                                      </p:to>
+                                    </p:set>
+                                  </p:childTnLst>
+                                </p:cTn>
+                              </p:par>
+                              <p:par>
+                                <p:cTn id="17" presetID="1" presetClass="entr" presetSubtype="0" fill="hold" nodeType="withEffect">
+                                  <p:stCondLst>
+                                    <p:cond delay="0"/>
+                                  </p:stCondLst>
+                                  <p:childTnLst>
+                                    <p:set>
+                                      <p:cBhvr>
+                                        <p:cTn id="18" dur="1" fill="hold">
+                                          <p:stCondLst>
+                                            <p:cond delay="0"/>
+                                          </p:stCondLst>
+                                        </p:cTn>
+                                        <p:tgtEl>
+                                          <p:spTgt spid="3">
+                                            <p:txEl>
+                                              <p:pRg st="6" end="6"/>
+                                            </p:txEl>
+                                          </p:spTgt>
+                                        </p:tgtEl>
+                                        <p:attrNameLst>
+                                          <p:attrName>style.visibility</p:attrName>
+                                        </p:attrNameLst>
+                                      </p:cBhvr>
+                                      <p:to>
+                                        <p:strVal val="visible"/>
+                                      </p:to>
+                                    </p:set>
+                                  </p:childTnLst>
+                                </p:cTn>
+                              </p:par>
+                            </p:childTnLst>
+                          </p:cTn>
+                        </p:par>
+                      </p:childTnLst>
+                    </p:cTn>
+                  </p:par>
+                  <p:par>
+                    <p:cTn id="19" fill="hold" nodeType="clickPar">
+                      <p:stCondLst>
+                        <p:cond delay="indefinite"/>
+                      </p:stCondLst>
+                      <p:childTnLst>
+                        <p:par>
+                          <p:cTn id="20" fill="hold" nodeType="withGroup">
+                            <p:stCondLst>
+                              <p:cond delay="0"/>
+                            </p:stCondLst>
+                            <p:childTnLst>
+                              <p:par>
+                                <p:cTn id="21" presetID="1" presetClass="entr" presetSubtype="0" fill="hold" nodeType="clickEffect">
+                                  <p:stCondLst>
+                                    <p:cond delay="0"/>
+                                  </p:stCondLst>
+                                  <p:childTnLst>
+                                    <p:set>
+                                      <p:cBhvr>
+                                        <p:cTn id="22" dur="1" fill="hold">
+                                          <p:stCondLst>
+                                            <p:cond delay="0"/>
+                                          </p:stCondLst>
+                                        </p:cTn>
+                                        <p:tgtEl>
+                                          <p:spTgt spid="3">
+                                            <p:txEl>
+                                              <p:pRg st="8" end="8"/>
+                                            </p:txEl>
+                                          </p:spTgt>
+                                        </p:tgtEl>
+                                        <p:attrNameLst>
+                                          <p:attrName>style.visibility</p:attrName>
+                                        </p:attrNameLst>
+                                      </p:cBhvr>
+                                      <p:to>
+                                        <p:strVal val="visible"/>
+                                      </p:to>
+                                    </p:set>
+                                  </p:childTnLst>
+                                </p:cTn>
+                              </p:par>
+                              <p:par>
+                                <p:cTn id="23" presetID="1" presetClass="entr" presetSubtype="0" fill="hold" nodeType="withEffect">
+                                  <p:stCondLst>
+                                    <p:cond delay="0"/>
+                                  </p:stCondLst>
+                                  <p:childTnLst>
+                                    <p:set>
+                                      <p:cBhvr>
+                                        <p:cTn id="24" dur="1" fill="hold">
+                                          <p:stCondLst>
+                                            <p:cond delay="0"/>
+                                          </p:stCondLst>
+                                        </p:cTn>
+                                        <p:tgtEl>
+                                          <p:spTgt spid="3">
+                                            <p:txEl>
+                                              <p:pRg st="9" end="9"/>
+                                            </p:txEl>
+                                          </p:spTgt>
+                                        </p:tgtEl>
+                                        <p:attrNameLst>
+                                          <p:attrName>style.visibility</p:attrName>
+                                        </p:attrNameLst>
+                                      </p:cBhvr>
+                                      <p:to>
+                                        <p:strVal val="visible"/>
+                                      </p:to>
+                                    </p:set>
+                                  </p:childTnLst>
+                                </p:cTn>
+                              </p:par>
+                              <p:par>
+                                <p:cTn id="25" presetID="1" presetClass="entr" presetSubtype="0" fill="hold" nodeType="withEffect">
+                                  <p:stCondLst>
+                                    <p:cond delay="0"/>
+                                  </p:stCondLst>
+                                  <p:childTnLst>
+                                    <p:set>
+                                      <p:cBhvr>
+                                        <p:cTn id="26" dur="1" fill="hold">
+                                          <p:stCondLst>
+                                            <p:cond delay="0"/>
+                                          </p:stCondLst>
+                                        </p:cTn>
+                                        <p:tgtEl>
+                                          <p:spTgt spid="3">
+                                            <p:txEl>
+                                              <p:pRg st="10" end="10"/>
+                                            </p:txEl>
+                                          </p:spTgt>
+                                        </p:tgtEl>
+                                        <p:attrNameLst>
+                                          <p:attrName>style.visibility</p:attrName>
+                                        </p:attrNameLst>
+                                      </p:cBhvr>
+                                      <p:to>
+                                        <p:strVal val="visible"/>
+                                      </p:to>
+                                    </p:set>
+                                  </p:childTnLst>
+                                </p:cTn>
+                              </p:par>
+                            </p:childTnLst>
+                          </p:cTn>
+                        </p:par>
+                      </p:childTnLst>
+                    </p:cTn>
+                  </p:par>
+                </p:childTnLst>
+              </p:cTn>
+              <p:prevCondLst>
+                <p:cond evt="onPrev" delay="0">
+                  <p:tgtEl>
+                    <p:sldTgt/>
+                  </p:tgtEl>
+                </p:cond>
+              </p:prevCondLst>
+              <p:nextCondLst>
+                <p:cond evt="onNext" delay="0">
+                  <p:tgtEl>
+                    <p:sldTgt/>
+                  </p:tgtEl>
+                </p:cond>
+              </p:nextCondLst>
+            </p:seq>
+          </p:childTnLst>
+        </p:cTn>
+      </p:par>
+    </p:tnLst>
+    <p:bldLst>
+      <p:bldP spid="3" grpId="0" build="p"/>
+    </p:bldLst>
+  </p:timing>
 </p:sld>
 </file>
 
-<file path=ppt/slides/slide11.xml><?xml version="1.0" encoding="utf-8"?>
+<file path=ppt/slides/slide12.xml><?xml version="1.0" encoding="utf-8"?>
 <p:sld xmlns:a="http://schemas.openxmlformats.org/drawingml/2006/main" xmlns:r="http://schemas.openxmlformats.org/officeDocument/2006/relationships" xmlns:p="http://schemas.openxmlformats.org/presentationml/2006/main">
   <p:cSld>
     <p:spTree>
@@ -15886,7 +16983,7 @@
 </p:sld>
 </file>
 
-<file path=ppt/slides/slide12.xml><?xml version="1.0" encoding="utf-8"?>
+<file path=ppt/slides/slide13.xml><?xml version="1.0" encoding="utf-8"?>
 <p:sld xmlns:a="http://schemas.openxmlformats.org/drawingml/2006/main" xmlns:r="http://schemas.openxmlformats.org/officeDocument/2006/relationships" xmlns:p="http://schemas.openxmlformats.org/presentationml/2006/main">
   <p:cSld>
     <p:spTree>
@@ -16577,7 +17674,7 @@
 </p:sld>
 </file>
 
-<file path=ppt/slides/slide13.xml><?xml version="1.0" encoding="utf-8"?>
+<file path=ppt/slides/slide14.xml><?xml version="1.0" encoding="utf-8"?>
 <p:sld xmlns:a="http://schemas.openxmlformats.org/drawingml/2006/main" xmlns:r="http://schemas.openxmlformats.org/officeDocument/2006/relationships" xmlns:p="http://schemas.openxmlformats.org/presentationml/2006/main">
   <p:cSld>
     <p:spTree>
@@ -18375,7 +19472,7 @@
 </p:sld>
 </file>
 
-<file path=ppt/slides/slide14.xml><?xml version="1.0" encoding="utf-8"?>
+<file path=ppt/slides/slide15.xml><?xml version="1.0" encoding="utf-8"?>
 <p:sld xmlns:a="http://schemas.openxmlformats.org/drawingml/2006/main" xmlns:r="http://schemas.openxmlformats.org/officeDocument/2006/relationships" xmlns:p="http://schemas.openxmlformats.org/presentationml/2006/main">
   <p:cSld>
     <p:spTree>
@@ -19218,7 +20315,7 @@
 </p:sld>
 </file>
 
-<file path=ppt/slides/slide15.xml><?xml version="1.0" encoding="utf-8"?>
+<file path=ppt/slides/slide16.xml><?xml version="1.0" encoding="utf-8"?>
 <p:sld xmlns:a="http://schemas.openxmlformats.org/drawingml/2006/main" xmlns:r="http://schemas.openxmlformats.org/officeDocument/2006/relationships" xmlns:p="http://schemas.openxmlformats.org/presentationml/2006/main">
   <p:cSld>
     <p:spTree>
@@ -19525,7 +20622,7 @@
 </p:sld>
 </file>
 
-<file path=ppt/slides/slide16.xml><?xml version="1.0" encoding="utf-8"?>
+<file path=ppt/slides/slide17.xml><?xml version="1.0" encoding="utf-8"?>
 <p:sld xmlns:a="http://schemas.openxmlformats.org/drawingml/2006/main" xmlns:r="http://schemas.openxmlformats.org/officeDocument/2006/relationships" xmlns:p="http://schemas.openxmlformats.org/presentationml/2006/main">
   <p:cSld>
     <p:spTree>
@@ -19752,7 +20849,7 @@
         </p:nvSpPr>
         <p:spPr bwMode="auto">
           <a:xfrm>
-            <a:off x="685800" y="2133600"/>
+            <a:off x="685800" y="1605280"/>
             <a:ext cx="6477000" cy="3970318"/>
           </a:xfrm>
           <a:prstGeom prst="rect">
@@ -20161,8 +21258,8 @@
         </p:nvSpPr>
         <p:spPr bwMode="auto">
           <a:xfrm>
-            <a:off x="1143000" y="533400"/>
-            <a:ext cx="6400800" cy="1028700"/>
+            <a:off x="2148840" y="332550"/>
+            <a:ext cx="4627880" cy="743766"/>
           </a:xfrm>
           <a:prstGeom prst="rect">
             <a:avLst/>
@@ -20180,7 +21277,7 @@
           <a:p>
             <a:pPr algn="ctr"/>
             <a:r>
-              <a:rPr lang="en-US" sz="3600" kern="10">
+              <a:rPr lang="en-US" sz="3600" kern="10" dirty="0">
                 <a:ln w="12700">
                   <a:solidFill>
                     <a:srgbClr val="EAEAEA"/>
@@ -20245,8 +21342,8 @@
         </p:nvSpPr>
         <p:spPr bwMode="auto">
           <a:xfrm>
-            <a:off x="5867400" y="3352800"/>
-            <a:ext cx="2057400" cy="2800767"/>
+            <a:off x="5748020" y="3051830"/>
+            <a:ext cx="2057400" cy="2523768"/>
           </a:xfrm>
           <a:prstGeom prst="rect">
             <a:avLst/>
@@ -20415,7 +21512,7 @@
               <a:buNone/>
             </a:pPr>
             <a:r>
-              <a:rPr lang="en-US" altLang="en-US" u="sng" dirty="0">
+              <a:rPr lang="en-US" altLang="en-US" sz="2800" u="sng" dirty="0">
                 <a:solidFill>
                   <a:srgbClr val="FF0000"/>
                 </a:solidFill>
@@ -20433,7 +21530,7 @@
               <a:buNone/>
             </a:pPr>
             <a:r>
-              <a:rPr lang="en-US" altLang="en-US" dirty="0">
+              <a:rPr lang="en-US" altLang="en-US" sz="2800" dirty="0">
                 <a:solidFill>
                   <a:srgbClr val="0066FF"/>
                 </a:solidFill>
@@ -20451,7 +21548,7 @@
               <a:buNone/>
             </a:pPr>
             <a:r>
-              <a:rPr lang="en-US" altLang="en-US" dirty="0">
+              <a:rPr lang="en-US" altLang="en-US" sz="2800" dirty="0">
                 <a:latin typeface="Tahoma" panose="020B0604030504040204" pitchFamily="34" charset="0"/>
               </a:rPr>
               <a:t>[88, 23]</a:t>
@@ -20466,7 +21563,7 @@
               <a:buNone/>
             </a:pPr>
             <a:r>
-              <a:rPr lang="en-US" altLang="en-US" dirty="0">
+              <a:rPr lang="en-US" altLang="en-US" sz="2800" dirty="0">
                 <a:solidFill>
                   <a:srgbClr val="0066FF"/>
                 </a:solidFill>
@@ -20484,10 +21581,205 @@
               <a:buNone/>
             </a:pPr>
             <a:r>
-              <a:rPr lang="en-US" altLang="en-US" dirty="0">
+              <a:rPr lang="en-US" altLang="en-US" sz="2800" dirty="0">
                 <a:latin typeface="Tahoma" panose="020B0604030504040204" pitchFamily="34" charset="0"/>
               </a:rPr>
               <a:t>[88]</a:t>
+            </a:r>
+          </a:p>
+        </p:txBody>
+      </p:sp>
+      <p:sp>
+        <p:nvSpPr>
+          <p:cNvPr id="2" name="Text Box 4">
+            <a:extLst>
+              <a:ext uri="{FF2B5EF4-FFF2-40B4-BE49-F238E27FC236}">
+                <a16:creationId xmlns:a16="http://schemas.microsoft.com/office/drawing/2014/main" id="{9432FBC0-EF42-59EC-0908-141A49395045}"/>
+              </a:ext>
+            </a:extLst>
+          </p:cNvPr>
+          <p:cNvSpPr txBox="1">
+            <a:spLocks noChangeArrowheads="1"/>
+          </p:cNvSpPr>
+          <p:nvPr/>
+        </p:nvSpPr>
+        <p:spPr bwMode="auto">
+          <a:xfrm>
+            <a:off x="535940" y="5903893"/>
+            <a:ext cx="8211820" cy="523220"/>
+          </a:xfrm>
+          <a:prstGeom prst="rect">
+            <a:avLst/>
+          </a:prstGeom>
+          <a:noFill/>
+          <a:ln w="12700">
+            <a:noFill/>
+            <a:miter lim="800000"/>
+            <a:headEnd type="none" w="sm" len="sm"/>
+            <a:tailEnd type="none" w="sm" len="sm"/>
+          </a:ln>
+          <a:effectLst/>
+          <a:extLst>
+            <a:ext uri="{909E8E84-426E-40DD-AFC4-6F175D3DCCD1}">
+              <a14:hiddenFill xmlns:a14="http://schemas.microsoft.com/office/drawing/2010/main">
+                <a:solidFill>
+                  <a:schemeClr val="accent1"/>
+                </a:solidFill>
+              </a14:hiddenFill>
+            </a:ext>
+            <a:ext uri="{AF507438-7753-43E0-B8FC-AC1667EBCBE1}">
+              <a14:hiddenEffects xmlns:a14="http://schemas.microsoft.com/office/drawing/2010/main">
+                <a:effectLst>
+                  <a:outerShdw dist="35921" dir="2700000" algn="ctr" rotWithShape="0">
+                    <a:schemeClr val="bg2"/>
+                  </a:outerShdw>
+                </a:effectLst>
+              </a14:hiddenEffects>
+            </a:ext>
+          </a:extLst>
+        </p:spPr>
+        <p:txBody>
+          <a:bodyPr wrap="square">
+            <a:spAutoFit/>
+          </a:bodyPr>
+          <a:lstStyle>
+            <a:lvl1pPr>
+              <a:spcBef>
+                <a:spcPct val="20000"/>
+              </a:spcBef>
+              <a:buChar char="•"/>
+              <a:defRPr sz="3200">
+                <a:solidFill>
+                  <a:schemeClr val="tx1"/>
+                </a:solidFill>
+                <a:latin typeface="Times New Roman" panose="02020603050405020304" pitchFamily="18" charset="0"/>
+              </a:defRPr>
+            </a:lvl1pPr>
+            <a:lvl2pPr marL="742950" indent="-285750">
+              <a:spcBef>
+                <a:spcPct val="20000"/>
+              </a:spcBef>
+              <a:buChar char="–"/>
+              <a:defRPr sz="2800">
+                <a:solidFill>
+                  <a:schemeClr val="tx1"/>
+                </a:solidFill>
+                <a:latin typeface="Times New Roman" panose="02020603050405020304" pitchFamily="18" charset="0"/>
+              </a:defRPr>
+            </a:lvl2pPr>
+            <a:lvl3pPr marL="1143000" indent="-228600">
+              <a:spcBef>
+                <a:spcPct val="20000"/>
+              </a:spcBef>
+              <a:buChar char="•"/>
+              <a:defRPr sz="2400">
+                <a:solidFill>
+                  <a:schemeClr val="tx1"/>
+                </a:solidFill>
+                <a:latin typeface="Times New Roman" panose="02020603050405020304" pitchFamily="18" charset="0"/>
+              </a:defRPr>
+            </a:lvl3pPr>
+            <a:lvl4pPr marL="1600200" indent="-228600">
+              <a:spcBef>
+                <a:spcPct val="20000"/>
+              </a:spcBef>
+              <a:buChar char="–"/>
+              <a:defRPr sz="2000">
+                <a:solidFill>
+                  <a:schemeClr val="tx1"/>
+                </a:solidFill>
+                <a:latin typeface="Times New Roman" panose="02020603050405020304" pitchFamily="18" charset="0"/>
+              </a:defRPr>
+            </a:lvl4pPr>
+            <a:lvl5pPr marL="2057400" indent="-228600">
+              <a:spcBef>
+                <a:spcPct val="20000"/>
+              </a:spcBef>
+              <a:buChar char="»"/>
+              <a:defRPr sz="2000">
+                <a:solidFill>
+                  <a:schemeClr val="tx1"/>
+                </a:solidFill>
+                <a:latin typeface="Times New Roman" panose="02020603050405020304" pitchFamily="18" charset="0"/>
+              </a:defRPr>
+            </a:lvl5pPr>
+            <a:lvl6pPr marL="2514600" indent="-228600" eaLnBrk="0" fontAlgn="base" hangingPunct="0">
+              <a:spcBef>
+                <a:spcPct val="20000"/>
+              </a:spcBef>
+              <a:spcAft>
+                <a:spcPct val="0"/>
+              </a:spcAft>
+              <a:buChar char="»"/>
+              <a:defRPr sz="2000">
+                <a:solidFill>
+                  <a:schemeClr val="tx1"/>
+                </a:solidFill>
+                <a:latin typeface="Times New Roman" panose="02020603050405020304" pitchFamily="18" charset="0"/>
+              </a:defRPr>
+            </a:lvl6pPr>
+            <a:lvl7pPr marL="2971800" indent="-228600" eaLnBrk="0" fontAlgn="base" hangingPunct="0">
+              <a:spcBef>
+                <a:spcPct val="20000"/>
+              </a:spcBef>
+              <a:spcAft>
+                <a:spcPct val="0"/>
+              </a:spcAft>
+              <a:buChar char="»"/>
+              <a:defRPr sz="2000">
+                <a:solidFill>
+                  <a:schemeClr val="tx1"/>
+                </a:solidFill>
+                <a:latin typeface="Times New Roman" panose="02020603050405020304" pitchFamily="18" charset="0"/>
+              </a:defRPr>
+            </a:lvl7pPr>
+            <a:lvl8pPr marL="3429000" indent="-228600" eaLnBrk="0" fontAlgn="base" hangingPunct="0">
+              <a:spcBef>
+                <a:spcPct val="20000"/>
+              </a:spcBef>
+              <a:spcAft>
+                <a:spcPct val="0"/>
+              </a:spcAft>
+              <a:buChar char="»"/>
+              <a:defRPr sz="2000">
+                <a:solidFill>
+                  <a:schemeClr val="tx1"/>
+                </a:solidFill>
+                <a:latin typeface="Times New Roman" panose="02020603050405020304" pitchFamily="18" charset="0"/>
+              </a:defRPr>
+            </a:lvl8pPr>
+            <a:lvl9pPr marL="3886200" indent="-228600" eaLnBrk="0" fontAlgn="base" hangingPunct="0">
+              <a:spcBef>
+                <a:spcPct val="20000"/>
+              </a:spcBef>
+              <a:spcAft>
+                <a:spcPct val="0"/>
+              </a:spcAft>
+              <a:buChar char="»"/>
+              <a:defRPr sz="2000">
+                <a:solidFill>
+                  <a:schemeClr val="tx1"/>
+                </a:solidFill>
+                <a:latin typeface="Times New Roman" panose="02020603050405020304" pitchFamily="18" charset="0"/>
+              </a:defRPr>
+            </a:lvl9pPr>
+          </a:lstStyle>
+          <a:p>
+            <a:pPr>
+              <a:spcBef>
+                <a:spcPct val="50000"/>
+              </a:spcBef>
+              <a:buFontTx/>
+              <a:buNone/>
+            </a:pPr>
+            <a:r>
+              <a:rPr lang="en-US" altLang="en-US" sz="2800" dirty="0">
+                <a:solidFill>
+                  <a:srgbClr val="0066FF"/>
+                </a:solidFill>
+                <a:latin typeface="Tahoma" panose="020B0604030504040204" pitchFamily="34" charset="0"/>
+              </a:rPr>
+              <a:t>How many more times can we call pop()?</a:t>
             </a:r>
           </a:p>
         </p:txBody>
@@ -20497,10 +21789,1249 @@
   <p:clrMapOvr>
     <a:masterClrMapping/>
   </p:clrMapOvr>
+  <p:timing>
+    <p:tnLst>
+      <p:par>
+        <p:cTn id="1" dur="indefinite" restart="never" nodeType="tmRoot">
+          <p:childTnLst>
+            <p:seq concurrent="1" nextAc="seek">
+              <p:cTn id="2" dur="indefinite" nodeType="mainSeq">
+                <p:childTnLst>
+                  <p:par>
+                    <p:cTn id="3" fill="hold">
+                      <p:stCondLst>
+                        <p:cond delay="indefinite"/>
+                      </p:stCondLst>
+                      <p:childTnLst>
+                        <p:par>
+                          <p:cTn id="4" fill="hold">
+                            <p:stCondLst>
+                              <p:cond delay="0"/>
+                            </p:stCondLst>
+                            <p:childTnLst>
+                              <p:par>
+                                <p:cTn id="5" presetID="16" presetClass="entr" presetSubtype="21" fill="hold" grpId="0" nodeType="clickEffect">
+                                  <p:stCondLst>
+                                    <p:cond delay="0"/>
+                                  </p:stCondLst>
+                                  <p:childTnLst>
+                                    <p:set>
+                                      <p:cBhvr>
+                                        <p:cTn id="6" dur="1" fill="hold">
+                                          <p:stCondLst>
+                                            <p:cond delay="0"/>
+                                          </p:stCondLst>
+                                        </p:cTn>
+                                        <p:tgtEl>
+                                          <p:spTgt spid="2"/>
+                                        </p:tgtEl>
+                                        <p:attrNameLst>
+                                          <p:attrName>style.visibility</p:attrName>
+                                        </p:attrNameLst>
+                                      </p:cBhvr>
+                                      <p:to>
+                                        <p:strVal val="visible"/>
+                                      </p:to>
+                                    </p:set>
+                                    <p:animEffect transition="in" filter="barn(inVertical)">
+                                      <p:cBhvr>
+                                        <p:cTn id="7" dur="500"/>
+                                        <p:tgtEl>
+                                          <p:spTgt spid="2"/>
+                                        </p:tgtEl>
+                                      </p:cBhvr>
+                                    </p:animEffect>
+                                  </p:childTnLst>
+                                </p:cTn>
+                              </p:par>
+                            </p:childTnLst>
+                          </p:cTn>
+                        </p:par>
+                      </p:childTnLst>
+                    </p:cTn>
+                  </p:par>
+                </p:childTnLst>
+              </p:cTn>
+              <p:prevCondLst>
+                <p:cond evt="onPrev" delay="0">
+                  <p:tgtEl>
+                    <p:sldTgt/>
+                  </p:tgtEl>
+                </p:cond>
+              </p:prevCondLst>
+              <p:nextCondLst>
+                <p:cond evt="onNext" delay="0">
+                  <p:tgtEl>
+                    <p:sldTgt/>
+                  </p:tgtEl>
+                </p:cond>
+              </p:nextCondLst>
+            </p:seq>
+          </p:childTnLst>
+        </p:cTn>
+      </p:par>
+    </p:tnLst>
+    <p:bldLst>
+      <p:bldP spid="2" grpId="0"/>
+    </p:bldLst>
+  </p:timing>
 </p:sld>
 </file>
 
-<file path=ppt/slides/slide17.xml><?xml version="1.0" encoding="utf-8"?>
+<file path=ppt/slides/slide18.xml><?xml version="1.0" encoding="utf-8"?>
+<p:sld xmlns:a="http://schemas.openxmlformats.org/drawingml/2006/main" xmlns:r="http://schemas.openxmlformats.org/officeDocument/2006/relationships" xmlns:p="http://schemas.openxmlformats.org/presentationml/2006/main">
+  <p:cSld>
+    <p:spTree>
+      <p:nvGrpSpPr>
+        <p:cNvPr id="1" name="">
+          <a:extLst>
+            <a:ext uri="{FF2B5EF4-FFF2-40B4-BE49-F238E27FC236}">
+              <a16:creationId xmlns:a16="http://schemas.microsoft.com/office/drawing/2014/main" id="{60FA2B60-0A05-5AC7-8178-7276FBA5ED44}"/>
+            </a:ext>
+          </a:extLst>
+        </p:cNvPr>
+        <p:cNvGrpSpPr/>
+        <p:nvPr/>
+      </p:nvGrpSpPr>
+      <p:grpSpPr>
+        <a:xfrm>
+          <a:off x="0" y="0"/>
+          <a:ext cx="0" cy="0"/>
+          <a:chOff x="0" y="0"/>
+          <a:chExt cx="0" cy="0"/>
+        </a:xfrm>
+      </p:grpSpPr>
+      <p:sp>
+        <p:nvSpPr>
+          <p:cNvPr id="18434" name="Footer Placeholder 3">
+            <a:extLst>
+              <a:ext uri="{FF2B5EF4-FFF2-40B4-BE49-F238E27FC236}">
+                <a16:creationId xmlns:a16="http://schemas.microsoft.com/office/drawing/2014/main" id="{F4988E7D-6295-B258-CF79-67F4BE1B429A}"/>
+              </a:ext>
+            </a:extLst>
+          </p:cNvPr>
+          <p:cNvSpPr>
+            <a:spLocks noGrp="1"/>
+          </p:cNvSpPr>
+          <p:nvPr>
+            <p:ph type="ftr" sz="quarter" idx="12"/>
+          </p:nvPr>
+        </p:nvSpPr>
+        <p:spPr>
+          <a:noFill/>
+        </p:spPr>
+        <p:txBody>
+          <a:bodyPr/>
+          <a:lstStyle>
+            <a:lvl1pPr>
+              <a:spcBef>
+                <a:spcPct val="20000"/>
+              </a:spcBef>
+              <a:buChar char="•"/>
+              <a:defRPr sz="3200">
+                <a:solidFill>
+                  <a:schemeClr val="tx1"/>
+                </a:solidFill>
+                <a:latin typeface="Times New Roman" panose="02020603050405020304" pitchFamily="18" charset="0"/>
+              </a:defRPr>
+            </a:lvl1pPr>
+            <a:lvl2pPr marL="742950" indent="-285750">
+              <a:spcBef>
+                <a:spcPct val="20000"/>
+              </a:spcBef>
+              <a:buChar char="–"/>
+              <a:defRPr sz="2800">
+                <a:solidFill>
+                  <a:schemeClr val="tx1"/>
+                </a:solidFill>
+                <a:latin typeface="Times New Roman" panose="02020603050405020304" pitchFamily="18" charset="0"/>
+              </a:defRPr>
+            </a:lvl2pPr>
+            <a:lvl3pPr marL="1143000" indent="-228600">
+              <a:spcBef>
+                <a:spcPct val="20000"/>
+              </a:spcBef>
+              <a:buChar char="•"/>
+              <a:defRPr sz="2400">
+                <a:solidFill>
+                  <a:schemeClr val="tx1"/>
+                </a:solidFill>
+                <a:latin typeface="Times New Roman" panose="02020603050405020304" pitchFamily="18" charset="0"/>
+              </a:defRPr>
+            </a:lvl3pPr>
+            <a:lvl4pPr marL="1600200" indent="-228600">
+              <a:spcBef>
+                <a:spcPct val="20000"/>
+              </a:spcBef>
+              <a:buChar char="–"/>
+              <a:defRPr sz="2000">
+                <a:solidFill>
+                  <a:schemeClr val="tx1"/>
+                </a:solidFill>
+                <a:latin typeface="Times New Roman" panose="02020603050405020304" pitchFamily="18" charset="0"/>
+              </a:defRPr>
+            </a:lvl4pPr>
+            <a:lvl5pPr marL="2057400" indent="-228600">
+              <a:spcBef>
+                <a:spcPct val="20000"/>
+              </a:spcBef>
+              <a:buChar char="»"/>
+              <a:defRPr sz="2000">
+                <a:solidFill>
+                  <a:schemeClr val="tx1"/>
+                </a:solidFill>
+                <a:latin typeface="Times New Roman" panose="02020603050405020304" pitchFamily="18" charset="0"/>
+              </a:defRPr>
+            </a:lvl5pPr>
+            <a:lvl6pPr marL="2514600" indent="-228600" eaLnBrk="0" fontAlgn="base" hangingPunct="0">
+              <a:spcBef>
+                <a:spcPct val="20000"/>
+              </a:spcBef>
+              <a:spcAft>
+                <a:spcPct val="0"/>
+              </a:spcAft>
+              <a:buChar char="»"/>
+              <a:defRPr sz="2000">
+                <a:solidFill>
+                  <a:schemeClr val="tx1"/>
+                </a:solidFill>
+                <a:latin typeface="Times New Roman" panose="02020603050405020304" pitchFamily="18" charset="0"/>
+              </a:defRPr>
+            </a:lvl6pPr>
+            <a:lvl7pPr marL="2971800" indent="-228600" eaLnBrk="0" fontAlgn="base" hangingPunct="0">
+              <a:spcBef>
+                <a:spcPct val="20000"/>
+              </a:spcBef>
+              <a:spcAft>
+                <a:spcPct val="0"/>
+              </a:spcAft>
+              <a:buChar char="»"/>
+              <a:defRPr sz="2000">
+                <a:solidFill>
+                  <a:schemeClr val="tx1"/>
+                </a:solidFill>
+                <a:latin typeface="Times New Roman" panose="02020603050405020304" pitchFamily="18" charset="0"/>
+              </a:defRPr>
+            </a:lvl7pPr>
+            <a:lvl8pPr marL="3429000" indent="-228600" eaLnBrk="0" fontAlgn="base" hangingPunct="0">
+              <a:spcBef>
+                <a:spcPct val="20000"/>
+              </a:spcBef>
+              <a:spcAft>
+                <a:spcPct val="0"/>
+              </a:spcAft>
+              <a:buChar char="»"/>
+              <a:defRPr sz="2000">
+                <a:solidFill>
+                  <a:schemeClr val="tx1"/>
+                </a:solidFill>
+                <a:latin typeface="Times New Roman" panose="02020603050405020304" pitchFamily="18" charset="0"/>
+              </a:defRPr>
+            </a:lvl8pPr>
+            <a:lvl9pPr marL="3886200" indent="-228600" eaLnBrk="0" fontAlgn="base" hangingPunct="0">
+              <a:spcBef>
+                <a:spcPct val="20000"/>
+              </a:spcBef>
+              <a:spcAft>
+                <a:spcPct val="0"/>
+              </a:spcAft>
+              <a:buChar char="»"/>
+              <a:defRPr sz="2000">
+                <a:solidFill>
+                  <a:schemeClr val="tx1"/>
+                </a:solidFill>
+                <a:latin typeface="Times New Roman" panose="02020603050405020304" pitchFamily="18" charset="0"/>
+              </a:defRPr>
+            </a:lvl9pPr>
+          </a:lstStyle>
+          <a:p>
+            <a:pPr>
+              <a:spcBef>
+                <a:spcPct val="0"/>
+              </a:spcBef>
+              <a:buFontTx/>
+              <a:buNone/>
+            </a:pPr>
+            <a:endParaRPr lang="en-US" altLang="en-US" sz="800"/>
+          </a:p>
+          <a:p>
+            <a:pPr>
+              <a:spcBef>
+                <a:spcPct val="0"/>
+              </a:spcBef>
+              <a:buFontTx/>
+              <a:buNone/>
+            </a:pPr>
+            <a:endParaRPr lang="en-US" altLang="en-US" sz="800" b="0">
+              <a:latin typeface="Tahoma" panose="020B0604030504040204" pitchFamily="34" charset="0"/>
+            </a:endParaRPr>
+          </a:p>
+          <a:p>
+            <a:pPr>
+              <a:spcBef>
+                <a:spcPct val="0"/>
+              </a:spcBef>
+              <a:buFontTx/>
+              <a:buNone/>
+            </a:pPr>
+            <a:endParaRPr lang="en-US" altLang="en-US" sz="800">
+              <a:latin typeface="Tahoma" panose="020B0604030504040204" pitchFamily="34" charset="0"/>
+            </a:endParaRPr>
+          </a:p>
+          <a:p>
+            <a:pPr>
+              <a:spcBef>
+                <a:spcPct val="0"/>
+              </a:spcBef>
+              <a:buFontTx/>
+              <a:buNone/>
+            </a:pPr>
+            <a:r>
+              <a:rPr lang="en-US" altLang="en-US" sz="800">
+                <a:latin typeface="Tahoma" panose="020B0604030504040204" pitchFamily="34" charset="0"/>
+              </a:rPr>
+              <a:t>© A+ Computer Science  -  www.apluscompsci.com</a:t>
+            </a:r>
+          </a:p>
+        </p:txBody>
+      </p:sp>
+      <p:sp>
+        <p:nvSpPr>
+          <p:cNvPr id="18435" name="Text Box 2">
+            <a:extLst>
+              <a:ext uri="{FF2B5EF4-FFF2-40B4-BE49-F238E27FC236}">
+                <a16:creationId xmlns:a16="http://schemas.microsoft.com/office/drawing/2014/main" id="{85F6AC03-3EC3-3088-7268-40CE3F50992F}"/>
+              </a:ext>
+            </a:extLst>
+          </p:cNvPr>
+          <p:cNvSpPr txBox="1">
+            <a:spLocks noChangeArrowheads="1"/>
+          </p:cNvSpPr>
+          <p:nvPr/>
+        </p:nvSpPr>
+        <p:spPr bwMode="auto">
+          <a:xfrm>
+            <a:off x="401320" y="680720"/>
+            <a:ext cx="6477000" cy="5262979"/>
+          </a:xfrm>
+          <a:prstGeom prst="rect">
+            <a:avLst/>
+          </a:prstGeom>
+          <a:noFill/>
+          <a:ln>
+            <a:noFill/>
+          </a:ln>
+          <a:effectLst/>
+          <a:extLst>
+            <a:ext uri="{909E8E84-426E-40DD-AFC4-6F175D3DCCD1}">
+              <a14:hiddenFill xmlns:a14="http://schemas.microsoft.com/office/drawing/2010/main">
+                <a:solidFill>
+                  <a:schemeClr val="accent1"/>
+                </a:solidFill>
+              </a14:hiddenFill>
+            </a:ext>
+            <a:ext uri="{91240B29-F687-4F45-9708-019B960494DF}">
+              <a14:hiddenLine xmlns:a14="http://schemas.microsoft.com/office/drawing/2010/main" w="9525">
+                <a:solidFill>
+                  <a:schemeClr val="tx1"/>
+                </a:solidFill>
+                <a:miter lim="800000"/>
+                <a:headEnd/>
+                <a:tailEnd/>
+              </a14:hiddenLine>
+            </a:ext>
+            <a:ext uri="{AF507438-7753-43E0-B8FC-AC1667EBCBE1}">
+              <a14:hiddenEffects xmlns:a14="http://schemas.microsoft.com/office/drawing/2010/main">
+                <a:effectLst>
+                  <a:outerShdw dist="35921" dir="2700000" algn="ctr" rotWithShape="0">
+                    <a:schemeClr val="bg2"/>
+                  </a:outerShdw>
+                </a:effectLst>
+              </a14:hiddenEffects>
+            </a:ext>
+          </a:extLst>
+        </p:spPr>
+        <p:txBody>
+          <a:bodyPr>
+            <a:spAutoFit/>
+          </a:bodyPr>
+          <a:lstStyle>
+            <a:lvl1pPr>
+              <a:spcBef>
+                <a:spcPct val="20000"/>
+              </a:spcBef>
+              <a:buChar char="•"/>
+              <a:defRPr sz="3200">
+                <a:solidFill>
+                  <a:schemeClr val="tx1"/>
+                </a:solidFill>
+                <a:latin typeface="Times New Roman" panose="02020603050405020304" pitchFamily="18" charset="0"/>
+              </a:defRPr>
+            </a:lvl1pPr>
+            <a:lvl2pPr marL="742950" indent="-285750">
+              <a:spcBef>
+                <a:spcPct val="20000"/>
+              </a:spcBef>
+              <a:buChar char="–"/>
+              <a:defRPr sz="2800">
+                <a:solidFill>
+                  <a:schemeClr val="tx1"/>
+                </a:solidFill>
+                <a:latin typeface="Times New Roman" panose="02020603050405020304" pitchFamily="18" charset="0"/>
+              </a:defRPr>
+            </a:lvl2pPr>
+            <a:lvl3pPr marL="1143000" indent="-228600">
+              <a:spcBef>
+                <a:spcPct val="20000"/>
+              </a:spcBef>
+              <a:buChar char="•"/>
+              <a:defRPr sz="2400">
+                <a:solidFill>
+                  <a:schemeClr val="tx1"/>
+                </a:solidFill>
+                <a:latin typeface="Times New Roman" panose="02020603050405020304" pitchFamily="18" charset="0"/>
+              </a:defRPr>
+            </a:lvl3pPr>
+            <a:lvl4pPr marL="1600200" indent="-228600">
+              <a:spcBef>
+                <a:spcPct val="20000"/>
+              </a:spcBef>
+              <a:buChar char="–"/>
+              <a:defRPr sz="2000">
+                <a:solidFill>
+                  <a:schemeClr val="tx1"/>
+                </a:solidFill>
+                <a:latin typeface="Times New Roman" panose="02020603050405020304" pitchFamily="18" charset="0"/>
+              </a:defRPr>
+            </a:lvl4pPr>
+            <a:lvl5pPr marL="2057400" indent="-228600">
+              <a:spcBef>
+                <a:spcPct val="20000"/>
+              </a:spcBef>
+              <a:buChar char="»"/>
+              <a:defRPr sz="2000">
+                <a:solidFill>
+                  <a:schemeClr val="tx1"/>
+                </a:solidFill>
+                <a:latin typeface="Times New Roman" panose="02020603050405020304" pitchFamily="18" charset="0"/>
+              </a:defRPr>
+            </a:lvl5pPr>
+            <a:lvl6pPr marL="2514600" indent="-228600" eaLnBrk="0" fontAlgn="base" hangingPunct="0">
+              <a:spcBef>
+                <a:spcPct val="20000"/>
+              </a:spcBef>
+              <a:spcAft>
+                <a:spcPct val="0"/>
+              </a:spcAft>
+              <a:buChar char="»"/>
+              <a:defRPr sz="2000">
+                <a:solidFill>
+                  <a:schemeClr val="tx1"/>
+                </a:solidFill>
+                <a:latin typeface="Times New Roman" panose="02020603050405020304" pitchFamily="18" charset="0"/>
+              </a:defRPr>
+            </a:lvl6pPr>
+            <a:lvl7pPr marL="2971800" indent="-228600" eaLnBrk="0" fontAlgn="base" hangingPunct="0">
+              <a:spcBef>
+                <a:spcPct val="20000"/>
+              </a:spcBef>
+              <a:spcAft>
+                <a:spcPct val="0"/>
+              </a:spcAft>
+              <a:buChar char="»"/>
+              <a:defRPr sz="2000">
+                <a:solidFill>
+                  <a:schemeClr val="tx1"/>
+                </a:solidFill>
+                <a:latin typeface="Times New Roman" panose="02020603050405020304" pitchFamily="18" charset="0"/>
+              </a:defRPr>
+            </a:lvl7pPr>
+            <a:lvl8pPr marL="3429000" indent="-228600" eaLnBrk="0" fontAlgn="base" hangingPunct="0">
+              <a:spcBef>
+                <a:spcPct val="20000"/>
+              </a:spcBef>
+              <a:spcAft>
+                <a:spcPct val="0"/>
+              </a:spcAft>
+              <a:buChar char="»"/>
+              <a:defRPr sz="2000">
+                <a:solidFill>
+                  <a:schemeClr val="tx1"/>
+                </a:solidFill>
+                <a:latin typeface="Times New Roman" panose="02020603050405020304" pitchFamily="18" charset="0"/>
+              </a:defRPr>
+            </a:lvl8pPr>
+            <a:lvl9pPr marL="3886200" indent="-228600" eaLnBrk="0" fontAlgn="base" hangingPunct="0">
+              <a:spcBef>
+                <a:spcPct val="20000"/>
+              </a:spcBef>
+              <a:spcAft>
+                <a:spcPct val="0"/>
+              </a:spcAft>
+              <a:buChar char="»"/>
+              <a:defRPr sz="2000">
+                <a:solidFill>
+                  <a:schemeClr val="tx1"/>
+                </a:solidFill>
+                <a:latin typeface="Times New Roman" panose="02020603050405020304" pitchFamily="18" charset="0"/>
+              </a:defRPr>
+            </a:lvl9pPr>
+          </a:lstStyle>
+          <a:p>
+            <a:pPr>
+              <a:spcBef>
+                <a:spcPct val="0"/>
+              </a:spcBef>
+              <a:buFontTx/>
+              <a:buNone/>
+            </a:pPr>
+            <a:r>
+              <a:rPr lang="en-US" altLang="en-US" sz="2800" dirty="0">
+                <a:latin typeface="Tahoma" panose="020B0604030504040204" pitchFamily="34" charset="0"/>
+              </a:rPr>
+              <a:t>Stack&lt;Integer&gt; s;</a:t>
+            </a:r>
+          </a:p>
+          <a:p>
+            <a:pPr>
+              <a:spcBef>
+                <a:spcPct val="0"/>
+              </a:spcBef>
+              <a:buFontTx/>
+              <a:buNone/>
+            </a:pPr>
+            <a:r>
+              <a:rPr lang="en-US" altLang="en-US" sz="2800" dirty="0">
+                <a:latin typeface="Tahoma" panose="020B0604030504040204" pitchFamily="34" charset="0"/>
+              </a:rPr>
+              <a:t>s = new Stack&lt;Integer&gt;();</a:t>
+            </a:r>
+          </a:p>
+          <a:p>
+            <a:pPr>
+              <a:spcBef>
+                <a:spcPct val="0"/>
+              </a:spcBef>
+              <a:buFontTx/>
+              <a:buNone/>
+            </a:pPr>
+            <a:r>
+              <a:rPr lang="en-US" altLang="en-US" sz="2800" dirty="0" err="1">
+                <a:latin typeface="Tahoma" panose="020B0604030504040204" pitchFamily="34" charset="0"/>
+              </a:rPr>
+              <a:t>s.push</a:t>
+            </a:r>
+            <a:r>
+              <a:rPr lang="en-US" altLang="en-US" sz="2800" dirty="0">
+                <a:latin typeface="Tahoma" panose="020B0604030504040204" pitchFamily="34" charset="0"/>
+              </a:rPr>
+              <a:t>(88);</a:t>
+            </a:r>
+          </a:p>
+          <a:p>
+            <a:pPr>
+              <a:spcBef>
+                <a:spcPct val="0"/>
+              </a:spcBef>
+              <a:buFontTx/>
+              <a:buNone/>
+            </a:pPr>
+            <a:r>
+              <a:rPr lang="en-US" altLang="en-US" sz="2800" dirty="0" err="1">
+                <a:latin typeface="Tahoma" panose="020B0604030504040204" pitchFamily="34" charset="0"/>
+              </a:rPr>
+              <a:t>s.push</a:t>
+            </a:r>
+            <a:r>
+              <a:rPr lang="en-US" altLang="en-US" sz="2800" dirty="0">
+                <a:latin typeface="Tahoma" panose="020B0604030504040204" pitchFamily="34" charset="0"/>
+              </a:rPr>
+              <a:t>(23);</a:t>
+            </a:r>
+          </a:p>
+          <a:p>
+            <a:pPr>
+              <a:spcBef>
+                <a:spcPct val="0"/>
+              </a:spcBef>
+              <a:buFontTx/>
+              <a:buNone/>
+            </a:pPr>
+            <a:r>
+              <a:rPr lang="en-US" altLang="en-US" sz="2800" dirty="0" err="1">
+                <a:latin typeface="Tahoma" panose="020B0604030504040204" pitchFamily="34" charset="0"/>
+              </a:rPr>
+              <a:t>s.push</a:t>
+            </a:r>
+            <a:r>
+              <a:rPr lang="en-US" altLang="en-US" sz="2800" dirty="0">
+                <a:latin typeface="Tahoma" panose="020B0604030504040204" pitchFamily="34" charset="0"/>
+              </a:rPr>
+              <a:t>(11);</a:t>
+            </a:r>
+          </a:p>
+          <a:p>
+            <a:pPr>
+              <a:spcBef>
+                <a:spcPct val="0"/>
+              </a:spcBef>
+              <a:buFontTx/>
+              <a:buNone/>
+            </a:pPr>
+            <a:r>
+              <a:rPr lang="en-US" altLang="en-US" sz="2800" dirty="0" err="1">
+                <a:solidFill>
+                  <a:srgbClr val="0066FF"/>
+                </a:solidFill>
+                <a:latin typeface="Tahoma" panose="020B0604030504040204" pitchFamily="34" charset="0"/>
+              </a:rPr>
+              <a:t>out.println</a:t>
+            </a:r>
+            <a:r>
+              <a:rPr lang="en-US" altLang="en-US" sz="2800" dirty="0">
+                <a:solidFill>
+                  <a:srgbClr val="0066FF"/>
+                </a:solidFill>
+                <a:latin typeface="Tahoma" panose="020B0604030504040204" pitchFamily="34" charset="0"/>
+              </a:rPr>
+              <a:t>(</a:t>
+            </a:r>
+            <a:r>
+              <a:rPr lang="en-US" altLang="en-US" sz="2800" dirty="0" err="1">
+                <a:solidFill>
+                  <a:srgbClr val="0066FF"/>
+                </a:solidFill>
+                <a:latin typeface="Tahoma" panose="020B0604030504040204" pitchFamily="34" charset="0"/>
+              </a:rPr>
+              <a:t>s.pop</a:t>
+            </a:r>
+            <a:r>
+              <a:rPr lang="en-US" altLang="en-US" sz="2800" dirty="0">
+                <a:solidFill>
+                  <a:srgbClr val="0066FF"/>
+                </a:solidFill>
+                <a:latin typeface="Tahoma" panose="020B0604030504040204" pitchFamily="34" charset="0"/>
+              </a:rPr>
+              <a:t>());</a:t>
+            </a:r>
+          </a:p>
+          <a:p>
+            <a:pPr>
+              <a:spcBef>
+                <a:spcPct val="0"/>
+              </a:spcBef>
+              <a:buFontTx/>
+              <a:buNone/>
+            </a:pPr>
+            <a:r>
+              <a:rPr lang="en-US" altLang="en-US" sz="2800" dirty="0" err="1">
+                <a:latin typeface="Tahoma" panose="020B0604030504040204" pitchFamily="34" charset="0"/>
+              </a:rPr>
+              <a:t>out.println</a:t>
+            </a:r>
+            <a:r>
+              <a:rPr lang="en-US" altLang="en-US" sz="2800" dirty="0">
+                <a:latin typeface="Tahoma" panose="020B0604030504040204" pitchFamily="34" charset="0"/>
+              </a:rPr>
+              <a:t>(s);</a:t>
+            </a:r>
+          </a:p>
+          <a:p>
+            <a:pPr>
+              <a:spcBef>
+                <a:spcPct val="0"/>
+              </a:spcBef>
+              <a:buFontTx/>
+              <a:buNone/>
+            </a:pPr>
+            <a:r>
+              <a:rPr lang="en-US" altLang="en-US" sz="2800" dirty="0" err="1">
+                <a:solidFill>
+                  <a:srgbClr val="0066FF"/>
+                </a:solidFill>
+                <a:latin typeface="Tahoma" panose="020B0604030504040204" pitchFamily="34" charset="0"/>
+              </a:rPr>
+              <a:t>out.println</a:t>
+            </a:r>
+            <a:r>
+              <a:rPr lang="en-US" altLang="en-US" sz="2800" dirty="0">
+                <a:solidFill>
+                  <a:srgbClr val="0066FF"/>
+                </a:solidFill>
+                <a:latin typeface="Tahoma" panose="020B0604030504040204" pitchFamily="34" charset="0"/>
+              </a:rPr>
+              <a:t>(</a:t>
+            </a:r>
+            <a:r>
+              <a:rPr lang="en-US" altLang="en-US" sz="2800" dirty="0" err="1">
+                <a:solidFill>
+                  <a:srgbClr val="0066FF"/>
+                </a:solidFill>
+                <a:latin typeface="Tahoma" panose="020B0604030504040204" pitchFamily="34" charset="0"/>
+              </a:rPr>
+              <a:t>s.pop</a:t>
+            </a:r>
+            <a:r>
+              <a:rPr lang="en-US" altLang="en-US" sz="2800" dirty="0">
+                <a:solidFill>
+                  <a:srgbClr val="0066FF"/>
+                </a:solidFill>
+                <a:latin typeface="Tahoma" panose="020B0604030504040204" pitchFamily="34" charset="0"/>
+              </a:rPr>
+              <a:t>());</a:t>
+            </a:r>
+          </a:p>
+          <a:p>
+            <a:pPr>
+              <a:spcBef>
+                <a:spcPct val="0"/>
+              </a:spcBef>
+              <a:buFontTx/>
+              <a:buNone/>
+            </a:pPr>
+            <a:r>
+              <a:rPr lang="en-US" altLang="en-US" sz="2800" dirty="0" err="1">
+                <a:latin typeface="Tahoma" panose="020B0604030504040204" pitchFamily="34" charset="0"/>
+              </a:rPr>
+              <a:t>out.println</a:t>
+            </a:r>
+            <a:r>
+              <a:rPr lang="en-US" altLang="en-US" sz="2800" dirty="0">
+                <a:latin typeface="Tahoma" panose="020B0604030504040204" pitchFamily="34" charset="0"/>
+              </a:rPr>
+              <a:t>(s);</a:t>
+            </a:r>
+          </a:p>
+          <a:p>
+            <a:pPr>
+              <a:spcBef>
+                <a:spcPct val="0"/>
+              </a:spcBef>
+              <a:buFontTx/>
+              <a:buNone/>
+            </a:pPr>
+            <a:r>
+              <a:rPr lang="en-US" altLang="en-US" sz="2800" dirty="0" err="1">
+                <a:solidFill>
+                  <a:srgbClr val="0066FF"/>
+                </a:solidFill>
+                <a:latin typeface="Tahoma" panose="020B0604030504040204" pitchFamily="34" charset="0"/>
+              </a:rPr>
+              <a:t>out.println</a:t>
+            </a:r>
+            <a:r>
+              <a:rPr lang="en-US" altLang="en-US" sz="2800" dirty="0">
+                <a:solidFill>
+                  <a:srgbClr val="0066FF"/>
+                </a:solidFill>
+                <a:latin typeface="Tahoma" panose="020B0604030504040204" pitchFamily="34" charset="0"/>
+              </a:rPr>
+              <a:t>(</a:t>
+            </a:r>
+            <a:r>
+              <a:rPr lang="en-US" altLang="en-US" sz="2800" dirty="0" err="1">
+                <a:solidFill>
+                  <a:srgbClr val="0066FF"/>
+                </a:solidFill>
+                <a:latin typeface="Tahoma" panose="020B0604030504040204" pitchFamily="34" charset="0"/>
+              </a:rPr>
+              <a:t>s.pop</a:t>
+            </a:r>
+            <a:r>
+              <a:rPr lang="en-US" altLang="en-US" sz="2800" dirty="0">
+                <a:solidFill>
+                  <a:srgbClr val="0066FF"/>
+                </a:solidFill>
+                <a:latin typeface="Tahoma" panose="020B0604030504040204" pitchFamily="34" charset="0"/>
+              </a:rPr>
+              <a:t>());</a:t>
+            </a:r>
+          </a:p>
+          <a:p>
+            <a:pPr>
+              <a:spcBef>
+                <a:spcPct val="0"/>
+              </a:spcBef>
+              <a:buFontTx/>
+              <a:buNone/>
+            </a:pPr>
+            <a:r>
+              <a:rPr lang="en-US" altLang="en-US" sz="2800" dirty="0" err="1">
+                <a:latin typeface="Tahoma" panose="020B0604030504040204" pitchFamily="34" charset="0"/>
+              </a:rPr>
+              <a:t>out.println</a:t>
+            </a:r>
+            <a:r>
+              <a:rPr lang="en-US" altLang="en-US" sz="2800" dirty="0">
+                <a:latin typeface="Tahoma" panose="020B0604030504040204" pitchFamily="34" charset="0"/>
+              </a:rPr>
+              <a:t>(s);</a:t>
+            </a:r>
+          </a:p>
+          <a:p>
+            <a:pPr>
+              <a:spcBef>
+                <a:spcPct val="0"/>
+              </a:spcBef>
+              <a:buNone/>
+            </a:pPr>
+            <a:r>
+              <a:rPr lang="en-US" altLang="en-US" sz="2800" dirty="0" err="1">
+                <a:solidFill>
+                  <a:srgbClr val="FF0000"/>
+                </a:solidFill>
+                <a:latin typeface="Tahoma" panose="020B0604030504040204" pitchFamily="34" charset="0"/>
+              </a:rPr>
+              <a:t>out.println</a:t>
+            </a:r>
+            <a:r>
+              <a:rPr lang="en-US" altLang="en-US" sz="2800" dirty="0">
+                <a:solidFill>
+                  <a:srgbClr val="FF0000"/>
+                </a:solidFill>
+                <a:latin typeface="Tahoma" panose="020B0604030504040204" pitchFamily="34" charset="0"/>
+              </a:rPr>
+              <a:t>(</a:t>
+            </a:r>
+            <a:r>
+              <a:rPr lang="en-US" altLang="en-US" sz="2800" dirty="0" err="1">
+                <a:solidFill>
+                  <a:srgbClr val="FF0000"/>
+                </a:solidFill>
+                <a:latin typeface="Tahoma" panose="020B0604030504040204" pitchFamily="34" charset="0"/>
+              </a:rPr>
+              <a:t>s.pop</a:t>
+            </a:r>
+            <a:r>
+              <a:rPr lang="en-US" altLang="en-US" sz="2800" dirty="0">
+                <a:solidFill>
+                  <a:srgbClr val="FF0000"/>
+                </a:solidFill>
+                <a:latin typeface="Tahoma" panose="020B0604030504040204" pitchFamily="34" charset="0"/>
+              </a:rPr>
+              <a:t>());</a:t>
+            </a:r>
+          </a:p>
+        </p:txBody>
+      </p:sp>
+      <p:sp>
+        <p:nvSpPr>
+          <p:cNvPr id="18436" name="WordArt 3">
+            <a:extLst>
+              <a:ext uri="{FF2B5EF4-FFF2-40B4-BE49-F238E27FC236}">
+                <a16:creationId xmlns:a16="http://schemas.microsoft.com/office/drawing/2014/main" id="{0D1B0ECC-BC34-A887-8439-529DFD6B8F35}"/>
+              </a:ext>
+            </a:extLst>
+          </p:cNvPr>
+          <p:cNvSpPr>
+            <a:spLocks noChangeArrowheads="1" noChangeShapeType="1" noTextEdit="1"/>
+          </p:cNvSpPr>
+          <p:nvPr/>
+        </p:nvSpPr>
+        <p:spPr bwMode="auto">
+          <a:xfrm>
+            <a:off x="4998720" y="402173"/>
+            <a:ext cx="3550920" cy="604520"/>
+          </a:xfrm>
+          <a:prstGeom prst="rect">
+            <a:avLst/>
+          </a:prstGeom>
+        </p:spPr>
+        <p:txBody>
+          <a:bodyPr wrap="none" fromWordArt="1">
+            <a:prstTxWarp prst="textPlain">
+              <a:avLst>
+                <a:gd name="adj" fmla="val 50000"/>
+              </a:avLst>
+            </a:prstTxWarp>
+          </a:bodyPr>
+          <a:lstStyle/>
+          <a:p>
+            <a:pPr algn="ctr"/>
+            <a:r>
+              <a:rPr lang="en-US" sz="3600" kern="10" dirty="0">
+                <a:ln w="12700">
+                  <a:solidFill>
+                    <a:srgbClr val="EAEAEA"/>
+                  </a:solidFill>
+                  <a:round/>
+                  <a:headEnd/>
+                  <a:tailEnd/>
+                </a:ln>
+                <a:gradFill rotWithShape="1">
+                  <a:gsLst>
+                    <a:gs pos="0">
+                      <a:srgbClr val="A603AB"/>
+                    </a:gs>
+                    <a:gs pos="12000">
+                      <a:srgbClr val="E81766"/>
+                    </a:gs>
+                    <a:gs pos="27000">
+                      <a:srgbClr val="EE3F17"/>
+                    </a:gs>
+                    <a:gs pos="48000">
+                      <a:srgbClr val="FFFF00"/>
+                    </a:gs>
+                    <a:gs pos="64999">
+                      <a:srgbClr val="1A8D48"/>
+                    </a:gs>
+                    <a:gs pos="78999">
+                      <a:srgbClr val="0819FB"/>
+                    </a:gs>
+                    <a:gs pos="100000">
+                      <a:srgbClr val="A603AB"/>
+                    </a:gs>
+                  </a:gsLst>
+                  <a:lin ang="0" scaled="1"/>
+                </a:gradFill>
+                <a:effectLst>
+                  <a:outerShdw dist="35921" dir="2700000" sy="50000" kx="2115830" algn="bl" rotWithShape="0">
+                    <a:srgbClr val="C0C0C0">
+                      <a:alpha val="79999"/>
+                    </a:srgbClr>
+                  </a:outerShdw>
+                </a:effectLst>
+                <a:latin typeface="Arial Black" panose="020B0A04020102020204" pitchFamily="34" charset="0"/>
+              </a:rPr>
+              <a:t>pop</a:t>
+            </a:r>
+          </a:p>
+        </p:txBody>
+      </p:sp>
+      <p:sp>
+        <p:nvSpPr>
+          <p:cNvPr id="18437" name="Text Box 4">
+            <a:extLst>
+              <a:ext uri="{FF2B5EF4-FFF2-40B4-BE49-F238E27FC236}">
+                <a16:creationId xmlns:a16="http://schemas.microsoft.com/office/drawing/2014/main" id="{1F65FC0B-83C9-33C0-2E7D-527174DD034B}"/>
+              </a:ext>
+            </a:extLst>
+          </p:cNvPr>
+          <p:cNvSpPr txBox="1">
+            <a:spLocks noChangeArrowheads="1"/>
+          </p:cNvSpPr>
+          <p:nvPr/>
+        </p:nvSpPr>
+        <p:spPr bwMode="auto">
+          <a:xfrm>
+            <a:off x="4475480" y="2194560"/>
+            <a:ext cx="4267200" cy="3754874"/>
+          </a:xfrm>
+          <a:prstGeom prst="rect">
+            <a:avLst/>
+          </a:prstGeom>
+          <a:noFill/>
+          <a:ln w="12700">
+            <a:solidFill>
+              <a:srgbClr val="993300"/>
+            </a:solidFill>
+            <a:miter lim="800000"/>
+            <a:headEnd type="none" w="sm" len="sm"/>
+            <a:tailEnd type="none" w="sm" len="sm"/>
+          </a:ln>
+          <a:effectLst/>
+          <a:extLst>
+            <a:ext uri="{909E8E84-426E-40DD-AFC4-6F175D3DCCD1}">
+              <a14:hiddenFill xmlns:a14="http://schemas.microsoft.com/office/drawing/2010/main">
+                <a:solidFill>
+                  <a:schemeClr val="accent1"/>
+                </a:solidFill>
+              </a14:hiddenFill>
+            </a:ext>
+            <a:ext uri="{AF507438-7753-43E0-B8FC-AC1667EBCBE1}">
+              <a14:hiddenEffects xmlns:a14="http://schemas.microsoft.com/office/drawing/2010/main">
+                <a:effectLst>
+                  <a:outerShdw dist="35921" dir="2700000" algn="ctr" rotWithShape="0">
+                    <a:schemeClr val="bg2"/>
+                  </a:outerShdw>
+                </a:effectLst>
+              </a14:hiddenEffects>
+            </a:ext>
+          </a:extLst>
+        </p:spPr>
+        <p:txBody>
+          <a:bodyPr wrap="square">
+            <a:spAutoFit/>
+          </a:bodyPr>
+          <a:lstStyle>
+            <a:lvl1pPr>
+              <a:spcBef>
+                <a:spcPct val="20000"/>
+              </a:spcBef>
+              <a:buChar char="•"/>
+              <a:defRPr sz="3200">
+                <a:solidFill>
+                  <a:schemeClr val="tx1"/>
+                </a:solidFill>
+                <a:latin typeface="Times New Roman" panose="02020603050405020304" pitchFamily="18" charset="0"/>
+              </a:defRPr>
+            </a:lvl1pPr>
+            <a:lvl2pPr marL="742950" indent="-285750">
+              <a:spcBef>
+                <a:spcPct val="20000"/>
+              </a:spcBef>
+              <a:buChar char="–"/>
+              <a:defRPr sz="2800">
+                <a:solidFill>
+                  <a:schemeClr val="tx1"/>
+                </a:solidFill>
+                <a:latin typeface="Times New Roman" panose="02020603050405020304" pitchFamily="18" charset="0"/>
+              </a:defRPr>
+            </a:lvl2pPr>
+            <a:lvl3pPr marL="1143000" indent="-228600">
+              <a:spcBef>
+                <a:spcPct val="20000"/>
+              </a:spcBef>
+              <a:buChar char="•"/>
+              <a:defRPr sz="2400">
+                <a:solidFill>
+                  <a:schemeClr val="tx1"/>
+                </a:solidFill>
+                <a:latin typeface="Times New Roman" panose="02020603050405020304" pitchFamily="18" charset="0"/>
+              </a:defRPr>
+            </a:lvl3pPr>
+            <a:lvl4pPr marL="1600200" indent="-228600">
+              <a:spcBef>
+                <a:spcPct val="20000"/>
+              </a:spcBef>
+              <a:buChar char="–"/>
+              <a:defRPr sz="2000">
+                <a:solidFill>
+                  <a:schemeClr val="tx1"/>
+                </a:solidFill>
+                <a:latin typeface="Times New Roman" panose="02020603050405020304" pitchFamily="18" charset="0"/>
+              </a:defRPr>
+            </a:lvl4pPr>
+            <a:lvl5pPr marL="2057400" indent="-228600">
+              <a:spcBef>
+                <a:spcPct val="20000"/>
+              </a:spcBef>
+              <a:buChar char="»"/>
+              <a:defRPr sz="2000">
+                <a:solidFill>
+                  <a:schemeClr val="tx1"/>
+                </a:solidFill>
+                <a:latin typeface="Times New Roman" panose="02020603050405020304" pitchFamily="18" charset="0"/>
+              </a:defRPr>
+            </a:lvl5pPr>
+            <a:lvl6pPr marL="2514600" indent="-228600" eaLnBrk="0" fontAlgn="base" hangingPunct="0">
+              <a:spcBef>
+                <a:spcPct val="20000"/>
+              </a:spcBef>
+              <a:spcAft>
+                <a:spcPct val="0"/>
+              </a:spcAft>
+              <a:buChar char="»"/>
+              <a:defRPr sz="2000">
+                <a:solidFill>
+                  <a:schemeClr val="tx1"/>
+                </a:solidFill>
+                <a:latin typeface="Times New Roman" panose="02020603050405020304" pitchFamily="18" charset="0"/>
+              </a:defRPr>
+            </a:lvl6pPr>
+            <a:lvl7pPr marL="2971800" indent="-228600" eaLnBrk="0" fontAlgn="base" hangingPunct="0">
+              <a:spcBef>
+                <a:spcPct val="20000"/>
+              </a:spcBef>
+              <a:spcAft>
+                <a:spcPct val="0"/>
+              </a:spcAft>
+              <a:buChar char="»"/>
+              <a:defRPr sz="2000">
+                <a:solidFill>
+                  <a:schemeClr val="tx1"/>
+                </a:solidFill>
+                <a:latin typeface="Times New Roman" panose="02020603050405020304" pitchFamily="18" charset="0"/>
+              </a:defRPr>
+            </a:lvl7pPr>
+            <a:lvl8pPr marL="3429000" indent="-228600" eaLnBrk="0" fontAlgn="base" hangingPunct="0">
+              <a:spcBef>
+                <a:spcPct val="20000"/>
+              </a:spcBef>
+              <a:spcAft>
+                <a:spcPct val="0"/>
+              </a:spcAft>
+              <a:buChar char="»"/>
+              <a:defRPr sz="2000">
+                <a:solidFill>
+                  <a:schemeClr val="tx1"/>
+                </a:solidFill>
+                <a:latin typeface="Times New Roman" panose="02020603050405020304" pitchFamily="18" charset="0"/>
+              </a:defRPr>
+            </a:lvl8pPr>
+            <a:lvl9pPr marL="3886200" indent="-228600" eaLnBrk="0" fontAlgn="base" hangingPunct="0">
+              <a:spcBef>
+                <a:spcPct val="20000"/>
+              </a:spcBef>
+              <a:spcAft>
+                <a:spcPct val="0"/>
+              </a:spcAft>
+              <a:buChar char="»"/>
+              <a:defRPr sz="2000">
+                <a:solidFill>
+                  <a:schemeClr val="tx1"/>
+                </a:solidFill>
+                <a:latin typeface="Times New Roman" panose="02020603050405020304" pitchFamily="18" charset="0"/>
+              </a:defRPr>
+            </a:lvl9pPr>
+          </a:lstStyle>
+          <a:p>
+            <a:pPr>
+              <a:spcBef>
+                <a:spcPct val="50000"/>
+              </a:spcBef>
+              <a:buFontTx/>
+              <a:buNone/>
+            </a:pPr>
+            <a:r>
+              <a:rPr lang="en-US" altLang="en-US" sz="2800" u="sng" dirty="0">
+                <a:solidFill>
+                  <a:srgbClr val="FF0000"/>
+                </a:solidFill>
+                <a:latin typeface="Tahoma" panose="020B0604030504040204" pitchFamily="34" charset="0"/>
+              </a:rPr>
+              <a:t>OUTPUT</a:t>
+            </a:r>
+          </a:p>
+          <a:p>
+            <a:pPr>
+              <a:spcBef>
+                <a:spcPct val="50000"/>
+              </a:spcBef>
+              <a:buFontTx/>
+              <a:buNone/>
+            </a:pPr>
+            <a:r>
+              <a:rPr lang="en-US" altLang="en-US" sz="2800" dirty="0">
+                <a:solidFill>
+                  <a:srgbClr val="0066FF"/>
+                </a:solidFill>
+                <a:latin typeface="Tahoma" panose="020B0604030504040204" pitchFamily="34" charset="0"/>
+              </a:rPr>
+              <a:t>11</a:t>
+            </a:r>
+          </a:p>
+          <a:p>
+            <a:pPr>
+              <a:spcBef>
+                <a:spcPts val="0"/>
+              </a:spcBef>
+              <a:buFontTx/>
+              <a:buNone/>
+            </a:pPr>
+            <a:r>
+              <a:rPr lang="en-US" altLang="en-US" sz="2800" dirty="0">
+                <a:latin typeface="Tahoma" panose="020B0604030504040204" pitchFamily="34" charset="0"/>
+              </a:rPr>
+              <a:t>[88, 23]</a:t>
+            </a:r>
+          </a:p>
+          <a:p>
+            <a:pPr>
+              <a:spcBef>
+                <a:spcPts val="0"/>
+              </a:spcBef>
+              <a:buFontTx/>
+              <a:buNone/>
+            </a:pPr>
+            <a:r>
+              <a:rPr lang="en-US" altLang="en-US" sz="2800" dirty="0">
+                <a:solidFill>
+                  <a:srgbClr val="0066FF"/>
+                </a:solidFill>
+                <a:latin typeface="Tahoma" panose="020B0604030504040204" pitchFamily="34" charset="0"/>
+              </a:rPr>
+              <a:t>23</a:t>
+            </a:r>
+          </a:p>
+          <a:p>
+            <a:pPr>
+              <a:spcBef>
+                <a:spcPts val="0"/>
+              </a:spcBef>
+              <a:buFontTx/>
+              <a:buNone/>
+            </a:pPr>
+            <a:r>
+              <a:rPr lang="en-US" altLang="en-US" sz="2800" dirty="0">
+                <a:latin typeface="Tahoma" panose="020B0604030504040204" pitchFamily="34" charset="0"/>
+              </a:rPr>
+              <a:t>[88]</a:t>
+            </a:r>
+          </a:p>
+          <a:p>
+            <a:pPr>
+              <a:spcBef>
+                <a:spcPts val="0"/>
+              </a:spcBef>
+              <a:buFontTx/>
+              <a:buNone/>
+            </a:pPr>
+            <a:r>
+              <a:rPr lang="en-US" altLang="en-US" sz="2800" dirty="0">
+                <a:solidFill>
+                  <a:srgbClr val="0066FF"/>
+                </a:solidFill>
+                <a:latin typeface="Tahoma" panose="020B0604030504040204" pitchFamily="34" charset="0"/>
+              </a:rPr>
+              <a:t>88</a:t>
+            </a:r>
+          </a:p>
+          <a:p>
+            <a:pPr>
+              <a:spcBef>
+                <a:spcPts val="0"/>
+              </a:spcBef>
+              <a:buFontTx/>
+              <a:buNone/>
+            </a:pPr>
+            <a:r>
+              <a:rPr lang="en-US" altLang="en-US" sz="2800" dirty="0">
+                <a:latin typeface="Tahoma" panose="020B0604030504040204" pitchFamily="34" charset="0"/>
+              </a:rPr>
+              <a:t>[]</a:t>
+            </a:r>
+          </a:p>
+          <a:p>
+            <a:pPr>
+              <a:spcBef>
+                <a:spcPts val="0"/>
+              </a:spcBef>
+              <a:buFontTx/>
+              <a:buNone/>
+            </a:pPr>
+            <a:r>
+              <a:rPr lang="en-US" altLang="en-US" sz="2800" dirty="0" err="1">
+                <a:solidFill>
+                  <a:srgbClr val="FF0000"/>
+                </a:solidFill>
+                <a:latin typeface="Tahoma" panose="020B0604030504040204" pitchFamily="34" charset="0"/>
+              </a:rPr>
+              <a:t>EmptyStackException</a:t>
+            </a:r>
+            <a:endParaRPr lang="en-US" altLang="en-US" sz="2800" dirty="0">
+              <a:solidFill>
+                <a:srgbClr val="FF0000"/>
+              </a:solidFill>
+              <a:latin typeface="Tahoma" panose="020B0604030504040204" pitchFamily="34" charset="0"/>
+            </a:endParaRPr>
+          </a:p>
+        </p:txBody>
+      </p:sp>
+    </p:spTree>
+    <p:extLst>
+      <p:ext uri="{BB962C8B-B14F-4D97-AF65-F5344CB8AC3E}">
+        <p14:creationId xmlns:p14="http://schemas.microsoft.com/office/powerpoint/2010/main" val="1028989355"/>
+      </p:ext>
+    </p:extLst>
+  </p:cSld>
+  <p:clrMapOvr>
+    <a:masterClrMapping/>
+  </p:clrMapOvr>
+</p:sld>
+</file>
+
+<file path=ppt/slides/slide19.xml><?xml version="1.0" encoding="utf-8"?>
 <p:sld xmlns:a="http://schemas.openxmlformats.org/drawingml/2006/main" xmlns:r="http://schemas.openxmlformats.org/officeDocument/2006/relationships" xmlns:p="http://schemas.openxmlformats.org/presentationml/2006/main">
   <p:cSld>
     <p:spTree>
@@ -20807,7 +23338,495 @@
 </p:sld>
 </file>
 
-<file path=ppt/slides/slide18.xml><?xml version="1.0" encoding="utf-8"?>
+<file path=ppt/slides/slide2.xml><?xml version="1.0" encoding="utf-8"?>
+<p:sld xmlns:a="http://schemas.openxmlformats.org/drawingml/2006/main" xmlns:r="http://schemas.openxmlformats.org/officeDocument/2006/relationships" xmlns:p="http://schemas.openxmlformats.org/presentationml/2006/main">
+  <p:cSld>
+    <p:spTree>
+      <p:nvGrpSpPr>
+        <p:cNvPr id="1" name="">
+          <a:extLst>
+            <a:ext uri="{FF2B5EF4-FFF2-40B4-BE49-F238E27FC236}">
+              <a16:creationId xmlns:a16="http://schemas.microsoft.com/office/drawing/2014/main" id="{A1889CF6-A3EE-A366-1CF7-0573997B7466}"/>
+            </a:ext>
+          </a:extLst>
+        </p:cNvPr>
+        <p:cNvGrpSpPr/>
+        <p:nvPr/>
+      </p:nvGrpSpPr>
+      <p:grpSpPr>
+        <a:xfrm>
+          <a:off x="0" y="0"/>
+          <a:ext cx="0" cy="0"/>
+          <a:chOff x="0" y="0"/>
+          <a:chExt cx="0" cy="0"/>
+        </a:xfrm>
+      </p:grpSpPr>
+      <p:sp>
+        <p:nvSpPr>
+          <p:cNvPr id="5122" name="Footer Placeholder 3">
+            <a:extLst>
+              <a:ext uri="{FF2B5EF4-FFF2-40B4-BE49-F238E27FC236}">
+                <a16:creationId xmlns:a16="http://schemas.microsoft.com/office/drawing/2014/main" id="{6D1B77C6-C669-ACD5-FBB0-B44B5F6572DB}"/>
+              </a:ext>
+            </a:extLst>
+          </p:cNvPr>
+          <p:cNvSpPr>
+            <a:spLocks noGrp="1"/>
+          </p:cNvSpPr>
+          <p:nvPr>
+            <p:ph type="ftr" sz="quarter" idx="12"/>
+          </p:nvPr>
+        </p:nvSpPr>
+        <p:spPr>
+          <a:noFill/>
+        </p:spPr>
+        <p:txBody>
+          <a:bodyPr/>
+          <a:lstStyle>
+            <a:lvl1pPr>
+              <a:spcBef>
+                <a:spcPct val="20000"/>
+              </a:spcBef>
+              <a:buChar char="•"/>
+              <a:defRPr sz="3200">
+                <a:solidFill>
+                  <a:schemeClr val="tx1"/>
+                </a:solidFill>
+                <a:latin typeface="Times New Roman" panose="02020603050405020304" pitchFamily="18" charset="0"/>
+              </a:defRPr>
+            </a:lvl1pPr>
+            <a:lvl2pPr marL="742950" indent="-285750">
+              <a:spcBef>
+                <a:spcPct val="20000"/>
+              </a:spcBef>
+              <a:buChar char="–"/>
+              <a:defRPr sz="2800">
+                <a:solidFill>
+                  <a:schemeClr val="tx1"/>
+                </a:solidFill>
+                <a:latin typeface="Times New Roman" panose="02020603050405020304" pitchFamily="18" charset="0"/>
+              </a:defRPr>
+            </a:lvl2pPr>
+            <a:lvl3pPr marL="1143000" indent="-228600">
+              <a:spcBef>
+                <a:spcPct val="20000"/>
+              </a:spcBef>
+              <a:buChar char="•"/>
+              <a:defRPr sz="2400">
+                <a:solidFill>
+                  <a:schemeClr val="tx1"/>
+                </a:solidFill>
+                <a:latin typeface="Times New Roman" panose="02020603050405020304" pitchFamily="18" charset="0"/>
+              </a:defRPr>
+            </a:lvl3pPr>
+            <a:lvl4pPr marL="1600200" indent="-228600">
+              <a:spcBef>
+                <a:spcPct val="20000"/>
+              </a:spcBef>
+              <a:buChar char="–"/>
+              <a:defRPr sz="2000">
+                <a:solidFill>
+                  <a:schemeClr val="tx1"/>
+                </a:solidFill>
+                <a:latin typeface="Times New Roman" panose="02020603050405020304" pitchFamily="18" charset="0"/>
+              </a:defRPr>
+            </a:lvl4pPr>
+            <a:lvl5pPr marL="2057400" indent="-228600">
+              <a:spcBef>
+                <a:spcPct val="20000"/>
+              </a:spcBef>
+              <a:buChar char="»"/>
+              <a:defRPr sz="2000">
+                <a:solidFill>
+                  <a:schemeClr val="tx1"/>
+                </a:solidFill>
+                <a:latin typeface="Times New Roman" panose="02020603050405020304" pitchFamily="18" charset="0"/>
+              </a:defRPr>
+            </a:lvl5pPr>
+            <a:lvl6pPr marL="2514600" indent="-228600" eaLnBrk="0" fontAlgn="base" hangingPunct="0">
+              <a:spcBef>
+                <a:spcPct val="20000"/>
+              </a:spcBef>
+              <a:spcAft>
+                <a:spcPct val="0"/>
+              </a:spcAft>
+              <a:buChar char="»"/>
+              <a:defRPr sz="2000">
+                <a:solidFill>
+                  <a:schemeClr val="tx1"/>
+                </a:solidFill>
+                <a:latin typeface="Times New Roman" panose="02020603050405020304" pitchFamily="18" charset="0"/>
+              </a:defRPr>
+            </a:lvl6pPr>
+            <a:lvl7pPr marL="2971800" indent="-228600" eaLnBrk="0" fontAlgn="base" hangingPunct="0">
+              <a:spcBef>
+                <a:spcPct val="20000"/>
+              </a:spcBef>
+              <a:spcAft>
+                <a:spcPct val="0"/>
+              </a:spcAft>
+              <a:buChar char="»"/>
+              <a:defRPr sz="2000">
+                <a:solidFill>
+                  <a:schemeClr val="tx1"/>
+                </a:solidFill>
+                <a:latin typeface="Times New Roman" panose="02020603050405020304" pitchFamily="18" charset="0"/>
+              </a:defRPr>
+            </a:lvl7pPr>
+            <a:lvl8pPr marL="3429000" indent="-228600" eaLnBrk="0" fontAlgn="base" hangingPunct="0">
+              <a:spcBef>
+                <a:spcPct val="20000"/>
+              </a:spcBef>
+              <a:spcAft>
+                <a:spcPct val="0"/>
+              </a:spcAft>
+              <a:buChar char="»"/>
+              <a:defRPr sz="2000">
+                <a:solidFill>
+                  <a:schemeClr val="tx1"/>
+                </a:solidFill>
+                <a:latin typeface="Times New Roman" panose="02020603050405020304" pitchFamily="18" charset="0"/>
+              </a:defRPr>
+            </a:lvl8pPr>
+            <a:lvl9pPr marL="3886200" indent="-228600" eaLnBrk="0" fontAlgn="base" hangingPunct="0">
+              <a:spcBef>
+                <a:spcPct val="20000"/>
+              </a:spcBef>
+              <a:spcAft>
+                <a:spcPct val="0"/>
+              </a:spcAft>
+              <a:buChar char="»"/>
+              <a:defRPr sz="2000">
+                <a:solidFill>
+                  <a:schemeClr val="tx1"/>
+                </a:solidFill>
+                <a:latin typeface="Times New Roman" panose="02020603050405020304" pitchFamily="18" charset="0"/>
+              </a:defRPr>
+            </a:lvl9pPr>
+          </a:lstStyle>
+          <a:p>
+            <a:pPr>
+              <a:spcBef>
+                <a:spcPct val="0"/>
+              </a:spcBef>
+              <a:buFontTx/>
+              <a:buNone/>
+            </a:pPr>
+            <a:endParaRPr lang="en-US" altLang="en-US" sz="800"/>
+          </a:p>
+          <a:p>
+            <a:pPr>
+              <a:spcBef>
+                <a:spcPct val="0"/>
+              </a:spcBef>
+              <a:buFontTx/>
+              <a:buNone/>
+            </a:pPr>
+            <a:endParaRPr lang="en-US" altLang="en-US" sz="800" b="0">
+              <a:latin typeface="Tahoma" panose="020B0604030504040204" pitchFamily="34" charset="0"/>
+            </a:endParaRPr>
+          </a:p>
+          <a:p>
+            <a:pPr>
+              <a:spcBef>
+                <a:spcPct val="0"/>
+              </a:spcBef>
+              <a:buFontTx/>
+              <a:buNone/>
+            </a:pPr>
+            <a:endParaRPr lang="en-US" altLang="en-US" sz="800">
+              <a:latin typeface="Tahoma" panose="020B0604030504040204" pitchFamily="34" charset="0"/>
+            </a:endParaRPr>
+          </a:p>
+          <a:p>
+            <a:pPr>
+              <a:spcBef>
+                <a:spcPct val="0"/>
+              </a:spcBef>
+              <a:buFontTx/>
+              <a:buNone/>
+            </a:pPr>
+            <a:r>
+              <a:rPr lang="en-US" altLang="en-US" sz="800">
+                <a:latin typeface="Tahoma" panose="020B0604030504040204" pitchFamily="34" charset="0"/>
+              </a:rPr>
+              <a:t>© A+ Computer Science  -  www.apluscompsci.com</a:t>
+            </a:r>
+          </a:p>
+        </p:txBody>
+      </p:sp>
+      <p:sp>
+        <p:nvSpPr>
+          <p:cNvPr id="5123" name="Text Box 2">
+            <a:extLst>
+              <a:ext uri="{FF2B5EF4-FFF2-40B4-BE49-F238E27FC236}">
+                <a16:creationId xmlns:a16="http://schemas.microsoft.com/office/drawing/2014/main" id="{66B2E528-A01C-0401-7E4D-00634BC0CDFB}"/>
+              </a:ext>
+            </a:extLst>
+          </p:cNvPr>
+          <p:cNvSpPr txBox="1">
+            <a:spLocks noChangeArrowheads="1"/>
+          </p:cNvSpPr>
+          <p:nvPr/>
+        </p:nvSpPr>
+        <p:spPr bwMode="auto">
+          <a:xfrm>
+            <a:off x="699370" y="2667000"/>
+            <a:ext cx="7772400" cy="2800767"/>
+          </a:xfrm>
+          <a:prstGeom prst="rect">
+            <a:avLst/>
+          </a:prstGeom>
+          <a:noFill/>
+          <a:ln>
+            <a:noFill/>
+          </a:ln>
+          <a:effectLst/>
+          <a:extLst>
+            <a:ext uri="{909E8E84-426E-40DD-AFC4-6F175D3DCCD1}">
+              <a14:hiddenFill xmlns:a14="http://schemas.microsoft.com/office/drawing/2010/main">
+                <a:solidFill>
+                  <a:schemeClr val="accent1"/>
+                </a:solidFill>
+              </a14:hiddenFill>
+            </a:ext>
+            <a:ext uri="{91240B29-F687-4F45-9708-019B960494DF}">
+              <a14:hiddenLine xmlns:a14="http://schemas.microsoft.com/office/drawing/2010/main" w="9525">
+                <a:solidFill>
+                  <a:schemeClr val="tx1"/>
+                </a:solidFill>
+                <a:miter lim="800000"/>
+                <a:headEnd/>
+                <a:tailEnd/>
+              </a14:hiddenLine>
+            </a:ext>
+            <a:ext uri="{AF507438-7753-43E0-B8FC-AC1667EBCBE1}">
+              <a14:hiddenEffects xmlns:a14="http://schemas.microsoft.com/office/drawing/2010/main">
+                <a:effectLst>
+                  <a:outerShdw dist="35921" dir="2700000" algn="ctr" rotWithShape="0">
+                    <a:schemeClr val="bg2"/>
+                  </a:outerShdw>
+                </a:effectLst>
+              </a14:hiddenEffects>
+            </a:ext>
+          </a:extLst>
+        </p:spPr>
+        <p:txBody>
+          <a:bodyPr>
+            <a:spAutoFit/>
+          </a:bodyPr>
+          <a:lstStyle>
+            <a:lvl1pPr>
+              <a:spcBef>
+                <a:spcPct val="20000"/>
+              </a:spcBef>
+              <a:buChar char="•"/>
+              <a:defRPr sz="3200">
+                <a:solidFill>
+                  <a:schemeClr val="tx1"/>
+                </a:solidFill>
+                <a:latin typeface="Times New Roman" panose="02020603050405020304" pitchFamily="18" charset="0"/>
+              </a:defRPr>
+            </a:lvl1pPr>
+            <a:lvl2pPr marL="742950" indent="-285750">
+              <a:spcBef>
+                <a:spcPct val="20000"/>
+              </a:spcBef>
+              <a:buChar char="–"/>
+              <a:defRPr sz="2800">
+                <a:solidFill>
+                  <a:schemeClr val="tx1"/>
+                </a:solidFill>
+                <a:latin typeface="Times New Roman" panose="02020603050405020304" pitchFamily="18" charset="0"/>
+              </a:defRPr>
+            </a:lvl2pPr>
+            <a:lvl3pPr marL="1143000" indent="-228600">
+              <a:spcBef>
+                <a:spcPct val="20000"/>
+              </a:spcBef>
+              <a:buChar char="•"/>
+              <a:defRPr sz="2400">
+                <a:solidFill>
+                  <a:schemeClr val="tx1"/>
+                </a:solidFill>
+                <a:latin typeface="Times New Roman" panose="02020603050405020304" pitchFamily="18" charset="0"/>
+              </a:defRPr>
+            </a:lvl3pPr>
+            <a:lvl4pPr marL="1600200" indent="-228600">
+              <a:spcBef>
+                <a:spcPct val="20000"/>
+              </a:spcBef>
+              <a:buChar char="–"/>
+              <a:defRPr sz="2000">
+                <a:solidFill>
+                  <a:schemeClr val="tx1"/>
+                </a:solidFill>
+                <a:latin typeface="Times New Roman" panose="02020603050405020304" pitchFamily="18" charset="0"/>
+              </a:defRPr>
+            </a:lvl4pPr>
+            <a:lvl5pPr marL="2057400" indent="-228600">
+              <a:spcBef>
+                <a:spcPct val="20000"/>
+              </a:spcBef>
+              <a:buChar char="»"/>
+              <a:defRPr sz="2000">
+                <a:solidFill>
+                  <a:schemeClr val="tx1"/>
+                </a:solidFill>
+                <a:latin typeface="Times New Roman" panose="02020603050405020304" pitchFamily="18" charset="0"/>
+              </a:defRPr>
+            </a:lvl5pPr>
+            <a:lvl6pPr marL="2514600" indent="-228600" eaLnBrk="0" fontAlgn="base" hangingPunct="0">
+              <a:spcBef>
+                <a:spcPct val="20000"/>
+              </a:spcBef>
+              <a:spcAft>
+                <a:spcPct val="0"/>
+              </a:spcAft>
+              <a:buChar char="»"/>
+              <a:defRPr sz="2000">
+                <a:solidFill>
+                  <a:schemeClr val="tx1"/>
+                </a:solidFill>
+                <a:latin typeface="Times New Roman" panose="02020603050405020304" pitchFamily="18" charset="0"/>
+              </a:defRPr>
+            </a:lvl6pPr>
+            <a:lvl7pPr marL="2971800" indent="-228600" eaLnBrk="0" fontAlgn="base" hangingPunct="0">
+              <a:spcBef>
+                <a:spcPct val="20000"/>
+              </a:spcBef>
+              <a:spcAft>
+                <a:spcPct val="0"/>
+              </a:spcAft>
+              <a:buChar char="»"/>
+              <a:defRPr sz="2000">
+                <a:solidFill>
+                  <a:schemeClr val="tx1"/>
+                </a:solidFill>
+                <a:latin typeface="Times New Roman" panose="02020603050405020304" pitchFamily="18" charset="0"/>
+              </a:defRPr>
+            </a:lvl7pPr>
+            <a:lvl8pPr marL="3429000" indent="-228600" eaLnBrk="0" fontAlgn="base" hangingPunct="0">
+              <a:spcBef>
+                <a:spcPct val="20000"/>
+              </a:spcBef>
+              <a:spcAft>
+                <a:spcPct val="0"/>
+              </a:spcAft>
+              <a:buChar char="»"/>
+              <a:defRPr sz="2000">
+                <a:solidFill>
+                  <a:schemeClr val="tx1"/>
+                </a:solidFill>
+                <a:latin typeface="Times New Roman" panose="02020603050405020304" pitchFamily="18" charset="0"/>
+              </a:defRPr>
+            </a:lvl8pPr>
+            <a:lvl9pPr marL="3886200" indent="-228600" eaLnBrk="0" fontAlgn="base" hangingPunct="0">
+              <a:spcBef>
+                <a:spcPct val="20000"/>
+              </a:spcBef>
+              <a:spcAft>
+                <a:spcPct val="0"/>
+              </a:spcAft>
+              <a:buChar char="»"/>
+              <a:defRPr sz="2000">
+                <a:solidFill>
+                  <a:schemeClr val="tx1"/>
+                </a:solidFill>
+                <a:latin typeface="Times New Roman" panose="02020603050405020304" pitchFamily="18" charset="0"/>
+              </a:defRPr>
+            </a:lvl9pPr>
+          </a:lstStyle>
+          <a:p>
+            <a:pPr algn="ctr">
+              <a:spcBef>
+                <a:spcPct val="0"/>
+              </a:spcBef>
+              <a:buFontTx/>
+              <a:buNone/>
+            </a:pPr>
+            <a:r>
+              <a:rPr lang="en-US" altLang="en-US" sz="4400" dirty="0">
+                <a:latin typeface="Tahoma" panose="020B0604030504040204" pitchFamily="34" charset="0"/>
+              </a:rPr>
+              <a:t>Stacks and Queues allow insertion and removal at the ends only, not in the middle.</a:t>
+            </a:r>
+          </a:p>
+        </p:txBody>
+      </p:sp>
+      <p:sp>
+        <p:nvSpPr>
+          <p:cNvPr id="5124" name="WordArt 3">
+            <a:extLst>
+              <a:ext uri="{FF2B5EF4-FFF2-40B4-BE49-F238E27FC236}">
+                <a16:creationId xmlns:a16="http://schemas.microsoft.com/office/drawing/2014/main" id="{1ECFF2C1-9766-68FE-8C97-D414D280A4D6}"/>
+              </a:ext>
+            </a:extLst>
+          </p:cNvPr>
+          <p:cNvSpPr>
+            <a:spLocks noChangeArrowheads="1" noChangeShapeType="1" noTextEdit="1"/>
+          </p:cNvSpPr>
+          <p:nvPr/>
+        </p:nvSpPr>
+        <p:spPr bwMode="auto">
+          <a:xfrm>
+            <a:off x="1308970" y="563880"/>
+            <a:ext cx="6553200" cy="1295400"/>
+          </a:xfrm>
+          <a:prstGeom prst="rect">
+            <a:avLst/>
+          </a:prstGeom>
+        </p:spPr>
+        <p:txBody>
+          <a:bodyPr wrap="none" fromWordArt="1">
+            <a:prstTxWarp prst="textPlain">
+              <a:avLst>
+                <a:gd name="adj" fmla="val 50000"/>
+              </a:avLst>
+            </a:prstTxWarp>
+          </a:bodyPr>
+          <a:lstStyle/>
+          <a:p>
+            <a:pPr algn="ctr"/>
+            <a:r>
+              <a:rPr lang="en-US" sz="3600" kern="10" dirty="0">
+                <a:ln w="9525">
+                  <a:solidFill>
+                    <a:srgbClr val="CCFFFF"/>
+                  </a:solidFill>
+                  <a:round/>
+                  <a:headEnd/>
+                  <a:tailEnd/>
+                </a:ln>
+                <a:solidFill>
+                  <a:srgbClr val="009900"/>
+                </a:solidFill>
+                <a:effectLst>
+                  <a:outerShdw dist="35921" dir="2700000" algn="ctr" rotWithShape="0">
+                    <a:srgbClr val="C0C0C0"/>
+                  </a:outerShdw>
+                </a:effectLst>
+                <a:latin typeface="Impact" panose="020B0806030902050204" pitchFamily="34" charset="0"/>
+              </a:rPr>
+              <a:t>Stacks &amp; Queues</a:t>
+            </a:r>
+          </a:p>
+        </p:txBody>
+      </p:sp>
+    </p:spTree>
+    <p:extLst>
+      <p:ext uri="{BB962C8B-B14F-4D97-AF65-F5344CB8AC3E}">
+        <p14:creationId xmlns:p14="http://schemas.microsoft.com/office/powerpoint/2010/main" val="803779353"/>
+      </p:ext>
+    </p:extLst>
+  </p:cSld>
+  <p:clrMapOvr>
+    <a:masterClrMapping/>
+  </p:clrMapOvr>
+</p:sld>
+</file>
+
+<file path=ppt/slides/slide20.xml><?xml version="1.0" encoding="utf-8"?>
 <p:sld xmlns:a="http://schemas.openxmlformats.org/drawingml/2006/main" xmlns:r="http://schemas.openxmlformats.org/officeDocument/2006/relationships" xmlns:p="http://schemas.openxmlformats.org/presentationml/2006/main">
   <p:cSld>
     <p:spTree>
@@ -21703,7 +24722,7 @@
 </p:sld>
 </file>
 
-<file path=ppt/slides/slide19.xml><?xml version="1.0" encoding="utf-8"?>
+<file path=ppt/slides/slide21.xml><?xml version="1.0" encoding="utf-8"?>
 <p:sld xmlns:a="http://schemas.openxmlformats.org/drawingml/2006/main" xmlns:r="http://schemas.openxmlformats.org/officeDocument/2006/relationships" xmlns:p="http://schemas.openxmlformats.org/presentationml/2006/main">
   <p:cSld>
     <p:spTree>
@@ -22010,499 +25029,7 @@
 </p:sld>
 </file>
 
-<file path=ppt/slides/slide2.xml><?xml version="1.0" encoding="utf-8"?>
-<p:sld xmlns:a="http://schemas.openxmlformats.org/drawingml/2006/main" xmlns:r="http://schemas.openxmlformats.org/officeDocument/2006/relationships" xmlns:p="http://schemas.openxmlformats.org/presentationml/2006/main">
-  <p:cSld>
-    <p:spTree>
-      <p:nvGrpSpPr>
-        <p:cNvPr id="1" name=""/>
-        <p:cNvGrpSpPr/>
-        <p:nvPr/>
-      </p:nvGrpSpPr>
-      <p:grpSpPr>
-        <a:xfrm>
-          <a:off x="0" y="0"/>
-          <a:ext cx="0" cy="0"/>
-          <a:chOff x="0" y="0"/>
-          <a:chExt cx="0" cy="0"/>
-        </a:xfrm>
-      </p:grpSpPr>
-      <p:sp>
-        <p:nvSpPr>
-          <p:cNvPr id="5122" name="Footer Placeholder 3">
-            <a:extLst>
-              <a:ext uri="{FF2B5EF4-FFF2-40B4-BE49-F238E27FC236}">
-                <a16:creationId xmlns:a16="http://schemas.microsoft.com/office/drawing/2014/main" id="{06704D29-96FB-4BCE-9F82-624D3CC37102}"/>
-              </a:ext>
-            </a:extLst>
-          </p:cNvPr>
-          <p:cNvSpPr>
-            <a:spLocks noGrp="1"/>
-          </p:cNvSpPr>
-          <p:nvPr>
-            <p:ph type="ftr" sz="quarter" idx="12"/>
-          </p:nvPr>
-        </p:nvSpPr>
-        <p:spPr>
-          <a:noFill/>
-        </p:spPr>
-        <p:txBody>
-          <a:bodyPr/>
-          <a:lstStyle>
-            <a:lvl1pPr>
-              <a:spcBef>
-                <a:spcPct val="20000"/>
-              </a:spcBef>
-              <a:buChar char="•"/>
-              <a:defRPr sz="3200">
-                <a:solidFill>
-                  <a:schemeClr val="tx1"/>
-                </a:solidFill>
-                <a:latin typeface="Times New Roman" panose="02020603050405020304" pitchFamily="18" charset="0"/>
-              </a:defRPr>
-            </a:lvl1pPr>
-            <a:lvl2pPr marL="742950" indent="-285750">
-              <a:spcBef>
-                <a:spcPct val="20000"/>
-              </a:spcBef>
-              <a:buChar char="–"/>
-              <a:defRPr sz="2800">
-                <a:solidFill>
-                  <a:schemeClr val="tx1"/>
-                </a:solidFill>
-                <a:latin typeface="Times New Roman" panose="02020603050405020304" pitchFamily="18" charset="0"/>
-              </a:defRPr>
-            </a:lvl2pPr>
-            <a:lvl3pPr marL="1143000" indent="-228600">
-              <a:spcBef>
-                <a:spcPct val="20000"/>
-              </a:spcBef>
-              <a:buChar char="•"/>
-              <a:defRPr sz="2400">
-                <a:solidFill>
-                  <a:schemeClr val="tx1"/>
-                </a:solidFill>
-                <a:latin typeface="Times New Roman" panose="02020603050405020304" pitchFamily="18" charset="0"/>
-              </a:defRPr>
-            </a:lvl3pPr>
-            <a:lvl4pPr marL="1600200" indent="-228600">
-              <a:spcBef>
-                <a:spcPct val="20000"/>
-              </a:spcBef>
-              <a:buChar char="–"/>
-              <a:defRPr sz="2000">
-                <a:solidFill>
-                  <a:schemeClr val="tx1"/>
-                </a:solidFill>
-                <a:latin typeface="Times New Roman" panose="02020603050405020304" pitchFamily="18" charset="0"/>
-              </a:defRPr>
-            </a:lvl4pPr>
-            <a:lvl5pPr marL="2057400" indent="-228600">
-              <a:spcBef>
-                <a:spcPct val="20000"/>
-              </a:spcBef>
-              <a:buChar char="»"/>
-              <a:defRPr sz="2000">
-                <a:solidFill>
-                  <a:schemeClr val="tx1"/>
-                </a:solidFill>
-                <a:latin typeface="Times New Roman" panose="02020603050405020304" pitchFamily="18" charset="0"/>
-              </a:defRPr>
-            </a:lvl5pPr>
-            <a:lvl6pPr marL="2514600" indent="-228600" eaLnBrk="0" fontAlgn="base" hangingPunct="0">
-              <a:spcBef>
-                <a:spcPct val="20000"/>
-              </a:spcBef>
-              <a:spcAft>
-                <a:spcPct val="0"/>
-              </a:spcAft>
-              <a:buChar char="»"/>
-              <a:defRPr sz="2000">
-                <a:solidFill>
-                  <a:schemeClr val="tx1"/>
-                </a:solidFill>
-                <a:latin typeface="Times New Roman" panose="02020603050405020304" pitchFamily="18" charset="0"/>
-              </a:defRPr>
-            </a:lvl6pPr>
-            <a:lvl7pPr marL="2971800" indent="-228600" eaLnBrk="0" fontAlgn="base" hangingPunct="0">
-              <a:spcBef>
-                <a:spcPct val="20000"/>
-              </a:spcBef>
-              <a:spcAft>
-                <a:spcPct val="0"/>
-              </a:spcAft>
-              <a:buChar char="»"/>
-              <a:defRPr sz="2000">
-                <a:solidFill>
-                  <a:schemeClr val="tx1"/>
-                </a:solidFill>
-                <a:latin typeface="Times New Roman" panose="02020603050405020304" pitchFamily="18" charset="0"/>
-              </a:defRPr>
-            </a:lvl7pPr>
-            <a:lvl8pPr marL="3429000" indent="-228600" eaLnBrk="0" fontAlgn="base" hangingPunct="0">
-              <a:spcBef>
-                <a:spcPct val="20000"/>
-              </a:spcBef>
-              <a:spcAft>
-                <a:spcPct val="0"/>
-              </a:spcAft>
-              <a:buChar char="»"/>
-              <a:defRPr sz="2000">
-                <a:solidFill>
-                  <a:schemeClr val="tx1"/>
-                </a:solidFill>
-                <a:latin typeface="Times New Roman" panose="02020603050405020304" pitchFamily="18" charset="0"/>
-              </a:defRPr>
-            </a:lvl8pPr>
-            <a:lvl9pPr marL="3886200" indent="-228600" eaLnBrk="0" fontAlgn="base" hangingPunct="0">
-              <a:spcBef>
-                <a:spcPct val="20000"/>
-              </a:spcBef>
-              <a:spcAft>
-                <a:spcPct val="0"/>
-              </a:spcAft>
-              <a:buChar char="»"/>
-              <a:defRPr sz="2000">
-                <a:solidFill>
-                  <a:schemeClr val="tx1"/>
-                </a:solidFill>
-                <a:latin typeface="Times New Roman" panose="02020603050405020304" pitchFamily="18" charset="0"/>
-              </a:defRPr>
-            </a:lvl9pPr>
-          </a:lstStyle>
-          <a:p>
-            <a:pPr>
-              <a:spcBef>
-                <a:spcPct val="0"/>
-              </a:spcBef>
-              <a:buFontTx/>
-              <a:buNone/>
-            </a:pPr>
-            <a:endParaRPr lang="en-US" altLang="en-US" sz="800"/>
-          </a:p>
-          <a:p>
-            <a:pPr>
-              <a:spcBef>
-                <a:spcPct val="0"/>
-              </a:spcBef>
-              <a:buFontTx/>
-              <a:buNone/>
-            </a:pPr>
-            <a:endParaRPr lang="en-US" altLang="en-US" sz="800" b="0">
-              <a:latin typeface="Tahoma" panose="020B0604030504040204" pitchFamily="34" charset="0"/>
-            </a:endParaRPr>
-          </a:p>
-          <a:p>
-            <a:pPr>
-              <a:spcBef>
-                <a:spcPct val="0"/>
-              </a:spcBef>
-              <a:buFontTx/>
-              <a:buNone/>
-            </a:pPr>
-            <a:endParaRPr lang="en-US" altLang="en-US" sz="800">
-              <a:latin typeface="Tahoma" panose="020B0604030504040204" pitchFamily="34" charset="0"/>
-            </a:endParaRPr>
-          </a:p>
-          <a:p>
-            <a:pPr>
-              <a:spcBef>
-                <a:spcPct val="0"/>
-              </a:spcBef>
-              <a:buFontTx/>
-              <a:buNone/>
-            </a:pPr>
-            <a:r>
-              <a:rPr lang="en-US" altLang="en-US" sz="800">
-                <a:latin typeface="Tahoma" panose="020B0604030504040204" pitchFamily="34" charset="0"/>
-              </a:rPr>
-              <a:t>© A+ Computer Science  -  www.apluscompsci.com</a:t>
-            </a:r>
-          </a:p>
-        </p:txBody>
-      </p:sp>
-      <p:sp>
-        <p:nvSpPr>
-          <p:cNvPr id="5123" name="Text Box 2">
-            <a:extLst>
-              <a:ext uri="{FF2B5EF4-FFF2-40B4-BE49-F238E27FC236}">
-                <a16:creationId xmlns:a16="http://schemas.microsoft.com/office/drawing/2014/main" id="{1DFA4F11-AAAF-4408-95C0-C20D58B37665}"/>
-              </a:ext>
-            </a:extLst>
-          </p:cNvPr>
-          <p:cNvSpPr txBox="1">
-            <a:spLocks noChangeArrowheads="1"/>
-          </p:cNvSpPr>
-          <p:nvPr/>
-        </p:nvSpPr>
-        <p:spPr bwMode="auto">
-          <a:xfrm>
-            <a:off x="762000" y="2667000"/>
-            <a:ext cx="7772400" cy="1570038"/>
-          </a:xfrm>
-          <a:prstGeom prst="rect">
-            <a:avLst/>
-          </a:prstGeom>
-          <a:noFill/>
-          <a:ln>
-            <a:noFill/>
-          </a:ln>
-          <a:effectLst/>
-          <a:extLst>
-            <a:ext uri="{909E8E84-426E-40DD-AFC4-6F175D3DCCD1}">
-              <a14:hiddenFill xmlns:a14="http://schemas.microsoft.com/office/drawing/2010/main">
-                <a:solidFill>
-                  <a:schemeClr val="accent1"/>
-                </a:solidFill>
-              </a14:hiddenFill>
-            </a:ext>
-            <a:ext uri="{91240B29-F687-4F45-9708-019B960494DF}">
-              <a14:hiddenLine xmlns:a14="http://schemas.microsoft.com/office/drawing/2010/main" w="9525">
-                <a:solidFill>
-                  <a:schemeClr val="tx1"/>
-                </a:solidFill>
-                <a:miter lim="800000"/>
-                <a:headEnd/>
-                <a:tailEnd/>
-              </a14:hiddenLine>
-            </a:ext>
-            <a:ext uri="{AF507438-7753-43E0-B8FC-AC1667EBCBE1}">
-              <a14:hiddenEffects xmlns:a14="http://schemas.microsoft.com/office/drawing/2010/main">
-                <a:effectLst>
-                  <a:outerShdw dist="35921" dir="2700000" algn="ctr" rotWithShape="0">
-                    <a:schemeClr val="bg2"/>
-                  </a:outerShdw>
-                </a:effectLst>
-              </a14:hiddenEffects>
-            </a:ext>
-          </a:extLst>
-        </p:spPr>
-        <p:txBody>
-          <a:bodyPr>
-            <a:spAutoFit/>
-          </a:bodyPr>
-          <a:lstStyle>
-            <a:lvl1pPr>
-              <a:spcBef>
-                <a:spcPct val="20000"/>
-              </a:spcBef>
-              <a:buChar char="•"/>
-              <a:defRPr sz="3200">
-                <a:solidFill>
-                  <a:schemeClr val="tx1"/>
-                </a:solidFill>
-                <a:latin typeface="Times New Roman" panose="02020603050405020304" pitchFamily="18" charset="0"/>
-              </a:defRPr>
-            </a:lvl1pPr>
-            <a:lvl2pPr marL="742950" indent="-285750">
-              <a:spcBef>
-                <a:spcPct val="20000"/>
-              </a:spcBef>
-              <a:buChar char="–"/>
-              <a:defRPr sz="2800">
-                <a:solidFill>
-                  <a:schemeClr val="tx1"/>
-                </a:solidFill>
-                <a:latin typeface="Times New Roman" panose="02020603050405020304" pitchFamily="18" charset="0"/>
-              </a:defRPr>
-            </a:lvl2pPr>
-            <a:lvl3pPr marL="1143000" indent="-228600">
-              <a:spcBef>
-                <a:spcPct val="20000"/>
-              </a:spcBef>
-              <a:buChar char="•"/>
-              <a:defRPr sz="2400">
-                <a:solidFill>
-                  <a:schemeClr val="tx1"/>
-                </a:solidFill>
-                <a:latin typeface="Times New Roman" panose="02020603050405020304" pitchFamily="18" charset="0"/>
-              </a:defRPr>
-            </a:lvl3pPr>
-            <a:lvl4pPr marL="1600200" indent="-228600">
-              <a:spcBef>
-                <a:spcPct val="20000"/>
-              </a:spcBef>
-              <a:buChar char="–"/>
-              <a:defRPr sz="2000">
-                <a:solidFill>
-                  <a:schemeClr val="tx1"/>
-                </a:solidFill>
-                <a:latin typeface="Times New Roman" panose="02020603050405020304" pitchFamily="18" charset="0"/>
-              </a:defRPr>
-            </a:lvl4pPr>
-            <a:lvl5pPr marL="2057400" indent="-228600">
-              <a:spcBef>
-                <a:spcPct val="20000"/>
-              </a:spcBef>
-              <a:buChar char="»"/>
-              <a:defRPr sz="2000">
-                <a:solidFill>
-                  <a:schemeClr val="tx1"/>
-                </a:solidFill>
-                <a:latin typeface="Times New Roman" panose="02020603050405020304" pitchFamily="18" charset="0"/>
-              </a:defRPr>
-            </a:lvl5pPr>
-            <a:lvl6pPr marL="2514600" indent="-228600" eaLnBrk="0" fontAlgn="base" hangingPunct="0">
-              <a:spcBef>
-                <a:spcPct val="20000"/>
-              </a:spcBef>
-              <a:spcAft>
-                <a:spcPct val="0"/>
-              </a:spcAft>
-              <a:buChar char="»"/>
-              <a:defRPr sz="2000">
-                <a:solidFill>
-                  <a:schemeClr val="tx1"/>
-                </a:solidFill>
-                <a:latin typeface="Times New Roman" panose="02020603050405020304" pitchFamily="18" charset="0"/>
-              </a:defRPr>
-            </a:lvl6pPr>
-            <a:lvl7pPr marL="2971800" indent="-228600" eaLnBrk="0" fontAlgn="base" hangingPunct="0">
-              <a:spcBef>
-                <a:spcPct val="20000"/>
-              </a:spcBef>
-              <a:spcAft>
-                <a:spcPct val="0"/>
-              </a:spcAft>
-              <a:buChar char="»"/>
-              <a:defRPr sz="2000">
-                <a:solidFill>
-                  <a:schemeClr val="tx1"/>
-                </a:solidFill>
-                <a:latin typeface="Times New Roman" panose="02020603050405020304" pitchFamily="18" charset="0"/>
-              </a:defRPr>
-            </a:lvl7pPr>
-            <a:lvl8pPr marL="3429000" indent="-228600" eaLnBrk="0" fontAlgn="base" hangingPunct="0">
-              <a:spcBef>
-                <a:spcPct val="20000"/>
-              </a:spcBef>
-              <a:spcAft>
-                <a:spcPct val="0"/>
-              </a:spcAft>
-              <a:buChar char="»"/>
-              <a:defRPr sz="2000">
-                <a:solidFill>
-                  <a:schemeClr val="tx1"/>
-                </a:solidFill>
-                <a:latin typeface="Times New Roman" panose="02020603050405020304" pitchFamily="18" charset="0"/>
-              </a:defRPr>
-            </a:lvl8pPr>
-            <a:lvl9pPr marL="3886200" indent="-228600" eaLnBrk="0" fontAlgn="base" hangingPunct="0">
-              <a:spcBef>
-                <a:spcPct val="20000"/>
-              </a:spcBef>
-              <a:spcAft>
-                <a:spcPct val="0"/>
-              </a:spcAft>
-              <a:buChar char="»"/>
-              <a:defRPr sz="2000">
-                <a:solidFill>
-                  <a:schemeClr val="tx1"/>
-                </a:solidFill>
-                <a:latin typeface="Times New Roman" panose="02020603050405020304" pitchFamily="18" charset="0"/>
-              </a:defRPr>
-            </a:lvl9pPr>
-          </a:lstStyle>
-          <a:p>
-            <a:pPr>
-              <a:spcBef>
-                <a:spcPct val="0"/>
-              </a:spcBef>
-              <a:buFontTx/>
-              <a:buNone/>
-            </a:pPr>
-            <a:r>
-              <a:rPr lang="en-US" altLang="en-US">
-                <a:latin typeface="Tahoma" panose="020B0604030504040204" pitchFamily="34" charset="0"/>
-              </a:rPr>
-              <a:t>These common </a:t>
-            </a:r>
-            <a:r>
-              <a:rPr lang="en-US" altLang="en-US">
-                <a:solidFill>
-                  <a:srgbClr val="FF0000"/>
-                </a:solidFill>
-                <a:latin typeface="Tahoma" panose="020B0604030504040204" pitchFamily="34" charset="0"/>
-              </a:rPr>
-              <a:t>abstract data types </a:t>
-            </a:r>
-            <a:r>
-              <a:rPr lang="en-US" altLang="en-US">
-                <a:latin typeface="Tahoma" panose="020B0604030504040204" pitchFamily="34" charset="0"/>
-              </a:rPr>
-              <a:t>allow insertion and removal at the ends only, not in the middle.</a:t>
-            </a:r>
-          </a:p>
-        </p:txBody>
-      </p:sp>
-      <p:sp>
-        <p:nvSpPr>
-          <p:cNvPr id="5124" name="WordArt 3">
-            <a:extLst>
-              <a:ext uri="{FF2B5EF4-FFF2-40B4-BE49-F238E27FC236}">
-                <a16:creationId xmlns:a16="http://schemas.microsoft.com/office/drawing/2014/main" id="{48DAC24B-7406-4981-AD4B-F1BE0032D174}"/>
-              </a:ext>
-            </a:extLst>
-          </p:cNvPr>
-          <p:cNvSpPr>
-            <a:spLocks noChangeArrowheads="1" noChangeShapeType="1" noTextEdit="1"/>
-          </p:cNvSpPr>
-          <p:nvPr/>
-        </p:nvSpPr>
-        <p:spPr bwMode="auto">
-          <a:xfrm>
-            <a:off x="990600" y="533400"/>
-            <a:ext cx="6553200" cy="1295400"/>
-          </a:xfrm>
-          <a:prstGeom prst="rect">
-            <a:avLst/>
-          </a:prstGeom>
-        </p:spPr>
-        <p:txBody>
-          <a:bodyPr wrap="none" fromWordArt="1">
-            <a:prstTxWarp prst="textPlain">
-              <a:avLst>
-                <a:gd name="adj" fmla="val 50000"/>
-              </a:avLst>
-            </a:prstTxWarp>
-          </a:bodyPr>
-          <a:lstStyle/>
-          <a:p>
-            <a:pPr algn="ctr"/>
-            <a:r>
-              <a:rPr lang="en-US" sz="3600" kern="10">
-                <a:ln w="9525">
-                  <a:solidFill>
-                    <a:srgbClr val="CCFFFF"/>
-                  </a:solidFill>
-                  <a:round/>
-                  <a:headEnd/>
-                  <a:tailEnd/>
-                </a:ln>
-                <a:solidFill>
-                  <a:srgbClr val="009900"/>
-                </a:solidFill>
-                <a:effectLst>
-                  <a:outerShdw dist="35921" dir="2700000" algn="ctr" rotWithShape="0">
-                    <a:srgbClr val="C0C0C0"/>
-                  </a:outerShdw>
-                </a:effectLst>
-                <a:latin typeface="Impact" panose="020B0806030902050204" pitchFamily="34" charset="0"/>
-              </a:rPr>
-              <a:t>Stacks &amp; Queues</a:t>
-            </a:r>
-          </a:p>
-        </p:txBody>
-      </p:sp>
-    </p:spTree>
-  </p:cSld>
-  <p:clrMapOvr>
-    <a:masterClrMapping/>
-  </p:clrMapOvr>
-</p:sld>
-</file>
-
-<file path=ppt/slides/slide20.xml><?xml version="1.0" encoding="utf-8"?>
+<file path=ppt/slides/slide22.xml><?xml version="1.0" encoding="utf-8"?>
 <p:sld xmlns:a="http://schemas.openxmlformats.org/drawingml/2006/main" xmlns:r="http://schemas.openxmlformats.org/officeDocument/2006/relationships" xmlns:p="http://schemas.openxmlformats.org/presentationml/2006/main">
   <p:cSld>
     <p:spTree>
@@ -22806,7 +25333,7 @@
 </p:sld>
 </file>
 
-<file path=ppt/slides/slide21.xml><?xml version="1.0" encoding="utf-8"?>
+<file path=ppt/slides/slide23.xml><?xml version="1.0" encoding="utf-8"?>
 <p:sld xmlns:a="http://schemas.openxmlformats.org/drawingml/2006/main" xmlns:r="http://schemas.openxmlformats.org/officeDocument/2006/relationships" xmlns:p="http://schemas.openxmlformats.org/presentationml/2006/main">
   <p:cSld>
     <p:spTree>
@@ -23167,7 +25694,7 @@
 </p:sld>
 </file>
 
-<file path=ppt/slides/slide22.xml><?xml version="1.0" encoding="utf-8"?>
+<file path=ppt/slides/slide24.xml><?xml version="1.0" encoding="utf-8"?>
 <p:sld xmlns:a="http://schemas.openxmlformats.org/drawingml/2006/main" xmlns:r="http://schemas.openxmlformats.org/officeDocument/2006/relationships" xmlns:p="http://schemas.openxmlformats.org/presentationml/2006/main">
   <p:cSld>
     <p:spTree>
@@ -24163,7 +26690,7 @@
 </p:sld>
 </file>
 
-<file path=ppt/slides/slide23.xml><?xml version="1.0" encoding="utf-8"?>
+<file path=ppt/slides/slide25.xml><?xml version="1.0" encoding="utf-8"?>
 <p:sld xmlns:a="http://schemas.openxmlformats.org/drawingml/2006/main" xmlns:r="http://schemas.openxmlformats.org/officeDocument/2006/relationships" xmlns:p="http://schemas.openxmlformats.org/presentationml/2006/main">
   <p:cSld>
     <p:spTree>
@@ -24986,7 +27513,7 @@
 </p:sld>
 </file>
 
-<file path=ppt/slides/slide24.xml><?xml version="1.0" encoding="utf-8"?>
+<file path=ppt/slides/slide26.xml><?xml version="1.0" encoding="utf-8"?>
 <p:sld xmlns:a="http://schemas.openxmlformats.org/drawingml/2006/main" xmlns:r="http://schemas.openxmlformats.org/officeDocument/2006/relationships" xmlns:p="http://schemas.openxmlformats.org/presentationml/2006/main">
   <p:cSld>
     <p:spTree>
@@ -25293,7 +27820,7 @@
 </p:sld>
 </file>
 
-<file path=ppt/slides/slide25.xml><?xml version="1.0" encoding="utf-8"?>
+<file path=ppt/slides/slide27.xml><?xml version="1.0" encoding="utf-8"?>
 <p:sld xmlns:a="http://schemas.openxmlformats.org/drawingml/2006/main" xmlns:r="http://schemas.openxmlformats.org/officeDocument/2006/relationships" xmlns:p="http://schemas.openxmlformats.org/presentationml/2006/main">
   <p:cSld>
     <p:spTree>
@@ -26499,7 +29026,7 @@
 </p:sld>
 </file>
 
-<file path=ppt/slides/slide26.xml><?xml version="1.0" encoding="utf-8"?>
+<file path=ppt/slides/slide28.xml><?xml version="1.0" encoding="utf-8"?>
 <p:sld xmlns:a="http://schemas.openxmlformats.org/drawingml/2006/main" xmlns:r="http://schemas.openxmlformats.org/officeDocument/2006/relationships" xmlns:p="http://schemas.openxmlformats.org/presentationml/2006/main">
   <p:cSld>
     <p:spTree>
@@ -27298,7 +29825,22 @@
               <a:rPr lang="en-US" altLang="en-US" dirty="0">
                 <a:latin typeface="Tahoma" panose="020B0604030504040204" pitchFamily="34" charset="0"/>
               </a:rPr>
-              <a:t>[88, 23, 11]</a:t>
+              <a:t>[88, 23, </a:t>
+            </a:r>
+            <a:r>
+              <a:rPr lang="en-US" altLang="en-US" dirty="0">
+                <a:highlight>
+                  <a:srgbClr val="FFFF00"/>
+                </a:highlight>
+                <a:latin typeface="Tahoma" panose="020B0604030504040204" pitchFamily="34" charset="0"/>
+              </a:rPr>
+              <a:t>11</a:t>
+            </a:r>
+            <a:r>
+              <a:rPr lang="en-US" altLang="en-US" dirty="0">
+                <a:latin typeface="Tahoma" panose="020B0604030504040204" pitchFamily="34" charset="0"/>
+              </a:rPr>
+              <a:t>]</a:t>
             </a:r>
           </a:p>
           <a:p>
@@ -27421,7 +29963,7 @@
 </p:sld>
 </file>
 
-<file path=ppt/slides/slide27.xml><?xml version="1.0" encoding="utf-8"?>
+<file path=ppt/slides/slide29.xml><?xml version="1.0" encoding="utf-8"?>
 <p:sld xmlns:a="http://schemas.openxmlformats.org/drawingml/2006/main" xmlns:r="http://schemas.openxmlformats.org/officeDocument/2006/relationships" xmlns:p="http://schemas.openxmlformats.org/presentationml/2006/main">
   <p:cSld>
     <p:spTree>
@@ -28786,1623 +31328,6 @@
       </p:grpSpPr>
       <p:sp>
         <p:nvSpPr>
-          <p:cNvPr id="21506" name="Title 1">
-            <a:extLst>
-              <a:ext uri="{FF2B5EF4-FFF2-40B4-BE49-F238E27FC236}">
-                <a16:creationId xmlns:a16="http://schemas.microsoft.com/office/drawing/2014/main" id="{8429338B-85E3-ED7C-A47A-7AAA634448C2}"/>
-              </a:ext>
-            </a:extLst>
-          </p:cNvPr>
-          <p:cNvSpPr>
-            <a:spLocks noGrp="1"/>
-          </p:cNvSpPr>
-          <p:nvPr>
-            <p:ph type="title"/>
-          </p:nvPr>
-        </p:nvSpPr>
-        <p:spPr/>
-        <p:txBody>
-          <a:bodyPr/>
-          <a:lstStyle/>
-          <a:p>
-            <a:pPr eaLnBrk="1" hangingPunct="1"/>
-            <a:r>
-              <a:rPr lang="en-US" altLang="en-US"/>
-              <a:t>Applications of Stacks</a:t>
-            </a:r>
-          </a:p>
-        </p:txBody>
-      </p:sp>
-      <p:sp>
-        <p:nvSpPr>
-          <p:cNvPr id="3" name="Content Placeholder 2">
-            <a:extLst>
-              <a:ext uri="{FF2B5EF4-FFF2-40B4-BE49-F238E27FC236}">
-                <a16:creationId xmlns:a16="http://schemas.microsoft.com/office/drawing/2014/main" id="{AEC31E50-F12F-7059-873F-46799A80E1A6}"/>
-              </a:ext>
-            </a:extLst>
-          </p:cNvPr>
-          <p:cNvSpPr>
-            <a:spLocks noGrp="1"/>
-          </p:cNvSpPr>
-          <p:nvPr>
-            <p:ph sz="quarter" idx="1"/>
-          </p:nvPr>
-        </p:nvSpPr>
-        <p:spPr>
-          <a:xfrm>
-            <a:off x="457200" y="1219200"/>
-            <a:ext cx="8229600" cy="4937125"/>
-          </a:xfrm>
-        </p:spPr>
-        <p:txBody>
-          <a:bodyPr>
-            <a:normAutofit/>
-          </a:bodyPr>
-          <a:lstStyle/>
-          <a:p>
-            <a:pPr eaLnBrk="1" hangingPunct="1">
-              <a:lnSpc>
-                <a:spcPct val="90000"/>
-              </a:lnSpc>
-            </a:pPr>
-            <a:r>
-              <a:rPr lang="en-US" altLang="en-US"/>
-              <a:t>Programming languages:</a:t>
-            </a:r>
-          </a:p>
-          <a:p>
-            <a:pPr lvl="1" eaLnBrk="1" hangingPunct="1">
-              <a:lnSpc>
-                <a:spcPct val="90000"/>
-              </a:lnSpc>
-            </a:pPr>
-            <a:r>
-              <a:rPr lang="en-US" altLang="en-US"/>
-              <a:t>method calls are placed onto a stack </a:t>
-            </a:r>
-            <a:r>
-              <a:rPr lang="en-US" altLang="en-US" i="1"/>
-              <a:t>(call=push, return=pop)</a:t>
-            </a:r>
-            <a:endParaRPr lang="en-US" altLang="en-US"/>
-          </a:p>
-          <a:p>
-            <a:pPr eaLnBrk="1" hangingPunct="1">
-              <a:lnSpc>
-                <a:spcPct val="90000"/>
-              </a:lnSpc>
-            </a:pPr>
-            <a:endParaRPr lang="en-US" altLang="en-US"/>
-          </a:p>
-          <a:p>
-            <a:pPr eaLnBrk="1" hangingPunct="1">
-              <a:lnSpc>
-                <a:spcPct val="90000"/>
-              </a:lnSpc>
-            </a:pPr>
-            <a:endParaRPr lang="en-US" altLang="en-US"/>
-          </a:p>
-          <a:p>
-            <a:pPr eaLnBrk="1" hangingPunct="1">
-              <a:lnSpc>
-                <a:spcPct val="90000"/>
-              </a:lnSpc>
-            </a:pPr>
-            <a:r>
-              <a:rPr lang="en-US" altLang="en-US"/>
-              <a:t>Matching up related pairs of things:</a:t>
-            </a:r>
-          </a:p>
-          <a:p>
-            <a:pPr lvl="1" eaLnBrk="1" hangingPunct="1">
-              <a:lnSpc>
-                <a:spcPct val="90000"/>
-              </a:lnSpc>
-            </a:pPr>
-            <a:r>
-              <a:rPr lang="en-US" altLang="en-US"/>
-              <a:t>find out whether a string is a palindrome</a:t>
-            </a:r>
-          </a:p>
-          <a:p>
-            <a:pPr lvl="1" eaLnBrk="1" hangingPunct="1">
-              <a:lnSpc>
-                <a:spcPct val="90000"/>
-              </a:lnSpc>
-            </a:pPr>
-            <a:r>
-              <a:rPr lang="en-US" altLang="en-US"/>
-              <a:t>examine a file to see if its braces </a:t>
-            </a:r>
-            <a:r>
-              <a:rPr lang="en-US" altLang="en-US">
-                <a:latin typeface="Courier New" panose="02070309020205020404" pitchFamily="49" charset="0"/>
-              </a:rPr>
-              <a:t>{</a:t>
-            </a:r>
-            <a:r>
-              <a:rPr lang="en-US" altLang="en-US"/>
-              <a:t> </a:t>
-            </a:r>
-            <a:r>
-              <a:rPr lang="en-US" altLang="en-US">
-                <a:latin typeface="Courier New" panose="02070309020205020404" pitchFamily="49" charset="0"/>
-              </a:rPr>
-              <a:t>}</a:t>
-            </a:r>
-            <a:r>
-              <a:rPr lang="en-US" altLang="en-US"/>
-              <a:t> and other operators match</a:t>
-            </a:r>
-          </a:p>
-          <a:p>
-            <a:pPr eaLnBrk="1" hangingPunct="1">
-              <a:lnSpc>
-                <a:spcPct val="90000"/>
-              </a:lnSpc>
-            </a:pPr>
-            <a:endParaRPr lang="en-US" altLang="en-US"/>
-          </a:p>
-          <a:p>
-            <a:pPr eaLnBrk="1" hangingPunct="1">
-              <a:lnSpc>
-                <a:spcPct val="90000"/>
-              </a:lnSpc>
-            </a:pPr>
-            <a:r>
-              <a:rPr lang="en-US" altLang="en-US"/>
-              <a:t>Sophisticated algorithms:</a:t>
-            </a:r>
-          </a:p>
-          <a:p>
-            <a:pPr lvl="1" eaLnBrk="1" hangingPunct="1">
-              <a:lnSpc>
-                <a:spcPct val="90000"/>
-              </a:lnSpc>
-            </a:pPr>
-            <a:r>
-              <a:rPr lang="en-US" altLang="en-US"/>
-              <a:t>searching through a maze with "backtracking"</a:t>
-            </a:r>
-          </a:p>
-          <a:p>
-            <a:pPr lvl="1" eaLnBrk="1" hangingPunct="1">
-              <a:lnSpc>
-                <a:spcPct val="90000"/>
-              </a:lnSpc>
-            </a:pPr>
-            <a:r>
-              <a:rPr lang="en-US" altLang="en-US"/>
-              <a:t>many programs use an "undo stack" of previous operations</a:t>
-            </a:r>
-          </a:p>
-        </p:txBody>
-      </p:sp>
-      <p:sp>
-        <p:nvSpPr>
-          <p:cNvPr id="21508" name="Slide Number Placeholder 3">
-            <a:extLst>
-              <a:ext uri="{FF2B5EF4-FFF2-40B4-BE49-F238E27FC236}">
-                <a16:creationId xmlns:a16="http://schemas.microsoft.com/office/drawing/2014/main" id="{BEA2FCD7-40AC-0F1C-383C-67A83A2A217F}"/>
-              </a:ext>
-            </a:extLst>
-          </p:cNvPr>
-          <p:cNvSpPr>
-            <a:spLocks noGrp="1"/>
-          </p:cNvSpPr>
-          <p:nvPr>
-            <p:ph type="sldNum" sz="quarter" idx="12"/>
-          </p:nvPr>
-        </p:nvSpPr>
-        <p:spPr bwMode="auto">
-          <a:noFill/>
-          <a:extLst>
-            <a:ext uri="{909E8E84-426E-40DD-AFC4-6F175D3DCCD1}">
-              <a14:hiddenFill xmlns:a14="http://schemas.microsoft.com/office/drawing/2010/main">
-                <a:solidFill>
-                  <a:srgbClr val="FFFFFF"/>
-                </a:solidFill>
-              </a14:hiddenFill>
-            </a:ext>
-            <a:ext uri="{91240B29-F687-4F45-9708-019B960494DF}">
-              <a14:hiddenLine xmlns:a14="http://schemas.microsoft.com/office/drawing/2010/main" w="9525">
-                <a:solidFill>
-                  <a:srgbClr val="000000"/>
-                </a:solidFill>
-                <a:miter lim="800000"/>
-                <a:headEnd/>
-                <a:tailEnd/>
-              </a14:hiddenLine>
-            </a:ext>
-          </a:extLst>
-        </p:spPr>
-        <p:txBody>
-          <a:bodyPr/>
-          <a:lstStyle>
-            <a:lvl1pPr eaLnBrk="0" hangingPunct="0">
-              <a:defRPr sz="2400">
-                <a:solidFill>
-                  <a:schemeClr val="tx1"/>
-                </a:solidFill>
-                <a:latin typeface="Arial" panose="020B0604020202020204" pitchFamily="34" charset="0"/>
-                <a:ea typeface="MS PGothic" panose="020B0600070205080204" pitchFamily="34" charset="-128"/>
-              </a:defRPr>
-            </a:lvl1pPr>
-            <a:lvl2pPr marL="37931725" indent="-37474525" eaLnBrk="0" hangingPunct="0">
-              <a:defRPr sz="2400">
-                <a:solidFill>
-                  <a:schemeClr val="tx1"/>
-                </a:solidFill>
-                <a:latin typeface="Arial" panose="020B0604020202020204" pitchFamily="34" charset="0"/>
-                <a:ea typeface="MS PGothic" panose="020B0600070205080204" pitchFamily="34" charset="-128"/>
-              </a:defRPr>
-            </a:lvl2pPr>
-            <a:lvl3pPr eaLnBrk="0" hangingPunct="0">
-              <a:defRPr sz="2400">
-                <a:solidFill>
-                  <a:schemeClr val="tx1"/>
-                </a:solidFill>
-                <a:latin typeface="Arial" panose="020B0604020202020204" pitchFamily="34" charset="0"/>
-                <a:ea typeface="MS PGothic" panose="020B0600070205080204" pitchFamily="34" charset="-128"/>
-              </a:defRPr>
-            </a:lvl3pPr>
-            <a:lvl4pPr eaLnBrk="0" hangingPunct="0">
-              <a:defRPr sz="2400">
-                <a:solidFill>
-                  <a:schemeClr val="tx1"/>
-                </a:solidFill>
-                <a:latin typeface="Arial" panose="020B0604020202020204" pitchFamily="34" charset="0"/>
-                <a:ea typeface="MS PGothic" panose="020B0600070205080204" pitchFamily="34" charset="-128"/>
-              </a:defRPr>
-            </a:lvl4pPr>
-            <a:lvl5pPr eaLnBrk="0" hangingPunct="0">
-              <a:defRPr sz="2400">
-                <a:solidFill>
-                  <a:schemeClr val="tx1"/>
-                </a:solidFill>
-                <a:latin typeface="Arial" panose="020B0604020202020204" pitchFamily="34" charset="0"/>
-                <a:ea typeface="MS PGothic" panose="020B0600070205080204" pitchFamily="34" charset="-128"/>
-              </a:defRPr>
-            </a:lvl5pPr>
-            <a:lvl6pPr marL="457200" eaLnBrk="0" fontAlgn="base" hangingPunct="0">
-              <a:spcBef>
-                <a:spcPct val="0"/>
-              </a:spcBef>
-              <a:spcAft>
-                <a:spcPct val="0"/>
-              </a:spcAft>
-              <a:defRPr sz="2400">
-                <a:solidFill>
-                  <a:schemeClr val="tx1"/>
-                </a:solidFill>
-                <a:latin typeface="Arial" panose="020B0604020202020204" pitchFamily="34" charset="0"/>
-                <a:ea typeface="MS PGothic" panose="020B0600070205080204" pitchFamily="34" charset="-128"/>
-              </a:defRPr>
-            </a:lvl6pPr>
-            <a:lvl7pPr marL="914400" eaLnBrk="0" fontAlgn="base" hangingPunct="0">
-              <a:spcBef>
-                <a:spcPct val="0"/>
-              </a:spcBef>
-              <a:spcAft>
-                <a:spcPct val="0"/>
-              </a:spcAft>
-              <a:defRPr sz="2400">
-                <a:solidFill>
-                  <a:schemeClr val="tx1"/>
-                </a:solidFill>
-                <a:latin typeface="Arial" panose="020B0604020202020204" pitchFamily="34" charset="0"/>
-                <a:ea typeface="MS PGothic" panose="020B0600070205080204" pitchFamily="34" charset="-128"/>
-              </a:defRPr>
-            </a:lvl7pPr>
-            <a:lvl8pPr marL="1371600" eaLnBrk="0" fontAlgn="base" hangingPunct="0">
-              <a:spcBef>
-                <a:spcPct val="0"/>
-              </a:spcBef>
-              <a:spcAft>
-                <a:spcPct val="0"/>
-              </a:spcAft>
-              <a:defRPr sz="2400">
-                <a:solidFill>
-                  <a:schemeClr val="tx1"/>
-                </a:solidFill>
-                <a:latin typeface="Arial" panose="020B0604020202020204" pitchFamily="34" charset="0"/>
-                <a:ea typeface="MS PGothic" panose="020B0600070205080204" pitchFamily="34" charset="-128"/>
-              </a:defRPr>
-            </a:lvl8pPr>
-            <a:lvl9pPr marL="1828800" eaLnBrk="0" fontAlgn="base" hangingPunct="0">
-              <a:spcBef>
-                <a:spcPct val="0"/>
-              </a:spcBef>
-              <a:spcAft>
-                <a:spcPct val="0"/>
-              </a:spcAft>
-              <a:defRPr sz="2400">
-                <a:solidFill>
-                  <a:schemeClr val="tx1"/>
-                </a:solidFill>
-                <a:latin typeface="Arial" panose="020B0604020202020204" pitchFamily="34" charset="0"/>
-                <a:ea typeface="MS PGothic" panose="020B0600070205080204" pitchFamily="34" charset="-128"/>
-              </a:defRPr>
-            </a:lvl9pPr>
-          </a:lstStyle>
-          <a:p>
-            <a:pPr marL="0" marR="0" lvl="0" indent="0" algn="l" defTabSz="457200" rtl="0" eaLnBrk="1" fontAlgn="base" latinLnBrk="0" hangingPunct="1">
-              <a:lnSpc>
-                <a:spcPct val="100000"/>
-              </a:lnSpc>
-              <a:spcBef>
-                <a:spcPct val="0"/>
-              </a:spcBef>
-              <a:spcAft>
-                <a:spcPct val="0"/>
-              </a:spcAft>
-              <a:buClrTx/>
-              <a:buSzTx/>
-              <a:buFontTx/>
-              <a:buNone/>
-              <a:tabLst/>
-              <a:defRPr/>
-            </a:pPr>
-            <a:fld id="{91A6577D-573A-4098-A1C3-5BDFEE39C60D}" type="slidenum">
-              <a:rPr kumimoji="0" lang="en-US" altLang="en-US" sz="1400" b="0" i="0" u="none" strike="noStrike" kern="1200" cap="none" spc="0" normalizeH="0" baseline="0" noProof="0" smtClean="0">
-                <a:ln>
-                  <a:noFill/>
-                </a:ln>
-                <a:solidFill>
-                  <a:srgbClr val="464653"/>
-                </a:solidFill>
-                <a:effectLst/>
-                <a:uLnTx/>
-                <a:uFillTx/>
-                <a:latin typeface="Arial" panose="020B0604020202020204" pitchFamily="34" charset="0"/>
-                <a:ea typeface="MS PGothic" panose="020B0600070205080204" pitchFamily="34" charset="-128"/>
-                <a:cs typeface="+mn-cs"/>
-              </a:rPr>
-              <a:pPr marL="0" marR="0" lvl="0" indent="0" algn="l" defTabSz="457200" rtl="0" eaLnBrk="1" fontAlgn="base" latinLnBrk="0" hangingPunct="1">
-                <a:lnSpc>
-                  <a:spcPct val="100000"/>
-                </a:lnSpc>
-                <a:spcBef>
-                  <a:spcPct val="0"/>
-                </a:spcBef>
-                <a:spcAft>
-                  <a:spcPct val="0"/>
-                </a:spcAft>
-                <a:buClrTx/>
-                <a:buSzTx/>
-                <a:buFontTx/>
-                <a:buNone/>
-                <a:tabLst/>
-                <a:defRPr/>
-              </a:pPr>
-              <a:t>4</a:t>
-            </a:fld>
-            <a:endParaRPr kumimoji="0" lang="en-US" altLang="en-US" sz="1400" b="0" i="0" u="none" strike="noStrike" kern="1200" cap="none" spc="0" normalizeH="0" baseline="0" noProof="0">
-              <a:ln>
-                <a:noFill/>
-              </a:ln>
-              <a:solidFill>
-                <a:srgbClr val="464653"/>
-              </a:solidFill>
-              <a:effectLst/>
-              <a:uLnTx/>
-              <a:uFillTx/>
-              <a:latin typeface="Arial" panose="020B0604020202020204" pitchFamily="34" charset="0"/>
-              <a:ea typeface="MS PGothic" panose="020B0600070205080204" pitchFamily="34" charset="-128"/>
-              <a:cs typeface="+mn-cs"/>
-            </a:endParaRPr>
-          </a:p>
-        </p:txBody>
-      </p:sp>
-      <p:graphicFrame>
-        <p:nvGraphicFramePr>
-          <p:cNvPr id="5" name="Group 33">
-            <a:extLst>
-              <a:ext uri="{FF2B5EF4-FFF2-40B4-BE49-F238E27FC236}">
-                <a16:creationId xmlns:a16="http://schemas.microsoft.com/office/drawing/2014/main" id="{E53B8ADF-88DE-DA72-F266-22FF302C0888}"/>
-              </a:ext>
-            </a:extLst>
-          </p:cNvPr>
-          <p:cNvGraphicFramePr>
-            <a:graphicFrameLocks noGrp="1"/>
-          </p:cNvGraphicFramePr>
-          <p:nvPr/>
-        </p:nvGraphicFramePr>
-        <p:xfrm>
-          <a:off x="6399213" y="2095500"/>
-          <a:ext cx="2092325" cy="1539876"/>
-        </p:xfrm>
-        <a:graphic>
-          <a:graphicData uri="http://schemas.openxmlformats.org/drawingml/2006/table">
-            <a:tbl>
-              <a:tblPr/>
-              <a:tblGrid>
-                <a:gridCol w="1076325">
-                  <a:extLst>
-                    <a:ext uri="{9D8B030D-6E8A-4147-A177-3AD203B41FA5}">
-                      <a16:colId xmlns:a16="http://schemas.microsoft.com/office/drawing/2014/main" val="20000"/>
-                    </a:ext>
-                  </a:extLst>
-                </a:gridCol>
-                <a:gridCol w="1016000">
-                  <a:extLst>
-                    <a:ext uri="{9D8B030D-6E8A-4147-A177-3AD203B41FA5}">
-                      <a16:colId xmlns:a16="http://schemas.microsoft.com/office/drawing/2014/main" val="20001"/>
-                    </a:ext>
-                  </a:extLst>
-                </a:gridCol>
-              </a:tblGrid>
-              <a:tr h="512763">
-                <a:tc>
-                  <a:txBody>
-                    <a:bodyPr/>
-                    <a:lstStyle/>
-                    <a:p>
-                      <a:pPr marL="0" marR="0" lvl="0" indent="0" algn="l" defTabSz="914400" rtl="0" eaLnBrk="1" fontAlgn="base" latinLnBrk="0" hangingPunct="1">
-                        <a:lnSpc>
-                          <a:spcPct val="100000"/>
-                        </a:lnSpc>
-                        <a:spcBef>
-                          <a:spcPct val="20000"/>
-                        </a:spcBef>
-                        <a:spcAft>
-                          <a:spcPct val="0"/>
-                        </a:spcAft>
-                        <a:buClrTx/>
-                        <a:buSzTx/>
-                        <a:buFontTx/>
-                        <a:buNone/>
-                        <a:tabLst/>
-                      </a:pPr>
-                      <a:r>
-                        <a:rPr kumimoji="0" lang="en-US" sz="1800" b="0" i="0" u="none" strike="noStrike" cap="none" normalizeH="0" baseline="0" dirty="0">
-                          <a:ln>
-                            <a:noFill/>
-                          </a:ln>
-                          <a:solidFill>
-                            <a:schemeClr val="bg2"/>
-                          </a:solidFill>
-                          <a:effectLst/>
-                          <a:latin typeface="Tahoma" charset="0"/>
-                        </a:rPr>
-                        <a:t>method3</a:t>
-                      </a:r>
-                    </a:p>
-                  </a:txBody>
-                  <a:tcPr anchor="ctr" anchorCtr="1" horzOverflow="overflow">
-                    <a:lnL cap="flat">
-                      <a:noFill/>
-                    </a:lnL>
-                    <a:lnR w="12700" cap="flat" cmpd="sng" algn="ctr">
-                      <a:solidFill>
-                        <a:schemeClr val="tx1"/>
-                      </a:solidFill>
-                      <a:prstDash val="solid"/>
-                      <a:round/>
-                      <a:headEnd type="none" w="med" len="med"/>
-                      <a:tailEnd type="none" w="med" len="med"/>
-                    </a:lnR>
-                    <a:lnT cap="flat">
-                      <a:noFill/>
-                    </a:lnT>
-                    <a:lnB>
-                      <a:noFill/>
-                    </a:lnB>
-                    <a:lnTlToBr>
-                      <a:noFill/>
-                    </a:lnTlToBr>
-                    <a:lnBlToTr>
-                      <a:noFill/>
-                    </a:lnBlToTr>
-                    <a:noFill/>
-                  </a:tcPr>
-                </a:tc>
-                <a:tc>
-                  <a:txBody>
-                    <a:bodyPr/>
-                    <a:lstStyle/>
-                    <a:p>
-                      <a:pPr marL="0" marR="0" lvl="0" indent="0" algn="l" defTabSz="914400" rtl="0" eaLnBrk="1" fontAlgn="base" latinLnBrk="0" hangingPunct="1">
-                        <a:lnSpc>
-                          <a:spcPct val="70000"/>
-                        </a:lnSpc>
-                        <a:spcBef>
-                          <a:spcPct val="20000"/>
-                        </a:spcBef>
-                        <a:spcAft>
-                          <a:spcPct val="0"/>
-                        </a:spcAft>
-                        <a:buClrTx/>
-                        <a:buSzTx/>
-                        <a:buFontTx/>
-                        <a:buNone/>
-                        <a:tabLst/>
-                      </a:pPr>
-                      <a:r>
-                        <a:rPr kumimoji="0" lang="en-US" sz="1000" b="0" i="0" u="none" strike="noStrike" cap="none" normalizeH="0" baseline="0" dirty="0">
-                          <a:ln>
-                            <a:noFill/>
-                          </a:ln>
-                          <a:solidFill>
-                            <a:schemeClr val="tx1"/>
-                          </a:solidFill>
-                          <a:effectLst/>
-                          <a:latin typeface="Tahoma" charset="0"/>
-                        </a:rPr>
-                        <a:t>return </a:t>
-                      </a:r>
-                      <a:r>
-                        <a:rPr kumimoji="0" lang="en-US" sz="1000" b="0" i="0" u="none" strike="noStrike" cap="none" normalizeH="0" baseline="0" dirty="0" err="1">
-                          <a:ln>
-                            <a:noFill/>
-                          </a:ln>
-                          <a:solidFill>
-                            <a:schemeClr val="tx1"/>
-                          </a:solidFill>
-                          <a:effectLst/>
-                          <a:latin typeface="Tahoma" charset="0"/>
-                        </a:rPr>
-                        <a:t>var</a:t>
-                      </a:r>
-                      <a:endParaRPr kumimoji="0" lang="en-US" sz="1000" b="0" i="0" u="none" strike="noStrike" cap="none" normalizeH="0" baseline="0" dirty="0">
-                        <a:ln>
-                          <a:noFill/>
-                        </a:ln>
-                        <a:solidFill>
-                          <a:schemeClr val="tx1"/>
-                        </a:solidFill>
-                        <a:effectLst/>
-                        <a:latin typeface="Tahoma" charset="0"/>
-                      </a:endParaRPr>
-                    </a:p>
-                    <a:p>
-                      <a:pPr marL="0" marR="0" lvl="0" indent="0" algn="l" defTabSz="914400" rtl="0" eaLnBrk="1" fontAlgn="base" latinLnBrk="0" hangingPunct="1">
-                        <a:lnSpc>
-                          <a:spcPct val="70000"/>
-                        </a:lnSpc>
-                        <a:spcBef>
-                          <a:spcPct val="20000"/>
-                        </a:spcBef>
-                        <a:spcAft>
-                          <a:spcPct val="0"/>
-                        </a:spcAft>
-                        <a:buClrTx/>
-                        <a:buSzTx/>
-                        <a:buFontTx/>
-                        <a:buNone/>
-                        <a:tabLst/>
-                      </a:pPr>
-                      <a:r>
-                        <a:rPr kumimoji="0" lang="en-US" sz="1000" b="0" i="0" u="none" strike="noStrike" cap="none" normalizeH="0" baseline="0" dirty="0">
-                          <a:ln>
-                            <a:noFill/>
-                          </a:ln>
-                          <a:solidFill>
-                            <a:schemeClr val="tx1"/>
-                          </a:solidFill>
-                          <a:effectLst/>
-                          <a:latin typeface="Tahoma" charset="0"/>
-                        </a:rPr>
-                        <a:t>local </a:t>
-                      </a:r>
-                      <a:r>
-                        <a:rPr kumimoji="0" lang="en-US" sz="1000" b="0" i="0" u="none" strike="noStrike" cap="none" normalizeH="0" baseline="0" dirty="0" err="1">
-                          <a:ln>
-                            <a:noFill/>
-                          </a:ln>
-                          <a:solidFill>
-                            <a:schemeClr val="tx1"/>
-                          </a:solidFill>
-                          <a:effectLst/>
-                          <a:latin typeface="Tahoma" charset="0"/>
-                        </a:rPr>
-                        <a:t>vars</a:t>
-                      </a:r>
-                      <a:endParaRPr kumimoji="0" lang="en-US" sz="1000" b="0" i="0" u="none" strike="noStrike" cap="none" normalizeH="0" baseline="0" dirty="0">
-                        <a:ln>
-                          <a:noFill/>
-                        </a:ln>
-                        <a:solidFill>
-                          <a:schemeClr val="tx1"/>
-                        </a:solidFill>
-                        <a:effectLst/>
-                        <a:latin typeface="Tahoma" charset="0"/>
-                      </a:endParaRPr>
-                    </a:p>
-                    <a:p>
-                      <a:pPr marL="0" marR="0" lvl="0" indent="0" algn="l" defTabSz="914400" rtl="0" eaLnBrk="1" fontAlgn="base" latinLnBrk="0" hangingPunct="1">
-                        <a:lnSpc>
-                          <a:spcPct val="70000"/>
-                        </a:lnSpc>
-                        <a:spcBef>
-                          <a:spcPct val="20000"/>
-                        </a:spcBef>
-                        <a:spcAft>
-                          <a:spcPct val="0"/>
-                        </a:spcAft>
-                        <a:buClrTx/>
-                        <a:buSzTx/>
-                        <a:buFontTx/>
-                        <a:buNone/>
-                        <a:tabLst/>
-                      </a:pPr>
-                      <a:r>
-                        <a:rPr kumimoji="0" lang="en-US" sz="1000" b="0" i="0" u="none" strike="noStrike" cap="none" normalizeH="0" baseline="0" dirty="0">
-                          <a:ln>
-                            <a:noFill/>
-                          </a:ln>
-                          <a:solidFill>
-                            <a:schemeClr val="tx1"/>
-                          </a:solidFill>
-                          <a:effectLst/>
-                          <a:latin typeface="Tahoma" charset="0"/>
-                        </a:rPr>
-                        <a:t>parameters</a:t>
-                      </a:r>
-                    </a:p>
-                  </a:txBody>
-                  <a:tcPr anchor="ctr" anchorCtr="1" horzOverflow="overflow">
-                    <a:lnL w="12700" cap="flat" cmpd="sng" algn="ctr">
-                      <a:solidFill>
-                        <a:schemeClr val="tx1"/>
-                      </a:solidFill>
-                      <a:prstDash val="solid"/>
-                      <a:round/>
-                      <a:headEnd type="none" w="med" len="med"/>
-                      <a:tailEnd type="none" w="med" len="med"/>
-                    </a:lnL>
-                    <a:lnR w="28575" cap="flat" cmpd="sng" algn="ctr">
-                      <a:solidFill>
-                        <a:schemeClr val="tx1"/>
-                      </a:solidFill>
-                      <a:prstDash val="solid"/>
-                      <a:round/>
-                      <a:headEnd type="none" w="med" len="med"/>
-                      <a:tailEnd type="none" w="med" len="med"/>
-                    </a:lnR>
-                    <a:lnT cap="flat">
-                      <a:noFill/>
-                    </a:lnT>
-                    <a:lnB w="12700" cap="flat" cmpd="sng" algn="ctr">
-                      <a:solidFill>
-                        <a:schemeClr val="tx1"/>
-                      </a:solidFill>
-                      <a:prstDash val="solid"/>
-                      <a:round/>
-                      <a:headEnd type="none" w="med" len="med"/>
-                      <a:tailEnd type="none" w="med" len="med"/>
-                    </a:lnB>
-                    <a:lnTlToBr>
-                      <a:noFill/>
-                    </a:lnTlToBr>
-                    <a:lnBlToTr>
-                      <a:noFill/>
-                    </a:lnBlToTr>
-                    <a:noFill/>
-                  </a:tcPr>
-                </a:tc>
-                <a:extLst>
-                  <a:ext uri="{0D108BD9-81ED-4DB2-BD59-A6C34878D82A}">
-                    <a16:rowId xmlns:a16="http://schemas.microsoft.com/office/drawing/2014/main" val="10000"/>
-                  </a:ext>
-                </a:extLst>
-              </a:tr>
-              <a:tr h="514350">
-                <a:tc>
-                  <a:txBody>
-                    <a:bodyPr/>
-                    <a:lstStyle/>
-                    <a:p>
-                      <a:pPr marL="0" marR="0" lvl="0" indent="0" algn="l" defTabSz="914400" rtl="0" eaLnBrk="1" fontAlgn="base" latinLnBrk="0" hangingPunct="1">
-                        <a:lnSpc>
-                          <a:spcPct val="100000"/>
-                        </a:lnSpc>
-                        <a:spcBef>
-                          <a:spcPct val="20000"/>
-                        </a:spcBef>
-                        <a:spcAft>
-                          <a:spcPct val="0"/>
-                        </a:spcAft>
-                        <a:buClrTx/>
-                        <a:buSzTx/>
-                        <a:buFontTx/>
-                        <a:buNone/>
-                        <a:tabLst/>
-                      </a:pPr>
-                      <a:r>
-                        <a:rPr kumimoji="0" lang="en-US" sz="1800" b="0" i="0" u="none" strike="noStrike" cap="none" normalizeH="0" baseline="0">
-                          <a:ln>
-                            <a:noFill/>
-                          </a:ln>
-                          <a:solidFill>
-                            <a:schemeClr val="bg2"/>
-                          </a:solidFill>
-                          <a:effectLst/>
-                          <a:latin typeface="Tahoma" charset="0"/>
-                        </a:rPr>
-                        <a:t>method2</a:t>
-                      </a:r>
-                    </a:p>
-                  </a:txBody>
-                  <a:tcPr anchor="ctr" anchorCtr="1" horzOverflow="overflow">
-                    <a:lnL cap="flat">
-                      <a:noFill/>
-                    </a:lnL>
-                    <a:lnR w="12700" cap="flat" cmpd="sng" algn="ctr">
-                      <a:solidFill>
-                        <a:schemeClr val="tx1"/>
-                      </a:solidFill>
-                      <a:prstDash val="solid"/>
-                      <a:round/>
-                      <a:headEnd type="none" w="med" len="med"/>
-                      <a:tailEnd type="none" w="med" len="med"/>
-                    </a:lnR>
-                    <a:lnT>
-                      <a:noFill/>
-                    </a:lnT>
-                    <a:lnB>
-                      <a:noFill/>
-                    </a:lnB>
-                    <a:lnTlToBr>
-                      <a:noFill/>
-                    </a:lnTlToBr>
-                    <a:lnBlToTr>
-                      <a:noFill/>
-                    </a:lnBlToTr>
-                    <a:noFill/>
-                  </a:tcPr>
-                </a:tc>
-                <a:tc>
-                  <a:txBody>
-                    <a:bodyPr/>
-                    <a:lstStyle/>
-                    <a:p>
-                      <a:pPr marL="0" marR="0" lvl="0" indent="0" algn="l" defTabSz="914400" rtl="0" eaLnBrk="1" fontAlgn="base" latinLnBrk="0" hangingPunct="1">
-                        <a:lnSpc>
-                          <a:spcPct val="70000"/>
-                        </a:lnSpc>
-                        <a:spcBef>
-                          <a:spcPct val="20000"/>
-                        </a:spcBef>
-                        <a:spcAft>
-                          <a:spcPct val="0"/>
-                        </a:spcAft>
-                        <a:buClrTx/>
-                        <a:buSzTx/>
-                        <a:buFontTx/>
-                        <a:buNone/>
-                        <a:tabLst/>
-                      </a:pPr>
-                      <a:r>
-                        <a:rPr kumimoji="0" lang="en-US" sz="1000" b="0" i="0" u="none" strike="noStrike" cap="none" normalizeH="0" baseline="0" dirty="0">
-                          <a:ln>
-                            <a:noFill/>
-                          </a:ln>
-                          <a:solidFill>
-                            <a:schemeClr val="tx1"/>
-                          </a:solidFill>
-                          <a:effectLst/>
-                          <a:latin typeface="Tahoma" charset="0"/>
-                        </a:rPr>
-                        <a:t>return </a:t>
-                      </a:r>
-                      <a:r>
-                        <a:rPr kumimoji="0" lang="en-US" sz="1000" b="0" i="0" u="none" strike="noStrike" cap="none" normalizeH="0" baseline="0" dirty="0" err="1">
-                          <a:ln>
-                            <a:noFill/>
-                          </a:ln>
-                          <a:solidFill>
-                            <a:schemeClr val="tx1"/>
-                          </a:solidFill>
-                          <a:effectLst/>
-                          <a:latin typeface="Tahoma" charset="0"/>
-                        </a:rPr>
-                        <a:t>var</a:t>
-                      </a:r>
-                      <a:endParaRPr kumimoji="0" lang="en-US" sz="1000" b="0" i="0" u="none" strike="noStrike" cap="none" normalizeH="0" baseline="0" dirty="0">
-                        <a:ln>
-                          <a:noFill/>
-                        </a:ln>
-                        <a:solidFill>
-                          <a:schemeClr val="tx1"/>
-                        </a:solidFill>
-                        <a:effectLst/>
-                        <a:latin typeface="Tahoma" charset="0"/>
-                      </a:endParaRPr>
-                    </a:p>
-                    <a:p>
-                      <a:pPr marL="0" marR="0" lvl="0" indent="0" algn="l" defTabSz="914400" rtl="0" eaLnBrk="1" fontAlgn="base" latinLnBrk="0" hangingPunct="1">
-                        <a:lnSpc>
-                          <a:spcPct val="70000"/>
-                        </a:lnSpc>
-                        <a:spcBef>
-                          <a:spcPct val="20000"/>
-                        </a:spcBef>
-                        <a:spcAft>
-                          <a:spcPct val="0"/>
-                        </a:spcAft>
-                        <a:buClrTx/>
-                        <a:buSzTx/>
-                        <a:buFontTx/>
-                        <a:buNone/>
-                        <a:tabLst/>
-                      </a:pPr>
-                      <a:r>
-                        <a:rPr kumimoji="0" lang="en-US" sz="1000" b="0" i="0" u="none" strike="noStrike" cap="none" normalizeH="0" baseline="0" dirty="0">
-                          <a:ln>
-                            <a:noFill/>
-                          </a:ln>
-                          <a:solidFill>
-                            <a:schemeClr val="tx1"/>
-                          </a:solidFill>
-                          <a:effectLst/>
-                          <a:latin typeface="Tahoma" charset="0"/>
-                        </a:rPr>
-                        <a:t>local </a:t>
-                      </a:r>
-                      <a:r>
-                        <a:rPr kumimoji="0" lang="en-US" sz="1000" b="0" i="0" u="none" strike="noStrike" cap="none" normalizeH="0" baseline="0" dirty="0" err="1">
-                          <a:ln>
-                            <a:noFill/>
-                          </a:ln>
-                          <a:solidFill>
-                            <a:schemeClr val="tx1"/>
-                          </a:solidFill>
-                          <a:effectLst/>
-                          <a:latin typeface="Tahoma" charset="0"/>
-                        </a:rPr>
-                        <a:t>vars</a:t>
-                      </a:r>
-                      <a:endParaRPr kumimoji="0" lang="en-US" sz="1000" b="0" i="0" u="none" strike="noStrike" cap="none" normalizeH="0" baseline="0" dirty="0">
-                        <a:ln>
-                          <a:noFill/>
-                        </a:ln>
-                        <a:solidFill>
-                          <a:schemeClr val="tx1"/>
-                        </a:solidFill>
-                        <a:effectLst/>
-                        <a:latin typeface="Tahoma" charset="0"/>
-                      </a:endParaRPr>
-                    </a:p>
-                    <a:p>
-                      <a:pPr marL="0" marR="0" lvl="0" indent="0" algn="l" defTabSz="914400" rtl="0" eaLnBrk="1" fontAlgn="base" latinLnBrk="0" hangingPunct="1">
-                        <a:lnSpc>
-                          <a:spcPct val="70000"/>
-                        </a:lnSpc>
-                        <a:spcBef>
-                          <a:spcPct val="20000"/>
-                        </a:spcBef>
-                        <a:spcAft>
-                          <a:spcPct val="0"/>
-                        </a:spcAft>
-                        <a:buClrTx/>
-                        <a:buSzTx/>
-                        <a:buFontTx/>
-                        <a:buNone/>
-                        <a:tabLst/>
-                      </a:pPr>
-                      <a:r>
-                        <a:rPr kumimoji="0" lang="en-US" sz="1000" b="0" i="0" u="none" strike="noStrike" cap="none" normalizeH="0" baseline="0" dirty="0">
-                          <a:ln>
-                            <a:noFill/>
-                          </a:ln>
-                          <a:solidFill>
-                            <a:schemeClr val="tx1"/>
-                          </a:solidFill>
-                          <a:effectLst/>
-                          <a:latin typeface="Tahoma" charset="0"/>
-                        </a:rPr>
-                        <a:t>parameters</a:t>
-                      </a:r>
-                    </a:p>
-                  </a:txBody>
-                  <a:tcPr anchor="ctr" anchorCtr="1" horzOverflow="overflow">
-                    <a:lnL w="12700" cap="flat" cmpd="sng" algn="ctr">
-                      <a:solidFill>
-                        <a:schemeClr val="tx1"/>
-                      </a:solidFill>
-                      <a:prstDash val="solid"/>
-                      <a:round/>
-                      <a:headEnd type="none" w="med" len="med"/>
-                      <a:tailEnd type="none" w="med" len="med"/>
-                    </a:lnL>
-                    <a:lnR w="28575" cap="flat" cmpd="sng" algn="ctr">
-                      <a:solidFill>
-                        <a:schemeClr val="tx1"/>
-                      </a:solidFill>
-                      <a:prstDash val="solid"/>
-                      <a:round/>
-                      <a:headEnd type="none" w="med" len="med"/>
-                      <a:tailEnd type="none" w="med" len="med"/>
-                    </a:lnR>
-                    <a:lnT w="12700" cap="flat" cmpd="sng" algn="ctr">
-                      <a:solidFill>
-                        <a:schemeClr val="tx1"/>
-                      </a:solidFill>
-                      <a:prstDash val="solid"/>
-                      <a:round/>
-                      <a:headEnd type="none" w="med" len="med"/>
-                      <a:tailEnd type="none" w="med" len="med"/>
-                    </a:lnT>
-                    <a:lnB w="12700" cap="flat" cmpd="sng" algn="ctr">
-                      <a:solidFill>
-                        <a:schemeClr val="tx1"/>
-                      </a:solidFill>
-                      <a:prstDash val="solid"/>
-                      <a:round/>
-                      <a:headEnd type="none" w="med" len="med"/>
-                      <a:tailEnd type="none" w="med" len="med"/>
-                    </a:lnB>
-                    <a:lnTlToBr>
-                      <a:noFill/>
-                    </a:lnTlToBr>
-                    <a:lnBlToTr>
-                      <a:noFill/>
-                    </a:lnBlToTr>
-                    <a:noFill/>
-                  </a:tcPr>
-                </a:tc>
-                <a:extLst>
-                  <a:ext uri="{0D108BD9-81ED-4DB2-BD59-A6C34878D82A}">
-                    <a16:rowId xmlns:a16="http://schemas.microsoft.com/office/drawing/2014/main" val="10001"/>
-                  </a:ext>
-                </a:extLst>
-              </a:tr>
-              <a:tr h="512763">
-                <a:tc>
-                  <a:txBody>
-                    <a:bodyPr/>
-                    <a:lstStyle/>
-                    <a:p>
-                      <a:pPr marL="0" marR="0" lvl="0" indent="0" algn="l" defTabSz="914400" rtl="0" eaLnBrk="1" fontAlgn="base" latinLnBrk="0" hangingPunct="1">
-                        <a:lnSpc>
-                          <a:spcPct val="100000"/>
-                        </a:lnSpc>
-                        <a:spcBef>
-                          <a:spcPct val="20000"/>
-                        </a:spcBef>
-                        <a:spcAft>
-                          <a:spcPct val="0"/>
-                        </a:spcAft>
-                        <a:buClrTx/>
-                        <a:buSzTx/>
-                        <a:buFontTx/>
-                        <a:buNone/>
-                        <a:tabLst/>
-                      </a:pPr>
-                      <a:r>
-                        <a:rPr kumimoji="0" lang="en-US" sz="1800" b="0" i="0" u="none" strike="noStrike" cap="none" normalizeH="0" baseline="0">
-                          <a:ln>
-                            <a:noFill/>
-                          </a:ln>
-                          <a:solidFill>
-                            <a:schemeClr val="bg2"/>
-                          </a:solidFill>
-                          <a:effectLst/>
-                          <a:latin typeface="Tahoma" charset="0"/>
-                        </a:rPr>
-                        <a:t>method1</a:t>
-                      </a:r>
-                    </a:p>
-                  </a:txBody>
-                  <a:tcPr anchor="ctr" anchorCtr="1" horzOverflow="overflow">
-                    <a:lnL cap="flat">
-                      <a:noFill/>
-                    </a:lnL>
-                    <a:lnR w="12700" cap="flat" cmpd="sng" algn="ctr">
-                      <a:solidFill>
-                        <a:schemeClr val="tx1"/>
-                      </a:solidFill>
-                      <a:prstDash val="solid"/>
-                      <a:round/>
-                      <a:headEnd type="none" w="med" len="med"/>
-                      <a:tailEnd type="none" w="med" len="med"/>
-                    </a:lnR>
-                    <a:lnT>
-                      <a:noFill/>
-                    </a:lnT>
-                    <a:lnB cap="flat">
-                      <a:noFill/>
-                    </a:lnB>
-                    <a:lnTlToBr>
-                      <a:noFill/>
-                    </a:lnTlToBr>
-                    <a:lnBlToTr>
-                      <a:noFill/>
-                    </a:lnBlToTr>
-                    <a:noFill/>
-                  </a:tcPr>
-                </a:tc>
-                <a:tc>
-                  <a:txBody>
-                    <a:bodyPr/>
-                    <a:lstStyle/>
-                    <a:p>
-                      <a:pPr marL="0" marR="0" lvl="0" indent="0" algn="l" defTabSz="914400" rtl="0" eaLnBrk="1" fontAlgn="base" latinLnBrk="0" hangingPunct="1">
-                        <a:lnSpc>
-                          <a:spcPct val="70000"/>
-                        </a:lnSpc>
-                        <a:spcBef>
-                          <a:spcPct val="20000"/>
-                        </a:spcBef>
-                        <a:spcAft>
-                          <a:spcPct val="0"/>
-                        </a:spcAft>
-                        <a:buClrTx/>
-                        <a:buSzTx/>
-                        <a:buFontTx/>
-                        <a:buNone/>
-                        <a:tabLst/>
-                      </a:pPr>
-                      <a:r>
-                        <a:rPr kumimoji="0" lang="en-US" sz="1000" b="0" i="0" u="none" strike="noStrike" cap="none" normalizeH="0" baseline="0" dirty="0">
-                          <a:ln>
-                            <a:noFill/>
-                          </a:ln>
-                          <a:solidFill>
-                            <a:schemeClr val="tx1"/>
-                          </a:solidFill>
-                          <a:effectLst/>
-                          <a:latin typeface="Tahoma" charset="0"/>
-                        </a:rPr>
-                        <a:t>return </a:t>
-                      </a:r>
-                      <a:r>
-                        <a:rPr kumimoji="0" lang="en-US" sz="1000" b="0" i="0" u="none" strike="noStrike" cap="none" normalizeH="0" baseline="0" dirty="0" err="1">
-                          <a:ln>
-                            <a:noFill/>
-                          </a:ln>
-                          <a:solidFill>
-                            <a:schemeClr val="tx1"/>
-                          </a:solidFill>
-                          <a:effectLst/>
-                          <a:latin typeface="Tahoma" charset="0"/>
-                        </a:rPr>
-                        <a:t>var</a:t>
-                      </a:r>
-                      <a:endParaRPr kumimoji="0" lang="en-US" sz="1000" b="0" i="0" u="none" strike="noStrike" cap="none" normalizeH="0" baseline="0" dirty="0">
-                        <a:ln>
-                          <a:noFill/>
-                        </a:ln>
-                        <a:solidFill>
-                          <a:schemeClr val="tx1"/>
-                        </a:solidFill>
-                        <a:effectLst/>
-                        <a:latin typeface="Tahoma" charset="0"/>
-                      </a:endParaRPr>
-                    </a:p>
-                    <a:p>
-                      <a:pPr marL="0" marR="0" lvl="0" indent="0" algn="l" defTabSz="914400" rtl="0" eaLnBrk="1" fontAlgn="base" latinLnBrk="0" hangingPunct="1">
-                        <a:lnSpc>
-                          <a:spcPct val="70000"/>
-                        </a:lnSpc>
-                        <a:spcBef>
-                          <a:spcPct val="20000"/>
-                        </a:spcBef>
-                        <a:spcAft>
-                          <a:spcPct val="0"/>
-                        </a:spcAft>
-                        <a:buClrTx/>
-                        <a:buSzTx/>
-                        <a:buFontTx/>
-                        <a:buNone/>
-                        <a:tabLst/>
-                      </a:pPr>
-                      <a:r>
-                        <a:rPr kumimoji="0" lang="en-US" sz="1000" b="0" i="0" u="none" strike="noStrike" cap="none" normalizeH="0" baseline="0" dirty="0">
-                          <a:ln>
-                            <a:noFill/>
-                          </a:ln>
-                          <a:solidFill>
-                            <a:schemeClr val="tx1"/>
-                          </a:solidFill>
-                          <a:effectLst/>
-                          <a:latin typeface="Tahoma" charset="0"/>
-                        </a:rPr>
-                        <a:t>local </a:t>
-                      </a:r>
-                      <a:r>
-                        <a:rPr kumimoji="0" lang="en-US" sz="1000" b="0" i="0" u="none" strike="noStrike" cap="none" normalizeH="0" baseline="0" dirty="0" err="1">
-                          <a:ln>
-                            <a:noFill/>
-                          </a:ln>
-                          <a:solidFill>
-                            <a:schemeClr val="tx1"/>
-                          </a:solidFill>
-                          <a:effectLst/>
-                          <a:latin typeface="Tahoma" charset="0"/>
-                        </a:rPr>
-                        <a:t>vars</a:t>
-                      </a:r>
-                      <a:endParaRPr kumimoji="0" lang="en-US" sz="1000" b="0" i="0" u="none" strike="noStrike" cap="none" normalizeH="0" baseline="0" dirty="0">
-                        <a:ln>
-                          <a:noFill/>
-                        </a:ln>
-                        <a:solidFill>
-                          <a:schemeClr val="tx1"/>
-                        </a:solidFill>
-                        <a:effectLst/>
-                        <a:latin typeface="Tahoma" charset="0"/>
-                      </a:endParaRPr>
-                    </a:p>
-                    <a:p>
-                      <a:pPr marL="0" marR="0" lvl="0" indent="0" algn="l" defTabSz="914400" rtl="0" eaLnBrk="1" fontAlgn="base" latinLnBrk="0" hangingPunct="1">
-                        <a:lnSpc>
-                          <a:spcPct val="70000"/>
-                        </a:lnSpc>
-                        <a:spcBef>
-                          <a:spcPct val="20000"/>
-                        </a:spcBef>
-                        <a:spcAft>
-                          <a:spcPct val="0"/>
-                        </a:spcAft>
-                        <a:buClrTx/>
-                        <a:buSzTx/>
-                        <a:buFontTx/>
-                        <a:buNone/>
-                        <a:tabLst/>
-                      </a:pPr>
-                      <a:r>
-                        <a:rPr kumimoji="0" lang="en-US" sz="1000" b="0" i="0" u="none" strike="noStrike" cap="none" normalizeH="0" baseline="0" dirty="0">
-                          <a:ln>
-                            <a:noFill/>
-                          </a:ln>
-                          <a:solidFill>
-                            <a:schemeClr val="tx1"/>
-                          </a:solidFill>
-                          <a:effectLst/>
-                          <a:latin typeface="Tahoma" charset="0"/>
-                        </a:rPr>
-                        <a:t>parameters</a:t>
-                      </a:r>
-                    </a:p>
-                  </a:txBody>
-                  <a:tcPr anchor="ctr" anchorCtr="1" horzOverflow="overflow">
-                    <a:lnL w="12700" cap="flat" cmpd="sng" algn="ctr">
-                      <a:solidFill>
-                        <a:schemeClr val="tx1"/>
-                      </a:solidFill>
-                      <a:prstDash val="solid"/>
-                      <a:round/>
-                      <a:headEnd type="none" w="med" len="med"/>
-                      <a:tailEnd type="none" w="med" len="med"/>
-                    </a:lnL>
-                    <a:lnR w="28575" cap="flat" cmpd="sng" algn="ctr">
-                      <a:solidFill>
-                        <a:schemeClr val="tx1"/>
-                      </a:solidFill>
-                      <a:prstDash val="solid"/>
-                      <a:round/>
-                      <a:headEnd type="none" w="med" len="med"/>
-                      <a:tailEnd type="none" w="med" len="med"/>
-                    </a:lnR>
-                    <a:lnT w="12700" cap="flat" cmpd="sng" algn="ctr">
-                      <a:solidFill>
-                        <a:schemeClr val="tx1"/>
-                      </a:solidFill>
-                      <a:prstDash val="solid"/>
-                      <a:round/>
-                      <a:headEnd type="none" w="med" len="med"/>
-                      <a:tailEnd type="none" w="med" len="med"/>
-                    </a:lnT>
-                    <a:lnB w="28575" cap="flat" cmpd="sng" algn="ctr">
-                      <a:solidFill>
-                        <a:schemeClr val="tx1"/>
-                      </a:solidFill>
-                      <a:prstDash val="solid"/>
-                      <a:round/>
-                      <a:headEnd type="none" w="med" len="med"/>
-                      <a:tailEnd type="none" w="med" len="med"/>
-                    </a:lnB>
-                    <a:lnTlToBr>
-                      <a:noFill/>
-                    </a:lnTlToBr>
-                    <a:lnBlToTr>
-                      <a:noFill/>
-                    </a:lnBlToTr>
-                    <a:noFill/>
-                  </a:tcPr>
-                </a:tc>
-                <a:extLst>
-                  <a:ext uri="{0D108BD9-81ED-4DB2-BD59-A6C34878D82A}">
-                    <a16:rowId xmlns:a16="http://schemas.microsoft.com/office/drawing/2014/main" val="10002"/>
-                  </a:ext>
-                </a:extLst>
-              </a:tr>
-            </a:tbl>
-          </a:graphicData>
-        </a:graphic>
-      </p:graphicFrame>
-    </p:spTree>
-  </p:cSld>
-  <p:clrMapOvr>
-    <a:masterClrMapping/>
-  </p:clrMapOvr>
-  <p:timing>
-    <p:tnLst>
-      <p:par>
-        <p:cTn id="1" dur="indefinite" restart="never" nodeType="tmRoot">
-          <p:childTnLst>
-            <p:seq concurrent="1" nextAc="seek">
-              <p:cTn id="2" dur="indefinite" nodeType="mainSeq">
-                <p:childTnLst>
-                  <p:par>
-                    <p:cTn id="3" fill="hold" nodeType="clickPar">
-                      <p:stCondLst>
-                        <p:cond delay="indefinite"/>
-                      </p:stCondLst>
-                      <p:childTnLst>
-                        <p:par>
-                          <p:cTn id="4" fill="hold" nodeType="withGroup">
-                            <p:stCondLst>
-                              <p:cond delay="0"/>
-                            </p:stCondLst>
-                            <p:childTnLst>
-                              <p:par>
-                                <p:cTn id="5" presetID="1" presetClass="entr" presetSubtype="0" fill="hold" nodeType="clickEffect">
-                                  <p:stCondLst>
-                                    <p:cond delay="0"/>
-                                  </p:stCondLst>
-                                  <p:childTnLst>
-                                    <p:set>
-                                      <p:cBhvr>
-                                        <p:cTn id="6" dur="1" fill="hold">
-                                          <p:stCondLst>
-                                            <p:cond delay="0"/>
-                                          </p:stCondLst>
-                                        </p:cTn>
-                                        <p:tgtEl>
-                                          <p:spTgt spid="3">
-                                            <p:txEl>
-                                              <p:pRg st="0" end="0"/>
-                                            </p:txEl>
-                                          </p:spTgt>
-                                        </p:tgtEl>
-                                        <p:attrNameLst>
-                                          <p:attrName>style.visibility</p:attrName>
-                                        </p:attrNameLst>
-                                      </p:cBhvr>
-                                      <p:to>
-                                        <p:strVal val="visible"/>
-                                      </p:to>
-                                    </p:set>
-                                  </p:childTnLst>
-                                </p:cTn>
-                              </p:par>
-                              <p:par>
-                                <p:cTn id="7" presetID="1" presetClass="entr" presetSubtype="0" fill="hold" nodeType="withEffect">
-                                  <p:stCondLst>
-                                    <p:cond delay="0"/>
-                                  </p:stCondLst>
-                                  <p:childTnLst>
-                                    <p:set>
-                                      <p:cBhvr>
-                                        <p:cTn id="8" dur="1" fill="hold">
-                                          <p:stCondLst>
-                                            <p:cond delay="0"/>
-                                          </p:stCondLst>
-                                        </p:cTn>
-                                        <p:tgtEl>
-                                          <p:spTgt spid="5"/>
-                                        </p:tgtEl>
-                                        <p:attrNameLst>
-                                          <p:attrName>style.visibility</p:attrName>
-                                        </p:attrNameLst>
-                                      </p:cBhvr>
-                                      <p:to>
-                                        <p:strVal val="visible"/>
-                                      </p:to>
-                                    </p:set>
-                                  </p:childTnLst>
-                                </p:cTn>
-                              </p:par>
-                              <p:par>
-                                <p:cTn id="9" presetID="1" presetClass="entr" presetSubtype="0" fill="hold" nodeType="withEffect">
-                                  <p:stCondLst>
-                                    <p:cond delay="0"/>
-                                  </p:stCondLst>
-                                  <p:childTnLst>
-                                    <p:set>
-                                      <p:cBhvr>
-                                        <p:cTn id="10" dur="1" fill="hold">
-                                          <p:stCondLst>
-                                            <p:cond delay="0"/>
-                                          </p:stCondLst>
-                                        </p:cTn>
-                                        <p:tgtEl>
-                                          <p:spTgt spid="3">
-                                            <p:txEl>
-                                              <p:pRg st="1" end="1"/>
-                                            </p:txEl>
-                                          </p:spTgt>
-                                        </p:tgtEl>
-                                        <p:attrNameLst>
-                                          <p:attrName>style.visibility</p:attrName>
-                                        </p:attrNameLst>
-                                      </p:cBhvr>
-                                      <p:to>
-                                        <p:strVal val="visible"/>
-                                      </p:to>
-                                    </p:set>
-                                  </p:childTnLst>
-                                </p:cTn>
-                              </p:par>
-                            </p:childTnLst>
-                          </p:cTn>
-                        </p:par>
-                      </p:childTnLst>
-                    </p:cTn>
-                  </p:par>
-                  <p:par>
-                    <p:cTn id="11" fill="hold" nodeType="clickPar">
-                      <p:stCondLst>
-                        <p:cond delay="indefinite"/>
-                      </p:stCondLst>
-                      <p:childTnLst>
-                        <p:par>
-                          <p:cTn id="12" fill="hold" nodeType="withGroup">
-                            <p:stCondLst>
-                              <p:cond delay="0"/>
-                            </p:stCondLst>
-                            <p:childTnLst>
-                              <p:par>
-                                <p:cTn id="13" presetID="1" presetClass="entr" presetSubtype="0" fill="hold" nodeType="clickEffect">
-                                  <p:stCondLst>
-                                    <p:cond delay="0"/>
-                                  </p:stCondLst>
-                                  <p:childTnLst>
-                                    <p:set>
-                                      <p:cBhvr>
-                                        <p:cTn id="14" dur="1" fill="hold">
-                                          <p:stCondLst>
-                                            <p:cond delay="0"/>
-                                          </p:stCondLst>
-                                        </p:cTn>
-                                        <p:tgtEl>
-                                          <p:spTgt spid="3">
-                                            <p:txEl>
-                                              <p:pRg st="4" end="4"/>
-                                            </p:txEl>
-                                          </p:spTgt>
-                                        </p:tgtEl>
-                                        <p:attrNameLst>
-                                          <p:attrName>style.visibility</p:attrName>
-                                        </p:attrNameLst>
-                                      </p:cBhvr>
-                                      <p:to>
-                                        <p:strVal val="visible"/>
-                                      </p:to>
-                                    </p:set>
-                                  </p:childTnLst>
-                                </p:cTn>
-                              </p:par>
-                              <p:par>
-                                <p:cTn id="15" presetID="1" presetClass="entr" presetSubtype="0" fill="hold" nodeType="withEffect">
-                                  <p:stCondLst>
-                                    <p:cond delay="0"/>
-                                  </p:stCondLst>
-                                  <p:childTnLst>
-                                    <p:set>
-                                      <p:cBhvr>
-                                        <p:cTn id="16" dur="1" fill="hold">
-                                          <p:stCondLst>
-                                            <p:cond delay="0"/>
-                                          </p:stCondLst>
-                                        </p:cTn>
-                                        <p:tgtEl>
-                                          <p:spTgt spid="3">
-                                            <p:txEl>
-                                              <p:pRg st="5" end="5"/>
-                                            </p:txEl>
-                                          </p:spTgt>
-                                        </p:tgtEl>
-                                        <p:attrNameLst>
-                                          <p:attrName>style.visibility</p:attrName>
-                                        </p:attrNameLst>
-                                      </p:cBhvr>
-                                      <p:to>
-                                        <p:strVal val="visible"/>
-                                      </p:to>
-                                    </p:set>
-                                  </p:childTnLst>
-                                </p:cTn>
-                              </p:par>
-                              <p:par>
-                                <p:cTn id="17" presetID="1" presetClass="entr" presetSubtype="0" fill="hold" nodeType="withEffect">
-                                  <p:stCondLst>
-                                    <p:cond delay="0"/>
-                                  </p:stCondLst>
-                                  <p:childTnLst>
-                                    <p:set>
-                                      <p:cBhvr>
-                                        <p:cTn id="18" dur="1" fill="hold">
-                                          <p:stCondLst>
-                                            <p:cond delay="0"/>
-                                          </p:stCondLst>
-                                        </p:cTn>
-                                        <p:tgtEl>
-                                          <p:spTgt spid="3">
-                                            <p:txEl>
-                                              <p:pRg st="6" end="6"/>
-                                            </p:txEl>
-                                          </p:spTgt>
-                                        </p:tgtEl>
-                                        <p:attrNameLst>
-                                          <p:attrName>style.visibility</p:attrName>
-                                        </p:attrNameLst>
-                                      </p:cBhvr>
-                                      <p:to>
-                                        <p:strVal val="visible"/>
-                                      </p:to>
-                                    </p:set>
-                                  </p:childTnLst>
-                                </p:cTn>
-                              </p:par>
-                            </p:childTnLst>
-                          </p:cTn>
-                        </p:par>
-                      </p:childTnLst>
-                    </p:cTn>
-                  </p:par>
-                  <p:par>
-                    <p:cTn id="19" fill="hold" nodeType="clickPar">
-                      <p:stCondLst>
-                        <p:cond delay="indefinite"/>
-                      </p:stCondLst>
-                      <p:childTnLst>
-                        <p:par>
-                          <p:cTn id="20" fill="hold" nodeType="withGroup">
-                            <p:stCondLst>
-                              <p:cond delay="0"/>
-                            </p:stCondLst>
-                            <p:childTnLst>
-                              <p:par>
-                                <p:cTn id="21" presetID="1" presetClass="entr" presetSubtype="0" fill="hold" nodeType="clickEffect">
-                                  <p:stCondLst>
-                                    <p:cond delay="0"/>
-                                  </p:stCondLst>
-                                  <p:childTnLst>
-                                    <p:set>
-                                      <p:cBhvr>
-                                        <p:cTn id="22" dur="1" fill="hold">
-                                          <p:stCondLst>
-                                            <p:cond delay="0"/>
-                                          </p:stCondLst>
-                                        </p:cTn>
-                                        <p:tgtEl>
-                                          <p:spTgt spid="3">
-                                            <p:txEl>
-                                              <p:pRg st="8" end="8"/>
-                                            </p:txEl>
-                                          </p:spTgt>
-                                        </p:tgtEl>
-                                        <p:attrNameLst>
-                                          <p:attrName>style.visibility</p:attrName>
-                                        </p:attrNameLst>
-                                      </p:cBhvr>
-                                      <p:to>
-                                        <p:strVal val="visible"/>
-                                      </p:to>
-                                    </p:set>
-                                  </p:childTnLst>
-                                </p:cTn>
-                              </p:par>
-                              <p:par>
-                                <p:cTn id="23" presetID="1" presetClass="entr" presetSubtype="0" fill="hold" nodeType="withEffect">
-                                  <p:stCondLst>
-                                    <p:cond delay="0"/>
-                                  </p:stCondLst>
-                                  <p:childTnLst>
-                                    <p:set>
-                                      <p:cBhvr>
-                                        <p:cTn id="24" dur="1" fill="hold">
-                                          <p:stCondLst>
-                                            <p:cond delay="0"/>
-                                          </p:stCondLst>
-                                        </p:cTn>
-                                        <p:tgtEl>
-                                          <p:spTgt spid="3">
-                                            <p:txEl>
-                                              <p:pRg st="9" end="9"/>
-                                            </p:txEl>
-                                          </p:spTgt>
-                                        </p:tgtEl>
-                                        <p:attrNameLst>
-                                          <p:attrName>style.visibility</p:attrName>
-                                        </p:attrNameLst>
-                                      </p:cBhvr>
-                                      <p:to>
-                                        <p:strVal val="visible"/>
-                                      </p:to>
-                                    </p:set>
-                                  </p:childTnLst>
-                                </p:cTn>
-                              </p:par>
-                              <p:par>
-                                <p:cTn id="25" presetID="1" presetClass="entr" presetSubtype="0" fill="hold" nodeType="withEffect">
-                                  <p:stCondLst>
-                                    <p:cond delay="0"/>
-                                  </p:stCondLst>
-                                  <p:childTnLst>
-                                    <p:set>
-                                      <p:cBhvr>
-                                        <p:cTn id="26" dur="1" fill="hold">
-                                          <p:stCondLst>
-                                            <p:cond delay="0"/>
-                                          </p:stCondLst>
-                                        </p:cTn>
-                                        <p:tgtEl>
-                                          <p:spTgt spid="3">
-                                            <p:txEl>
-                                              <p:pRg st="10" end="10"/>
-                                            </p:txEl>
-                                          </p:spTgt>
-                                        </p:tgtEl>
-                                        <p:attrNameLst>
-                                          <p:attrName>style.visibility</p:attrName>
-                                        </p:attrNameLst>
-                                      </p:cBhvr>
-                                      <p:to>
-                                        <p:strVal val="visible"/>
-                                      </p:to>
-                                    </p:set>
-                                  </p:childTnLst>
-                                </p:cTn>
-                              </p:par>
-                            </p:childTnLst>
-                          </p:cTn>
-                        </p:par>
-                      </p:childTnLst>
-                    </p:cTn>
-                  </p:par>
-                </p:childTnLst>
-              </p:cTn>
-              <p:prevCondLst>
-                <p:cond evt="onPrev" delay="0">
-                  <p:tgtEl>
-                    <p:sldTgt/>
-                  </p:tgtEl>
-                </p:cond>
-              </p:prevCondLst>
-              <p:nextCondLst>
-                <p:cond evt="onNext" delay="0">
-                  <p:tgtEl>
-                    <p:sldTgt/>
-                  </p:tgtEl>
-                </p:cond>
-              </p:nextCondLst>
-            </p:seq>
-          </p:childTnLst>
-        </p:cTn>
-      </p:par>
-    </p:tnLst>
-    <p:bldLst>
-      <p:bldP spid="3" grpId="0" build="p"/>
-    </p:bldLst>
-  </p:timing>
-</p:sld>
-</file>
-
-<file path=ppt/slides/slide5.xml><?xml version="1.0" encoding="utf-8"?>
-<p:sld xmlns:a="http://schemas.openxmlformats.org/drawingml/2006/main" xmlns:r="http://schemas.openxmlformats.org/officeDocument/2006/relationships" xmlns:p="http://schemas.openxmlformats.org/presentationml/2006/main">
-  <p:cSld>
-    <p:spTree>
-      <p:nvGrpSpPr>
-        <p:cNvPr id="1" name=""/>
-        <p:cNvGrpSpPr/>
-        <p:nvPr/>
-      </p:nvGrpSpPr>
-      <p:grpSpPr>
-        <a:xfrm>
-          <a:off x="0" y="0"/>
-          <a:ext cx="0" cy="0"/>
-          <a:chOff x="0" y="0"/>
-          <a:chExt cx="0" cy="0"/>
-        </a:xfrm>
-      </p:grpSpPr>
-      <p:sp>
-        <p:nvSpPr>
           <p:cNvPr id="7170" name="Footer Placeholder 3">
             <a:extLst>
               <a:ext uri="{FF2B5EF4-FFF2-40B4-BE49-F238E27FC236}">
@@ -31182,7 +32107,7 @@
 </p:sld>
 </file>
 
-<file path=ppt/slides/slide6.xml><?xml version="1.0" encoding="utf-8"?>
+<file path=ppt/slides/slide5.xml><?xml version="1.0" encoding="utf-8"?>
 <p:sld xmlns:a="http://schemas.openxmlformats.org/drawingml/2006/main" xmlns:r="http://schemas.openxmlformats.org/officeDocument/2006/relationships" xmlns:p="http://schemas.openxmlformats.org/presentationml/2006/main">
   <p:cSld>
     <p:spTree>
@@ -32013,7 +32938,7 @@
 </p:sld>
 </file>
 
-<file path=ppt/slides/slide7.xml><?xml version="1.0" encoding="utf-8"?>
+<file path=ppt/slides/slide6.xml><?xml version="1.0" encoding="utf-8"?>
 <p:sld xmlns:a="http://schemas.openxmlformats.org/drawingml/2006/main" xmlns:r="http://schemas.openxmlformats.org/officeDocument/2006/relationships" xmlns:p="http://schemas.openxmlformats.org/presentationml/2006/main">
   <p:cSld>
     <p:spTree>
@@ -32937,7 +33862,7 @@
 </p:sld>
 </file>
 
-<file path=ppt/slides/slide8.xml><?xml version="1.0" encoding="utf-8"?>
+<file path=ppt/slides/slide7.xml><?xml version="1.0" encoding="utf-8"?>
 <p:sld xmlns:a="http://schemas.openxmlformats.org/drawingml/2006/main" xmlns:r="http://schemas.openxmlformats.org/officeDocument/2006/relationships" xmlns:p="http://schemas.openxmlformats.org/presentationml/2006/main">
   <p:cSld>
     <p:spTree>
@@ -33954,7 +34879,7 @@
 </p:sld>
 </file>
 
-<file path=ppt/slides/slide9.xml><?xml version="1.0" encoding="utf-8"?>
+<file path=ppt/slides/slide8.xml><?xml version="1.0" encoding="utf-8"?>
 <p:sld xmlns:a="http://schemas.openxmlformats.org/drawingml/2006/main" xmlns:r="http://schemas.openxmlformats.org/officeDocument/2006/relationships" xmlns:p="http://schemas.openxmlformats.org/presentationml/2006/main">
   <p:cSld>
     <p:spTree>
@@ -34800,6 +35725,820 @@
             <a:extLst>
               <a:ext uri="{FF2B5EF4-FFF2-40B4-BE49-F238E27FC236}">
                 <a16:creationId xmlns:a16="http://schemas.microsoft.com/office/drawing/2014/main" id="{AD28769B-C92F-4429-A42E-5A4D21899748}"/>
+              </a:ext>
+            </a:extLst>
+          </p:cNvPr>
+          <p:cNvSpPr>
+            <a:spLocks noChangeArrowheads="1" noChangeShapeType="1" noTextEdit="1"/>
+          </p:cNvSpPr>
+          <p:nvPr/>
+        </p:nvSpPr>
+        <p:spPr bwMode="auto">
+          <a:xfrm>
+            <a:off x="1143000" y="609600"/>
+            <a:ext cx="6553200" cy="990600"/>
+          </a:xfrm>
+          <a:prstGeom prst="rect">
+            <a:avLst/>
+          </a:prstGeom>
+        </p:spPr>
+        <p:txBody>
+          <a:bodyPr wrap="none" fromWordArt="1">
+            <a:prstTxWarp prst="textPlain">
+              <a:avLst>
+                <a:gd name="adj" fmla="val 50000"/>
+              </a:avLst>
+            </a:prstTxWarp>
+          </a:bodyPr>
+          <a:lstStyle/>
+          <a:p>
+            <a:pPr algn="ctr"/>
+            <a:r>
+              <a:rPr lang="en-US" sz="3600" kern="10">
+                <a:ln w="9525">
+                  <a:solidFill>
+                    <a:srgbClr val="CCFFFF"/>
+                  </a:solidFill>
+                  <a:round/>
+                  <a:headEnd/>
+                  <a:tailEnd/>
+                </a:ln>
+                <a:solidFill>
+                  <a:srgbClr val="0000FF"/>
+                </a:solidFill>
+                <a:effectLst>
+                  <a:outerShdw dist="35921" dir="2700000" algn="ctr" rotWithShape="0">
+                    <a:srgbClr val="C0C0C0"/>
+                  </a:outerShdw>
+                </a:effectLst>
+                <a:latin typeface="Impact" panose="020B0806030902050204" pitchFamily="34" charset="0"/>
+              </a:rPr>
+              <a:t>What is a Stack?</a:t>
+            </a:r>
+          </a:p>
+        </p:txBody>
+      </p:sp>
+    </p:spTree>
+  </p:cSld>
+  <p:clrMapOvr>
+    <a:masterClrMapping/>
+  </p:clrMapOvr>
+</p:sld>
+</file>
+
+<file path=ppt/slides/slide9.xml><?xml version="1.0" encoding="utf-8"?>
+<p:sld xmlns:a="http://schemas.openxmlformats.org/drawingml/2006/main" xmlns:r="http://schemas.openxmlformats.org/officeDocument/2006/relationships" xmlns:p="http://schemas.openxmlformats.org/presentationml/2006/main">
+  <p:cSld>
+    <p:spTree>
+      <p:nvGrpSpPr>
+        <p:cNvPr id="1" name=""/>
+        <p:cNvGrpSpPr/>
+        <p:nvPr/>
+      </p:nvGrpSpPr>
+      <p:grpSpPr>
+        <a:xfrm>
+          <a:off x="0" y="0"/>
+          <a:ext cx="0" cy="0"/>
+          <a:chOff x="0" y="0"/>
+          <a:chExt cx="0" cy="0"/>
+        </a:xfrm>
+      </p:grpSpPr>
+      <p:sp>
+        <p:nvSpPr>
+          <p:cNvPr id="12290" name="Footer Placeholder 3">
+            <a:extLst>
+              <a:ext uri="{FF2B5EF4-FFF2-40B4-BE49-F238E27FC236}">
+                <a16:creationId xmlns:a16="http://schemas.microsoft.com/office/drawing/2014/main" id="{136C3C54-91F7-4335-A21C-71C13068E663}"/>
+              </a:ext>
+            </a:extLst>
+          </p:cNvPr>
+          <p:cNvSpPr>
+            <a:spLocks noGrp="1"/>
+          </p:cNvSpPr>
+          <p:nvPr>
+            <p:ph type="ftr" sz="quarter" idx="12"/>
+          </p:nvPr>
+        </p:nvSpPr>
+        <p:spPr>
+          <a:noFill/>
+        </p:spPr>
+        <p:txBody>
+          <a:bodyPr/>
+          <a:lstStyle>
+            <a:lvl1pPr>
+              <a:spcBef>
+                <a:spcPct val="20000"/>
+              </a:spcBef>
+              <a:buChar char="•"/>
+              <a:defRPr sz="3200">
+                <a:solidFill>
+                  <a:schemeClr val="tx1"/>
+                </a:solidFill>
+                <a:latin typeface="Times New Roman" panose="02020603050405020304" pitchFamily="18" charset="0"/>
+              </a:defRPr>
+            </a:lvl1pPr>
+            <a:lvl2pPr marL="742950" indent="-285750">
+              <a:spcBef>
+                <a:spcPct val="20000"/>
+              </a:spcBef>
+              <a:buChar char="–"/>
+              <a:defRPr sz="2800">
+                <a:solidFill>
+                  <a:schemeClr val="tx1"/>
+                </a:solidFill>
+                <a:latin typeface="Times New Roman" panose="02020603050405020304" pitchFamily="18" charset="0"/>
+              </a:defRPr>
+            </a:lvl2pPr>
+            <a:lvl3pPr marL="1143000" indent="-228600">
+              <a:spcBef>
+                <a:spcPct val="20000"/>
+              </a:spcBef>
+              <a:buChar char="•"/>
+              <a:defRPr sz="2400">
+                <a:solidFill>
+                  <a:schemeClr val="tx1"/>
+                </a:solidFill>
+                <a:latin typeface="Times New Roman" panose="02020603050405020304" pitchFamily="18" charset="0"/>
+              </a:defRPr>
+            </a:lvl3pPr>
+            <a:lvl4pPr marL="1600200" indent="-228600">
+              <a:spcBef>
+                <a:spcPct val="20000"/>
+              </a:spcBef>
+              <a:buChar char="–"/>
+              <a:defRPr sz="2000">
+                <a:solidFill>
+                  <a:schemeClr val="tx1"/>
+                </a:solidFill>
+                <a:latin typeface="Times New Roman" panose="02020603050405020304" pitchFamily="18" charset="0"/>
+              </a:defRPr>
+            </a:lvl4pPr>
+            <a:lvl5pPr marL="2057400" indent="-228600">
+              <a:spcBef>
+                <a:spcPct val="20000"/>
+              </a:spcBef>
+              <a:buChar char="»"/>
+              <a:defRPr sz="2000">
+                <a:solidFill>
+                  <a:schemeClr val="tx1"/>
+                </a:solidFill>
+                <a:latin typeface="Times New Roman" panose="02020603050405020304" pitchFamily="18" charset="0"/>
+              </a:defRPr>
+            </a:lvl5pPr>
+            <a:lvl6pPr marL="2514600" indent="-228600" eaLnBrk="0" fontAlgn="base" hangingPunct="0">
+              <a:spcBef>
+                <a:spcPct val="20000"/>
+              </a:spcBef>
+              <a:spcAft>
+                <a:spcPct val="0"/>
+              </a:spcAft>
+              <a:buChar char="»"/>
+              <a:defRPr sz="2000">
+                <a:solidFill>
+                  <a:schemeClr val="tx1"/>
+                </a:solidFill>
+                <a:latin typeface="Times New Roman" panose="02020603050405020304" pitchFamily="18" charset="0"/>
+              </a:defRPr>
+            </a:lvl6pPr>
+            <a:lvl7pPr marL="2971800" indent="-228600" eaLnBrk="0" fontAlgn="base" hangingPunct="0">
+              <a:spcBef>
+                <a:spcPct val="20000"/>
+              </a:spcBef>
+              <a:spcAft>
+                <a:spcPct val="0"/>
+              </a:spcAft>
+              <a:buChar char="»"/>
+              <a:defRPr sz="2000">
+                <a:solidFill>
+                  <a:schemeClr val="tx1"/>
+                </a:solidFill>
+                <a:latin typeface="Times New Roman" panose="02020603050405020304" pitchFamily="18" charset="0"/>
+              </a:defRPr>
+            </a:lvl7pPr>
+            <a:lvl8pPr marL="3429000" indent="-228600" eaLnBrk="0" fontAlgn="base" hangingPunct="0">
+              <a:spcBef>
+                <a:spcPct val="20000"/>
+              </a:spcBef>
+              <a:spcAft>
+                <a:spcPct val="0"/>
+              </a:spcAft>
+              <a:buChar char="»"/>
+              <a:defRPr sz="2000">
+                <a:solidFill>
+                  <a:schemeClr val="tx1"/>
+                </a:solidFill>
+                <a:latin typeface="Times New Roman" panose="02020603050405020304" pitchFamily="18" charset="0"/>
+              </a:defRPr>
+            </a:lvl8pPr>
+            <a:lvl9pPr marL="3886200" indent="-228600" eaLnBrk="0" fontAlgn="base" hangingPunct="0">
+              <a:spcBef>
+                <a:spcPct val="20000"/>
+              </a:spcBef>
+              <a:spcAft>
+                <a:spcPct val="0"/>
+              </a:spcAft>
+              <a:buChar char="»"/>
+              <a:defRPr sz="2000">
+                <a:solidFill>
+                  <a:schemeClr val="tx1"/>
+                </a:solidFill>
+                <a:latin typeface="Times New Roman" panose="02020603050405020304" pitchFamily="18" charset="0"/>
+              </a:defRPr>
+            </a:lvl9pPr>
+          </a:lstStyle>
+          <a:p>
+            <a:pPr>
+              <a:spcBef>
+                <a:spcPct val="0"/>
+              </a:spcBef>
+              <a:buFontTx/>
+              <a:buNone/>
+            </a:pPr>
+            <a:endParaRPr lang="en-US" altLang="en-US" sz="800"/>
+          </a:p>
+          <a:p>
+            <a:pPr>
+              <a:spcBef>
+                <a:spcPct val="0"/>
+              </a:spcBef>
+              <a:buFontTx/>
+              <a:buNone/>
+            </a:pPr>
+            <a:endParaRPr lang="en-US" altLang="en-US" sz="800" b="0">
+              <a:latin typeface="Tahoma" panose="020B0604030504040204" pitchFamily="34" charset="0"/>
+            </a:endParaRPr>
+          </a:p>
+          <a:p>
+            <a:pPr>
+              <a:spcBef>
+                <a:spcPct val="0"/>
+              </a:spcBef>
+              <a:buFontTx/>
+              <a:buNone/>
+            </a:pPr>
+            <a:endParaRPr lang="en-US" altLang="en-US" sz="800">
+              <a:latin typeface="Tahoma" panose="020B0604030504040204" pitchFamily="34" charset="0"/>
+            </a:endParaRPr>
+          </a:p>
+          <a:p>
+            <a:pPr>
+              <a:spcBef>
+                <a:spcPct val="0"/>
+              </a:spcBef>
+              <a:buFontTx/>
+              <a:buNone/>
+            </a:pPr>
+            <a:r>
+              <a:rPr lang="en-US" altLang="en-US" sz="800">
+                <a:latin typeface="Tahoma" panose="020B0604030504040204" pitchFamily="34" charset="0"/>
+              </a:rPr>
+              <a:t>© A+ Computer Science  -  www.apluscompsci.com</a:t>
+            </a:r>
+          </a:p>
+        </p:txBody>
+      </p:sp>
+      <p:sp>
+        <p:nvSpPr>
+          <p:cNvPr id="12291" name="Text Box 2">
+            <a:extLst>
+              <a:ext uri="{FF2B5EF4-FFF2-40B4-BE49-F238E27FC236}">
+                <a16:creationId xmlns:a16="http://schemas.microsoft.com/office/drawing/2014/main" id="{DB477874-A6DB-4826-8A10-55A80C7443C6}"/>
+              </a:ext>
+            </a:extLst>
+          </p:cNvPr>
+          <p:cNvSpPr txBox="1">
+            <a:spLocks noChangeArrowheads="1"/>
+          </p:cNvSpPr>
+          <p:nvPr/>
+        </p:nvSpPr>
+        <p:spPr bwMode="auto">
+          <a:xfrm>
+            <a:off x="1066800" y="2667000"/>
+            <a:ext cx="2359025" cy="946150"/>
+          </a:xfrm>
+          <a:prstGeom prst="rect">
+            <a:avLst/>
+          </a:prstGeom>
+          <a:noFill/>
+          <a:ln>
+            <a:noFill/>
+          </a:ln>
+          <a:effectLst/>
+          <a:extLst>
+            <a:ext uri="{909E8E84-426E-40DD-AFC4-6F175D3DCCD1}">
+              <a14:hiddenFill xmlns:a14="http://schemas.microsoft.com/office/drawing/2010/main">
+                <a:solidFill>
+                  <a:schemeClr val="accent1"/>
+                </a:solidFill>
+              </a14:hiddenFill>
+            </a:ext>
+            <a:ext uri="{91240B29-F687-4F45-9708-019B960494DF}">
+              <a14:hiddenLine xmlns:a14="http://schemas.microsoft.com/office/drawing/2010/main" w="9525">
+                <a:solidFill>
+                  <a:schemeClr val="tx1"/>
+                </a:solidFill>
+                <a:miter lim="800000"/>
+                <a:headEnd/>
+                <a:tailEnd/>
+              </a14:hiddenLine>
+            </a:ext>
+            <a:ext uri="{AF507438-7753-43E0-B8FC-AC1667EBCBE1}">
+              <a14:hiddenEffects xmlns:a14="http://schemas.microsoft.com/office/drawing/2010/main">
+                <a:effectLst>
+                  <a:outerShdw dist="35921" dir="2700000" algn="ctr" rotWithShape="0">
+                    <a:schemeClr val="bg2"/>
+                  </a:outerShdw>
+                </a:effectLst>
+              </a14:hiddenEffects>
+            </a:ext>
+          </a:extLst>
+        </p:spPr>
+        <p:txBody>
+          <a:bodyPr wrap="none">
+            <a:spAutoFit/>
+          </a:bodyPr>
+          <a:lstStyle>
+            <a:lvl1pPr>
+              <a:spcBef>
+                <a:spcPct val="20000"/>
+              </a:spcBef>
+              <a:buChar char="•"/>
+              <a:defRPr sz="3200">
+                <a:solidFill>
+                  <a:schemeClr val="tx1"/>
+                </a:solidFill>
+                <a:latin typeface="Times New Roman" panose="02020603050405020304" pitchFamily="18" charset="0"/>
+              </a:defRPr>
+            </a:lvl1pPr>
+            <a:lvl2pPr marL="742950" indent="-285750">
+              <a:spcBef>
+                <a:spcPct val="20000"/>
+              </a:spcBef>
+              <a:buChar char="–"/>
+              <a:defRPr sz="2800">
+                <a:solidFill>
+                  <a:schemeClr val="tx1"/>
+                </a:solidFill>
+                <a:latin typeface="Times New Roman" panose="02020603050405020304" pitchFamily="18" charset="0"/>
+              </a:defRPr>
+            </a:lvl2pPr>
+            <a:lvl3pPr marL="1143000" indent="-228600">
+              <a:spcBef>
+                <a:spcPct val="20000"/>
+              </a:spcBef>
+              <a:buChar char="•"/>
+              <a:defRPr sz="2400">
+                <a:solidFill>
+                  <a:schemeClr val="tx1"/>
+                </a:solidFill>
+                <a:latin typeface="Times New Roman" panose="02020603050405020304" pitchFamily="18" charset="0"/>
+              </a:defRPr>
+            </a:lvl3pPr>
+            <a:lvl4pPr marL="1600200" indent="-228600">
+              <a:spcBef>
+                <a:spcPct val="20000"/>
+              </a:spcBef>
+              <a:buChar char="–"/>
+              <a:defRPr sz="2000">
+                <a:solidFill>
+                  <a:schemeClr val="tx1"/>
+                </a:solidFill>
+                <a:latin typeface="Times New Roman" panose="02020603050405020304" pitchFamily="18" charset="0"/>
+              </a:defRPr>
+            </a:lvl4pPr>
+            <a:lvl5pPr marL="2057400" indent="-228600">
+              <a:spcBef>
+                <a:spcPct val="20000"/>
+              </a:spcBef>
+              <a:buChar char="»"/>
+              <a:defRPr sz="2000">
+                <a:solidFill>
+                  <a:schemeClr val="tx1"/>
+                </a:solidFill>
+                <a:latin typeface="Times New Roman" panose="02020603050405020304" pitchFamily="18" charset="0"/>
+              </a:defRPr>
+            </a:lvl5pPr>
+            <a:lvl6pPr marL="2514600" indent="-228600" eaLnBrk="0" fontAlgn="base" hangingPunct="0">
+              <a:spcBef>
+                <a:spcPct val="20000"/>
+              </a:spcBef>
+              <a:spcAft>
+                <a:spcPct val="0"/>
+              </a:spcAft>
+              <a:buChar char="»"/>
+              <a:defRPr sz="2000">
+                <a:solidFill>
+                  <a:schemeClr val="tx1"/>
+                </a:solidFill>
+                <a:latin typeface="Times New Roman" panose="02020603050405020304" pitchFamily="18" charset="0"/>
+              </a:defRPr>
+            </a:lvl6pPr>
+            <a:lvl7pPr marL="2971800" indent="-228600" eaLnBrk="0" fontAlgn="base" hangingPunct="0">
+              <a:spcBef>
+                <a:spcPct val="20000"/>
+              </a:spcBef>
+              <a:spcAft>
+                <a:spcPct val="0"/>
+              </a:spcAft>
+              <a:buChar char="»"/>
+              <a:defRPr sz="2000">
+                <a:solidFill>
+                  <a:schemeClr val="tx1"/>
+                </a:solidFill>
+                <a:latin typeface="Times New Roman" panose="02020603050405020304" pitchFamily="18" charset="0"/>
+              </a:defRPr>
+            </a:lvl7pPr>
+            <a:lvl8pPr marL="3429000" indent="-228600" eaLnBrk="0" fontAlgn="base" hangingPunct="0">
+              <a:spcBef>
+                <a:spcPct val="20000"/>
+              </a:spcBef>
+              <a:spcAft>
+                <a:spcPct val="0"/>
+              </a:spcAft>
+              <a:buChar char="»"/>
+              <a:defRPr sz="2000">
+                <a:solidFill>
+                  <a:schemeClr val="tx1"/>
+                </a:solidFill>
+                <a:latin typeface="Times New Roman" panose="02020603050405020304" pitchFamily="18" charset="0"/>
+              </a:defRPr>
+            </a:lvl8pPr>
+            <a:lvl9pPr marL="3886200" indent="-228600" eaLnBrk="0" fontAlgn="base" hangingPunct="0">
+              <a:spcBef>
+                <a:spcPct val="20000"/>
+              </a:spcBef>
+              <a:spcAft>
+                <a:spcPct val="0"/>
+              </a:spcAft>
+              <a:buChar char="»"/>
+              <a:defRPr sz="2000">
+                <a:solidFill>
+                  <a:schemeClr val="tx1"/>
+                </a:solidFill>
+                <a:latin typeface="Times New Roman" panose="02020603050405020304" pitchFamily="18" charset="0"/>
+              </a:defRPr>
+            </a:lvl9pPr>
+          </a:lstStyle>
+          <a:p>
+            <a:pPr>
+              <a:spcBef>
+                <a:spcPct val="0"/>
+              </a:spcBef>
+              <a:buFontTx/>
+              <a:buNone/>
+            </a:pPr>
+            <a:endParaRPr lang="en-US" altLang="en-US" sz="2800">
+              <a:latin typeface="Tahoma" panose="020B0604030504040204" pitchFamily="34" charset="0"/>
+            </a:endParaRPr>
+          </a:p>
+          <a:p>
+            <a:pPr>
+              <a:spcBef>
+                <a:spcPct val="0"/>
+              </a:spcBef>
+              <a:buFontTx/>
+              <a:buNone/>
+            </a:pPr>
+            <a:r>
+              <a:rPr lang="en-US" altLang="en-US" sz="2800">
+                <a:latin typeface="Tahoma" panose="020B0604030504040204" pitchFamily="34" charset="0"/>
+              </a:rPr>
+              <a:t>stack.pop();</a:t>
+            </a:r>
+          </a:p>
+        </p:txBody>
+      </p:sp>
+      <p:sp>
+        <p:nvSpPr>
+          <p:cNvPr id="12292" name="Text Box 3">
+            <a:extLst>
+              <a:ext uri="{FF2B5EF4-FFF2-40B4-BE49-F238E27FC236}">
+                <a16:creationId xmlns:a16="http://schemas.microsoft.com/office/drawing/2014/main" id="{4F2E58D4-6A68-4584-8205-097A5F221026}"/>
+              </a:ext>
+            </a:extLst>
+          </p:cNvPr>
+          <p:cNvSpPr txBox="1">
+            <a:spLocks noChangeArrowheads="1"/>
+          </p:cNvSpPr>
+          <p:nvPr/>
+        </p:nvSpPr>
+        <p:spPr bwMode="auto">
+          <a:xfrm>
+            <a:off x="1143000" y="4343400"/>
+            <a:ext cx="3048000" cy="1196975"/>
+          </a:xfrm>
+          <a:prstGeom prst="rect">
+            <a:avLst/>
+          </a:prstGeom>
+          <a:noFill/>
+          <a:ln w="9525">
+            <a:solidFill>
+              <a:schemeClr val="accent2"/>
+            </a:solidFill>
+            <a:miter lim="800000"/>
+            <a:headEnd/>
+            <a:tailEnd/>
+          </a:ln>
+          <a:effectLst/>
+          <a:extLst>
+            <a:ext uri="{909E8E84-426E-40DD-AFC4-6F175D3DCCD1}">
+              <a14:hiddenFill xmlns:a14="http://schemas.microsoft.com/office/drawing/2010/main">
+                <a:solidFill>
+                  <a:schemeClr val="accent1"/>
+                </a:solidFill>
+              </a14:hiddenFill>
+            </a:ext>
+            <a:ext uri="{AF507438-7753-43E0-B8FC-AC1667EBCBE1}">
+              <a14:hiddenEffects xmlns:a14="http://schemas.microsoft.com/office/drawing/2010/main">
+                <a:effectLst>
+                  <a:outerShdw dist="35921" dir="2700000" algn="ctr" rotWithShape="0">
+                    <a:schemeClr val="bg2"/>
+                  </a:outerShdw>
+                </a:effectLst>
+              </a14:hiddenEffects>
+            </a:ext>
+          </a:extLst>
+        </p:spPr>
+        <p:txBody>
+          <a:bodyPr>
+            <a:spAutoFit/>
+          </a:bodyPr>
+          <a:lstStyle>
+            <a:lvl1pPr>
+              <a:spcBef>
+                <a:spcPct val="20000"/>
+              </a:spcBef>
+              <a:buChar char="•"/>
+              <a:defRPr sz="3200">
+                <a:solidFill>
+                  <a:schemeClr val="tx1"/>
+                </a:solidFill>
+                <a:latin typeface="Times New Roman" panose="02020603050405020304" pitchFamily="18" charset="0"/>
+              </a:defRPr>
+            </a:lvl1pPr>
+            <a:lvl2pPr marL="742950" indent="-285750">
+              <a:spcBef>
+                <a:spcPct val="20000"/>
+              </a:spcBef>
+              <a:buChar char="–"/>
+              <a:defRPr sz="2800">
+                <a:solidFill>
+                  <a:schemeClr val="tx1"/>
+                </a:solidFill>
+                <a:latin typeface="Times New Roman" panose="02020603050405020304" pitchFamily="18" charset="0"/>
+              </a:defRPr>
+            </a:lvl2pPr>
+            <a:lvl3pPr marL="1143000" indent="-228600">
+              <a:spcBef>
+                <a:spcPct val="20000"/>
+              </a:spcBef>
+              <a:buChar char="•"/>
+              <a:defRPr sz="2400">
+                <a:solidFill>
+                  <a:schemeClr val="tx1"/>
+                </a:solidFill>
+                <a:latin typeface="Times New Roman" panose="02020603050405020304" pitchFamily="18" charset="0"/>
+              </a:defRPr>
+            </a:lvl3pPr>
+            <a:lvl4pPr marL="1600200" indent="-228600">
+              <a:spcBef>
+                <a:spcPct val="20000"/>
+              </a:spcBef>
+              <a:buChar char="–"/>
+              <a:defRPr sz="2000">
+                <a:solidFill>
+                  <a:schemeClr val="tx1"/>
+                </a:solidFill>
+                <a:latin typeface="Times New Roman" panose="02020603050405020304" pitchFamily="18" charset="0"/>
+              </a:defRPr>
+            </a:lvl4pPr>
+            <a:lvl5pPr marL="2057400" indent="-228600">
+              <a:spcBef>
+                <a:spcPct val="20000"/>
+              </a:spcBef>
+              <a:buChar char="»"/>
+              <a:defRPr sz="2000">
+                <a:solidFill>
+                  <a:schemeClr val="tx1"/>
+                </a:solidFill>
+                <a:latin typeface="Times New Roman" panose="02020603050405020304" pitchFamily="18" charset="0"/>
+              </a:defRPr>
+            </a:lvl5pPr>
+            <a:lvl6pPr marL="2514600" indent="-228600" eaLnBrk="0" fontAlgn="base" hangingPunct="0">
+              <a:spcBef>
+                <a:spcPct val="20000"/>
+              </a:spcBef>
+              <a:spcAft>
+                <a:spcPct val="0"/>
+              </a:spcAft>
+              <a:buChar char="»"/>
+              <a:defRPr sz="2000">
+                <a:solidFill>
+                  <a:schemeClr val="tx1"/>
+                </a:solidFill>
+                <a:latin typeface="Times New Roman" panose="02020603050405020304" pitchFamily="18" charset="0"/>
+              </a:defRPr>
+            </a:lvl6pPr>
+            <a:lvl7pPr marL="2971800" indent="-228600" eaLnBrk="0" fontAlgn="base" hangingPunct="0">
+              <a:spcBef>
+                <a:spcPct val="20000"/>
+              </a:spcBef>
+              <a:spcAft>
+                <a:spcPct val="0"/>
+              </a:spcAft>
+              <a:buChar char="»"/>
+              <a:defRPr sz="2000">
+                <a:solidFill>
+                  <a:schemeClr val="tx1"/>
+                </a:solidFill>
+                <a:latin typeface="Times New Roman" panose="02020603050405020304" pitchFamily="18" charset="0"/>
+              </a:defRPr>
+            </a:lvl7pPr>
+            <a:lvl8pPr marL="3429000" indent="-228600" eaLnBrk="0" fontAlgn="base" hangingPunct="0">
+              <a:spcBef>
+                <a:spcPct val="20000"/>
+              </a:spcBef>
+              <a:spcAft>
+                <a:spcPct val="0"/>
+              </a:spcAft>
+              <a:buChar char="»"/>
+              <a:defRPr sz="2000">
+                <a:solidFill>
+                  <a:schemeClr val="tx1"/>
+                </a:solidFill>
+                <a:latin typeface="Times New Roman" panose="02020603050405020304" pitchFamily="18" charset="0"/>
+              </a:defRPr>
+            </a:lvl8pPr>
+            <a:lvl9pPr marL="3886200" indent="-228600" eaLnBrk="0" fontAlgn="base" hangingPunct="0">
+              <a:spcBef>
+                <a:spcPct val="20000"/>
+              </a:spcBef>
+              <a:spcAft>
+                <a:spcPct val="0"/>
+              </a:spcAft>
+              <a:buChar char="»"/>
+              <a:defRPr sz="2000">
+                <a:solidFill>
+                  <a:schemeClr val="tx1"/>
+                </a:solidFill>
+                <a:latin typeface="Times New Roman" panose="02020603050405020304" pitchFamily="18" charset="0"/>
+              </a:defRPr>
+            </a:lvl9pPr>
+          </a:lstStyle>
+          <a:p>
+            <a:pPr>
+              <a:spcBef>
+                <a:spcPct val="50000"/>
+              </a:spcBef>
+              <a:buFontTx/>
+              <a:buNone/>
+            </a:pPr>
+            <a:r>
+              <a:rPr lang="en-US" altLang="en-US" sz="2400">
+                <a:solidFill>
+                  <a:schemeClr val="accent2"/>
+                </a:solidFill>
+                <a:latin typeface="Tahoma" panose="020B0604030504040204" pitchFamily="34" charset="0"/>
+              </a:rPr>
+              <a:t>pop removes an item from the stack.</a:t>
+            </a:r>
+          </a:p>
+        </p:txBody>
+      </p:sp>
+      <p:graphicFrame>
+        <p:nvGraphicFramePr>
+          <p:cNvPr id="143364" name="Group 4">
+            <a:extLst>
+              <a:ext uri="{FF2B5EF4-FFF2-40B4-BE49-F238E27FC236}">
+                <a16:creationId xmlns:a16="http://schemas.microsoft.com/office/drawing/2014/main" id="{B4FB6CAB-D4BD-4AC1-8AD2-ADB745CFF592}"/>
+              </a:ext>
+            </a:extLst>
+          </p:cNvPr>
+          <p:cNvGraphicFramePr>
+            <a:graphicFrameLocks noGrp="1"/>
+          </p:cNvGraphicFramePr>
+          <p:nvPr/>
+        </p:nvGraphicFramePr>
+        <p:xfrm>
+          <a:off x="5943600" y="4343400"/>
+          <a:ext cx="1905000" cy="1130300"/>
+        </p:xfrm>
+        <a:graphic>
+          <a:graphicData uri="http://schemas.openxmlformats.org/drawingml/2006/table">
+            <a:tbl>
+              <a:tblPr/>
+              <a:tblGrid>
+                <a:gridCol w="1905000">
+                  <a:extLst>
+                    <a:ext uri="{9D8B030D-6E8A-4147-A177-3AD203B41FA5}">
+                      <a16:colId xmlns:a16="http://schemas.microsoft.com/office/drawing/2014/main" val="20000"/>
+                    </a:ext>
+                  </a:extLst>
+                </a:gridCol>
+              </a:tblGrid>
+              <a:tr h="1130300">
+                <a:tc>
+                  <a:txBody>
+                    <a:bodyPr/>
+                    <a:lstStyle/>
+                    <a:p>
+                      <a:pPr marL="0" marR="0" lvl="0" indent="0" algn="ctr" defTabSz="914400" rtl="0" eaLnBrk="1" fontAlgn="base" latinLnBrk="0" hangingPunct="1">
+                        <a:lnSpc>
+                          <a:spcPct val="100000"/>
+                        </a:lnSpc>
+                        <a:spcBef>
+                          <a:spcPct val="20000"/>
+                        </a:spcBef>
+                        <a:spcAft>
+                          <a:spcPct val="0"/>
+                        </a:spcAft>
+                        <a:buClrTx/>
+                        <a:buSzTx/>
+                        <a:buFontTx/>
+                        <a:buNone/>
+                        <a:tabLst/>
+                      </a:pPr>
+                      <a:r>
+                        <a:rPr kumimoji="0" lang="en-US" sz="4400" b="1" i="0" u="none" strike="noStrike" cap="none" normalizeH="0" baseline="0">
+                          <a:ln>
+                            <a:noFill/>
+                          </a:ln>
+                          <a:solidFill>
+                            <a:schemeClr val="tx1"/>
+                          </a:solidFill>
+                          <a:effectLst/>
+                          <a:latin typeface="Tahoma" pitchFamily="34" charset="0"/>
+                        </a:rPr>
+                        <a:t>15</a:t>
+                      </a:r>
+                    </a:p>
+                  </a:txBody>
+                  <a:tcPr horzOverflow="overflow">
+                    <a:lnL w="28575" cap="flat" cmpd="sng" algn="ctr">
+                      <a:solidFill>
+                        <a:schemeClr val="tx1"/>
+                      </a:solidFill>
+                      <a:prstDash val="solid"/>
+                      <a:round/>
+                      <a:headEnd type="none" w="med" len="med"/>
+                      <a:tailEnd type="none" w="med" len="med"/>
+                    </a:lnL>
+                    <a:lnR w="28575" cap="flat" cmpd="sng" algn="ctr">
+                      <a:solidFill>
+                        <a:schemeClr val="tx1"/>
+                      </a:solidFill>
+                      <a:prstDash val="solid"/>
+                      <a:round/>
+                      <a:headEnd type="none" w="med" len="med"/>
+                      <a:tailEnd type="none" w="med" len="med"/>
+                    </a:lnR>
+                    <a:lnT w="28575" cap="flat" cmpd="sng" algn="ctr">
+                      <a:solidFill>
+                        <a:schemeClr val="tx1"/>
+                      </a:solidFill>
+                      <a:prstDash val="solid"/>
+                      <a:round/>
+                      <a:headEnd type="none" w="med" len="med"/>
+                      <a:tailEnd type="none" w="med" len="med"/>
+                    </a:lnT>
+                    <a:lnB w="28575" cap="flat" cmpd="sng" algn="ctr">
+                      <a:solidFill>
+                        <a:schemeClr val="tx1"/>
+                      </a:solidFill>
+                      <a:prstDash val="solid"/>
+                      <a:round/>
+                      <a:headEnd type="none" w="med" len="med"/>
+                      <a:tailEnd type="none" w="med" len="med"/>
+                    </a:lnB>
+                    <a:lnTlToBr>
+                      <a:noFill/>
+                    </a:lnTlToBr>
+                    <a:lnBlToTr>
+                      <a:noFill/>
+                    </a:lnBlToTr>
+                    <a:solidFill>
+                      <a:srgbClr val="66FFFF">
+                        <a:alpha val="50000"/>
+                      </a:srgbClr>
+                    </a:solidFill>
+                  </a:tcPr>
+                </a:tc>
+                <a:extLst>
+                  <a:ext uri="{0D108BD9-81ED-4DB2-BD59-A6C34878D82A}">
+                    <a16:rowId xmlns:a16="http://schemas.microsoft.com/office/drawing/2014/main" val="10000"/>
+                  </a:ext>
+                </a:extLst>
+              </a:tr>
+            </a:tbl>
+          </a:graphicData>
+        </a:graphic>
+      </p:graphicFrame>
+      <p:sp>
+        <p:nvSpPr>
+          <p:cNvPr id="12299" name="WordArt 10">
+            <a:extLst>
+              <a:ext uri="{FF2B5EF4-FFF2-40B4-BE49-F238E27FC236}">
+                <a16:creationId xmlns:a16="http://schemas.microsoft.com/office/drawing/2014/main" id="{3CAF414C-E041-476A-90A7-24657F1DA8B7}"/>
               </a:ext>
             </a:extLst>
           </p:cNvPr>
